--- a/2025/LEC/05-1 методы машинного обучения для анализа ВР.pptx
+++ b/2025/LEC/05-1 методы машинного обучения для анализа ВР.pptx
@@ -5,7 +5,7 @@
     <p:sldMasterId id="2147483648" r:id="rId1"/>
   </p:sldMasterIdLst>
   <p:notesMasterIdLst>
-    <p:notesMasterId r:id="rId15"/>
+    <p:notesMasterId r:id="rId16"/>
   </p:notesMasterIdLst>
   <p:sldIdLst>
     <p:sldId id="256" r:id="rId2"/>
@@ -13,14 +13,15 @@
     <p:sldId id="260" r:id="rId4"/>
     <p:sldId id="259" r:id="rId5"/>
     <p:sldId id="269" r:id="rId6"/>
-    <p:sldId id="261" r:id="rId7"/>
-    <p:sldId id="264" r:id="rId8"/>
-    <p:sldId id="263" r:id="rId9"/>
-    <p:sldId id="270" r:id="rId10"/>
-    <p:sldId id="266" r:id="rId11"/>
-    <p:sldId id="271" r:id="rId12"/>
-    <p:sldId id="272" r:id="rId13"/>
-    <p:sldId id="273" r:id="rId14"/>
+    <p:sldId id="274" r:id="rId7"/>
+    <p:sldId id="261" r:id="rId8"/>
+    <p:sldId id="264" r:id="rId9"/>
+    <p:sldId id="263" r:id="rId10"/>
+    <p:sldId id="270" r:id="rId11"/>
+    <p:sldId id="266" r:id="rId12"/>
+    <p:sldId id="271" r:id="rId13"/>
+    <p:sldId id="272" r:id="rId14"/>
+    <p:sldId id="273" r:id="rId15"/>
   </p:sldIdLst>
   <p:sldSz cx="12192000" cy="6858000"/>
   <p:notesSz cx="6858000" cy="9144000"/>
@@ -235,7 +236,7 @@
           <a:p>
             <a:fld id="{803A9DE4-6CFD-4732-953B-EF950A6B3001}" type="datetimeFigureOut">
               <a:rPr lang="ru-RU" smtClean="0"/>
-              <a:t>04.08.2025</a:t>
+              <a:t>05.08.2025</a:t>
             </a:fld>
             <a:endParaRPr lang="ru-RU"/>
           </a:p>
@@ -693,7 +694,7 @@
           <a:p>
             <a:fld id="{26E69999-DA45-44A1-83D2-44E2B03D187B}" type="slidenum">
               <a:rPr lang="ru-RU" smtClean="0"/>
-              <a:t>11</a:t>
+              <a:t>12</a:t>
             </a:fld>
             <a:endParaRPr lang="ru-RU"/>
           </a:p>
@@ -843,7 +844,7 @@
           <a:p>
             <a:fld id="{43B237C4-111C-4636-B222-D785A341FF5A}" type="datetimeFigureOut">
               <a:rPr lang="ru-RU" smtClean="0"/>
-              <a:t>04.08.2025</a:t>
+              <a:t>05.08.2025</a:t>
             </a:fld>
             <a:endParaRPr lang="ru-RU"/>
           </a:p>
@@ -1013,7 +1014,7 @@
           <a:p>
             <a:fld id="{43B237C4-111C-4636-B222-D785A341FF5A}" type="datetimeFigureOut">
               <a:rPr lang="ru-RU" smtClean="0"/>
-              <a:t>04.08.2025</a:t>
+              <a:t>05.08.2025</a:t>
             </a:fld>
             <a:endParaRPr lang="ru-RU"/>
           </a:p>
@@ -1193,7 +1194,7 @@
           <a:p>
             <a:fld id="{43B237C4-111C-4636-B222-D785A341FF5A}" type="datetimeFigureOut">
               <a:rPr lang="ru-RU" smtClean="0"/>
-              <a:t>04.08.2025</a:t>
+              <a:t>05.08.2025</a:t>
             </a:fld>
             <a:endParaRPr lang="ru-RU"/>
           </a:p>
@@ -1363,7 +1364,7 @@
           <a:p>
             <a:fld id="{43B237C4-111C-4636-B222-D785A341FF5A}" type="datetimeFigureOut">
               <a:rPr lang="ru-RU" smtClean="0"/>
-              <a:t>04.08.2025</a:t>
+              <a:t>05.08.2025</a:t>
             </a:fld>
             <a:endParaRPr lang="ru-RU"/>
           </a:p>
@@ -1609,7 +1610,7 @@
           <a:p>
             <a:fld id="{43B237C4-111C-4636-B222-D785A341FF5A}" type="datetimeFigureOut">
               <a:rPr lang="ru-RU" smtClean="0"/>
-              <a:t>04.08.2025</a:t>
+              <a:t>05.08.2025</a:t>
             </a:fld>
             <a:endParaRPr lang="ru-RU"/>
           </a:p>
@@ -1841,7 +1842,7 @@
           <a:p>
             <a:fld id="{43B237C4-111C-4636-B222-D785A341FF5A}" type="datetimeFigureOut">
               <a:rPr lang="ru-RU" smtClean="0"/>
-              <a:t>04.08.2025</a:t>
+              <a:t>05.08.2025</a:t>
             </a:fld>
             <a:endParaRPr lang="ru-RU"/>
           </a:p>
@@ -2208,7 +2209,7 @@
           <a:p>
             <a:fld id="{43B237C4-111C-4636-B222-D785A341FF5A}" type="datetimeFigureOut">
               <a:rPr lang="ru-RU" smtClean="0"/>
-              <a:t>04.08.2025</a:t>
+              <a:t>05.08.2025</a:t>
             </a:fld>
             <a:endParaRPr lang="ru-RU"/>
           </a:p>
@@ -2326,7 +2327,7 @@
           <a:p>
             <a:fld id="{43B237C4-111C-4636-B222-D785A341FF5A}" type="datetimeFigureOut">
               <a:rPr lang="ru-RU" smtClean="0"/>
-              <a:t>04.08.2025</a:t>
+              <a:t>05.08.2025</a:t>
             </a:fld>
             <a:endParaRPr lang="ru-RU"/>
           </a:p>
@@ -2421,7 +2422,7 @@
           <a:p>
             <a:fld id="{43B237C4-111C-4636-B222-D785A341FF5A}" type="datetimeFigureOut">
               <a:rPr lang="ru-RU" smtClean="0"/>
-              <a:t>04.08.2025</a:t>
+              <a:t>05.08.2025</a:t>
             </a:fld>
             <a:endParaRPr lang="ru-RU"/>
           </a:p>
@@ -2698,7 +2699,7 @@
           <a:p>
             <a:fld id="{43B237C4-111C-4636-B222-D785A341FF5A}" type="datetimeFigureOut">
               <a:rPr lang="ru-RU" smtClean="0"/>
-              <a:t>04.08.2025</a:t>
+              <a:t>05.08.2025</a:t>
             </a:fld>
             <a:endParaRPr lang="ru-RU"/>
           </a:p>
@@ -2951,7 +2952,7 @@
           <a:p>
             <a:fld id="{43B237C4-111C-4636-B222-D785A341FF5A}" type="datetimeFigureOut">
               <a:rPr lang="ru-RU" smtClean="0"/>
-              <a:t>04.08.2025</a:t>
+              <a:t>05.08.2025</a:t>
             </a:fld>
             <a:endParaRPr lang="ru-RU"/>
           </a:p>
@@ -3164,7 +3165,7 @@
           <a:p>
             <a:fld id="{43B237C4-111C-4636-B222-D785A341FF5A}" type="datetimeFigureOut">
               <a:rPr lang="ru-RU" smtClean="0"/>
-              <a:t>04.08.2025</a:t>
+              <a:t>05.08.2025</a:t>
             </a:fld>
             <a:endParaRPr lang="ru-RU"/>
           </a:p>
@@ -3660,213 +3661,233 @@
         </p:nvSpPr>
         <p:spPr>
           <a:xfrm>
-            <a:off x="242046" y="105148"/>
-            <a:ext cx="11111753" cy="656851"/>
+            <a:off x="215712" y="174625"/>
+            <a:ext cx="11147613" cy="898899"/>
           </a:xfrm>
         </p:spPr>
         <p:txBody>
+          <a:bodyPr/>
+          <a:lstStyle/>
+          <a:p>
+            <a:pPr lvl="0" eaLnBrk="0" fontAlgn="base" hangingPunct="0">
+              <a:lnSpc>
+                <a:spcPct val="100000"/>
+              </a:lnSpc>
+              <a:spcBef>
+                <a:spcPts val="300"/>
+              </a:spcBef>
+              <a:spcAft>
+                <a:spcPct val="0"/>
+              </a:spcAft>
+            </a:pPr>
+            <a:r>
+              <a:rPr lang="ru-RU" altLang="ru-RU" b="1" dirty="0"/>
+              <a:t>Проблемы выбора окна Редукции</a:t>
+            </a:r>
+          </a:p>
+        </p:txBody>
+      </p:sp>
+      <p:sp>
+        <p:nvSpPr>
+          <p:cNvPr id="3" name="Объект 2"/>
+          <p:cNvSpPr>
+            <a:spLocks noGrp="1"/>
+          </p:cNvSpPr>
+          <p:nvPr>
+            <p:ph idx="1"/>
+          </p:nvPr>
+        </p:nvSpPr>
+        <p:spPr>
+          <a:xfrm>
+            <a:off x="215712" y="940174"/>
+            <a:ext cx="11985813" cy="5154704"/>
+          </a:xfrm>
+        </p:spPr>
+        <p:txBody>
           <a:bodyPr>
-            <a:normAutofit fontScale="90000"/>
+            <a:noAutofit/>
           </a:bodyPr>
           <a:lstStyle/>
           <a:p>
-            <a:r>
-              <a:rPr lang="ru-RU" altLang="ru-RU" b="1" dirty="0" smtClean="0">
+            <a:pPr marL="0" indent="0" eaLnBrk="0" fontAlgn="base" hangingPunct="0">
+              <a:lnSpc>
+                <a:spcPct val="100000"/>
+              </a:lnSpc>
+              <a:spcBef>
+                <a:spcPts val="300"/>
+              </a:spcBef>
+              <a:spcAft>
+                <a:spcPct val="0"/>
+              </a:spcAft>
+              <a:buNone/>
+            </a:pPr>
+            <a:r>
+              <a:rPr lang="ru-RU" altLang="ru-RU" sz="2300" dirty="0" smtClean="0"/>
+              <a:t>Выбор слишком короткого или слишком длинного окна может привести к</a:t>
+            </a:r>
+            <a:r>
+              <a:rPr lang="ru-RU" altLang="ru-RU" sz="2300" dirty="0"/>
+              <a:t> </a:t>
+            </a:r>
+            <a:r>
+              <a:rPr lang="ru-RU" altLang="ru-RU" sz="2300" dirty="0" smtClean="0"/>
+              <a:t/>
+            </a:r>
+            <a:br>
+              <a:rPr lang="ru-RU" altLang="ru-RU" sz="2300" dirty="0" smtClean="0"/>
+            </a:br>
+            <a:r>
+              <a:rPr lang="ru-RU" altLang="ru-RU" sz="2300" dirty="0" smtClean="0">
                 <a:solidFill>
                   <a:srgbClr val="0D47A1"/>
                 </a:solidFill>
-                <a:latin typeface="system-ui"/>
+                <a:hlinkClick r:id="rId2"/>
               </a:rPr>
-              <a:t>Экзогенные переменные</a:t>
-            </a:r>
-            <a:r>
-              <a:rPr lang="ru-RU" altLang="ru-RU" dirty="0" smtClean="0">
-                <a:latin typeface="system-ui"/>
+              <a:t>“</a:t>
+            </a:r>
+            <a:r>
+              <a:rPr lang="ru-RU" altLang="ru-RU" sz="2300" dirty="0">
+                <a:solidFill>
+                  <a:srgbClr val="0D47A1"/>
+                </a:solidFill>
+                <a:hlinkClick r:id="rId2"/>
               </a:rPr>
-              <a:t> </a:t>
-            </a:r>
-            <a:endParaRPr lang="ru-RU" dirty="0"/>
-          </a:p>
-        </p:txBody>
-      </p:sp>
-      <p:sp>
-        <p:nvSpPr>
-          <p:cNvPr id="3" name="Объект 2"/>
-          <p:cNvSpPr>
-            <a:spLocks noGrp="1"/>
-          </p:cNvSpPr>
-          <p:nvPr>
-            <p:ph idx="1"/>
-          </p:nvPr>
-        </p:nvSpPr>
-        <p:spPr>
-          <a:xfrm>
-            <a:off x="134470" y="761998"/>
-            <a:ext cx="11949953" cy="5862919"/>
-          </a:xfrm>
-        </p:spPr>
-        <p:txBody>
-          <a:bodyPr>
-            <a:normAutofit/>
-          </a:bodyPr>
-          <a:lstStyle/>
-          <a:p>
-            <a:pPr>
+              <a:t>p-</a:t>
+            </a:r>
+            <a:r>
+              <a:rPr lang="ru-RU" altLang="ru-RU" sz="2300" dirty="0" err="1">
+                <a:solidFill>
+                  <a:srgbClr val="0D47A1"/>
+                </a:solidFill>
+                <a:hlinkClick r:id="rId2"/>
+              </a:rPr>
+              <a:t>value</a:t>
+            </a:r>
+            <a:r>
+              <a:rPr lang="ru-RU" altLang="ru-RU" sz="2300" dirty="0">
+                <a:solidFill>
+                  <a:srgbClr val="0D47A1"/>
+                </a:solidFill>
+                <a:hlinkClick r:id="rId2"/>
+              </a:rPr>
+              <a:t> </a:t>
+            </a:r>
+            <a:r>
+              <a:rPr lang="ru-RU" altLang="ru-RU" sz="2300" dirty="0" err="1">
+                <a:solidFill>
+                  <a:srgbClr val="0D47A1"/>
+                </a:solidFill>
+                <a:hlinkClick r:id="rId2"/>
+              </a:rPr>
+              <a:t>hacking</a:t>
+            </a:r>
+            <a:r>
+              <a:rPr lang="ru-RU" altLang="ru-RU" sz="2300" dirty="0">
+                <a:solidFill>
+                  <a:srgbClr val="0D47A1"/>
+                </a:solidFill>
+                <a:hlinkClick r:id="rId2"/>
+              </a:rPr>
+              <a:t>”</a:t>
+            </a:r>
+            <a:r>
+              <a:rPr lang="ru-RU" altLang="ru-RU" sz="2300" dirty="0"/>
+              <a:t> – то есть утечке информации (или появление ложных зависимостей). </a:t>
+            </a:r>
+            <a:endParaRPr lang="en-US" altLang="ru-RU" sz="2300" dirty="0" smtClean="0"/>
+          </a:p>
+          <a:p>
+            <a:pPr marL="0" indent="0" eaLnBrk="0" fontAlgn="base" hangingPunct="0">
               <a:lnSpc>
-                <a:spcPct val="120000"/>
+                <a:spcPct val="100000"/>
               </a:lnSpc>
               <a:spcBef>
-                <a:spcPts val="0"/>
+                <a:spcPts val="300"/>
               </a:spcBef>
+              <a:spcAft>
+                <a:spcPct val="0"/>
+              </a:spcAft>
+              <a:buNone/>
             </a:pPr>
             <a:r>
-              <a:rPr lang="ru-RU" altLang="ru-RU" sz="2300" b="1" dirty="0"/>
-              <a:t>Эндогенные ф</a:t>
-            </a:r>
-            <a:r>
-              <a:rPr lang="en-US" sz="2300" b="1" dirty="0" err="1"/>
-              <a:t>акторы</a:t>
-            </a:r>
-            <a:r>
-              <a:rPr lang="en-US" sz="2300" dirty="0"/>
-              <a:t>, </a:t>
-            </a:r>
-            <a:r>
-              <a:rPr lang="en-US" sz="2300" dirty="0" err="1"/>
-              <a:t>очевидно</a:t>
-            </a:r>
-            <a:r>
-              <a:rPr lang="en-US" sz="2300" dirty="0"/>
-              <a:t> </a:t>
-            </a:r>
-            <a:r>
-              <a:rPr lang="en-US" sz="2300" dirty="0" err="1"/>
-              <a:t>коррелирующие</a:t>
-            </a:r>
-            <a:r>
-              <a:rPr lang="en-US" sz="2300" dirty="0"/>
-              <a:t> с </a:t>
-            </a:r>
-            <a:r>
-              <a:rPr lang="ru-RU" sz="2300" dirty="0"/>
-              <a:t>ВР</a:t>
-            </a:r>
-            <a:r>
-              <a:rPr lang="en-US" sz="2300" dirty="0"/>
-              <a:t>. </a:t>
-            </a:r>
-            <a:endParaRPr lang="ru-RU" sz="2300" dirty="0" smtClean="0"/>
-          </a:p>
-          <a:p>
-            <a:pPr lvl="1">
+              <a:rPr lang="ru-RU" altLang="ru-RU" sz="2300" dirty="0" smtClean="0"/>
+              <a:t>Для </a:t>
+            </a:r>
+            <a:r>
+              <a:rPr lang="ru-RU" altLang="ru-RU" sz="2300" dirty="0" err="1" smtClean="0"/>
+              <a:t>преотвращения</a:t>
+            </a:r>
+            <a:r>
+              <a:rPr lang="ru-RU" altLang="ru-RU" sz="2300" dirty="0" smtClean="0"/>
+              <a:t>:</a:t>
+            </a:r>
+          </a:p>
+          <a:p>
+            <a:pPr lvl="1" eaLnBrk="0" fontAlgn="base" hangingPunct="0">
               <a:lnSpc>
-                <a:spcPct val="120000"/>
+                <a:spcPct val="100000"/>
               </a:lnSpc>
               <a:spcBef>
-                <a:spcPts val="0"/>
+                <a:spcPts val="300"/>
               </a:spcBef>
+              <a:spcAft>
+                <a:spcPct val="0"/>
+              </a:spcAft>
             </a:pPr>
             <a:r>
-              <a:rPr lang="ru-RU" sz="2300" dirty="0" smtClean="0"/>
-              <a:t>Лаги ВР, преобразованные значения, значения автокорреляций, тренда или сезонности, и </a:t>
-            </a:r>
-            <a:r>
-              <a:rPr lang="ru-RU" sz="2300" dirty="0" err="1" smtClean="0"/>
-              <a:t>тд</a:t>
-            </a:r>
-            <a:endParaRPr lang="ru-RU" sz="2300" dirty="0" smtClean="0"/>
-          </a:p>
-          <a:p>
-            <a:pPr>
+              <a:rPr lang="en-US" altLang="ru-RU" sz="2300" dirty="0" smtClean="0"/>
+              <a:t>Walking forward </a:t>
+            </a:r>
+            <a:r>
+              <a:rPr lang="ru-RU" altLang="ru-RU" sz="2300" dirty="0" smtClean="0"/>
+              <a:t>кросс </a:t>
+            </a:r>
+            <a:r>
+              <a:rPr lang="ru-RU" altLang="ru-RU" sz="2300" dirty="0" err="1" smtClean="0"/>
+              <a:t>валидация</a:t>
+            </a:r>
+            <a:r>
+              <a:rPr lang="en-US" altLang="ru-RU" sz="2300" dirty="0" smtClean="0"/>
+              <a:t> </a:t>
+            </a:r>
+            <a:r>
+              <a:rPr lang="ru-RU" altLang="ru-RU" sz="2300" dirty="0" smtClean="0"/>
+              <a:t>и </a:t>
+            </a:r>
+            <a:r>
+              <a:rPr lang="en-US" altLang="ru-RU" sz="2300" dirty="0" err="1" smtClean="0"/>
+              <a:t>backtesting</a:t>
+            </a:r>
+            <a:r>
+              <a:rPr lang="ru-RU" altLang="ru-RU" sz="2300" dirty="0" smtClean="0"/>
+              <a:t>. </a:t>
+            </a:r>
+          </a:p>
+          <a:p>
+            <a:pPr lvl="1" eaLnBrk="0" fontAlgn="base" hangingPunct="0">
               <a:lnSpc>
-                <a:spcPct val="120000"/>
+                <a:spcPct val="100000"/>
               </a:lnSpc>
               <a:spcBef>
-                <a:spcPts val="0"/>
+                <a:spcPts val="300"/>
               </a:spcBef>
+              <a:spcAft>
+                <a:spcPct val="0"/>
+              </a:spcAft>
             </a:pPr>
             <a:r>
-              <a:rPr lang="ru-RU" sz="2300" b="1" dirty="0" smtClean="0"/>
-              <a:t>Э</a:t>
-            </a:r>
-            <a:r>
-              <a:rPr lang="en-US" sz="2300" b="1" dirty="0" err="1" smtClean="0"/>
-              <a:t>кзогенны</a:t>
-            </a:r>
-            <a:r>
-              <a:rPr lang="ru-RU" sz="2300" b="1" dirty="0" smtClean="0"/>
-              <a:t>е ф</a:t>
-            </a:r>
-            <a:r>
-              <a:rPr lang="ru-RU" sz="2300" b="1" dirty="0" smtClean="0"/>
-              <a:t>акторы</a:t>
-            </a:r>
-            <a:r>
-              <a:rPr lang="ru-RU" sz="2300" dirty="0" smtClean="0"/>
-              <a:t> – факторы, не </a:t>
-            </a:r>
-            <a:r>
-              <a:rPr lang="ru-RU" sz="2300" dirty="0" smtClean="0"/>
-              <a:t>имеющие линейной корреляции с </a:t>
-            </a:r>
-            <a:r>
-              <a:rPr lang="ru-RU" sz="2300" dirty="0" smtClean="0"/>
-              <a:t>ВР, но </a:t>
-            </a:r>
-            <a:r>
-              <a:rPr lang="ru-RU" sz="2300" dirty="0" smtClean="0"/>
-              <a:t>объясняющие его поведения  </a:t>
-            </a:r>
-            <a:endParaRPr lang="ru-RU" sz="2300" dirty="0" smtClean="0"/>
-          </a:p>
-          <a:p>
-            <a:pPr lvl="1">
-              <a:lnSpc>
-                <a:spcPct val="120000"/>
-              </a:lnSpc>
-              <a:spcBef>
-                <a:spcPts val="0"/>
-              </a:spcBef>
-            </a:pPr>
-            <a:r>
-              <a:rPr lang="ru-RU" altLang="ru-RU" sz="2300" dirty="0" smtClean="0"/>
-              <a:t>Прогноз </a:t>
-            </a:r>
-            <a:r>
-              <a:rPr lang="ru-RU" altLang="ru-RU" sz="2300" dirty="0" smtClean="0"/>
-              <a:t>энергопотребления – </a:t>
-            </a:r>
-            <a:r>
-              <a:rPr lang="en-US" altLang="ru-RU" sz="2300" dirty="0" err="1" smtClean="0"/>
-              <a:t>exdog</a:t>
-            </a:r>
-            <a:r>
-              <a:rPr lang="en-US" altLang="ru-RU" sz="2300" dirty="0" smtClean="0"/>
-              <a:t>: </a:t>
-            </a:r>
-            <a:r>
-              <a:rPr lang="ru-RU" altLang="ru-RU" sz="2300" dirty="0" smtClean="0"/>
-              <a:t>Температура, время суток, день </a:t>
-            </a:r>
-            <a:r>
-              <a:rPr lang="ru-RU" altLang="ru-RU" sz="2300" dirty="0" smtClean="0"/>
-              <a:t>недели</a:t>
-            </a:r>
-          </a:p>
-          <a:p>
-            <a:pPr marL="447675" lvl="2" indent="0" eaLnBrk="0" fontAlgn="base" hangingPunct="0">
-              <a:lnSpc>
-                <a:spcPct val="120000"/>
-              </a:lnSpc>
-              <a:spcBef>
-                <a:spcPts val="0"/>
-              </a:spcBef>
-              <a:buNone/>
-            </a:pPr>
-            <a:r>
-              <a:rPr lang="ru-RU" altLang="ru-RU" sz="2400" b="1" dirty="0" smtClean="0"/>
-              <a:t>Требования к экзогенным факторам</a:t>
-            </a:r>
+              <a:rPr lang="ru-RU" altLang="ru-RU" sz="2300" dirty="0" smtClean="0">
+                <a:solidFill>
+                  <a:srgbClr val="0D47A1"/>
+                </a:solidFill>
+              </a:rPr>
+              <a:t>Тесты</a:t>
+            </a:r>
+            <a:r>
+              <a:rPr lang="ru-RU" altLang="ru-RU" sz="2300" dirty="0"/>
+              <a:t> на ложные корреляции. </a:t>
+            </a:r>
+            <a:endParaRPr lang="ru-RU" altLang="ru-RU" sz="2300" dirty="0" smtClean="0"/>
           </a:p>
           <a:p>
             <a:pPr lvl="2" eaLnBrk="0" fontAlgn="base" hangingPunct="0">
@@ -3874,93 +3895,186 @@
                 <a:spcPct val="100000"/>
               </a:lnSpc>
               <a:spcBef>
-                <a:spcPts val="200"/>
+                <a:spcPts val="300"/>
               </a:spcBef>
+              <a:spcAft>
+                <a:spcPct val="0"/>
+              </a:spcAft>
             </a:pPr>
             <a:r>
-              <a:rPr lang="ru-RU" altLang="ru-RU" sz="1900" dirty="0" smtClean="0"/>
-              <a:t>На практике </a:t>
-            </a:r>
-            <a:r>
-              <a:rPr lang="ru-RU" altLang="ru-RU" sz="1900" dirty="0" err="1" smtClean="0"/>
-              <a:t>экзогенность</a:t>
-            </a:r>
-            <a:r>
-              <a:rPr lang="ru-RU" altLang="ru-RU" sz="1900" dirty="0" smtClean="0"/>
-              <a:t> устанавливается экспертом в предметной области!</a:t>
-            </a:r>
-          </a:p>
-          <a:p>
-            <a:pPr lvl="2" eaLnBrk="0" fontAlgn="base" hangingPunct="0">
+              <a:rPr lang="ru-RU" altLang="ru-RU" dirty="0" smtClean="0"/>
+              <a:t>Напр. </a:t>
+            </a:r>
+            <a:r>
+              <a:rPr lang="ru-RU" altLang="ru-RU" dirty="0" err="1"/>
+              <a:t>Bonferonni</a:t>
+            </a:r>
+            <a:r>
+              <a:rPr lang="ru-RU" altLang="ru-RU" dirty="0"/>
+              <a:t> </a:t>
+            </a:r>
+            <a:r>
+              <a:rPr lang="ru-RU" altLang="ru-RU" dirty="0" err="1"/>
+              <a:t>correction</a:t>
+            </a:r>
+            <a:r>
+              <a:rPr lang="ru-RU" altLang="ru-RU" dirty="0"/>
+              <a:t>, </a:t>
+            </a:r>
+            <a:r>
+              <a:rPr lang="ru-RU" altLang="ru-RU" dirty="0" err="1"/>
+              <a:t>Scheffé's</a:t>
+            </a:r>
+            <a:r>
+              <a:rPr lang="ru-RU" altLang="ru-RU" dirty="0"/>
+              <a:t> </a:t>
+            </a:r>
+            <a:r>
+              <a:rPr lang="ru-RU" altLang="ru-RU" dirty="0" err="1"/>
+              <a:t>method</a:t>
+            </a:r>
+            <a:r>
+              <a:rPr lang="ru-RU" altLang="ru-RU" dirty="0"/>
+              <a:t> и </a:t>
+            </a:r>
+            <a:r>
+              <a:rPr lang="ru-RU" altLang="ru-RU" dirty="0" err="1"/>
+              <a:t>false</a:t>
+            </a:r>
+            <a:r>
+              <a:rPr lang="ru-RU" altLang="ru-RU" dirty="0"/>
+              <a:t> </a:t>
+            </a:r>
+            <a:r>
+              <a:rPr lang="ru-RU" altLang="ru-RU" dirty="0" err="1"/>
+              <a:t>discovery</a:t>
+            </a:r>
+            <a:r>
+              <a:rPr lang="ru-RU" altLang="ru-RU" dirty="0"/>
+              <a:t> </a:t>
+            </a:r>
+            <a:r>
+              <a:rPr lang="ru-RU" altLang="ru-RU" dirty="0" err="1"/>
+              <a:t>rate</a:t>
+            </a:r>
+            <a:r>
+              <a:rPr lang="ru-RU" altLang="ru-RU" dirty="0"/>
+              <a:t>.</a:t>
+            </a:r>
+          </a:p>
+          <a:p>
+            <a:pPr eaLnBrk="0" fontAlgn="base" hangingPunct="0">
               <a:lnSpc>
                 <a:spcPct val="100000"/>
               </a:lnSpc>
               <a:spcBef>
-                <a:spcPts val="200"/>
+                <a:spcPts val="300"/>
               </a:spcBef>
+              <a:spcAft>
+                <a:spcPct val="0"/>
+              </a:spcAft>
             </a:pPr>
             <a:r>
-              <a:rPr lang="ru-RU" altLang="ru-RU" sz="1900" dirty="0" smtClean="0"/>
-              <a:t>Экзогенные факторы объясняют ВР – то есть их использование статистически значимо и стабильно улучшает прогноз. В ином случае лучше фактор не использовать.</a:t>
-            </a:r>
-          </a:p>
-          <a:p>
-            <a:pPr lvl="2" eaLnBrk="0" fontAlgn="base" hangingPunct="0">
+              <a:rPr lang="ru-RU" altLang="ru-RU" sz="2300" dirty="0" smtClean="0"/>
+              <a:t>При добавлении признаков в окно прогноза нужно смотреть чтобы </a:t>
+            </a:r>
+            <a:r>
+              <a:rPr lang="ru-RU" altLang="ru-RU" sz="2300" dirty="0" err="1" smtClean="0"/>
+              <a:t>небыло</a:t>
+            </a:r>
+            <a:r>
+              <a:rPr lang="ru-RU" altLang="ru-RU" sz="2300" dirty="0" smtClean="0"/>
+              <a:t> утечки данных – признаки не должны опережать временную метку предсказываемого значения.</a:t>
+            </a:r>
+          </a:p>
+          <a:p>
+            <a:pPr eaLnBrk="0" fontAlgn="base" hangingPunct="0">
               <a:lnSpc>
                 <a:spcPct val="100000"/>
               </a:lnSpc>
               <a:spcBef>
-                <a:spcPts val="200"/>
+                <a:spcPts val="300"/>
               </a:spcBef>
+              <a:spcAft>
+                <a:spcPct val="0"/>
+              </a:spcAft>
             </a:pPr>
             <a:r>
-              <a:rPr lang="ru-RU" altLang="ru-RU" sz="1900" dirty="0"/>
-              <a:t>Экзогенные </a:t>
-            </a:r>
-            <a:r>
-              <a:rPr lang="ru-RU" altLang="ru-RU" sz="1900" dirty="0" smtClean="0"/>
-              <a:t>факторы должны быть «всегда в наличии», не пропадать</a:t>
-            </a:r>
-          </a:p>
-          <a:p>
-            <a:pPr lvl="2" eaLnBrk="0" fontAlgn="base" hangingPunct="0">
+              <a:rPr lang="ru-RU" altLang="ru-RU" sz="2300" dirty="0" smtClean="0"/>
+              <a:t>Если </a:t>
+            </a:r>
+            <a:r>
+              <a:rPr lang="ru-RU" altLang="ru-RU" sz="2300" dirty="0"/>
+              <a:t>метка прогноза преобразована, часто забывают сделать обратное преобразование</a:t>
+            </a:r>
+            <a:r>
+              <a:rPr lang="ru-RU" altLang="ru-RU" sz="2100" dirty="0">
+                <a:latin typeface="system-ui"/>
+              </a:rPr>
+              <a:t>.</a:t>
+            </a:r>
+          </a:p>
+          <a:p>
+            <a:pPr marL="0" lvl="0" indent="0" eaLnBrk="0" fontAlgn="base" hangingPunct="0">
               <a:lnSpc>
                 <a:spcPct val="100000"/>
               </a:lnSpc>
               <a:spcBef>
-                <a:spcPts val="200"/>
+                <a:spcPts val="300"/>
               </a:spcBef>
+              <a:spcAft>
+                <a:spcPct val="0"/>
+              </a:spcAft>
+              <a:buNone/>
             </a:pPr>
-            <a:r>
-              <a:rPr lang="ru-RU" altLang="ru-RU" sz="1900" dirty="0"/>
-              <a:t>Экзогенные </a:t>
-            </a:r>
-            <a:r>
-              <a:rPr lang="ru-RU" altLang="ru-RU" sz="1900" dirty="0" smtClean="0"/>
-              <a:t>факторы не должны приводить к «утечке данных» (созданию ложных корреляций) – они должны не завесить от ВР</a:t>
-            </a:r>
-          </a:p>
-          <a:p>
-            <a:pPr lvl="2" eaLnBrk="0" fontAlgn="base" hangingPunct="0">
-              <a:lnSpc>
-                <a:spcPct val="100000"/>
-              </a:lnSpc>
-              <a:spcBef>
-                <a:spcPts val="200"/>
-              </a:spcBef>
-            </a:pPr>
-            <a:r>
-              <a:rPr lang="ru-RU" altLang="ru-RU" sz="1900" dirty="0" smtClean="0"/>
-              <a:t>Для многомерных ВР экзогенные факторы могут быть локальными или глобальными – то есть общей информацией между ВР</a:t>
-            </a:r>
-            <a:endParaRPr lang="en-US" altLang="ru-RU" sz="1900" dirty="0" smtClean="0"/>
+            <a:endParaRPr kumimoji="0" lang="ru-RU" altLang="ru-RU" sz="2100" b="0" i="0" u="none" strike="noStrike" cap="none" normalizeH="0" baseline="0" dirty="0" smtClean="0">
+              <a:ln>
+                <a:noFill/>
+              </a:ln>
+              <a:solidFill>
+                <a:schemeClr val="tx1"/>
+              </a:solidFill>
+              <a:effectLst/>
+              <a:latin typeface="Arial" panose="020B0604020202020204" pitchFamily="34" charset="0"/>
+            </a:endParaRPr>
+          </a:p>
+          <a:p>
+            <a:endParaRPr lang="ru-RU" sz="2100" dirty="0"/>
+          </a:p>
+        </p:txBody>
+      </p:sp>
+      <p:sp>
+        <p:nvSpPr>
+          <p:cNvPr id="4" name="Прямоугольник 3"/>
+          <p:cNvSpPr/>
+          <p:nvPr/>
+        </p:nvSpPr>
+        <p:spPr>
+          <a:xfrm>
+            <a:off x="419379" y="6331148"/>
+            <a:ext cx="4208268" cy="307777"/>
+          </a:xfrm>
+          <a:prstGeom prst="rect">
+            <a:avLst/>
+          </a:prstGeom>
+        </p:spPr>
+        <p:txBody>
+          <a:bodyPr wrap="none">
+            <a:spAutoFit/>
+          </a:bodyPr>
+          <a:lstStyle/>
+          <a:p>
+            <a:r>
+              <a:rPr lang="ru-RU" sz="1400" dirty="0"/>
+              <a:t>https://www.nature.com/articles/d41586-025-01246-1</a:t>
+            </a:r>
           </a:p>
         </p:txBody>
       </p:sp>
     </p:spTree>
     <p:extLst>
       <p:ext uri="{BB962C8B-B14F-4D97-AF65-F5344CB8AC3E}">
-        <p14:creationId xmlns:p14="http://schemas.microsoft.com/office/powerpoint/2010/main" val="1968690726"/>
+        <p14:creationId xmlns:p14="http://schemas.microsoft.com/office/powerpoint/2010/main" val="3365436130"/>
       </p:ext>
     </p:extLst>
   </p:cSld>
@@ -4006,7 +4120,7 @@
         </p:nvSpPr>
         <p:spPr>
           <a:xfrm>
-            <a:off x="280146" y="238498"/>
+            <a:off x="242046" y="105148"/>
             <a:ext cx="11111753" cy="656851"/>
           </a:xfrm>
         </p:spPr>
@@ -4016,7 +4130,6 @@
           </a:bodyPr>
           <a:lstStyle/>
           <a:p>
-            <a:pPr lvl="0"/>
             <a:r>
               <a:rPr lang="ru-RU" altLang="ru-RU" b="1" dirty="0" smtClean="0">
                 <a:solidFill>
@@ -4024,47 +4137,7 @@
                 </a:solidFill>
                 <a:latin typeface="system-ui"/>
               </a:rPr>
-              <a:t>Экзогенные </a:t>
-            </a:r>
-            <a:r>
-              <a:rPr lang="ru-RU" altLang="ru-RU" b="1" dirty="0" smtClean="0">
-                <a:solidFill>
-                  <a:srgbClr val="0D47A1"/>
-                </a:solidFill>
-                <a:latin typeface="system-ui"/>
-              </a:rPr>
-              <a:t>переменные</a:t>
-            </a:r>
-            <a:r>
-              <a:rPr lang="en-US" altLang="ru-RU" b="1" dirty="0">
-                <a:solidFill>
-                  <a:srgbClr val="0D47A1"/>
-                </a:solidFill>
-                <a:latin typeface="system-ui"/>
-              </a:rPr>
-              <a:t>.</a:t>
-            </a:r>
-            <a:r>
-              <a:rPr lang="ru-RU" altLang="ru-RU" b="1" dirty="0" smtClean="0">
-                <a:solidFill>
-                  <a:srgbClr val="0D47A1"/>
-                </a:solidFill>
-                <a:latin typeface="system-ui"/>
-              </a:rPr>
-              <a:t> Три </a:t>
-            </a:r>
-            <a:r>
-              <a:rPr lang="ru-RU" altLang="ru-RU" b="1" dirty="0">
-                <a:solidFill>
-                  <a:srgbClr val="0D47A1"/>
-                </a:solidFill>
-                <a:latin typeface="system-ui"/>
-              </a:rPr>
-              <a:t>группы</a:t>
-            </a:r>
-            <a:r>
-              <a:rPr lang="ru-RU" altLang="ru-RU" dirty="0" smtClean="0"/>
-              <a:t>:</a:t>
+              <a:t>Экзогенные переменные</a:t>
             </a:r>
             <a:r>
               <a:rPr lang="ru-RU" altLang="ru-RU" dirty="0" smtClean="0">
@@ -4094,362 +4167,235 @@
         </p:spPr>
         <p:txBody>
           <a:bodyPr>
-            <a:normAutofit fontScale="92500"/>
+            <a:normAutofit/>
           </a:bodyPr>
           <a:lstStyle/>
           <a:p>
-            <a:pPr marL="0" lvl="0" indent="0" eaLnBrk="0" fontAlgn="base" hangingPunct="0">
+            <a:pPr>
               <a:lnSpc>
                 <a:spcPct val="120000"/>
               </a:lnSpc>
               <a:spcBef>
-                <a:spcPts val="600"/>
+                <a:spcPts val="0"/>
               </a:spcBef>
-              <a:spcAft>
-                <a:spcPct val="0"/>
-              </a:spcAft>
-              <a:buNone/>
             </a:pPr>
             <a:r>
-              <a:rPr lang="ru-RU" altLang="ru-RU" b="1" dirty="0" smtClean="0"/>
-              <a:t>Статические </a:t>
-            </a:r>
-            <a:r>
-              <a:rPr lang="ru-RU" altLang="ru-RU" b="1" dirty="0"/>
-              <a:t>экзогенные переменные</a:t>
-            </a:r>
-            <a:r>
-              <a:rPr lang="ru-RU" altLang="ru-RU" dirty="0"/>
-              <a:t>: </a:t>
-            </a:r>
-            <a:endParaRPr lang="en-US" altLang="ru-RU" dirty="0"/>
-          </a:p>
-          <a:p>
-            <a:pPr lvl="1" eaLnBrk="0" fontAlgn="base" hangingPunct="0">
+              <a:rPr lang="ru-RU" altLang="ru-RU" sz="2300" b="1" dirty="0"/>
+              <a:t>Эндогенные ф</a:t>
+            </a:r>
+            <a:r>
+              <a:rPr lang="en-US" sz="2300" b="1" dirty="0" err="1"/>
+              <a:t>акторы</a:t>
+            </a:r>
+            <a:r>
+              <a:rPr lang="en-US" sz="2300" dirty="0"/>
+              <a:t>, </a:t>
+            </a:r>
+            <a:r>
+              <a:rPr lang="en-US" sz="2300" dirty="0" err="1"/>
+              <a:t>очевидно</a:t>
+            </a:r>
+            <a:r>
+              <a:rPr lang="en-US" sz="2300" dirty="0"/>
+              <a:t> </a:t>
+            </a:r>
+            <a:r>
+              <a:rPr lang="en-US" sz="2300" dirty="0" err="1"/>
+              <a:t>коррелирующие</a:t>
+            </a:r>
+            <a:r>
+              <a:rPr lang="en-US" sz="2300" dirty="0"/>
+              <a:t> с </a:t>
+            </a:r>
+            <a:r>
+              <a:rPr lang="ru-RU" sz="2300" dirty="0"/>
+              <a:t>ВР</a:t>
+            </a:r>
+            <a:r>
+              <a:rPr lang="en-US" sz="2300" dirty="0"/>
+              <a:t>. </a:t>
+            </a:r>
+            <a:endParaRPr lang="ru-RU" sz="2300" dirty="0" smtClean="0"/>
+          </a:p>
+          <a:p>
+            <a:pPr lvl="1">
               <a:lnSpc>
                 <a:spcPct val="120000"/>
               </a:lnSpc>
               <a:spcBef>
-                <a:spcPct val="0"/>
+                <a:spcPts val="0"/>
               </a:spcBef>
-              <a:spcAft>
-                <a:spcPct val="0"/>
-              </a:spcAft>
             </a:pPr>
             <a:r>
-              <a:rPr lang="ru-RU" altLang="ru-RU" dirty="0" smtClean="0"/>
-              <a:t>несут </a:t>
-            </a:r>
-            <a:r>
-              <a:rPr lang="ru-RU" altLang="ru-RU" dirty="0"/>
-              <a:t>неизменную во времени информацию для каждого временного ряда</a:t>
-            </a:r>
-            <a:r>
-              <a:rPr lang="ru-RU" altLang="ru-RU" dirty="0" smtClean="0"/>
-              <a:t>.</a:t>
-            </a:r>
-            <a:endParaRPr lang="en-US" altLang="ru-RU" dirty="0" smtClean="0"/>
-          </a:p>
-          <a:p>
-            <a:pPr lvl="2" eaLnBrk="0" fontAlgn="base" hangingPunct="0">
+              <a:rPr lang="ru-RU" sz="2300" dirty="0" smtClean="0"/>
+              <a:t>Лаги ВР, преобразованные значения, значения автокорреляций, тренда или сезонности, и </a:t>
+            </a:r>
+            <a:r>
+              <a:rPr lang="ru-RU" sz="2300" dirty="0" err="1" smtClean="0"/>
+              <a:t>тд</a:t>
+            </a:r>
+            <a:endParaRPr lang="ru-RU" sz="2300" dirty="0" smtClean="0"/>
+          </a:p>
+          <a:p>
+            <a:pPr>
               <a:lnSpc>
                 <a:spcPct val="120000"/>
               </a:lnSpc>
               <a:spcBef>
-                <a:spcPct val="0"/>
+                <a:spcPts val="0"/>
               </a:spcBef>
-              <a:spcAft>
-                <a:spcPct val="0"/>
-              </a:spcAft>
             </a:pPr>
             <a:r>
-              <a:rPr lang="ru-RU" altLang="ru-RU" sz="2400" b="1" dirty="0" smtClean="0"/>
-              <a:t>Напр. </a:t>
-            </a:r>
-            <a:r>
-              <a:rPr lang="ru-RU" altLang="ru-RU" sz="2400" dirty="0"/>
-              <a:t> </a:t>
-            </a:r>
-            <a:r>
-              <a:rPr lang="ru-RU" altLang="ru-RU" sz="2400" dirty="0" smtClean="0"/>
-              <a:t>идентификаторы </a:t>
-            </a:r>
-            <a:r>
-              <a:rPr lang="ru-RU" altLang="ru-RU" sz="2400" dirty="0"/>
-              <a:t>регионов, групп </a:t>
-            </a:r>
-            <a:r>
-              <a:rPr lang="ru-RU" altLang="ru-RU" sz="2400" dirty="0" smtClean="0"/>
-              <a:t>товаров </a:t>
-            </a:r>
-            <a:r>
-              <a:rPr lang="ru-RU" altLang="ru-RU" sz="2400" dirty="0"/>
-              <a:t>и т. д.</a:t>
-            </a:r>
-          </a:p>
-          <a:p>
-            <a:pPr eaLnBrk="0" fontAlgn="base" hangingPunct="0">
+              <a:rPr lang="ru-RU" sz="2300" b="1" dirty="0" smtClean="0"/>
+              <a:t>Э</a:t>
+            </a:r>
+            <a:r>
+              <a:rPr lang="en-US" sz="2300" b="1" dirty="0" err="1" smtClean="0"/>
+              <a:t>кзогенны</a:t>
+            </a:r>
+            <a:r>
+              <a:rPr lang="ru-RU" sz="2300" b="1" dirty="0" smtClean="0"/>
+              <a:t>е факторы</a:t>
+            </a:r>
+            <a:r>
+              <a:rPr lang="ru-RU" sz="2300" dirty="0" smtClean="0"/>
+              <a:t> – факторы, не имеющие линейной корреляции с ВР, но объясняющие его поведения  </a:t>
+            </a:r>
+          </a:p>
+          <a:p>
+            <a:pPr lvl="1">
               <a:lnSpc>
                 <a:spcPct val="120000"/>
               </a:lnSpc>
               <a:spcBef>
-                <a:spcPct val="0"/>
+                <a:spcPts val="0"/>
               </a:spcBef>
-              <a:spcAft>
-                <a:spcPct val="0"/>
-              </a:spcAft>
             </a:pPr>
             <a:r>
-              <a:rPr lang="ru-RU" altLang="ru-RU" b="1" dirty="0"/>
-              <a:t>Исторические экзогенные переменные</a:t>
-            </a:r>
-            <a:r>
-              <a:rPr lang="ru-RU" altLang="ru-RU" dirty="0"/>
+              <a:rPr lang="ru-RU" altLang="ru-RU" sz="2300" dirty="0" smtClean="0"/>
+              <a:t>Прогноз энергопотребления – </a:t>
+            </a:r>
+            <a:r>
+              <a:rPr lang="en-US" altLang="ru-RU" sz="2300" dirty="0" err="1" smtClean="0"/>
+              <a:t>exdog</a:t>
+            </a:r>
+            <a:r>
+              <a:rPr lang="en-US" altLang="ru-RU" sz="2300" dirty="0" smtClean="0"/>
               <a:t>: </a:t>
             </a:r>
             <a:r>
-              <a:rPr lang="ru-RU" altLang="ru-RU" dirty="0" smtClean="0"/>
-              <a:t>переменная </a:t>
-            </a:r>
-            <a:r>
-              <a:rPr lang="ru-RU" altLang="ru-RU" dirty="0"/>
-              <a:t>ограничена прошлыми наблюдаемыми значениями. </a:t>
-            </a:r>
-            <a:endParaRPr lang="ru-RU" altLang="ru-RU" dirty="0" smtClean="0"/>
-          </a:p>
-          <a:p>
-            <a:pPr lvl="1" eaLnBrk="0" fontAlgn="base" hangingPunct="0">
+              <a:rPr lang="ru-RU" altLang="ru-RU" sz="2300" dirty="0" smtClean="0"/>
+              <a:t>Температура, время суток, день недели</a:t>
+            </a:r>
+          </a:p>
+          <a:p>
+            <a:pPr marL="447675" lvl="2" indent="0" eaLnBrk="0" fontAlgn="base" hangingPunct="0">
               <a:lnSpc>
                 <a:spcPct val="120000"/>
               </a:lnSpc>
               <a:spcBef>
-                <a:spcPct val="0"/>
+                <a:spcPts val="0"/>
               </a:spcBef>
-              <a:spcAft>
-                <a:spcPct val="0"/>
-              </a:spcAft>
+              <a:buNone/>
             </a:pPr>
             <a:r>
-              <a:rPr lang="ru-RU" altLang="ru-RU" sz="2600" dirty="0"/>
-              <a:t>Причинность можно проверить напр. </a:t>
-            </a:r>
-            <a:r>
-              <a:rPr lang="ru-RU" altLang="ru-RU" sz="2600" dirty="0" smtClean="0"/>
-              <a:t>при помощи Теста </a:t>
-            </a:r>
-            <a:r>
-              <a:rPr lang="ru-RU" altLang="ru-RU" sz="2600" dirty="0" err="1" smtClean="0"/>
-              <a:t>Гранжера</a:t>
-            </a:r>
-            <a:r>
-              <a:rPr lang="ru-RU" altLang="ru-RU" sz="2600" dirty="0"/>
-              <a:t> </a:t>
-            </a:r>
-            <a:r>
-              <a:rPr lang="ru-RU" altLang="ru-RU" sz="2600" dirty="0" smtClean="0"/>
-              <a:t>на казуальность.</a:t>
-            </a:r>
-            <a:endParaRPr lang="ru-RU" altLang="ru-RU" sz="2600" dirty="0"/>
-          </a:p>
-          <a:p>
-            <a:pPr eaLnBrk="0" fontAlgn="base" hangingPunct="0">
-              <a:lnSpc>
-                <a:spcPct val="120000"/>
-              </a:lnSpc>
-              <a:spcBef>
-                <a:spcPct val="0"/>
-              </a:spcBef>
-              <a:spcAft>
-                <a:spcPct val="0"/>
-              </a:spcAft>
-            </a:pPr>
-            <a:r>
-              <a:rPr lang="ru-RU" altLang="ru-RU" b="1" dirty="0"/>
-              <a:t>Будущие экзогенные переменные</a:t>
-            </a:r>
-            <a:r>
-              <a:rPr lang="ru-RU" altLang="ru-RU" dirty="0"/>
-              <a:t>: </a:t>
-            </a:r>
-            <a:r>
-              <a:rPr lang="ru-RU" altLang="ru-RU" dirty="0" smtClean="0"/>
-              <a:t> </a:t>
-            </a:r>
-            <a:r>
-              <a:rPr lang="ru-RU" altLang="ru-RU" dirty="0"/>
-              <a:t>доступны на момент прогнозирования. </a:t>
-            </a:r>
-            <a:endParaRPr lang="ru-RU" altLang="ru-RU" dirty="0" smtClean="0"/>
-          </a:p>
-          <a:p>
-            <a:pPr lvl="1" eaLnBrk="0" fontAlgn="base" hangingPunct="0">
-              <a:lnSpc>
-                <a:spcPct val="120000"/>
-              </a:lnSpc>
-              <a:spcBef>
-                <a:spcPct val="0"/>
-              </a:spcBef>
-              <a:spcAft>
-                <a:spcPct val="0"/>
-              </a:spcAft>
-            </a:pPr>
-            <a:r>
-              <a:rPr lang="ru-RU" altLang="ru-RU" dirty="0" smtClean="0"/>
-              <a:t>Напр. календарные </a:t>
-            </a:r>
-            <a:r>
-              <a:rPr lang="ru-RU" altLang="ru-RU" dirty="0"/>
-              <a:t>переменные, известные события, </a:t>
-            </a:r>
-            <a:r>
-              <a:rPr lang="ru-RU" altLang="ru-RU" dirty="0" smtClean="0"/>
-              <a:t>(напр. </a:t>
-            </a:r>
-            <a:r>
-              <a:rPr lang="ru-RU" altLang="ru-RU" dirty="0"/>
-              <a:t>запланированные </a:t>
-            </a:r>
-            <a:r>
-              <a:rPr lang="ru-RU" altLang="ru-RU" dirty="0" smtClean="0"/>
-              <a:t>акции), </a:t>
-            </a:r>
-            <a:r>
-              <a:rPr lang="ru-RU" altLang="ru-RU" dirty="0" smtClean="0"/>
-              <a:t>прогнозы факторов (напр. прогноз погоды для прогноза </a:t>
-            </a:r>
-            <a:r>
-              <a:rPr lang="ru-RU" altLang="ru-RU" dirty="0" smtClean="0"/>
-              <a:t>электропотребления на 1 день).</a:t>
-            </a:r>
-            <a:endParaRPr lang="en-US" altLang="ru-RU" dirty="0" smtClean="0"/>
-          </a:p>
-          <a:p>
-            <a:pPr lvl="1" eaLnBrk="0" fontAlgn="base" hangingPunct="0">
-              <a:lnSpc>
-                <a:spcPct val="120000"/>
-              </a:lnSpc>
-              <a:spcBef>
-                <a:spcPct val="0"/>
-              </a:spcBef>
-              <a:spcAft>
-                <a:spcPct val="0"/>
-              </a:spcAft>
-            </a:pPr>
-            <a:r>
-              <a:rPr lang="ru-RU" altLang="ru-RU" dirty="0" smtClean="0"/>
-              <a:t>Важно чтобы переменная всегда в будущем была известна и не несла </a:t>
-            </a:r>
-            <a:r>
-              <a:rPr lang="en-US" altLang="ru-RU" dirty="0" smtClean="0"/>
-              <a:t>data leaks</a:t>
-            </a:r>
-          </a:p>
-          <a:p>
-            <a:pPr lvl="1" eaLnBrk="0" fontAlgn="base" hangingPunct="0">
-              <a:lnSpc>
-                <a:spcPct val="120000"/>
-              </a:lnSpc>
-              <a:spcBef>
-                <a:spcPct val="0"/>
-              </a:spcBef>
-              <a:spcAft>
-                <a:spcPct val="0"/>
-              </a:spcAft>
-            </a:pPr>
-            <a:r>
-              <a:rPr lang="ru-RU" altLang="ru-RU" dirty="0" smtClean="0"/>
-              <a:t>Для проверки </a:t>
+              <a:rPr lang="ru-RU" altLang="ru-RU" sz="2400" b="1" dirty="0" smtClean="0"/>
+              <a:t>Требования к экзогенным факторам</a:t>
             </a:r>
           </a:p>
           <a:p>
             <a:pPr lvl="2" eaLnBrk="0" fontAlgn="base" hangingPunct="0">
-              <a:lnSpc>
-                <a:spcPct val="120000"/>
-              </a:lnSpc>
-              <a:spcBef>
-                <a:spcPct val="0"/>
-              </a:spcBef>
-              <a:spcAft>
-                <a:spcPct val="0"/>
-              </a:spcAft>
-            </a:pPr>
-            <a:r>
-              <a:rPr lang="ru-RU" altLang="ru-RU" dirty="0" smtClean="0"/>
-              <a:t>обратный тест на казуальность (фактор на ВР) </a:t>
-            </a:r>
-          </a:p>
-          <a:p>
-            <a:pPr lvl="2" eaLnBrk="0" fontAlgn="base" hangingPunct="0">
-              <a:lnSpc>
-                <a:spcPct val="120000"/>
-              </a:lnSpc>
-              <a:spcBef>
-                <a:spcPct val="0"/>
-              </a:spcBef>
-              <a:spcAft>
-                <a:spcPct val="0"/>
-              </a:spcAft>
-            </a:pPr>
-            <a:r>
-              <a:rPr lang="en-US" dirty="0"/>
-              <a:t>Lead-Lag </a:t>
-            </a:r>
-            <a:r>
-              <a:rPr lang="en-US" dirty="0" smtClean="0"/>
-              <a:t>Analysis</a:t>
-            </a:r>
-            <a:r>
-              <a:rPr lang="ru-RU" dirty="0" smtClean="0"/>
-              <a:t> – на сколько далеко нужно сместить ВР чтобы возникла казуальность?</a:t>
-            </a:r>
-            <a:endParaRPr lang="en-US" b="1" dirty="0"/>
-          </a:p>
-          <a:p>
-            <a:pPr lvl="1" eaLnBrk="0" fontAlgn="base" hangingPunct="0">
-              <a:lnSpc>
-                <a:spcPct val="120000"/>
-              </a:lnSpc>
-              <a:spcBef>
-                <a:spcPct val="0"/>
-              </a:spcBef>
-              <a:spcAft>
-                <a:spcPct val="0"/>
-              </a:spcAft>
-            </a:pPr>
-            <a:endParaRPr lang="ru-RU" altLang="ru-RU" dirty="0"/>
-          </a:p>
-          <a:p>
-            <a:pPr marL="0" lvl="0" indent="0" eaLnBrk="0" fontAlgn="base" hangingPunct="0">
               <a:lnSpc>
                 <a:spcPct val="100000"/>
               </a:lnSpc>
               <a:spcBef>
-                <a:spcPct val="0"/>
+                <a:spcPts val="200"/>
               </a:spcBef>
-              <a:spcAft>
-                <a:spcPct val="0"/>
-              </a:spcAft>
-              <a:buNone/>
             </a:pPr>
-            <a:endParaRPr kumimoji="0" lang="ru-RU" altLang="ru-RU" sz="5400" b="0" i="0" u="none" strike="noStrike" cap="none" normalizeH="0" baseline="0" dirty="0" smtClean="0">
-              <a:ln>
-                <a:noFill/>
-              </a:ln>
-              <a:solidFill>
-                <a:schemeClr val="tx1"/>
-              </a:solidFill>
-              <a:effectLst/>
-            </a:endParaRPr>
-          </a:p>
-          <a:p>
-            <a:endParaRPr lang="ru-RU" dirty="0"/>
+            <a:r>
+              <a:rPr lang="ru-RU" altLang="ru-RU" sz="1900" dirty="0" smtClean="0"/>
+              <a:t>На практике </a:t>
+            </a:r>
+            <a:r>
+              <a:rPr lang="ru-RU" altLang="ru-RU" sz="1900" dirty="0" err="1" smtClean="0"/>
+              <a:t>экзогенность</a:t>
+            </a:r>
+            <a:r>
+              <a:rPr lang="ru-RU" altLang="ru-RU" sz="1900" dirty="0" smtClean="0"/>
+              <a:t> устанавливается экспертом в предметной области!</a:t>
+            </a:r>
+          </a:p>
+          <a:p>
+            <a:pPr lvl="2" eaLnBrk="0" fontAlgn="base" hangingPunct="0">
+              <a:lnSpc>
+                <a:spcPct val="100000"/>
+              </a:lnSpc>
+              <a:spcBef>
+                <a:spcPts val="200"/>
+              </a:spcBef>
+            </a:pPr>
+            <a:r>
+              <a:rPr lang="ru-RU" altLang="ru-RU" sz="1900" dirty="0" smtClean="0"/>
+              <a:t>Экзогенные факторы объясняют ВР – то есть их использование статистически значимо и стабильно улучшает прогноз. В ином случае лучше фактор не использовать.</a:t>
+            </a:r>
+          </a:p>
+          <a:p>
+            <a:pPr lvl="2" eaLnBrk="0" fontAlgn="base" hangingPunct="0">
+              <a:lnSpc>
+                <a:spcPct val="100000"/>
+              </a:lnSpc>
+              <a:spcBef>
+                <a:spcPts val="200"/>
+              </a:spcBef>
+            </a:pPr>
+            <a:r>
+              <a:rPr lang="ru-RU" altLang="ru-RU" sz="1900" dirty="0"/>
+              <a:t>Экзогенные </a:t>
+            </a:r>
+            <a:r>
+              <a:rPr lang="ru-RU" altLang="ru-RU" sz="1900" dirty="0" smtClean="0"/>
+              <a:t>факторы должны быть «всегда в наличии», не пропадать</a:t>
+            </a:r>
+          </a:p>
+          <a:p>
+            <a:pPr lvl="2" eaLnBrk="0" fontAlgn="base" hangingPunct="0">
+              <a:lnSpc>
+                <a:spcPct val="100000"/>
+              </a:lnSpc>
+              <a:spcBef>
+                <a:spcPts val="200"/>
+              </a:spcBef>
+            </a:pPr>
+            <a:r>
+              <a:rPr lang="ru-RU" altLang="ru-RU" sz="1900" dirty="0"/>
+              <a:t>Экзогенные </a:t>
+            </a:r>
+            <a:r>
+              <a:rPr lang="ru-RU" altLang="ru-RU" sz="1900" dirty="0" smtClean="0"/>
+              <a:t>факторы не должны приводить к «утечке данных» (созданию ложных корреляций) – они должны не завесить от ВР</a:t>
+            </a:r>
+          </a:p>
+          <a:p>
+            <a:pPr lvl="2" eaLnBrk="0" fontAlgn="base" hangingPunct="0">
+              <a:lnSpc>
+                <a:spcPct val="100000"/>
+              </a:lnSpc>
+              <a:spcBef>
+                <a:spcPts val="200"/>
+              </a:spcBef>
+            </a:pPr>
+            <a:r>
+              <a:rPr lang="ru-RU" altLang="ru-RU" sz="1900" dirty="0" smtClean="0"/>
+              <a:t>Для многомерных ВР экзогенные факторы могут быть локальными или глобальными – то есть общей информацией между ВР</a:t>
+            </a:r>
+            <a:endParaRPr lang="en-US" altLang="ru-RU" sz="1900" dirty="0" smtClean="0"/>
           </a:p>
         </p:txBody>
       </p:sp>
     </p:spTree>
     <p:extLst>
       <p:ext uri="{BB962C8B-B14F-4D97-AF65-F5344CB8AC3E}">
-        <p14:creationId xmlns:p14="http://schemas.microsoft.com/office/powerpoint/2010/main" val="1608365178"/>
+        <p14:creationId xmlns:p14="http://schemas.microsoft.com/office/powerpoint/2010/main" val="1968690726"/>
       </p:ext>
     </p:extLst>
   </p:cSld>
@@ -4495,6 +4441,478 @@
         </p:nvSpPr>
         <p:spPr>
           <a:xfrm>
+            <a:off x="280146" y="238498"/>
+            <a:ext cx="11111753" cy="656851"/>
+          </a:xfrm>
+        </p:spPr>
+        <p:txBody>
+          <a:bodyPr>
+            <a:normAutofit fontScale="90000"/>
+          </a:bodyPr>
+          <a:lstStyle/>
+          <a:p>
+            <a:pPr lvl="0"/>
+            <a:r>
+              <a:rPr lang="ru-RU" altLang="ru-RU" b="1" dirty="0" smtClean="0">
+                <a:solidFill>
+                  <a:srgbClr val="0D47A1"/>
+                </a:solidFill>
+                <a:latin typeface="system-ui"/>
+              </a:rPr>
+              <a:t>Экзогенные переменные</a:t>
+            </a:r>
+            <a:r>
+              <a:rPr lang="en-US" altLang="ru-RU" b="1" dirty="0">
+                <a:solidFill>
+                  <a:srgbClr val="0D47A1"/>
+                </a:solidFill>
+                <a:latin typeface="system-ui"/>
+              </a:rPr>
+              <a:t>.</a:t>
+            </a:r>
+            <a:r>
+              <a:rPr lang="ru-RU" altLang="ru-RU" b="1" dirty="0" smtClean="0">
+                <a:solidFill>
+                  <a:srgbClr val="0D47A1"/>
+                </a:solidFill>
+                <a:latin typeface="system-ui"/>
+              </a:rPr>
+              <a:t> Три </a:t>
+            </a:r>
+            <a:r>
+              <a:rPr lang="ru-RU" altLang="ru-RU" b="1" dirty="0">
+                <a:solidFill>
+                  <a:srgbClr val="0D47A1"/>
+                </a:solidFill>
+                <a:latin typeface="system-ui"/>
+              </a:rPr>
+              <a:t>группы</a:t>
+            </a:r>
+            <a:r>
+              <a:rPr lang="ru-RU" altLang="ru-RU" dirty="0" smtClean="0"/>
+              <a:t>:</a:t>
+            </a:r>
+            <a:r>
+              <a:rPr lang="ru-RU" altLang="ru-RU" dirty="0" smtClean="0">
+                <a:latin typeface="system-ui"/>
+              </a:rPr>
+              <a:t> </a:t>
+            </a:r>
+            <a:endParaRPr lang="ru-RU" dirty="0"/>
+          </a:p>
+        </p:txBody>
+      </p:sp>
+      <p:sp>
+        <p:nvSpPr>
+          <p:cNvPr id="3" name="Объект 2"/>
+          <p:cNvSpPr>
+            <a:spLocks noGrp="1"/>
+          </p:cNvSpPr>
+          <p:nvPr>
+            <p:ph idx="1"/>
+          </p:nvPr>
+        </p:nvSpPr>
+        <p:spPr>
+          <a:xfrm>
+            <a:off x="134470" y="761998"/>
+            <a:ext cx="11949953" cy="5862919"/>
+          </a:xfrm>
+        </p:spPr>
+        <p:txBody>
+          <a:bodyPr>
+            <a:normAutofit fontScale="92500"/>
+          </a:bodyPr>
+          <a:lstStyle/>
+          <a:p>
+            <a:pPr marL="0" lvl="0" indent="0" eaLnBrk="0" fontAlgn="base" hangingPunct="0">
+              <a:lnSpc>
+                <a:spcPct val="120000"/>
+              </a:lnSpc>
+              <a:spcBef>
+                <a:spcPts val="600"/>
+              </a:spcBef>
+              <a:spcAft>
+                <a:spcPct val="0"/>
+              </a:spcAft>
+              <a:buNone/>
+            </a:pPr>
+            <a:r>
+              <a:rPr lang="ru-RU" altLang="ru-RU" b="1" dirty="0" smtClean="0"/>
+              <a:t>Статические </a:t>
+            </a:r>
+            <a:r>
+              <a:rPr lang="ru-RU" altLang="ru-RU" b="1" dirty="0"/>
+              <a:t>экзогенные переменные</a:t>
+            </a:r>
+            <a:r>
+              <a:rPr lang="ru-RU" altLang="ru-RU" dirty="0"/>
+              <a:t>: </a:t>
+            </a:r>
+            <a:endParaRPr lang="en-US" altLang="ru-RU" dirty="0"/>
+          </a:p>
+          <a:p>
+            <a:pPr lvl="1" eaLnBrk="0" fontAlgn="base" hangingPunct="0">
+              <a:lnSpc>
+                <a:spcPct val="120000"/>
+              </a:lnSpc>
+              <a:spcBef>
+                <a:spcPct val="0"/>
+              </a:spcBef>
+              <a:spcAft>
+                <a:spcPct val="0"/>
+              </a:spcAft>
+            </a:pPr>
+            <a:r>
+              <a:rPr lang="ru-RU" altLang="ru-RU" dirty="0" smtClean="0"/>
+              <a:t>несут </a:t>
+            </a:r>
+            <a:r>
+              <a:rPr lang="ru-RU" altLang="ru-RU" dirty="0"/>
+              <a:t>неизменную во времени информацию для каждого временного ряда</a:t>
+            </a:r>
+            <a:r>
+              <a:rPr lang="ru-RU" altLang="ru-RU" dirty="0" smtClean="0"/>
+              <a:t>.</a:t>
+            </a:r>
+            <a:endParaRPr lang="en-US" altLang="ru-RU" dirty="0" smtClean="0"/>
+          </a:p>
+          <a:p>
+            <a:pPr lvl="2" eaLnBrk="0" fontAlgn="base" hangingPunct="0">
+              <a:lnSpc>
+                <a:spcPct val="120000"/>
+              </a:lnSpc>
+              <a:spcBef>
+                <a:spcPct val="0"/>
+              </a:spcBef>
+              <a:spcAft>
+                <a:spcPct val="0"/>
+              </a:spcAft>
+            </a:pPr>
+            <a:r>
+              <a:rPr lang="ru-RU" altLang="ru-RU" sz="2400" b="1" dirty="0" smtClean="0"/>
+              <a:t>Напр. </a:t>
+            </a:r>
+            <a:r>
+              <a:rPr lang="ru-RU" altLang="ru-RU" sz="2400" dirty="0"/>
+              <a:t> </a:t>
+            </a:r>
+            <a:r>
+              <a:rPr lang="ru-RU" altLang="ru-RU" sz="2400" dirty="0" smtClean="0"/>
+              <a:t>идентификаторы </a:t>
+            </a:r>
+            <a:r>
+              <a:rPr lang="ru-RU" altLang="ru-RU" sz="2400" dirty="0"/>
+              <a:t>регионов, групп </a:t>
+            </a:r>
+            <a:r>
+              <a:rPr lang="ru-RU" altLang="ru-RU" sz="2400" dirty="0" smtClean="0"/>
+              <a:t>товаров </a:t>
+            </a:r>
+            <a:r>
+              <a:rPr lang="ru-RU" altLang="ru-RU" sz="2400" dirty="0"/>
+              <a:t>и т. д.</a:t>
+            </a:r>
+          </a:p>
+          <a:p>
+            <a:pPr eaLnBrk="0" fontAlgn="base" hangingPunct="0">
+              <a:lnSpc>
+                <a:spcPct val="120000"/>
+              </a:lnSpc>
+              <a:spcBef>
+                <a:spcPct val="0"/>
+              </a:spcBef>
+              <a:spcAft>
+                <a:spcPct val="0"/>
+              </a:spcAft>
+            </a:pPr>
+            <a:r>
+              <a:rPr lang="ru-RU" altLang="ru-RU" b="1" dirty="0"/>
+              <a:t>Исторические экзогенные переменные</a:t>
+            </a:r>
+            <a:r>
+              <a:rPr lang="ru-RU" altLang="ru-RU" dirty="0"/>
+              <a:t>: </a:t>
+            </a:r>
+            <a:r>
+              <a:rPr lang="ru-RU" altLang="ru-RU" dirty="0" smtClean="0"/>
+              <a:t>переменная </a:t>
+            </a:r>
+            <a:r>
+              <a:rPr lang="ru-RU" altLang="ru-RU" dirty="0"/>
+              <a:t>ограничена прошлыми наблюдаемыми значениями. </a:t>
+            </a:r>
+            <a:endParaRPr lang="ru-RU" altLang="ru-RU" dirty="0" smtClean="0"/>
+          </a:p>
+          <a:p>
+            <a:pPr lvl="1" eaLnBrk="0" fontAlgn="base" hangingPunct="0">
+              <a:lnSpc>
+                <a:spcPct val="120000"/>
+              </a:lnSpc>
+              <a:spcBef>
+                <a:spcPct val="0"/>
+              </a:spcBef>
+              <a:spcAft>
+                <a:spcPct val="0"/>
+              </a:spcAft>
+            </a:pPr>
+            <a:r>
+              <a:rPr lang="ru-RU" altLang="ru-RU" sz="2600" dirty="0"/>
+              <a:t>Причинность можно проверить напр. </a:t>
+            </a:r>
+            <a:r>
+              <a:rPr lang="ru-RU" altLang="ru-RU" sz="2600" dirty="0" smtClean="0"/>
+              <a:t>при помощи Теста </a:t>
+            </a:r>
+            <a:r>
+              <a:rPr lang="ru-RU" altLang="ru-RU" sz="2600" dirty="0" err="1" smtClean="0"/>
+              <a:t>Гранжера</a:t>
+            </a:r>
+            <a:r>
+              <a:rPr lang="ru-RU" altLang="ru-RU" sz="2600" dirty="0"/>
+              <a:t> </a:t>
+            </a:r>
+            <a:r>
+              <a:rPr lang="ru-RU" altLang="ru-RU" sz="2600" dirty="0" smtClean="0"/>
+              <a:t>на казуальность.</a:t>
+            </a:r>
+            <a:endParaRPr lang="ru-RU" altLang="ru-RU" sz="2600" dirty="0"/>
+          </a:p>
+          <a:p>
+            <a:pPr eaLnBrk="0" fontAlgn="base" hangingPunct="0">
+              <a:lnSpc>
+                <a:spcPct val="120000"/>
+              </a:lnSpc>
+              <a:spcBef>
+                <a:spcPct val="0"/>
+              </a:spcBef>
+              <a:spcAft>
+                <a:spcPct val="0"/>
+              </a:spcAft>
+            </a:pPr>
+            <a:r>
+              <a:rPr lang="ru-RU" altLang="ru-RU" b="1" dirty="0"/>
+              <a:t>Будущие экзогенные переменные</a:t>
+            </a:r>
+            <a:r>
+              <a:rPr lang="ru-RU" altLang="ru-RU" dirty="0"/>
+              <a:t>: </a:t>
+            </a:r>
+            <a:r>
+              <a:rPr lang="ru-RU" altLang="ru-RU" dirty="0" smtClean="0"/>
+              <a:t> </a:t>
+            </a:r>
+            <a:r>
+              <a:rPr lang="ru-RU" altLang="ru-RU" dirty="0"/>
+              <a:t>доступны на момент прогнозирования. </a:t>
+            </a:r>
+            <a:endParaRPr lang="ru-RU" altLang="ru-RU" dirty="0" smtClean="0"/>
+          </a:p>
+          <a:p>
+            <a:pPr lvl="1" eaLnBrk="0" fontAlgn="base" hangingPunct="0">
+              <a:lnSpc>
+                <a:spcPct val="120000"/>
+              </a:lnSpc>
+              <a:spcBef>
+                <a:spcPct val="0"/>
+              </a:spcBef>
+              <a:spcAft>
+                <a:spcPct val="0"/>
+              </a:spcAft>
+            </a:pPr>
+            <a:r>
+              <a:rPr lang="ru-RU" altLang="ru-RU" dirty="0" smtClean="0"/>
+              <a:t>Напр. календарные </a:t>
+            </a:r>
+            <a:r>
+              <a:rPr lang="ru-RU" altLang="ru-RU" dirty="0"/>
+              <a:t>переменные, известные события, </a:t>
+            </a:r>
+            <a:r>
+              <a:rPr lang="ru-RU" altLang="ru-RU" dirty="0" smtClean="0"/>
+              <a:t>(напр. </a:t>
+            </a:r>
+            <a:r>
+              <a:rPr lang="ru-RU" altLang="ru-RU" dirty="0"/>
+              <a:t>запланированные </a:t>
+            </a:r>
+            <a:r>
+              <a:rPr lang="ru-RU" altLang="ru-RU" dirty="0" smtClean="0"/>
+              <a:t>акции), прогнозы факторов (напр. прогноз погоды для прогноза электропотребления на 1 день).</a:t>
+            </a:r>
+            <a:endParaRPr lang="en-US" altLang="ru-RU" dirty="0" smtClean="0"/>
+          </a:p>
+          <a:p>
+            <a:pPr lvl="1" eaLnBrk="0" fontAlgn="base" hangingPunct="0">
+              <a:lnSpc>
+                <a:spcPct val="120000"/>
+              </a:lnSpc>
+              <a:spcBef>
+                <a:spcPct val="0"/>
+              </a:spcBef>
+              <a:spcAft>
+                <a:spcPct val="0"/>
+              </a:spcAft>
+            </a:pPr>
+            <a:r>
+              <a:rPr lang="ru-RU" altLang="ru-RU" dirty="0" smtClean="0"/>
+              <a:t>Важно чтобы переменная всегда в будущем была известна и не несла </a:t>
+            </a:r>
+            <a:r>
+              <a:rPr lang="en-US" altLang="ru-RU" dirty="0" smtClean="0"/>
+              <a:t>data leaks</a:t>
+            </a:r>
+          </a:p>
+          <a:p>
+            <a:pPr lvl="1" eaLnBrk="0" fontAlgn="base" hangingPunct="0">
+              <a:lnSpc>
+                <a:spcPct val="120000"/>
+              </a:lnSpc>
+              <a:spcBef>
+                <a:spcPct val="0"/>
+              </a:spcBef>
+              <a:spcAft>
+                <a:spcPct val="0"/>
+              </a:spcAft>
+            </a:pPr>
+            <a:r>
+              <a:rPr lang="ru-RU" altLang="ru-RU" dirty="0" smtClean="0"/>
+              <a:t>Для проверки </a:t>
+            </a:r>
+          </a:p>
+          <a:p>
+            <a:pPr lvl="2" eaLnBrk="0" fontAlgn="base" hangingPunct="0">
+              <a:lnSpc>
+                <a:spcPct val="120000"/>
+              </a:lnSpc>
+              <a:spcBef>
+                <a:spcPct val="0"/>
+              </a:spcBef>
+              <a:spcAft>
+                <a:spcPct val="0"/>
+              </a:spcAft>
+            </a:pPr>
+            <a:r>
+              <a:rPr lang="ru-RU" altLang="ru-RU" dirty="0" smtClean="0"/>
+              <a:t>обратный тест на казуальность (фактор на ВР) </a:t>
+            </a:r>
+          </a:p>
+          <a:p>
+            <a:pPr lvl="2" eaLnBrk="0" fontAlgn="base" hangingPunct="0">
+              <a:lnSpc>
+                <a:spcPct val="120000"/>
+              </a:lnSpc>
+              <a:spcBef>
+                <a:spcPct val="0"/>
+              </a:spcBef>
+              <a:spcAft>
+                <a:spcPct val="0"/>
+              </a:spcAft>
+            </a:pPr>
+            <a:r>
+              <a:rPr lang="en-US" dirty="0"/>
+              <a:t>Lead-Lag </a:t>
+            </a:r>
+            <a:r>
+              <a:rPr lang="en-US" dirty="0" smtClean="0"/>
+              <a:t>Analysis</a:t>
+            </a:r>
+            <a:r>
+              <a:rPr lang="ru-RU" dirty="0" smtClean="0"/>
+              <a:t> – на сколько далеко нужно сместить ВР чтобы возникла казуальность?</a:t>
+            </a:r>
+            <a:endParaRPr lang="en-US" b="1" dirty="0"/>
+          </a:p>
+          <a:p>
+            <a:pPr lvl="1" eaLnBrk="0" fontAlgn="base" hangingPunct="0">
+              <a:lnSpc>
+                <a:spcPct val="120000"/>
+              </a:lnSpc>
+              <a:spcBef>
+                <a:spcPct val="0"/>
+              </a:spcBef>
+              <a:spcAft>
+                <a:spcPct val="0"/>
+              </a:spcAft>
+            </a:pPr>
+            <a:endParaRPr lang="ru-RU" altLang="ru-RU" dirty="0"/>
+          </a:p>
+          <a:p>
+            <a:pPr marL="0" lvl="0" indent="0" eaLnBrk="0" fontAlgn="base" hangingPunct="0">
+              <a:lnSpc>
+                <a:spcPct val="100000"/>
+              </a:lnSpc>
+              <a:spcBef>
+                <a:spcPct val="0"/>
+              </a:spcBef>
+              <a:spcAft>
+                <a:spcPct val="0"/>
+              </a:spcAft>
+              <a:buNone/>
+            </a:pPr>
+            <a:endParaRPr kumimoji="0" lang="ru-RU" altLang="ru-RU" sz="5400" b="0" i="0" u="none" strike="noStrike" cap="none" normalizeH="0" baseline="0" dirty="0" smtClean="0">
+              <a:ln>
+                <a:noFill/>
+              </a:ln>
+              <a:solidFill>
+                <a:schemeClr val="tx1"/>
+              </a:solidFill>
+              <a:effectLst/>
+            </a:endParaRPr>
+          </a:p>
+          <a:p>
+            <a:endParaRPr lang="ru-RU" dirty="0"/>
+          </a:p>
+        </p:txBody>
+      </p:sp>
+    </p:spTree>
+    <p:extLst>
+      <p:ext uri="{BB962C8B-B14F-4D97-AF65-F5344CB8AC3E}">
+        <p14:creationId xmlns:p14="http://schemas.microsoft.com/office/powerpoint/2010/main" val="1608365178"/>
+      </p:ext>
+    </p:extLst>
+  </p:cSld>
+  <p:clrMapOvr>
+    <a:masterClrMapping/>
+  </p:clrMapOvr>
+  <p:timing>
+    <p:tnLst>
+      <p:par>
+        <p:cTn id="1" dur="indefinite" restart="never" nodeType="tmRoot"/>
+      </p:par>
+    </p:tnLst>
+  </p:timing>
+</p:sld>
+</file>
+
+<file path=ppt/slides/slide13.xml><?xml version="1.0" encoding="utf-8"?>
+<p:sld xmlns:a="http://schemas.openxmlformats.org/drawingml/2006/main" xmlns:r="http://schemas.openxmlformats.org/officeDocument/2006/relationships" xmlns:p="http://schemas.openxmlformats.org/presentationml/2006/main">
+  <p:cSld>
+    <p:spTree>
+      <p:nvGrpSpPr>
+        <p:cNvPr id="1" name=""/>
+        <p:cNvGrpSpPr/>
+        <p:nvPr/>
+      </p:nvGrpSpPr>
+      <p:grpSpPr>
+        <a:xfrm>
+          <a:off x="0" y="0"/>
+          <a:ext cx="0" cy="0"/>
+          <a:chOff x="0" y="0"/>
+          <a:chExt cx="0" cy="0"/>
+        </a:xfrm>
+      </p:grpSpPr>
+      <p:sp>
+        <p:nvSpPr>
+          <p:cNvPr id="2" name="Заголовок 1"/>
+          <p:cNvSpPr>
+            <a:spLocks noGrp="1"/>
+          </p:cNvSpPr>
+          <p:nvPr>
+            <p:ph type="title"/>
+          </p:nvPr>
+        </p:nvSpPr>
+        <p:spPr>
+          <a:xfrm>
             <a:off x="228600" y="266721"/>
             <a:ext cx="11134725" cy="863600"/>
           </a:xfrm>
@@ -4780,7 +5198,6 @@
               <a:rPr lang="ru-RU" altLang="ru-RU" dirty="0"/>
               <a:t>Проверяйте факторы на интерпретируемость</a:t>
             </a:r>
-            <a:endParaRPr lang="ru-RU" altLang="ru-RU" dirty="0"/>
           </a:p>
           <a:p>
             <a:endParaRPr lang="ru-RU" dirty="0"/>
@@ -4800,7 +5217,7 @@
 </p:sld>
 </file>
 
-<file path=ppt/slides/slide13.xml><?xml version="1.0" encoding="utf-8"?>
+<file path=ppt/slides/slide14.xml><?xml version="1.0" encoding="utf-8"?>
 <p:sld xmlns:a="http://schemas.openxmlformats.org/drawingml/2006/main" xmlns:r="http://schemas.openxmlformats.org/officeDocument/2006/relationships" xmlns:p="http://schemas.openxmlformats.org/presentationml/2006/main">
   <p:cSld>
     <p:spTree>
@@ -6916,6 +7333,34 @@
           </a:extLst>
         </p:spPr>
       </p:pic>
+      <p:sp>
+        <p:nvSpPr>
+          <p:cNvPr id="4" name="Прямоугольник 3"/>
+          <p:cNvSpPr/>
+          <p:nvPr/>
+        </p:nvSpPr>
+        <p:spPr>
+          <a:xfrm>
+            <a:off x="180975" y="6541754"/>
+            <a:ext cx="6096000" cy="276999"/>
+          </a:xfrm>
+          <a:prstGeom prst="rect">
+            <a:avLst/>
+          </a:prstGeom>
+        </p:spPr>
+        <p:txBody>
+          <a:bodyPr>
+            <a:spAutoFit/>
+          </a:bodyPr>
+          <a:lstStyle/>
+          <a:p>
+            <a:r>
+              <a:rPr lang="ru-RU" sz="1200" dirty="0"/>
+              <a:t>https://skforecast.org/0.16.0/introduction-forecasting/introduction-forecasting</a:t>
+            </a:r>
+          </a:p>
+        </p:txBody>
+      </p:sp>
     </p:spTree>
     <p:extLst>
       <p:ext uri="{BB962C8B-B14F-4D97-AF65-F5344CB8AC3E}">
@@ -6956,6 +7401,182 @@
             <p:ph type="title"/>
           </p:nvPr>
         </p:nvSpPr>
+        <p:spPr/>
+        <p:txBody>
+          <a:bodyPr/>
+          <a:lstStyle/>
+          <a:p>
+            <a:endParaRPr lang="ru-RU"/>
+          </a:p>
+        </p:txBody>
+      </p:sp>
+      <p:sp>
+        <p:nvSpPr>
+          <p:cNvPr id="3" name="Объект 2"/>
+          <p:cNvSpPr>
+            <a:spLocks noGrp="1"/>
+          </p:cNvSpPr>
+          <p:nvPr>
+            <p:ph idx="1"/>
+          </p:nvPr>
+        </p:nvSpPr>
+        <p:spPr/>
+        <p:txBody>
+          <a:bodyPr/>
+          <a:lstStyle/>
+          <a:p>
+            <a:endParaRPr lang="ru-RU"/>
+          </a:p>
+        </p:txBody>
+      </p:sp>
+      <p:pic>
+        <p:nvPicPr>
+          <p:cNvPr id="1026" name="Picture 2" descr="https://skforecast.org/0.8.0/img/forecaster_multivariate_train_matrix_diagram.png"/>
+          <p:cNvPicPr>
+            <a:picLocks noChangeAspect="1" noChangeArrowheads="1"/>
+          </p:cNvPicPr>
+          <p:nvPr/>
+        </p:nvPicPr>
+        <p:blipFill rotWithShape="1">
+          <a:blip r:embed="rId2">
+            <a:extLst>
+              <a:ext uri="{28A0092B-C50C-407E-A947-70E740481C1C}">
+                <a14:useLocalDpi xmlns:a14="http://schemas.microsoft.com/office/drawing/2010/main" val="0"/>
+              </a:ext>
+            </a:extLst>
+          </a:blip>
+          <a:srcRect t="11213" r="3230" b="9567"/>
+          <a:stretch/>
+        </p:blipFill>
+        <p:spPr bwMode="auto">
+          <a:xfrm>
+            <a:off x="3438525" y="3458884"/>
+            <a:ext cx="8620125" cy="3224491"/>
+          </a:xfrm>
+          <a:prstGeom prst="rect">
+            <a:avLst/>
+          </a:prstGeom>
+          <a:noFill/>
+          <a:extLst>
+            <a:ext uri="{909E8E84-426E-40DD-AFC4-6F175D3DCCD1}">
+              <a14:hiddenFill xmlns:a14="http://schemas.microsoft.com/office/drawing/2010/main">
+                <a:solidFill>
+                  <a:srgbClr val="FFFFFF"/>
+                </a:solidFill>
+              </a14:hiddenFill>
+            </a:ext>
+          </a:extLst>
+        </p:spPr>
+      </p:pic>
+      <p:sp>
+        <p:nvSpPr>
+          <p:cNvPr id="4" name="Прямоугольник 3"/>
+          <p:cNvSpPr/>
+          <p:nvPr/>
+        </p:nvSpPr>
+        <p:spPr>
+          <a:xfrm>
+            <a:off x="571500" y="6544875"/>
+            <a:ext cx="6096000" cy="276999"/>
+          </a:xfrm>
+          <a:prstGeom prst="rect">
+            <a:avLst/>
+          </a:prstGeom>
+        </p:spPr>
+        <p:txBody>
+          <a:bodyPr>
+            <a:spAutoFit/>
+          </a:bodyPr>
+          <a:lstStyle/>
+          <a:p>
+            <a:r>
+              <a:rPr lang="ru-RU" sz="1200" dirty="0"/>
+              <a:t>https://skforecast.org/0.16.0/user_guides/independent-multi-time-series-forecasting.html</a:t>
+            </a:r>
+          </a:p>
+        </p:txBody>
+      </p:sp>
+      <p:pic>
+        <p:nvPicPr>
+          <p:cNvPr id="1028" name="Picture 4" descr="No description has been provided for this image"/>
+          <p:cNvPicPr>
+            <a:picLocks noChangeAspect="1" noChangeArrowheads="1"/>
+          </p:cNvPicPr>
+          <p:nvPr/>
+        </p:nvPicPr>
+        <p:blipFill>
+          <a:blip r:embed="rId3" cstate="print">
+            <a:extLst>
+              <a:ext uri="{28A0092B-C50C-407E-A947-70E740481C1C}">
+                <a14:useLocalDpi xmlns:a14="http://schemas.microsoft.com/office/drawing/2010/main" val="0"/>
+              </a:ext>
+            </a:extLst>
+          </a:blip>
+          <a:srcRect/>
+          <a:stretch>
+            <a:fillRect/>
+          </a:stretch>
+        </p:blipFill>
+        <p:spPr bwMode="auto">
+          <a:xfrm>
+            <a:off x="438150" y="908123"/>
+            <a:ext cx="8070850" cy="3093171"/>
+          </a:xfrm>
+          <a:prstGeom prst="rect">
+            <a:avLst/>
+          </a:prstGeom>
+          <a:noFill/>
+          <a:extLst>
+            <a:ext uri="{909E8E84-426E-40DD-AFC4-6F175D3DCCD1}">
+              <a14:hiddenFill xmlns:a14="http://schemas.microsoft.com/office/drawing/2010/main">
+                <a:solidFill>
+                  <a:srgbClr val="FFFFFF"/>
+                </a:solidFill>
+              </a14:hiddenFill>
+            </a:ext>
+          </a:extLst>
+        </p:spPr>
+      </p:pic>
+    </p:spTree>
+    <p:extLst>
+      <p:ext uri="{BB962C8B-B14F-4D97-AF65-F5344CB8AC3E}">
+        <p14:creationId xmlns:p14="http://schemas.microsoft.com/office/powerpoint/2010/main" val="1389010208"/>
+      </p:ext>
+    </p:extLst>
+  </p:cSld>
+  <p:clrMapOvr>
+    <a:masterClrMapping/>
+  </p:clrMapOvr>
+</p:sld>
+</file>
+
+<file path=ppt/slides/slide7.xml><?xml version="1.0" encoding="utf-8"?>
+<p:sld xmlns:a="http://schemas.openxmlformats.org/drawingml/2006/main" xmlns:r="http://schemas.openxmlformats.org/officeDocument/2006/relationships" xmlns:p="http://schemas.openxmlformats.org/presentationml/2006/main">
+  <p:cSld>
+    <p:spTree>
+      <p:nvGrpSpPr>
+        <p:cNvPr id="1" name=""/>
+        <p:cNvGrpSpPr/>
+        <p:nvPr/>
+      </p:nvGrpSpPr>
+      <p:grpSpPr>
+        <a:xfrm>
+          <a:off x="0" y="0"/>
+          <a:ext cx="0" cy="0"/>
+          <a:chOff x="0" y="0"/>
+          <a:chExt cx="0" cy="0"/>
+        </a:xfrm>
+      </p:grpSpPr>
+      <p:sp>
+        <p:nvSpPr>
+          <p:cNvPr id="2" name="Заголовок 1"/>
+          <p:cNvSpPr>
+            <a:spLocks noGrp="1"/>
+          </p:cNvSpPr>
+          <p:nvPr>
+            <p:ph type="title"/>
+          </p:nvPr>
+        </p:nvSpPr>
         <p:spPr>
           <a:xfrm>
             <a:off x="125505" y="320303"/>
@@ -6998,11 +7619,7 @@
           <a:p>
             <a:r>
               <a:rPr lang="ru-RU" dirty="0" smtClean="0"/>
-              <a:t>Лаги </a:t>
-            </a:r>
-            <a:r>
-              <a:rPr lang="ru-RU" dirty="0" smtClean="0"/>
-              <a:t>временных рядов</a:t>
+              <a:t>Лаги временных рядов</a:t>
             </a:r>
           </a:p>
           <a:p>
@@ -7118,7 +7735,6 @@
               <a:rPr lang="ru-RU" dirty="0" smtClean="0"/>
               <a:t>Экзогенные факторы, объясняющие (в домене) целевую переменную</a:t>
             </a:r>
-            <a:endParaRPr lang="ru-RU" dirty="0" smtClean="0"/>
           </a:p>
           <a:p>
             <a:r>
@@ -7218,7 +7834,7 @@
 </p:sld>
 </file>
 
-<file path=ppt/slides/slide7.xml><?xml version="1.0" encoding="utf-8"?>
+<file path=ppt/slides/slide8.xml><?xml version="1.0" encoding="utf-8"?>
 <p:sld xmlns:a="http://schemas.openxmlformats.org/drawingml/2006/main" xmlns:r="http://schemas.openxmlformats.org/officeDocument/2006/relationships" xmlns:p="http://schemas.openxmlformats.org/presentationml/2006/main">
   <p:cSld>
     <p:spTree>
@@ -7820,7 +8436,7 @@
 </p:sld>
 </file>
 
-<file path=ppt/slides/slide8.xml><?xml version="1.0" encoding="utf-8"?>
+<file path=ppt/slides/slide9.xml><?xml version="1.0" encoding="utf-8"?>
 <p:sld xmlns:a="http://schemas.openxmlformats.org/drawingml/2006/main" xmlns:r="http://schemas.openxmlformats.org/officeDocument/2006/relationships" xmlns:p="http://schemas.openxmlformats.org/presentationml/2006/main">
   <p:cSld>
     <p:spTree>
@@ -8036,476 +8652,6 @@
     <p:extLst>
       <p:ext uri="{BB962C8B-B14F-4D97-AF65-F5344CB8AC3E}">
         <p14:creationId xmlns:p14="http://schemas.microsoft.com/office/powerpoint/2010/main" val="628570510"/>
-      </p:ext>
-    </p:extLst>
-  </p:cSld>
-  <p:clrMapOvr>
-    <a:masterClrMapping/>
-  </p:clrMapOvr>
-  <p:timing>
-    <p:tnLst>
-      <p:par>
-        <p:cTn id="1" dur="indefinite" restart="never" nodeType="tmRoot"/>
-      </p:par>
-    </p:tnLst>
-  </p:timing>
-</p:sld>
-</file>
-
-<file path=ppt/slides/slide9.xml><?xml version="1.0" encoding="utf-8"?>
-<p:sld xmlns:a="http://schemas.openxmlformats.org/drawingml/2006/main" xmlns:r="http://schemas.openxmlformats.org/officeDocument/2006/relationships" xmlns:p="http://schemas.openxmlformats.org/presentationml/2006/main">
-  <p:cSld>
-    <p:spTree>
-      <p:nvGrpSpPr>
-        <p:cNvPr id="1" name=""/>
-        <p:cNvGrpSpPr/>
-        <p:nvPr/>
-      </p:nvGrpSpPr>
-      <p:grpSpPr>
-        <a:xfrm>
-          <a:off x="0" y="0"/>
-          <a:ext cx="0" cy="0"/>
-          <a:chOff x="0" y="0"/>
-          <a:chExt cx="0" cy="0"/>
-        </a:xfrm>
-      </p:grpSpPr>
-      <p:sp>
-        <p:nvSpPr>
-          <p:cNvPr id="2" name="Заголовок 1"/>
-          <p:cNvSpPr>
-            <a:spLocks noGrp="1"/>
-          </p:cNvSpPr>
-          <p:nvPr>
-            <p:ph type="title"/>
-          </p:nvPr>
-        </p:nvSpPr>
-        <p:spPr>
-          <a:xfrm>
-            <a:off x="215712" y="174625"/>
-            <a:ext cx="11147613" cy="898899"/>
-          </a:xfrm>
-        </p:spPr>
-        <p:txBody>
-          <a:bodyPr/>
-          <a:lstStyle/>
-          <a:p>
-            <a:pPr lvl="0" eaLnBrk="0" fontAlgn="base" hangingPunct="0">
-              <a:lnSpc>
-                <a:spcPct val="100000"/>
-              </a:lnSpc>
-              <a:spcBef>
-                <a:spcPts val="300"/>
-              </a:spcBef>
-              <a:spcAft>
-                <a:spcPct val="0"/>
-              </a:spcAft>
-            </a:pPr>
-            <a:r>
-              <a:rPr lang="ru-RU" altLang="ru-RU" b="1" dirty="0"/>
-              <a:t>Проблемы выбора окна Редукции</a:t>
-            </a:r>
-            <a:endParaRPr lang="ru-RU" altLang="ru-RU" b="1" dirty="0"/>
-          </a:p>
-        </p:txBody>
-      </p:sp>
-      <p:sp>
-        <p:nvSpPr>
-          <p:cNvPr id="3" name="Объект 2"/>
-          <p:cNvSpPr>
-            <a:spLocks noGrp="1"/>
-          </p:cNvSpPr>
-          <p:nvPr>
-            <p:ph idx="1"/>
-          </p:nvPr>
-        </p:nvSpPr>
-        <p:spPr>
-          <a:xfrm>
-            <a:off x="215712" y="940174"/>
-            <a:ext cx="11985813" cy="5154704"/>
-          </a:xfrm>
-        </p:spPr>
-        <p:txBody>
-          <a:bodyPr>
-            <a:noAutofit/>
-          </a:bodyPr>
-          <a:lstStyle/>
-          <a:p>
-            <a:pPr marL="0" indent="0" eaLnBrk="0" fontAlgn="base" hangingPunct="0">
-              <a:lnSpc>
-                <a:spcPct val="100000"/>
-              </a:lnSpc>
-              <a:spcBef>
-                <a:spcPts val="300"/>
-              </a:spcBef>
-              <a:spcAft>
-                <a:spcPct val="0"/>
-              </a:spcAft>
-              <a:buNone/>
-            </a:pPr>
-            <a:r>
-              <a:rPr lang="ru-RU" altLang="ru-RU" sz="2300" dirty="0" smtClean="0"/>
-              <a:t>Выбор </a:t>
-            </a:r>
-            <a:r>
-              <a:rPr lang="ru-RU" altLang="ru-RU" sz="2300" dirty="0" smtClean="0"/>
-              <a:t>слишком короткого или слишком длинного окна может привести к</a:t>
-            </a:r>
-            <a:r>
-              <a:rPr lang="ru-RU" altLang="ru-RU" sz="2300" dirty="0"/>
-              <a:t> </a:t>
-            </a:r>
-            <a:r>
-              <a:rPr lang="ru-RU" altLang="ru-RU" sz="2300" dirty="0" smtClean="0"/>
-              <a:t/>
-            </a:r>
-            <a:br>
-              <a:rPr lang="ru-RU" altLang="ru-RU" sz="2300" dirty="0" smtClean="0"/>
-            </a:br>
-            <a:r>
-              <a:rPr lang="ru-RU" altLang="ru-RU" sz="2300" dirty="0" smtClean="0">
-                <a:solidFill>
-                  <a:srgbClr val="0D47A1"/>
-                </a:solidFill>
-                <a:hlinkClick r:id="rId2"/>
-              </a:rPr>
-              <a:t>“</a:t>
-            </a:r>
-            <a:r>
-              <a:rPr lang="ru-RU" altLang="ru-RU" sz="2300" dirty="0">
-                <a:solidFill>
-                  <a:srgbClr val="0D47A1"/>
-                </a:solidFill>
-                <a:hlinkClick r:id="rId2"/>
-              </a:rPr>
-              <a:t>p-</a:t>
-            </a:r>
-            <a:r>
-              <a:rPr lang="ru-RU" altLang="ru-RU" sz="2300" dirty="0" err="1">
-                <a:solidFill>
-                  <a:srgbClr val="0D47A1"/>
-                </a:solidFill>
-                <a:hlinkClick r:id="rId2"/>
-              </a:rPr>
-              <a:t>value</a:t>
-            </a:r>
-            <a:r>
-              <a:rPr lang="ru-RU" altLang="ru-RU" sz="2300" dirty="0">
-                <a:solidFill>
-                  <a:srgbClr val="0D47A1"/>
-                </a:solidFill>
-                <a:hlinkClick r:id="rId2"/>
-              </a:rPr>
-              <a:t> </a:t>
-            </a:r>
-            <a:r>
-              <a:rPr lang="ru-RU" altLang="ru-RU" sz="2300" dirty="0" err="1">
-                <a:solidFill>
-                  <a:srgbClr val="0D47A1"/>
-                </a:solidFill>
-                <a:hlinkClick r:id="rId2"/>
-              </a:rPr>
-              <a:t>hacking</a:t>
-            </a:r>
-            <a:r>
-              <a:rPr lang="ru-RU" altLang="ru-RU" sz="2300" dirty="0">
-                <a:solidFill>
-                  <a:srgbClr val="0D47A1"/>
-                </a:solidFill>
-                <a:hlinkClick r:id="rId2"/>
-              </a:rPr>
-              <a:t>”</a:t>
-            </a:r>
-            <a:r>
-              <a:rPr lang="ru-RU" altLang="ru-RU" sz="2300" dirty="0"/>
-              <a:t> – то есть утечке информации (или появление ложных зависимостей). </a:t>
-            </a:r>
-            <a:endParaRPr lang="en-US" altLang="ru-RU" sz="2300" dirty="0" smtClean="0"/>
-          </a:p>
-          <a:p>
-            <a:pPr marL="0" indent="0" eaLnBrk="0" fontAlgn="base" hangingPunct="0">
-              <a:lnSpc>
-                <a:spcPct val="100000"/>
-              </a:lnSpc>
-              <a:spcBef>
-                <a:spcPts val="300"/>
-              </a:spcBef>
-              <a:spcAft>
-                <a:spcPct val="0"/>
-              </a:spcAft>
-              <a:buNone/>
-            </a:pPr>
-            <a:r>
-              <a:rPr lang="ru-RU" altLang="ru-RU" sz="2300" dirty="0" smtClean="0"/>
-              <a:t>Для </a:t>
-            </a:r>
-            <a:r>
-              <a:rPr lang="ru-RU" altLang="ru-RU" sz="2300" dirty="0" err="1" smtClean="0"/>
-              <a:t>преотвращения</a:t>
-            </a:r>
-            <a:r>
-              <a:rPr lang="ru-RU" altLang="ru-RU" sz="2300" dirty="0" smtClean="0"/>
-              <a:t>:</a:t>
-            </a:r>
-            <a:endParaRPr lang="ru-RU" altLang="ru-RU" sz="2300" dirty="0" smtClean="0"/>
-          </a:p>
-          <a:p>
-            <a:pPr lvl="1" eaLnBrk="0" fontAlgn="base" hangingPunct="0">
-              <a:lnSpc>
-                <a:spcPct val="100000"/>
-              </a:lnSpc>
-              <a:spcBef>
-                <a:spcPts val="300"/>
-              </a:spcBef>
-              <a:spcAft>
-                <a:spcPct val="0"/>
-              </a:spcAft>
-            </a:pPr>
-            <a:r>
-              <a:rPr lang="en-US" altLang="ru-RU" sz="2300" dirty="0" smtClean="0"/>
-              <a:t>Walking forward </a:t>
-            </a:r>
-            <a:r>
-              <a:rPr lang="ru-RU" altLang="ru-RU" sz="2300" dirty="0" smtClean="0"/>
-              <a:t>кросс </a:t>
-            </a:r>
-            <a:r>
-              <a:rPr lang="ru-RU" altLang="ru-RU" sz="2300" dirty="0" err="1" smtClean="0"/>
-              <a:t>валидация</a:t>
-            </a:r>
-            <a:r>
-              <a:rPr lang="en-US" altLang="ru-RU" sz="2300" dirty="0" smtClean="0"/>
-              <a:t> </a:t>
-            </a:r>
-            <a:r>
-              <a:rPr lang="ru-RU" altLang="ru-RU" sz="2300" dirty="0" smtClean="0"/>
-              <a:t>и </a:t>
-            </a:r>
-            <a:r>
-              <a:rPr lang="en-US" altLang="ru-RU" sz="2300" dirty="0" err="1" smtClean="0"/>
-              <a:t>backtesting</a:t>
-            </a:r>
-            <a:r>
-              <a:rPr lang="ru-RU" altLang="ru-RU" sz="2300" dirty="0" smtClean="0"/>
-              <a:t>. </a:t>
-            </a:r>
-            <a:endParaRPr lang="ru-RU" altLang="ru-RU" sz="2300" dirty="0" smtClean="0"/>
-          </a:p>
-          <a:p>
-            <a:pPr lvl="1" eaLnBrk="0" fontAlgn="base" hangingPunct="0">
-              <a:lnSpc>
-                <a:spcPct val="100000"/>
-              </a:lnSpc>
-              <a:spcBef>
-                <a:spcPts val="300"/>
-              </a:spcBef>
-              <a:spcAft>
-                <a:spcPct val="0"/>
-              </a:spcAft>
-            </a:pPr>
-            <a:r>
-              <a:rPr lang="ru-RU" altLang="ru-RU" sz="2300" dirty="0" smtClean="0">
-                <a:solidFill>
-                  <a:srgbClr val="0D47A1"/>
-                </a:solidFill>
-              </a:rPr>
-              <a:t>Тесты</a:t>
-            </a:r>
-            <a:r>
-              <a:rPr lang="ru-RU" altLang="ru-RU" sz="2300" dirty="0"/>
-              <a:t> на ложные корреляции. </a:t>
-            </a:r>
-            <a:endParaRPr lang="ru-RU" altLang="ru-RU" sz="2300" dirty="0" smtClean="0"/>
-          </a:p>
-          <a:p>
-            <a:pPr lvl="2" eaLnBrk="0" fontAlgn="base" hangingPunct="0">
-              <a:lnSpc>
-                <a:spcPct val="100000"/>
-              </a:lnSpc>
-              <a:spcBef>
-                <a:spcPts val="300"/>
-              </a:spcBef>
-              <a:spcAft>
-                <a:spcPct val="0"/>
-              </a:spcAft>
-            </a:pPr>
-            <a:r>
-              <a:rPr lang="ru-RU" altLang="ru-RU" dirty="0" smtClean="0"/>
-              <a:t>Напр</a:t>
-            </a:r>
-            <a:r>
-              <a:rPr lang="ru-RU" altLang="ru-RU" dirty="0" smtClean="0"/>
-              <a:t>. </a:t>
-            </a:r>
-            <a:r>
-              <a:rPr lang="ru-RU" altLang="ru-RU" dirty="0" err="1"/>
-              <a:t>Bonferonni</a:t>
-            </a:r>
-            <a:r>
-              <a:rPr lang="ru-RU" altLang="ru-RU" dirty="0"/>
-              <a:t> </a:t>
-            </a:r>
-            <a:r>
-              <a:rPr lang="ru-RU" altLang="ru-RU" dirty="0" err="1"/>
-              <a:t>correction</a:t>
-            </a:r>
-            <a:r>
-              <a:rPr lang="ru-RU" altLang="ru-RU" dirty="0"/>
-              <a:t>, </a:t>
-            </a:r>
-            <a:r>
-              <a:rPr lang="ru-RU" altLang="ru-RU" dirty="0" err="1"/>
-              <a:t>Scheffé's</a:t>
-            </a:r>
-            <a:r>
-              <a:rPr lang="ru-RU" altLang="ru-RU" dirty="0"/>
-              <a:t> </a:t>
-            </a:r>
-            <a:r>
-              <a:rPr lang="ru-RU" altLang="ru-RU" dirty="0" err="1"/>
-              <a:t>method</a:t>
-            </a:r>
-            <a:r>
-              <a:rPr lang="ru-RU" altLang="ru-RU" dirty="0"/>
-              <a:t> и </a:t>
-            </a:r>
-            <a:r>
-              <a:rPr lang="ru-RU" altLang="ru-RU" dirty="0" err="1"/>
-              <a:t>false</a:t>
-            </a:r>
-            <a:r>
-              <a:rPr lang="ru-RU" altLang="ru-RU" dirty="0"/>
-              <a:t> </a:t>
-            </a:r>
-            <a:r>
-              <a:rPr lang="ru-RU" altLang="ru-RU" dirty="0" err="1"/>
-              <a:t>discovery</a:t>
-            </a:r>
-            <a:r>
-              <a:rPr lang="ru-RU" altLang="ru-RU" dirty="0"/>
-              <a:t> </a:t>
-            </a:r>
-            <a:r>
-              <a:rPr lang="ru-RU" altLang="ru-RU" dirty="0" err="1"/>
-              <a:t>rate</a:t>
-            </a:r>
-            <a:r>
-              <a:rPr lang="ru-RU" altLang="ru-RU" dirty="0"/>
-              <a:t>.</a:t>
-            </a:r>
-          </a:p>
-          <a:p>
-            <a:pPr eaLnBrk="0" fontAlgn="base" hangingPunct="0">
-              <a:lnSpc>
-                <a:spcPct val="100000"/>
-              </a:lnSpc>
-              <a:spcBef>
-                <a:spcPts val="300"/>
-              </a:spcBef>
-              <a:spcAft>
-                <a:spcPct val="0"/>
-              </a:spcAft>
-            </a:pPr>
-            <a:r>
-              <a:rPr lang="ru-RU" altLang="ru-RU" sz="2300" dirty="0" smtClean="0"/>
-              <a:t>При добавлении признаков в окно прогноза нужно смотреть чтобы </a:t>
-            </a:r>
-            <a:r>
-              <a:rPr lang="ru-RU" altLang="ru-RU" sz="2300" dirty="0" err="1" smtClean="0"/>
-              <a:t>небыло</a:t>
-            </a:r>
-            <a:r>
-              <a:rPr lang="ru-RU" altLang="ru-RU" sz="2300" dirty="0" smtClean="0"/>
-              <a:t> утечки данных – признаки не должны опережать временную метку предсказываемого значения.</a:t>
-            </a:r>
-          </a:p>
-          <a:p>
-            <a:pPr eaLnBrk="0" fontAlgn="base" hangingPunct="0">
-              <a:lnSpc>
-                <a:spcPct val="100000"/>
-              </a:lnSpc>
-              <a:spcBef>
-                <a:spcPts val="300"/>
-              </a:spcBef>
-              <a:spcAft>
-                <a:spcPct val="0"/>
-              </a:spcAft>
-            </a:pPr>
-            <a:r>
-              <a:rPr lang="ru-RU" altLang="ru-RU" sz="2300" dirty="0" smtClean="0"/>
-              <a:t>Если </a:t>
-            </a:r>
-            <a:r>
-              <a:rPr lang="ru-RU" altLang="ru-RU" sz="2300" dirty="0"/>
-              <a:t>метка прогноза преобразована, часто забывают сделать обратное преобразование</a:t>
-            </a:r>
-            <a:r>
-              <a:rPr lang="ru-RU" altLang="ru-RU" sz="2100" dirty="0">
-                <a:latin typeface="system-ui"/>
-              </a:rPr>
-              <a:t>.</a:t>
-            </a:r>
-          </a:p>
-          <a:p>
-            <a:pPr marL="0" lvl="0" indent="0" eaLnBrk="0" fontAlgn="base" hangingPunct="0">
-              <a:lnSpc>
-                <a:spcPct val="100000"/>
-              </a:lnSpc>
-              <a:spcBef>
-                <a:spcPts val="300"/>
-              </a:spcBef>
-              <a:spcAft>
-                <a:spcPct val="0"/>
-              </a:spcAft>
-              <a:buNone/>
-            </a:pPr>
-            <a:endParaRPr kumimoji="0" lang="ru-RU" altLang="ru-RU" sz="2100" b="0" i="0" u="none" strike="noStrike" cap="none" normalizeH="0" baseline="0" dirty="0" smtClean="0">
-              <a:ln>
-                <a:noFill/>
-              </a:ln>
-              <a:solidFill>
-                <a:schemeClr val="tx1"/>
-              </a:solidFill>
-              <a:effectLst/>
-              <a:latin typeface="Arial" panose="020B0604020202020204" pitchFamily="34" charset="0"/>
-            </a:endParaRPr>
-          </a:p>
-          <a:p>
-            <a:endParaRPr lang="ru-RU" sz="2100" dirty="0"/>
-          </a:p>
-        </p:txBody>
-      </p:sp>
-      <p:sp>
-        <p:nvSpPr>
-          <p:cNvPr id="4" name="Прямоугольник 3"/>
-          <p:cNvSpPr/>
-          <p:nvPr/>
-        </p:nvSpPr>
-        <p:spPr>
-          <a:xfrm>
-            <a:off x="419379" y="6331148"/>
-            <a:ext cx="4208268" cy="307777"/>
-          </a:xfrm>
-          <a:prstGeom prst="rect">
-            <a:avLst/>
-          </a:prstGeom>
-        </p:spPr>
-        <p:txBody>
-          <a:bodyPr wrap="none">
-            <a:spAutoFit/>
-          </a:bodyPr>
-          <a:lstStyle/>
-          <a:p>
-            <a:r>
-              <a:rPr lang="ru-RU" sz="1400" dirty="0"/>
-              <a:t>https://www.nature.com/articles/d41586-025-01246-1</a:t>
-            </a:r>
-          </a:p>
-        </p:txBody>
-      </p:sp>
-    </p:spTree>
-    <p:extLst>
-      <p:ext uri="{BB962C8B-B14F-4D97-AF65-F5344CB8AC3E}">
-        <p14:creationId xmlns:p14="http://schemas.microsoft.com/office/powerpoint/2010/main" val="3365436130"/>
       </p:ext>
     </p:extLst>
   </p:cSld>

--- a/2025/LEC/05-1 методы машинного обучения для анализа ВР.pptx
+++ b/2025/LEC/05-1 методы машинного обучения для анализа ВР.pptx
@@ -5,23 +5,26 @@
     <p:sldMasterId id="2147483648" r:id="rId1"/>
   </p:sldMasterIdLst>
   <p:notesMasterIdLst>
-    <p:notesMasterId r:id="rId16"/>
+    <p:notesMasterId r:id="rId19"/>
   </p:notesMasterIdLst>
   <p:sldIdLst>
     <p:sldId id="256" r:id="rId2"/>
     <p:sldId id="258" r:id="rId3"/>
     <p:sldId id="260" r:id="rId4"/>
-    <p:sldId id="259" r:id="rId5"/>
-    <p:sldId id="269" r:id="rId6"/>
-    <p:sldId id="274" r:id="rId7"/>
-    <p:sldId id="261" r:id="rId8"/>
-    <p:sldId id="264" r:id="rId9"/>
-    <p:sldId id="263" r:id="rId10"/>
-    <p:sldId id="270" r:id="rId11"/>
-    <p:sldId id="266" r:id="rId12"/>
-    <p:sldId id="271" r:id="rId13"/>
-    <p:sldId id="272" r:id="rId14"/>
-    <p:sldId id="273" r:id="rId15"/>
+    <p:sldId id="275" r:id="rId5"/>
+    <p:sldId id="276" r:id="rId6"/>
+    <p:sldId id="278" r:id="rId7"/>
+    <p:sldId id="259" r:id="rId8"/>
+    <p:sldId id="269" r:id="rId9"/>
+    <p:sldId id="274" r:id="rId10"/>
+    <p:sldId id="261" r:id="rId11"/>
+    <p:sldId id="264" r:id="rId12"/>
+    <p:sldId id="263" r:id="rId13"/>
+    <p:sldId id="270" r:id="rId14"/>
+    <p:sldId id="266" r:id="rId15"/>
+    <p:sldId id="271" r:id="rId16"/>
+    <p:sldId id="272" r:id="rId17"/>
+    <p:sldId id="273" r:id="rId18"/>
   </p:sldIdLst>
   <p:sldSz cx="12192000" cy="6858000"/>
   <p:notesSz cx="6858000" cy="9144000"/>
@@ -236,7 +239,7 @@
           <a:p>
             <a:fld id="{803A9DE4-6CFD-4732-953B-EF950A6B3001}" type="datetimeFigureOut">
               <a:rPr lang="ru-RU" smtClean="0"/>
-              <a:t>05.08.2025</a:t>
+              <a:t>08.08.2025</a:t>
             </a:fld>
             <a:endParaRPr lang="ru-RU"/>
           </a:p>
@@ -300,38 +303,37 @@
           <a:p>
             <a:pPr lvl="0"/>
             <a:r>
-              <a:rPr lang="ru-RU" smtClean="0"/>
+              <a:rPr lang="ru-RU"/>
               <a:t>Образец текста</a:t>
             </a:r>
           </a:p>
           <a:p>
             <a:pPr lvl="1"/>
             <a:r>
-              <a:rPr lang="ru-RU" smtClean="0"/>
+              <a:rPr lang="ru-RU"/>
               <a:t>Второй уровень</a:t>
             </a:r>
           </a:p>
           <a:p>
             <a:pPr lvl="2"/>
             <a:r>
-              <a:rPr lang="ru-RU" smtClean="0"/>
+              <a:rPr lang="ru-RU"/>
               <a:t>Третий уровень</a:t>
             </a:r>
           </a:p>
           <a:p>
             <a:pPr lvl="3"/>
             <a:r>
-              <a:rPr lang="ru-RU" smtClean="0"/>
+              <a:rPr lang="ru-RU"/>
               <a:t>Четвертый уровень</a:t>
             </a:r>
           </a:p>
           <a:p>
             <a:pPr lvl="4"/>
             <a:r>
-              <a:rPr lang="ru-RU" smtClean="0"/>
+              <a:rPr lang="ru-RU"/>
               <a:t>Пятый уровень</a:t>
             </a:r>
-            <a:endParaRPr lang="ru-RU"/>
           </a:p>
         </p:txBody>
       </p:sp>
@@ -549,7 +551,7 @@
           <a:lstStyle/>
           <a:p>
             <a:r>
-              <a:rPr lang="ru-RU" sz="1200" b="1" i="0" kern="1200" dirty="0" smtClean="0">
+              <a:rPr lang="ru-RU" sz="1200" b="1" i="0" kern="1200" dirty="0">
                 <a:solidFill>
                   <a:schemeClr val="tx1"/>
                 </a:solidFill>
@@ -561,7 +563,7 @@
               <a:t>Признаки </a:t>
             </a:r>
             <a:r>
-              <a:rPr lang="ru-RU" sz="1200" b="1" i="0" kern="1200" dirty="0" err="1" smtClean="0">
+              <a:rPr lang="ru-RU" sz="1200" b="1" i="0" kern="1200" dirty="0" err="1">
                 <a:solidFill>
                   <a:schemeClr val="tx1"/>
                 </a:solidFill>
@@ -573,7 +575,7 @@
               <a:t>data</a:t>
             </a:r>
             <a:r>
-              <a:rPr lang="ru-RU" sz="1200" b="1" i="0" kern="1200" dirty="0" smtClean="0">
+              <a:rPr lang="ru-RU" sz="1200" b="1" i="0" kern="1200" dirty="0">
                 <a:solidFill>
                   <a:schemeClr val="tx1"/>
                 </a:solidFill>
@@ -585,7 +587,7 @@
               <a:t> </a:t>
             </a:r>
             <a:r>
-              <a:rPr lang="ru-RU" sz="1200" b="1" i="0" kern="1200" dirty="0" err="1" smtClean="0">
+              <a:rPr lang="ru-RU" sz="1200" b="1" i="0" kern="1200" dirty="0" err="1">
                 <a:solidFill>
                   <a:schemeClr val="tx1"/>
                 </a:solidFill>
@@ -597,7 +599,7 @@
               <a:t>leakage</a:t>
             </a:r>
             <a:r>
-              <a:rPr lang="ru-RU" sz="1200" b="1" i="0" kern="1200" dirty="0" smtClean="0">
+              <a:rPr lang="ru-RU" sz="1200" b="1" i="0" kern="1200" dirty="0">
                 <a:solidFill>
                   <a:schemeClr val="tx1"/>
                 </a:solidFill>
@@ -611,7 +613,7 @@
           </a:p>
           <a:p>
             <a:r>
-              <a:rPr lang="ru-RU" sz="1200" b="0" i="0" kern="1200" dirty="0" smtClean="0">
+              <a:rPr lang="ru-RU" sz="1200" b="0" i="0" kern="1200" dirty="0">
                 <a:solidFill>
                   <a:schemeClr val="tx1"/>
                 </a:solidFill>
@@ -623,7 +625,7 @@
               <a:t>Резко высокая точность на </a:t>
             </a:r>
             <a:r>
-              <a:rPr lang="ru-RU" sz="1200" b="0" i="0" kern="1200" dirty="0" err="1" smtClean="0">
+              <a:rPr lang="ru-RU" sz="1200" b="0" i="0" kern="1200" dirty="0" err="1">
                 <a:solidFill>
                   <a:schemeClr val="tx1"/>
                 </a:solidFill>
@@ -634,7 +636,7 @@
               </a:rPr>
               <a:t>валидации</a:t>
             </a:r>
-            <a:endParaRPr lang="ru-RU" sz="1200" b="0" i="0" kern="1200" dirty="0" smtClean="0">
+            <a:endParaRPr lang="ru-RU" sz="1200" b="0" i="0" kern="1200" dirty="0">
               <a:solidFill>
                 <a:schemeClr val="tx1"/>
               </a:solidFill>
@@ -646,7 +648,7 @@
           </a:p>
           <a:p>
             <a:r>
-              <a:rPr lang="ru-RU" sz="1200" b="0" i="0" kern="1200" dirty="0" smtClean="0">
+              <a:rPr lang="ru-RU" sz="1200" b="0" i="0" kern="1200" dirty="0">
                 <a:solidFill>
                   <a:schemeClr val="tx1"/>
                 </a:solidFill>
@@ -660,7 +662,7 @@
           </a:p>
           <a:p>
             <a:r>
-              <a:rPr lang="ru-RU" sz="1200" b="0" i="0" kern="1200" dirty="0" smtClean="0">
+              <a:rPr lang="ru-RU" sz="1200" b="0" i="0" kern="1200" dirty="0">
                 <a:solidFill>
                   <a:schemeClr val="tx1"/>
                 </a:solidFill>
@@ -694,7 +696,7 @@
           <a:p>
             <a:fld id="{26E69999-DA45-44A1-83D2-44E2B03D187B}" type="slidenum">
               <a:rPr lang="ru-RU" smtClean="0"/>
-              <a:t>12</a:t>
+              <a:t>15</a:t>
             </a:fld>
             <a:endParaRPr lang="ru-RU"/>
           </a:p>
@@ -755,10 +757,9 @@
           </a:lstStyle>
           <a:p>
             <a:r>
-              <a:rPr lang="ru-RU" smtClean="0"/>
+              <a:rPr lang="ru-RU"/>
               <a:t>Образец заголовка</a:t>
             </a:r>
-            <a:endParaRPr lang="ru-RU"/>
           </a:p>
         </p:txBody>
       </p:sp>
@@ -820,10 +821,9 @@
           </a:lstStyle>
           <a:p>
             <a:r>
-              <a:rPr lang="ru-RU" smtClean="0"/>
+              <a:rPr lang="ru-RU"/>
               <a:t>Образец подзаголовка</a:t>
             </a:r>
-            <a:endParaRPr lang="ru-RU"/>
           </a:p>
         </p:txBody>
       </p:sp>
@@ -844,7 +844,7 @@
           <a:p>
             <a:fld id="{43B237C4-111C-4636-B222-D785A341FF5A}" type="datetimeFigureOut">
               <a:rPr lang="ru-RU" smtClean="0"/>
-              <a:t>05.08.2025</a:t>
+              <a:t>08.08.2025</a:t>
             </a:fld>
             <a:endParaRPr lang="ru-RU"/>
           </a:p>
@@ -938,10 +938,9 @@
           <a:lstStyle/>
           <a:p>
             <a:r>
-              <a:rPr lang="ru-RU" smtClean="0"/>
+              <a:rPr lang="ru-RU"/>
               <a:t>Образец заголовка</a:t>
             </a:r>
-            <a:endParaRPr lang="ru-RU"/>
           </a:p>
         </p:txBody>
       </p:sp>
@@ -962,38 +961,37 @@
           <a:p>
             <a:pPr lvl="0"/>
             <a:r>
-              <a:rPr lang="ru-RU" smtClean="0"/>
+              <a:rPr lang="ru-RU"/>
               <a:t>Образец текста</a:t>
             </a:r>
           </a:p>
           <a:p>
             <a:pPr lvl="1"/>
             <a:r>
-              <a:rPr lang="ru-RU" smtClean="0"/>
+              <a:rPr lang="ru-RU"/>
               <a:t>Второй уровень</a:t>
             </a:r>
           </a:p>
           <a:p>
             <a:pPr lvl="2"/>
             <a:r>
-              <a:rPr lang="ru-RU" smtClean="0"/>
+              <a:rPr lang="ru-RU"/>
               <a:t>Третий уровень</a:t>
             </a:r>
           </a:p>
           <a:p>
             <a:pPr lvl="3"/>
             <a:r>
-              <a:rPr lang="ru-RU" smtClean="0"/>
+              <a:rPr lang="ru-RU"/>
               <a:t>Четвертый уровень</a:t>
             </a:r>
           </a:p>
           <a:p>
             <a:pPr lvl="4"/>
             <a:r>
-              <a:rPr lang="ru-RU" smtClean="0"/>
+              <a:rPr lang="ru-RU"/>
               <a:t>Пятый уровень</a:t>
             </a:r>
-            <a:endParaRPr lang="ru-RU"/>
           </a:p>
         </p:txBody>
       </p:sp>
@@ -1014,7 +1012,7 @@
           <a:p>
             <a:fld id="{43B237C4-111C-4636-B222-D785A341FF5A}" type="datetimeFigureOut">
               <a:rPr lang="ru-RU" smtClean="0"/>
-              <a:t>05.08.2025</a:t>
+              <a:t>08.08.2025</a:t>
             </a:fld>
             <a:endParaRPr lang="ru-RU"/>
           </a:p>
@@ -1113,10 +1111,9 @@
           <a:lstStyle/>
           <a:p>
             <a:r>
-              <a:rPr lang="ru-RU" smtClean="0"/>
+              <a:rPr lang="ru-RU"/>
               <a:t>Образец заголовка</a:t>
             </a:r>
-            <a:endParaRPr lang="ru-RU"/>
           </a:p>
         </p:txBody>
       </p:sp>
@@ -1142,38 +1139,37 @@
           <a:p>
             <a:pPr lvl="0"/>
             <a:r>
-              <a:rPr lang="ru-RU" smtClean="0"/>
+              <a:rPr lang="ru-RU"/>
               <a:t>Образец текста</a:t>
             </a:r>
           </a:p>
           <a:p>
             <a:pPr lvl="1"/>
             <a:r>
-              <a:rPr lang="ru-RU" smtClean="0"/>
+              <a:rPr lang="ru-RU"/>
               <a:t>Второй уровень</a:t>
             </a:r>
           </a:p>
           <a:p>
             <a:pPr lvl="2"/>
             <a:r>
-              <a:rPr lang="ru-RU" smtClean="0"/>
+              <a:rPr lang="ru-RU"/>
               <a:t>Третий уровень</a:t>
             </a:r>
           </a:p>
           <a:p>
             <a:pPr lvl="3"/>
             <a:r>
-              <a:rPr lang="ru-RU" smtClean="0"/>
+              <a:rPr lang="ru-RU"/>
               <a:t>Четвертый уровень</a:t>
             </a:r>
           </a:p>
           <a:p>
             <a:pPr lvl="4"/>
             <a:r>
-              <a:rPr lang="ru-RU" smtClean="0"/>
+              <a:rPr lang="ru-RU"/>
               <a:t>Пятый уровень</a:t>
             </a:r>
-            <a:endParaRPr lang="ru-RU"/>
           </a:p>
         </p:txBody>
       </p:sp>
@@ -1194,7 +1190,7 @@
           <a:p>
             <a:fld id="{43B237C4-111C-4636-B222-D785A341FF5A}" type="datetimeFigureOut">
               <a:rPr lang="ru-RU" smtClean="0"/>
-              <a:t>05.08.2025</a:t>
+              <a:t>08.08.2025</a:t>
             </a:fld>
             <a:endParaRPr lang="ru-RU"/>
           </a:p>
@@ -1288,10 +1284,9 @@
           <a:lstStyle/>
           <a:p>
             <a:r>
-              <a:rPr lang="ru-RU" smtClean="0"/>
+              <a:rPr lang="ru-RU"/>
               <a:t>Образец заголовка</a:t>
             </a:r>
-            <a:endParaRPr lang="ru-RU"/>
           </a:p>
         </p:txBody>
       </p:sp>
@@ -1312,38 +1307,37 @@
           <a:p>
             <a:pPr lvl="0"/>
             <a:r>
-              <a:rPr lang="ru-RU" smtClean="0"/>
+              <a:rPr lang="ru-RU"/>
               <a:t>Образец текста</a:t>
             </a:r>
           </a:p>
           <a:p>
             <a:pPr lvl="1"/>
             <a:r>
-              <a:rPr lang="ru-RU" smtClean="0"/>
+              <a:rPr lang="ru-RU"/>
               <a:t>Второй уровень</a:t>
             </a:r>
           </a:p>
           <a:p>
             <a:pPr lvl="2"/>
             <a:r>
-              <a:rPr lang="ru-RU" smtClean="0"/>
+              <a:rPr lang="ru-RU"/>
               <a:t>Третий уровень</a:t>
             </a:r>
           </a:p>
           <a:p>
             <a:pPr lvl="3"/>
             <a:r>
-              <a:rPr lang="ru-RU" smtClean="0"/>
+              <a:rPr lang="ru-RU"/>
               <a:t>Четвертый уровень</a:t>
             </a:r>
           </a:p>
           <a:p>
             <a:pPr lvl="4"/>
             <a:r>
-              <a:rPr lang="ru-RU" smtClean="0"/>
+              <a:rPr lang="ru-RU"/>
               <a:t>Пятый уровень</a:t>
             </a:r>
-            <a:endParaRPr lang="ru-RU"/>
           </a:p>
         </p:txBody>
       </p:sp>
@@ -1364,7 +1358,7 @@
           <a:p>
             <a:fld id="{43B237C4-111C-4636-B222-D785A341FF5A}" type="datetimeFigureOut">
               <a:rPr lang="ru-RU" smtClean="0"/>
-              <a:t>05.08.2025</a:t>
+              <a:t>08.08.2025</a:t>
             </a:fld>
             <a:endParaRPr lang="ru-RU"/>
           </a:p>
@@ -1467,10 +1461,9 @@
           </a:lstStyle>
           <a:p>
             <a:r>
-              <a:rPr lang="ru-RU" smtClean="0"/>
+              <a:rPr lang="ru-RU"/>
               <a:t>Образец заголовка</a:t>
             </a:r>
-            <a:endParaRPr lang="ru-RU"/>
           </a:p>
         </p:txBody>
       </p:sp>
@@ -1587,7 +1580,7 @@
           <a:p>
             <a:pPr lvl="0"/>
             <a:r>
-              <a:rPr lang="ru-RU" smtClean="0"/>
+              <a:rPr lang="ru-RU"/>
               <a:t>Образец текста</a:t>
             </a:r>
           </a:p>
@@ -1610,7 +1603,7 @@
           <a:p>
             <a:fld id="{43B237C4-111C-4636-B222-D785A341FF5A}" type="datetimeFigureOut">
               <a:rPr lang="ru-RU" smtClean="0"/>
-              <a:t>05.08.2025</a:t>
+              <a:t>08.08.2025</a:t>
             </a:fld>
             <a:endParaRPr lang="ru-RU"/>
           </a:p>
@@ -1704,10 +1697,9 @@
           <a:lstStyle/>
           <a:p>
             <a:r>
-              <a:rPr lang="ru-RU" smtClean="0"/>
+              <a:rPr lang="ru-RU"/>
               <a:t>Образец заголовка</a:t>
             </a:r>
-            <a:endParaRPr lang="ru-RU"/>
           </a:p>
         </p:txBody>
       </p:sp>
@@ -1733,38 +1725,37 @@
           <a:p>
             <a:pPr lvl="0"/>
             <a:r>
-              <a:rPr lang="ru-RU" smtClean="0"/>
+              <a:rPr lang="ru-RU"/>
               <a:t>Образец текста</a:t>
             </a:r>
           </a:p>
           <a:p>
             <a:pPr lvl="1"/>
             <a:r>
-              <a:rPr lang="ru-RU" smtClean="0"/>
+              <a:rPr lang="ru-RU"/>
               <a:t>Второй уровень</a:t>
             </a:r>
           </a:p>
           <a:p>
             <a:pPr lvl="2"/>
             <a:r>
-              <a:rPr lang="ru-RU" smtClean="0"/>
+              <a:rPr lang="ru-RU"/>
               <a:t>Третий уровень</a:t>
             </a:r>
           </a:p>
           <a:p>
             <a:pPr lvl="3"/>
             <a:r>
-              <a:rPr lang="ru-RU" smtClean="0"/>
+              <a:rPr lang="ru-RU"/>
               <a:t>Четвертый уровень</a:t>
             </a:r>
           </a:p>
           <a:p>
             <a:pPr lvl="4"/>
             <a:r>
-              <a:rPr lang="ru-RU" smtClean="0"/>
+              <a:rPr lang="ru-RU"/>
               <a:t>Пятый уровень</a:t>
             </a:r>
-            <a:endParaRPr lang="ru-RU"/>
           </a:p>
         </p:txBody>
       </p:sp>
@@ -1790,38 +1781,37 @@
           <a:p>
             <a:pPr lvl="0"/>
             <a:r>
-              <a:rPr lang="ru-RU" smtClean="0"/>
+              <a:rPr lang="ru-RU"/>
               <a:t>Образец текста</a:t>
             </a:r>
           </a:p>
           <a:p>
             <a:pPr lvl="1"/>
             <a:r>
-              <a:rPr lang="ru-RU" smtClean="0"/>
+              <a:rPr lang="ru-RU"/>
               <a:t>Второй уровень</a:t>
             </a:r>
           </a:p>
           <a:p>
             <a:pPr lvl="2"/>
             <a:r>
-              <a:rPr lang="ru-RU" smtClean="0"/>
+              <a:rPr lang="ru-RU"/>
               <a:t>Третий уровень</a:t>
             </a:r>
           </a:p>
           <a:p>
             <a:pPr lvl="3"/>
             <a:r>
-              <a:rPr lang="ru-RU" smtClean="0"/>
+              <a:rPr lang="ru-RU"/>
               <a:t>Четвертый уровень</a:t>
             </a:r>
           </a:p>
           <a:p>
             <a:pPr lvl="4"/>
             <a:r>
-              <a:rPr lang="ru-RU" smtClean="0"/>
+              <a:rPr lang="ru-RU"/>
               <a:t>Пятый уровень</a:t>
             </a:r>
-            <a:endParaRPr lang="ru-RU"/>
           </a:p>
         </p:txBody>
       </p:sp>
@@ -1842,7 +1832,7 @@
           <a:p>
             <a:fld id="{43B237C4-111C-4636-B222-D785A341FF5A}" type="datetimeFigureOut">
               <a:rPr lang="ru-RU" smtClean="0"/>
-              <a:t>05.08.2025</a:t>
+              <a:t>08.08.2025</a:t>
             </a:fld>
             <a:endParaRPr lang="ru-RU"/>
           </a:p>
@@ -1941,10 +1931,9 @@
           <a:lstStyle/>
           <a:p>
             <a:r>
-              <a:rPr lang="ru-RU" smtClean="0"/>
+              <a:rPr lang="ru-RU"/>
               <a:t>Образец заголовка</a:t>
             </a:r>
-            <a:endParaRPr lang="ru-RU"/>
           </a:p>
         </p:txBody>
       </p:sp>
@@ -2007,7 +1996,7 @@
           <a:p>
             <a:pPr lvl="0"/>
             <a:r>
-              <a:rPr lang="ru-RU" smtClean="0"/>
+              <a:rPr lang="ru-RU"/>
               <a:t>Образец текста</a:t>
             </a:r>
           </a:p>
@@ -2035,38 +2024,37 @@
           <a:p>
             <a:pPr lvl="0"/>
             <a:r>
-              <a:rPr lang="ru-RU" smtClean="0"/>
+              <a:rPr lang="ru-RU"/>
               <a:t>Образец текста</a:t>
             </a:r>
           </a:p>
           <a:p>
             <a:pPr lvl="1"/>
             <a:r>
-              <a:rPr lang="ru-RU" smtClean="0"/>
+              <a:rPr lang="ru-RU"/>
               <a:t>Второй уровень</a:t>
             </a:r>
           </a:p>
           <a:p>
             <a:pPr lvl="2"/>
             <a:r>
-              <a:rPr lang="ru-RU" smtClean="0"/>
+              <a:rPr lang="ru-RU"/>
               <a:t>Третий уровень</a:t>
             </a:r>
           </a:p>
           <a:p>
             <a:pPr lvl="3"/>
             <a:r>
-              <a:rPr lang="ru-RU" smtClean="0"/>
+              <a:rPr lang="ru-RU"/>
               <a:t>Четвертый уровень</a:t>
             </a:r>
           </a:p>
           <a:p>
             <a:pPr lvl="4"/>
             <a:r>
-              <a:rPr lang="ru-RU" smtClean="0"/>
+              <a:rPr lang="ru-RU"/>
               <a:t>Пятый уровень</a:t>
             </a:r>
-            <a:endParaRPr lang="ru-RU"/>
           </a:p>
         </p:txBody>
       </p:sp>
@@ -2129,7 +2117,7 @@
           <a:p>
             <a:pPr lvl="0"/>
             <a:r>
-              <a:rPr lang="ru-RU" smtClean="0"/>
+              <a:rPr lang="ru-RU"/>
               <a:t>Образец текста</a:t>
             </a:r>
           </a:p>
@@ -2157,38 +2145,37 @@
           <a:p>
             <a:pPr lvl="0"/>
             <a:r>
-              <a:rPr lang="ru-RU" smtClean="0"/>
+              <a:rPr lang="ru-RU"/>
               <a:t>Образец текста</a:t>
             </a:r>
           </a:p>
           <a:p>
             <a:pPr lvl="1"/>
             <a:r>
-              <a:rPr lang="ru-RU" smtClean="0"/>
+              <a:rPr lang="ru-RU"/>
               <a:t>Второй уровень</a:t>
             </a:r>
           </a:p>
           <a:p>
             <a:pPr lvl="2"/>
             <a:r>
-              <a:rPr lang="ru-RU" smtClean="0"/>
+              <a:rPr lang="ru-RU"/>
               <a:t>Третий уровень</a:t>
             </a:r>
           </a:p>
           <a:p>
             <a:pPr lvl="3"/>
             <a:r>
-              <a:rPr lang="ru-RU" smtClean="0"/>
+              <a:rPr lang="ru-RU"/>
               <a:t>Четвертый уровень</a:t>
             </a:r>
           </a:p>
           <a:p>
             <a:pPr lvl="4"/>
             <a:r>
-              <a:rPr lang="ru-RU" smtClean="0"/>
+              <a:rPr lang="ru-RU"/>
               <a:t>Пятый уровень</a:t>
             </a:r>
-            <a:endParaRPr lang="ru-RU"/>
           </a:p>
         </p:txBody>
       </p:sp>
@@ -2209,7 +2196,7 @@
           <a:p>
             <a:fld id="{43B237C4-111C-4636-B222-D785A341FF5A}" type="datetimeFigureOut">
               <a:rPr lang="ru-RU" smtClean="0"/>
-              <a:t>05.08.2025</a:t>
+              <a:t>08.08.2025</a:t>
             </a:fld>
             <a:endParaRPr lang="ru-RU"/>
           </a:p>
@@ -2303,10 +2290,9 @@
           <a:lstStyle/>
           <a:p>
             <a:r>
-              <a:rPr lang="ru-RU" smtClean="0"/>
+              <a:rPr lang="ru-RU"/>
               <a:t>Образец заголовка</a:t>
             </a:r>
-            <a:endParaRPr lang="ru-RU"/>
           </a:p>
         </p:txBody>
       </p:sp>
@@ -2327,7 +2313,7 @@
           <a:p>
             <a:fld id="{43B237C4-111C-4636-B222-D785A341FF5A}" type="datetimeFigureOut">
               <a:rPr lang="ru-RU" smtClean="0"/>
-              <a:t>05.08.2025</a:t>
+              <a:t>08.08.2025</a:t>
             </a:fld>
             <a:endParaRPr lang="ru-RU"/>
           </a:p>
@@ -2422,7 +2408,7 @@
           <a:p>
             <a:fld id="{43B237C4-111C-4636-B222-D785A341FF5A}" type="datetimeFigureOut">
               <a:rPr lang="ru-RU" smtClean="0"/>
-              <a:t>05.08.2025</a:t>
+              <a:t>08.08.2025</a:t>
             </a:fld>
             <a:endParaRPr lang="ru-RU"/>
           </a:p>
@@ -2525,10 +2511,9 @@
           </a:lstStyle>
           <a:p>
             <a:r>
-              <a:rPr lang="ru-RU" smtClean="0"/>
+              <a:rPr lang="ru-RU"/>
               <a:t>Образец заголовка</a:t>
             </a:r>
-            <a:endParaRPr lang="ru-RU"/>
           </a:p>
         </p:txBody>
       </p:sp>
@@ -2582,38 +2567,37 @@
           <a:p>
             <a:pPr lvl="0"/>
             <a:r>
-              <a:rPr lang="ru-RU" smtClean="0"/>
+              <a:rPr lang="ru-RU"/>
               <a:t>Образец текста</a:t>
             </a:r>
           </a:p>
           <a:p>
             <a:pPr lvl="1"/>
             <a:r>
-              <a:rPr lang="ru-RU" smtClean="0"/>
+              <a:rPr lang="ru-RU"/>
               <a:t>Второй уровень</a:t>
             </a:r>
           </a:p>
           <a:p>
             <a:pPr lvl="2"/>
             <a:r>
-              <a:rPr lang="ru-RU" smtClean="0"/>
+              <a:rPr lang="ru-RU"/>
               <a:t>Третий уровень</a:t>
             </a:r>
           </a:p>
           <a:p>
             <a:pPr lvl="3"/>
             <a:r>
-              <a:rPr lang="ru-RU" smtClean="0"/>
+              <a:rPr lang="ru-RU"/>
               <a:t>Четвертый уровень</a:t>
             </a:r>
           </a:p>
           <a:p>
             <a:pPr lvl="4"/>
             <a:r>
-              <a:rPr lang="ru-RU" smtClean="0"/>
+              <a:rPr lang="ru-RU"/>
               <a:t>Пятый уровень</a:t>
             </a:r>
-            <a:endParaRPr lang="ru-RU"/>
           </a:p>
         </p:txBody>
       </p:sp>
@@ -2676,7 +2660,7 @@
           <a:p>
             <a:pPr lvl="0"/>
             <a:r>
-              <a:rPr lang="ru-RU" smtClean="0"/>
+              <a:rPr lang="ru-RU"/>
               <a:t>Образец текста</a:t>
             </a:r>
           </a:p>
@@ -2699,7 +2683,7 @@
           <a:p>
             <a:fld id="{43B237C4-111C-4636-B222-D785A341FF5A}" type="datetimeFigureOut">
               <a:rPr lang="ru-RU" smtClean="0"/>
-              <a:t>05.08.2025</a:t>
+              <a:t>08.08.2025</a:t>
             </a:fld>
             <a:endParaRPr lang="ru-RU"/>
           </a:p>
@@ -2802,10 +2786,9 @@
           </a:lstStyle>
           <a:p>
             <a:r>
-              <a:rPr lang="ru-RU" smtClean="0"/>
+              <a:rPr lang="ru-RU"/>
               <a:t>Образец заголовка</a:t>
             </a:r>
-            <a:endParaRPr lang="ru-RU"/>
           </a:p>
         </p:txBody>
       </p:sp>
@@ -2929,7 +2912,7 @@
           <a:p>
             <a:pPr lvl="0"/>
             <a:r>
-              <a:rPr lang="ru-RU" smtClean="0"/>
+              <a:rPr lang="ru-RU"/>
               <a:t>Образец текста</a:t>
             </a:r>
           </a:p>
@@ -2952,7 +2935,7 @@
           <a:p>
             <a:fld id="{43B237C4-111C-4636-B222-D785A341FF5A}" type="datetimeFigureOut">
               <a:rPr lang="ru-RU" smtClean="0"/>
-              <a:t>05.08.2025</a:t>
+              <a:t>08.08.2025</a:t>
             </a:fld>
             <a:endParaRPr lang="ru-RU"/>
           </a:p>
@@ -3061,10 +3044,9 @@
           <a:lstStyle/>
           <a:p>
             <a:r>
-              <a:rPr lang="ru-RU" smtClean="0"/>
+              <a:rPr lang="ru-RU"/>
               <a:t>Образец заголовка</a:t>
             </a:r>
-            <a:endParaRPr lang="ru-RU"/>
           </a:p>
         </p:txBody>
       </p:sp>
@@ -3095,38 +3077,37 @@
           <a:p>
             <a:pPr lvl="0"/>
             <a:r>
-              <a:rPr lang="ru-RU" smtClean="0"/>
+              <a:rPr lang="ru-RU"/>
               <a:t>Образец текста</a:t>
             </a:r>
           </a:p>
           <a:p>
             <a:pPr lvl="1"/>
             <a:r>
-              <a:rPr lang="ru-RU" smtClean="0"/>
+              <a:rPr lang="ru-RU"/>
               <a:t>Второй уровень</a:t>
             </a:r>
           </a:p>
           <a:p>
             <a:pPr lvl="2"/>
             <a:r>
-              <a:rPr lang="ru-RU" smtClean="0"/>
+              <a:rPr lang="ru-RU"/>
               <a:t>Третий уровень</a:t>
             </a:r>
           </a:p>
           <a:p>
             <a:pPr lvl="3"/>
             <a:r>
-              <a:rPr lang="ru-RU" smtClean="0"/>
+              <a:rPr lang="ru-RU"/>
               <a:t>Четвертый уровень</a:t>
             </a:r>
           </a:p>
           <a:p>
             <a:pPr lvl="4"/>
             <a:r>
-              <a:rPr lang="ru-RU" smtClean="0"/>
+              <a:rPr lang="ru-RU"/>
               <a:t>Пятый уровень</a:t>
             </a:r>
-            <a:endParaRPr lang="ru-RU"/>
           </a:p>
         </p:txBody>
       </p:sp>
@@ -3165,7 +3146,7 @@
           <a:p>
             <a:fld id="{43B237C4-111C-4636-B222-D785A341FF5A}" type="datetimeFigureOut">
               <a:rPr lang="ru-RU" smtClean="0"/>
-              <a:t>05.08.2025</a:t>
+              <a:t>08.08.2025</a:t>
             </a:fld>
             <a:endParaRPr lang="ru-RU"/>
           </a:p>
@@ -3586,10 +3567,9 @@
           <a:lstStyle/>
           <a:p>
             <a:r>
-              <a:rPr lang="ru-RU" dirty="0" smtClean="0"/>
+              <a:rPr lang="ru-RU" dirty="0"/>
               <a:t>Методы машинного обучения в АВР</a:t>
             </a:r>
-            <a:endParaRPr lang="ru-RU" dirty="0"/>
           </a:p>
         </p:txBody>
       </p:sp>
@@ -3622,13 +3602,6 @@
   <p:clrMapOvr>
     <a:masterClrMapping/>
   </p:clrMapOvr>
-  <p:timing>
-    <p:tnLst>
-      <p:par>
-        <p:cTn id="1" dur="indefinite" restart="never" nodeType="tmRoot"/>
-      </p:par>
-    </p:tnLst>
-  </p:timing>
 </p:sld>
 </file>
 
@@ -3661,28 +3634,17 @@
         </p:nvSpPr>
         <p:spPr>
           <a:xfrm>
-            <a:off x="215712" y="174625"/>
-            <a:ext cx="11147613" cy="898899"/>
+            <a:off x="125505" y="320303"/>
+            <a:ext cx="12227859" cy="773392"/>
           </a:xfrm>
         </p:spPr>
         <p:txBody>
           <a:bodyPr/>
           <a:lstStyle/>
           <a:p>
-            <a:pPr lvl="0" eaLnBrk="0" fontAlgn="base" hangingPunct="0">
-              <a:lnSpc>
-                <a:spcPct val="100000"/>
-              </a:lnSpc>
-              <a:spcBef>
-                <a:spcPts val="300"/>
-              </a:spcBef>
-              <a:spcAft>
-                <a:spcPct val="0"/>
-              </a:spcAft>
-            </a:pPr>
-            <a:r>
-              <a:rPr lang="ru-RU" altLang="ru-RU" b="1" dirty="0"/>
-              <a:t>Проблемы выбора окна Редукции</a:t>
+            <a:r>
+              <a:rPr lang="ru-RU" dirty="0"/>
+              <a:t>Признаки во временных рядах</a:t>
             </a:r>
           </a:p>
         </p:txBody>
@@ -3699,347 +3661,146 @@
         </p:nvSpPr>
         <p:spPr>
           <a:xfrm>
-            <a:off x="215712" y="940174"/>
-            <a:ext cx="11985813" cy="5154704"/>
+            <a:off x="188258" y="1029249"/>
+            <a:ext cx="11660842" cy="5304876"/>
           </a:xfrm>
         </p:spPr>
         <p:txBody>
           <a:bodyPr>
-            <a:noAutofit/>
+            <a:normAutofit fontScale="92500" lnSpcReduction="20000"/>
           </a:bodyPr>
           <a:lstStyle/>
           <a:p>
-            <a:pPr marL="0" indent="0" eaLnBrk="0" fontAlgn="base" hangingPunct="0">
-              <a:lnSpc>
-                <a:spcPct val="100000"/>
-              </a:lnSpc>
-              <a:spcBef>
-                <a:spcPts val="300"/>
-              </a:spcBef>
-              <a:spcAft>
-                <a:spcPct val="0"/>
-              </a:spcAft>
-              <a:buNone/>
-            </a:pPr>
-            <a:r>
-              <a:rPr lang="ru-RU" altLang="ru-RU" sz="2300" dirty="0" smtClean="0"/>
-              <a:t>Выбор слишком короткого или слишком длинного окна может привести к</a:t>
-            </a:r>
-            <a:r>
-              <a:rPr lang="ru-RU" altLang="ru-RU" sz="2300" dirty="0"/>
-              <a:t> </a:t>
-            </a:r>
-            <a:r>
-              <a:rPr lang="ru-RU" altLang="ru-RU" sz="2300" dirty="0" smtClean="0"/>
-              <a:t/>
-            </a:r>
-            <a:br>
-              <a:rPr lang="ru-RU" altLang="ru-RU" sz="2300" dirty="0" smtClean="0"/>
-            </a:br>
-            <a:r>
-              <a:rPr lang="ru-RU" altLang="ru-RU" sz="2300" dirty="0" smtClean="0">
-                <a:solidFill>
-                  <a:srgbClr val="0D47A1"/>
-                </a:solidFill>
-                <a:hlinkClick r:id="rId2"/>
-              </a:rPr>
-              <a:t>“</a:t>
-            </a:r>
-            <a:r>
-              <a:rPr lang="ru-RU" altLang="ru-RU" sz="2300" dirty="0">
-                <a:solidFill>
-                  <a:srgbClr val="0D47A1"/>
-                </a:solidFill>
-                <a:hlinkClick r:id="rId2"/>
-              </a:rPr>
-              <a:t>p-</a:t>
-            </a:r>
-            <a:r>
-              <a:rPr lang="ru-RU" altLang="ru-RU" sz="2300" dirty="0" err="1">
-                <a:solidFill>
-                  <a:srgbClr val="0D47A1"/>
-                </a:solidFill>
-                <a:hlinkClick r:id="rId2"/>
-              </a:rPr>
-              <a:t>value</a:t>
-            </a:r>
-            <a:r>
-              <a:rPr lang="ru-RU" altLang="ru-RU" sz="2300" dirty="0">
-                <a:solidFill>
-                  <a:srgbClr val="0D47A1"/>
-                </a:solidFill>
-                <a:hlinkClick r:id="rId2"/>
-              </a:rPr>
-              <a:t> </a:t>
-            </a:r>
-            <a:r>
-              <a:rPr lang="ru-RU" altLang="ru-RU" sz="2300" dirty="0" err="1">
-                <a:solidFill>
-                  <a:srgbClr val="0D47A1"/>
-                </a:solidFill>
-                <a:hlinkClick r:id="rId2"/>
-              </a:rPr>
-              <a:t>hacking</a:t>
-            </a:r>
-            <a:r>
-              <a:rPr lang="ru-RU" altLang="ru-RU" sz="2300" dirty="0">
-                <a:solidFill>
-                  <a:srgbClr val="0D47A1"/>
-                </a:solidFill>
-                <a:hlinkClick r:id="rId2"/>
-              </a:rPr>
-              <a:t>”</a:t>
-            </a:r>
-            <a:r>
-              <a:rPr lang="ru-RU" altLang="ru-RU" sz="2300" dirty="0"/>
-              <a:t> – то есть утечке информации (или появление ложных зависимостей). </a:t>
-            </a:r>
-            <a:endParaRPr lang="en-US" altLang="ru-RU" sz="2300" dirty="0" smtClean="0"/>
-          </a:p>
-          <a:p>
-            <a:pPr marL="0" indent="0" eaLnBrk="0" fontAlgn="base" hangingPunct="0">
-              <a:lnSpc>
-                <a:spcPct val="100000"/>
-              </a:lnSpc>
-              <a:spcBef>
-                <a:spcPts val="300"/>
-              </a:spcBef>
-              <a:spcAft>
-                <a:spcPct val="0"/>
-              </a:spcAft>
-              <a:buNone/>
-            </a:pPr>
-            <a:r>
-              <a:rPr lang="ru-RU" altLang="ru-RU" sz="2300" dirty="0" smtClean="0"/>
-              <a:t>Для </a:t>
-            </a:r>
-            <a:r>
-              <a:rPr lang="ru-RU" altLang="ru-RU" sz="2300" dirty="0" err="1" smtClean="0"/>
-              <a:t>преотвращения</a:t>
-            </a:r>
-            <a:r>
-              <a:rPr lang="ru-RU" altLang="ru-RU" sz="2300" dirty="0" smtClean="0"/>
+            <a:r>
+              <a:rPr lang="ru-RU" dirty="0"/>
+              <a:t>Лаги временных рядов</a:t>
+            </a:r>
+          </a:p>
+          <a:p>
+            <a:r>
+              <a:rPr lang="ru-RU" dirty="0"/>
+              <a:t>Преобразования лагов (степенное, разность и </a:t>
+            </a:r>
+            <a:r>
+              <a:rPr lang="ru-RU" dirty="0" err="1"/>
+              <a:t>тд</a:t>
+            </a:r>
+            <a:r>
+              <a:rPr lang="ru-RU" dirty="0"/>
+              <a:t>)</a:t>
+            </a:r>
+            <a:endParaRPr lang="en-US" dirty="0"/>
+          </a:p>
+          <a:p>
+            <a:r>
+              <a:rPr lang="ru-RU" dirty="0"/>
+              <a:t>Преобразования метки (степенное, разность, кодирование и </a:t>
+            </a:r>
+            <a:r>
+              <a:rPr lang="ru-RU" dirty="0" err="1"/>
+              <a:t>тд</a:t>
+            </a:r>
+            <a:r>
+              <a:rPr lang="ru-RU" dirty="0"/>
+              <a:t>)</a:t>
+            </a:r>
+            <a:endParaRPr lang="en-US" dirty="0"/>
+          </a:p>
+          <a:p>
+            <a:r>
+              <a:rPr lang="ru-RU" dirty="0"/>
+              <a:t>Оконные статистики</a:t>
+            </a:r>
+            <a:r>
+              <a:rPr lang="en-US" dirty="0"/>
               <a:t>:</a:t>
             </a:r>
           </a:p>
           <a:p>
-            <a:pPr lvl="1" eaLnBrk="0" fontAlgn="base" hangingPunct="0">
-              <a:lnSpc>
-                <a:spcPct val="100000"/>
-              </a:lnSpc>
-              <a:spcBef>
-                <a:spcPts val="300"/>
-              </a:spcBef>
-              <a:spcAft>
-                <a:spcPct val="0"/>
-              </a:spcAft>
-            </a:pPr>
-            <a:r>
-              <a:rPr lang="en-US" altLang="ru-RU" sz="2300" dirty="0" smtClean="0"/>
-              <a:t>Walking forward </a:t>
-            </a:r>
-            <a:r>
-              <a:rPr lang="ru-RU" altLang="ru-RU" sz="2300" dirty="0" smtClean="0"/>
-              <a:t>кросс </a:t>
-            </a:r>
-            <a:r>
-              <a:rPr lang="ru-RU" altLang="ru-RU" sz="2300" dirty="0" err="1" smtClean="0"/>
-              <a:t>валидация</a:t>
-            </a:r>
-            <a:r>
-              <a:rPr lang="en-US" altLang="ru-RU" sz="2300" dirty="0" smtClean="0"/>
-              <a:t> </a:t>
-            </a:r>
-            <a:r>
-              <a:rPr lang="ru-RU" altLang="ru-RU" sz="2300" dirty="0" smtClean="0"/>
-              <a:t>и </a:t>
-            </a:r>
-            <a:r>
-              <a:rPr lang="en-US" altLang="ru-RU" sz="2300" dirty="0" err="1" smtClean="0"/>
-              <a:t>backtesting</a:t>
-            </a:r>
-            <a:r>
-              <a:rPr lang="ru-RU" altLang="ru-RU" sz="2300" dirty="0" smtClean="0"/>
-              <a:t>. </a:t>
-            </a:r>
-          </a:p>
-          <a:p>
-            <a:pPr lvl="1" eaLnBrk="0" fontAlgn="base" hangingPunct="0">
-              <a:lnSpc>
-                <a:spcPct val="100000"/>
-              </a:lnSpc>
-              <a:spcBef>
-                <a:spcPts val="300"/>
-              </a:spcBef>
-              <a:spcAft>
-                <a:spcPct val="0"/>
-              </a:spcAft>
-            </a:pPr>
-            <a:r>
-              <a:rPr lang="ru-RU" altLang="ru-RU" sz="2300" dirty="0" smtClean="0">
-                <a:solidFill>
-                  <a:srgbClr val="0D47A1"/>
-                </a:solidFill>
-              </a:rPr>
-              <a:t>Тесты</a:t>
-            </a:r>
-            <a:r>
-              <a:rPr lang="ru-RU" altLang="ru-RU" sz="2300" dirty="0"/>
-              <a:t> на ложные корреляции. </a:t>
-            </a:r>
-            <a:endParaRPr lang="ru-RU" altLang="ru-RU" sz="2300" dirty="0" smtClean="0"/>
-          </a:p>
-          <a:p>
-            <a:pPr lvl="2" eaLnBrk="0" fontAlgn="base" hangingPunct="0">
-              <a:lnSpc>
-                <a:spcPct val="100000"/>
-              </a:lnSpc>
-              <a:spcBef>
-                <a:spcPts val="300"/>
-              </a:spcBef>
-              <a:spcAft>
-                <a:spcPct val="0"/>
-              </a:spcAft>
-            </a:pPr>
-            <a:r>
-              <a:rPr lang="ru-RU" altLang="ru-RU" dirty="0" smtClean="0"/>
-              <a:t>Напр. </a:t>
-            </a:r>
-            <a:r>
-              <a:rPr lang="ru-RU" altLang="ru-RU" dirty="0" err="1"/>
-              <a:t>Bonferonni</a:t>
-            </a:r>
-            <a:r>
-              <a:rPr lang="ru-RU" altLang="ru-RU" dirty="0"/>
-              <a:t> </a:t>
-            </a:r>
-            <a:r>
-              <a:rPr lang="ru-RU" altLang="ru-RU" dirty="0" err="1"/>
-              <a:t>correction</a:t>
-            </a:r>
-            <a:r>
-              <a:rPr lang="ru-RU" altLang="ru-RU" dirty="0"/>
-              <a:t>, </a:t>
-            </a:r>
-            <a:r>
-              <a:rPr lang="ru-RU" altLang="ru-RU" dirty="0" err="1"/>
-              <a:t>Scheffé's</a:t>
-            </a:r>
-            <a:r>
-              <a:rPr lang="ru-RU" altLang="ru-RU" dirty="0"/>
-              <a:t> </a:t>
-            </a:r>
-            <a:r>
-              <a:rPr lang="ru-RU" altLang="ru-RU" dirty="0" err="1"/>
-              <a:t>method</a:t>
-            </a:r>
-            <a:r>
-              <a:rPr lang="ru-RU" altLang="ru-RU" dirty="0"/>
-              <a:t> и </a:t>
-            </a:r>
-            <a:r>
-              <a:rPr lang="ru-RU" altLang="ru-RU" dirty="0" err="1"/>
-              <a:t>false</a:t>
-            </a:r>
-            <a:r>
-              <a:rPr lang="ru-RU" altLang="ru-RU" dirty="0"/>
-              <a:t> </a:t>
-            </a:r>
-            <a:r>
-              <a:rPr lang="ru-RU" altLang="ru-RU" dirty="0" err="1"/>
-              <a:t>discovery</a:t>
-            </a:r>
-            <a:r>
-              <a:rPr lang="ru-RU" altLang="ru-RU" dirty="0"/>
-              <a:t> </a:t>
-            </a:r>
-            <a:r>
-              <a:rPr lang="ru-RU" altLang="ru-RU" dirty="0" err="1"/>
-              <a:t>rate</a:t>
-            </a:r>
-            <a:r>
-              <a:rPr lang="ru-RU" altLang="ru-RU" dirty="0"/>
-              <a:t>.</a:t>
-            </a:r>
-          </a:p>
-          <a:p>
-            <a:pPr eaLnBrk="0" fontAlgn="base" hangingPunct="0">
-              <a:lnSpc>
-                <a:spcPct val="100000"/>
-              </a:lnSpc>
-              <a:spcBef>
-                <a:spcPts val="300"/>
-              </a:spcBef>
-              <a:spcAft>
-                <a:spcPct val="0"/>
-              </a:spcAft>
-            </a:pPr>
-            <a:r>
-              <a:rPr lang="ru-RU" altLang="ru-RU" sz="2300" dirty="0" smtClean="0"/>
-              <a:t>При добавлении признаков в окно прогноза нужно смотреть чтобы </a:t>
-            </a:r>
-            <a:r>
-              <a:rPr lang="ru-RU" altLang="ru-RU" sz="2300" dirty="0" err="1" smtClean="0"/>
-              <a:t>небыло</a:t>
-            </a:r>
-            <a:r>
-              <a:rPr lang="ru-RU" altLang="ru-RU" sz="2300" dirty="0" smtClean="0"/>
-              <a:t> утечки данных – признаки не должны опережать временную метку предсказываемого значения.</a:t>
-            </a:r>
-          </a:p>
-          <a:p>
-            <a:pPr eaLnBrk="0" fontAlgn="base" hangingPunct="0">
-              <a:lnSpc>
-                <a:spcPct val="100000"/>
-              </a:lnSpc>
-              <a:spcBef>
-                <a:spcPts val="300"/>
-              </a:spcBef>
-              <a:spcAft>
-                <a:spcPct val="0"/>
-              </a:spcAft>
-            </a:pPr>
-            <a:r>
-              <a:rPr lang="ru-RU" altLang="ru-RU" sz="2300" dirty="0" smtClean="0"/>
-              <a:t>Если </a:t>
-            </a:r>
-            <a:r>
-              <a:rPr lang="ru-RU" altLang="ru-RU" sz="2300" dirty="0"/>
-              <a:t>метка прогноза преобразована, часто забывают сделать обратное преобразование</a:t>
-            </a:r>
-            <a:r>
-              <a:rPr lang="ru-RU" altLang="ru-RU" sz="2100" dirty="0">
-                <a:latin typeface="system-ui"/>
-              </a:rPr>
-              <a:t>.</a:t>
-            </a:r>
-          </a:p>
-          <a:p>
-            <a:pPr marL="0" lvl="0" indent="0" eaLnBrk="0" fontAlgn="base" hangingPunct="0">
-              <a:lnSpc>
-                <a:spcPct val="100000"/>
-              </a:lnSpc>
-              <a:spcBef>
-                <a:spcPts val="300"/>
-              </a:spcBef>
-              <a:spcAft>
-                <a:spcPct val="0"/>
-              </a:spcAft>
-              <a:buNone/>
-            </a:pPr>
-            <a:endParaRPr kumimoji="0" lang="ru-RU" altLang="ru-RU" sz="2100" b="0" i="0" u="none" strike="noStrike" cap="none" normalizeH="0" baseline="0" dirty="0" smtClean="0">
-              <a:ln>
-                <a:noFill/>
-              </a:ln>
-              <a:solidFill>
-                <a:schemeClr val="tx1"/>
-              </a:solidFill>
-              <a:effectLst/>
-              <a:latin typeface="Arial" panose="020B0604020202020204" pitchFamily="34" charset="0"/>
-            </a:endParaRPr>
-          </a:p>
-          <a:p>
-            <a:endParaRPr lang="ru-RU" sz="2100" dirty="0"/>
+            <a:pPr lvl="1"/>
+            <a:r>
+              <a:rPr lang="en-US" dirty="0"/>
+              <a:t>Max/min value of series in a window</a:t>
+            </a:r>
+          </a:p>
+          <a:p>
+            <a:pPr lvl="1"/>
+            <a:r>
+              <a:rPr lang="en-US" dirty="0"/>
+              <a:t>Average/median value in a window</a:t>
+            </a:r>
+          </a:p>
+          <a:p>
+            <a:pPr lvl="1"/>
+            <a:r>
+              <a:rPr lang="en-US" dirty="0"/>
+              <a:t>Window variance</a:t>
+            </a:r>
+          </a:p>
+          <a:p>
+            <a:pPr lvl="1"/>
+            <a:r>
+              <a:rPr lang="en-US" dirty="0"/>
+              <a:t>etc.</a:t>
+            </a:r>
+          </a:p>
+          <a:p>
+            <a:r>
+              <a:rPr lang="ru-RU" dirty="0"/>
+              <a:t>Даты и время</a:t>
+            </a:r>
+            <a:r>
+              <a:rPr lang="en-US" dirty="0"/>
+              <a:t>:</a:t>
+            </a:r>
+          </a:p>
+          <a:p>
+            <a:pPr lvl="1"/>
+            <a:r>
+              <a:rPr lang="ru-RU" dirty="0"/>
+              <a:t>Порядковые (категориальные) данные: Число, день недели, месяц, квартал и </a:t>
+            </a:r>
+            <a:r>
+              <a:rPr lang="ru-RU" dirty="0" err="1"/>
+              <a:t>тд</a:t>
+            </a:r>
+            <a:endParaRPr lang="en-US" dirty="0"/>
+          </a:p>
+          <a:p>
+            <a:pPr lvl="1"/>
+            <a:r>
+              <a:rPr lang="ru-RU" dirty="0"/>
+              <a:t>Бинарные (дискретные): </a:t>
+            </a:r>
+            <a:r>
+              <a:rPr lang="en-US" dirty="0"/>
+              <a:t>Is this day a holiday? Maybe there is a special event? </a:t>
+            </a:r>
+            <a:endParaRPr lang="ru-RU" dirty="0"/>
+          </a:p>
+          <a:p>
+            <a:r>
+              <a:rPr lang="ru-RU" dirty="0"/>
+              <a:t>Экзогенные факторы, объясняющие (в домене) целевую переменную</a:t>
+            </a:r>
+          </a:p>
+          <a:p>
+            <a:r>
+              <a:rPr lang="ru-RU" dirty="0"/>
+              <a:t>Результаты, статистики остатков и другие характеристики </a:t>
+            </a:r>
+            <a:r>
+              <a:rPr lang="ru-RU" dirty="0" err="1"/>
+              <a:t>предскзаний</a:t>
+            </a:r>
+            <a:r>
+              <a:rPr lang="ru-RU" dirty="0"/>
+              <a:t> других моделей </a:t>
+            </a:r>
+            <a:endParaRPr lang="en-US" dirty="0"/>
+          </a:p>
+          <a:p>
+            <a:endParaRPr lang="ru-RU" dirty="0"/>
           </a:p>
         </p:txBody>
       </p:sp>
@@ -4051,22 +3812,50 @@
         </p:nvSpPr>
         <p:spPr>
           <a:xfrm>
-            <a:off x="419379" y="6331148"/>
-            <a:ext cx="4208268" cy="307777"/>
+            <a:off x="5459505" y="6449670"/>
+            <a:ext cx="6096000" cy="307777"/>
           </a:xfrm>
           <a:prstGeom prst="rect">
             <a:avLst/>
           </a:prstGeom>
         </p:spPr>
         <p:txBody>
-          <a:bodyPr wrap="none">
+          <a:bodyPr>
             <a:spAutoFit/>
           </a:bodyPr>
           <a:lstStyle/>
           <a:p>
             <a:r>
               <a:rPr lang="ru-RU" sz="1400" dirty="0"/>
-              <a:t>https://www.nature.com/articles/d41586-025-01246-1</a:t>
+              <a:t>https://mlcourse.ai/book/topic09/topic9_part1_time_series_python.html</a:t>
+            </a:r>
+          </a:p>
+        </p:txBody>
+      </p:sp>
+      <p:sp>
+        <p:nvSpPr>
+          <p:cNvPr id="5" name="Прямоугольник 4"/>
+          <p:cNvSpPr/>
+          <p:nvPr/>
+        </p:nvSpPr>
+        <p:spPr>
+          <a:xfrm>
+            <a:off x="5952565" y="6172671"/>
+            <a:ext cx="6096000" cy="276999"/>
+          </a:xfrm>
+          <a:prstGeom prst="rect">
+            <a:avLst/>
+          </a:prstGeom>
+        </p:spPr>
+        <p:txBody>
+          <a:bodyPr>
+            <a:spAutoFit/>
+          </a:bodyPr>
+          <a:lstStyle/>
+          <a:p>
+            <a:r>
+              <a:rPr lang="ru-RU" sz="1200" dirty="0"/>
+              <a:t>https://nixtlaverse.nixtla.io/mlforecast/docs/getting-started/end_to_end_walkthrough.htm</a:t>
             </a:r>
           </a:p>
         </p:txBody>
@@ -4074,20 +3863,13 @@
     </p:spTree>
     <p:extLst>
       <p:ext uri="{BB962C8B-B14F-4D97-AF65-F5344CB8AC3E}">
-        <p14:creationId xmlns:p14="http://schemas.microsoft.com/office/powerpoint/2010/main" val="3365436130"/>
+        <p14:creationId xmlns:p14="http://schemas.microsoft.com/office/powerpoint/2010/main" val="139361784"/>
       </p:ext>
     </p:extLst>
   </p:cSld>
   <p:clrMapOvr>
     <a:masterClrMapping/>
   </p:clrMapOvr>
-  <p:timing>
-    <p:tnLst>
-      <p:par>
-        <p:cTn id="1" dur="indefinite" restart="never" nodeType="tmRoot"/>
-      </p:par>
-    </p:tnLst>
-  </p:timing>
 </p:sld>
 </file>
 
@@ -4120,49 +3902,8 @@
         </p:nvSpPr>
         <p:spPr>
           <a:xfrm>
-            <a:off x="242046" y="105148"/>
-            <a:ext cx="11111753" cy="656851"/>
-          </a:xfrm>
-        </p:spPr>
-        <p:txBody>
-          <a:bodyPr>
-            <a:normAutofit fontScale="90000"/>
-          </a:bodyPr>
-          <a:lstStyle/>
-          <a:p>
-            <a:r>
-              <a:rPr lang="ru-RU" altLang="ru-RU" b="1" dirty="0" smtClean="0">
-                <a:solidFill>
-                  <a:srgbClr val="0D47A1"/>
-                </a:solidFill>
-                <a:latin typeface="system-ui"/>
-              </a:rPr>
-              <a:t>Экзогенные переменные</a:t>
-            </a:r>
-            <a:r>
-              <a:rPr lang="ru-RU" altLang="ru-RU" dirty="0" smtClean="0">
-                <a:latin typeface="system-ui"/>
-              </a:rPr>
-              <a:t> </a:t>
-            </a:r>
-            <a:endParaRPr lang="ru-RU" dirty="0"/>
-          </a:p>
-        </p:txBody>
-      </p:sp>
-      <p:sp>
-        <p:nvSpPr>
-          <p:cNvPr id="3" name="Объект 2"/>
-          <p:cNvSpPr>
-            <a:spLocks noGrp="1"/>
-          </p:cNvSpPr>
-          <p:nvPr>
-            <p:ph idx="1"/>
-          </p:nvPr>
-        </p:nvSpPr>
-        <p:spPr>
-          <a:xfrm>
-            <a:off x="134470" y="761998"/>
-            <a:ext cx="11949953" cy="5862919"/>
+            <a:off x="331694" y="365125"/>
+            <a:ext cx="11022106" cy="925793"/>
           </a:xfrm>
         </p:spPr>
         <p:txBody>
@@ -4171,244 +3912,537 @@
           </a:bodyPr>
           <a:lstStyle/>
           <a:p>
-            <a:pPr>
-              <a:lnSpc>
-                <a:spcPct val="120000"/>
-              </a:lnSpc>
+            <a:r>
+              <a:rPr lang="ru-RU" sz="3600" dirty="0"/>
+              <a:t>Разница между задачами регрессии и предсказания</a:t>
+            </a:r>
+          </a:p>
+        </p:txBody>
+      </p:sp>
+      <p:graphicFrame>
+        <p:nvGraphicFramePr>
+          <p:cNvPr id="4" name="Объект 3"/>
+          <p:cNvGraphicFramePr>
+            <a:graphicFrameLocks noGrp="1"/>
+          </p:cNvGraphicFramePr>
+          <p:nvPr>
+            <p:ph idx="1"/>
+            <p:extLst>
+              <p:ext uri="{D42A27DB-BD31-4B8C-83A1-F6EECF244321}">
+                <p14:modId xmlns:p14="http://schemas.microsoft.com/office/powerpoint/2010/main" val="3329227898"/>
+              </p:ext>
+            </p:extLst>
+          </p:nvPr>
+        </p:nvGraphicFramePr>
+        <p:xfrm>
+          <a:off x="421341" y="1290918"/>
+          <a:ext cx="10932459" cy="3576320"/>
+        </p:xfrm>
+        <a:graphic>
+          <a:graphicData uri="http://schemas.openxmlformats.org/drawingml/2006/table">
+            <a:tbl>
+              <a:tblPr firstRow="1" bandRow="1">
+                <a:tableStyleId>{5C22544A-7EE6-4342-B048-85BDC9FD1C3A}</a:tableStyleId>
+              </a:tblPr>
+              <a:tblGrid>
+                <a:gridCol w="2424954">
+                  <a:extLst>
+                    <a:ext uri="{9D8B030D-6E8A-4147-A177-3AD203B41FA5}">
+                      <a16:colId xmlns:a16="http://schemas.microsoft.com/office/drawing/2014/main" val="3381004655"/>
+                    </a:ext>
+                  </a:extLst>
+                </a:gridCol>
+                <a:gridCol w="3693459">
+                  <a:extLst>
+                    <a:ext uri="{9D8B030D-6E8A-4147-A177-3AD203B41FA5}">
+                      <a16:colId xmlns:a16="http://schemas.microsoft.com/office/drawing/2014/main" val="2915955119"/>
+                    </a:ext>
+                  </a:extLst>
+                </a:gridCol>
+                <a:gridCol w="4814046">
+                  <a:extLst>
+                    <a:ext uri="{9D8B030D-6E8A-4147-A177-3AD203B41FA5}">
+                      <a16:colId xmlns:a16="http://schemas.microsoft.com/office/drawing/2014/main" val="3699764588"/>
+                    </a:ext>
+                  </a:extLst>
+                </a:gridCol>
+              </a:tblGrid>
+              <a:tr h="370840">
+                <a:tc>
+                  <a:txBody>
+                    <a:bodyPr/>
+                    <a:lstStyle/>
+                    <a:p>
+                      <a:r>
+                        <a:rPr lang="ru-RU" dirty="0"/>
+                        <a:t>Задача</a:t>
+                      </a:r>
+                    </a:p>
+                  </a:txBody>
+                  <a:tcPr/>
+                </a:tc>
+                <a:tc>
+                  <a:txBody>
+                    <a:bodyPr/>
+                    <a:lstStyle/>
+                    <a:p>
+                      <a:r>
+                        <a:rPr lang="ru-RU" dirty="0"/>
+                        <a:t>Табличная</a:t>
+                      </a:r>
+                      <a:r>
+                        <a:rPr lang="ru-RU" baseline="0" dirty="0"/>
+                        <a:t> регрессия </a:t>
+                      </a:r>
+                      <a:endParaRPr lang="ru-RU" dirty="0"/>
+                    </a:p>
+                  </a:txBody>
+                  <a:tcPr/>
+                </a:tc>
+                <a:tc>
+                  <a:txBody>
+                    <a:bodyPr/>
+                    <a:lstStyle/>
+                    <a:p>
+                      <a:r>
+                        <a:rPr lang="ru-RU" dirty="0"/>
+                        <a:t>предсказания ВР</a:t>
+                      </a:r>
+                    </a:p>
+                  </a:txBody>
+                  <a:tcPr/>
+                </a:tc>
+                <a:extLst>
+                  <a:ext uri="{0D108BD9-81ED-4DB2-BD59-A6C34878D82A}">
+                    <a16:rowId xmlns:a16="http://schemas.microsoft.com/office/drawing/2014/main" val="532934532"/>
+                  </a:ext>
+                </a:extLst>
+              </a:tr>
+              <a:tr h="370840">
+                <a:tc>
+                  <a:txBody>
+                    <a:bodyPr/>
+                    <a:lstStyle/>
+                    <a:p>
+                      <a:r>
+                        <a:rPr lang="ru-RU" dirty="0"/>
+                        <a:t>Задача</a:t>
+                      </a:r>
+                    </a:p>
+                  </a:txBody>
+                  <a:tcPr/>
+                </a:tc>
+                <a:tc>
+                  <a:txBody>
+                    <a:bodyPr/>
+                    <a:lstStyle/>
+                    <a:p>
+                      <a:r>
+                        <a:rPr lang="ru-RU" dirty="0"/>
+                        <a:t>Регрессия (</a:t>
+                      </a:r>
+                      <a:r>
+                        <a:rPr lang="ru-RU" dirty="0" err="1"/>
+                        <a:t>фичи</a:t>
+                      </a:r>
+                      <a:r>
+                        <a:rPr lang="ru-RU" dirty="0"/>
+                        <a:t> связаны</a:t>
+                      </a:r>
+                      <a:r>
+                        <a:rPr lang="ru-RU" baseline="0" dirty="0"/>
+                        <a:t> с меткой но не коррелируют)</a:t>
+                      </a:r>
+                      <a:endParaRPr lang="ru-RU" dirty="0"/>
+                    </a:p>
+                  </a:txBody>
+                  <a:tcPr/>
+                </a:tc>
+                <a:tc>
+                  <a:txBody>
+                    <a:bodyPr/>
+                    <a:lstStyle/>
+                    <a:p>
+                      <a:r>
+                        <a:rPr lang="ru-RU" dirty="0"/>
+                        <a:t>Предсказание (следующее</a:t>
+                      </a:r>
+                      <a:r>
+                        <a:rPr lang="ru-RU" baseline="0" dirty="0"/>
+                        <a:t> значение сильно коррелирует с предыдущим, на которых строится </a:t>
+                      </a:r>
+                      <a:r>
+                        <a:rPr lang="ru-RU" baseline="0" dirty="0" err="1"/>
+                        <a:t>прогнз</a:t>
+                      </a:r>
+                      <a:r>
+                        <a:rPr lang="ru-RU" baseline="0" dirty="0"/>
+                        <a:t>)</a:t>
+                      </a:r>
+                      <a:endParaRPr lang="ru-RU" dirty="0"/>
+                    </a:p>
+                  </a:txBody>
+                  <a:tcPr/>
+                </a:tc>
+                <a:extLst>
+                  <a:ext uri="{0D108BD9-81ED-4DB2-BD59-A6C34878D82A}">
+                    <a16:rowId xmlns:a16="http://schemas.microsoft.com/office/drawing/2014/main" val="2976921306"/>
+                  </a:ext>
+                </a:extLst>
+              </a:tr>
+              <a:tr h="370840">
+                <a:tc>
+                  <a:txBody>
+                    <a:bodyPr/>
+                    <a:lstStyle/>
+                    <a:p>
+                      <a:r>
+                        <a:rPr lang="ru-RU" dirty="0"/>
+                        <a:t>Признаки</a:t>
+                      </a:r>
+                    </a:p>
+                  </a:txBody>
+                  <a:tcPr/>
+                </a:tc>
+                <a:tc>
+                  <a:txBody>
+                    <a:bodyPr/>
+                    <a:lstStyle/>
+                    <a:p>
+                      <a:r>
+                        <a:rPr lang="ru-RU" dirty="0"/>
+                        <a:t>Колонки – признаки</a:t>
+                      </a:r>
+                    </a:p>
+                  </a:txBody>
+                  <a:tcPr/>
+                </a:tc>
+                <a:tc>
+                  <a:txBody>
+                    <a:bodyPr/>
+                    <a:lstStyle/>
+                    <a:p>
+                      <a:r>
+                        <a:rPr lang="ru-RU" dirty="0"/>
+                        <a:t>ВР – это не признаки, признаки надо выделить</a:t>
+                      </a:r>
+                    </a:p>
+                  </a:txBody>
+                  <a:tcPr/>
+                </a:tc>
+                <a:extLst>
+                  <a:ext uri="{0D108BD9-81ED-4DB2-BD59-A6C34878D82A}">
+                    <a16:rowId xmlns:a16="http://schemas.microsoft.com/office/drawing/2014/main" val="813022796"/>
+                  </a:ext>
+                </a:extLst>
+              </a:tr>
+              <a:tr h="370840">
+                <a:tc>
+                  <a:txBody>
+                    <a:bodyPr/>
+                    <a:lstStyle/>
+                    <a:p>
+                      <a:r>
+                        <a:rPr lang="ru-RU" dirty="0" err="1"/>
+                        <a:t>Фичи-инженеринг</a:t>
+                      </a:r>
+                      <a:endParaRPr lang="ru-RU" dirty="0"/>
+                    </a:p>
+                  </a:txBody>
+                  <a:tcPr/>
+                </a:tc>
+                <a:tc>
+                  <a:txBody>
+                    <a:bodyPr/>
+                    <a:lstStyle/>
+                    <a:p>
+                      <a:r>
+                        <a:rPr lang="ru-RU" dirty="0"/>
+                        <a:t>Отбор, трансформация</a:t>
+                      </a:r>
+                      <a:r>
+                        <a:rPr lang="ru-RU" baseline="0" dirty="0"/>
+                        <a:t> </a:t>
+                      </a:r>
+                      <a:r>
+                        <a:rPr lang="ru-RU" dirty="0" err="1"/>
+                        <a:t>фичей</a:t>
+                      </a:r>
+                      <a:r>
+                        <a:rPr lang="ru-RU" dirty="0"/>
+                        <a:t>,</a:t>
+                      </a:r>
+                    </a:p>
+                  </a:txBody>
+                  <a:tcPr/>
+                </a:tc>
+                <a:tc>
+                  <a:txBody>
+                    <a:bodyPr/>
+                    <a:lstStyle/>
+                    <a:p>
+                      <a:pPr marL="0" marR="0" indent="0" algn="l" defTabSz="914400" rtl="0" eaLnBrk="1" fontAlgn="auto" latinLnBrk="0" hangingPunct="1">
+                        <a:lnSpc>
+                          <a:spcPct val="100000"/>
+                        </a:lnSpc>
+                        <a:spcBef>
+                          <a:spcPts val="0"/>
+                        </a:spcBef>
+                        <a:spcAft>
+                          <a:spcPts val="0"/>
+                        </a:spcAft>
+                        <a:buClrTx/>
+                        <a:buSzTx/>
+                        <a:buFontTx/>
+                        <a:buNone/>
+                        <a:tabLst/>
+                        <a:defRPr/>
+                      </a:pPr>
+                      <a:r>
+                        <a:rPr lang="ru-RU" dirty="0"/>
+                        <a:t>Редукция ВР к таблице</a:t>
+                      </a:r>
+                      <a:r>
+                        <a:rPr lang="ru-RU" baseline="0" dirty="0"/>
+                        <a:t> + табличный </a:t>
+                      </a:r>
+                      <a:r>
+                        <a:rPr lang="ru-RU" dirty="0" err="1"/>
+                        <a:t>Фичи-инженеринг</a:t>
+                      </a:r>
+                      <a:endParaRPr lang="ru-RU" dirty="0"/>
+                    </a:p>
+                  </a:txBody>
+                  <a:tcPr/>
+                </a:tc>
+                <a:extLst>
+                  <a:ext uri="{0D108BD9-81ED-4DB2-BD59-A6C34878D82A}">
+                    <a16:rowId xmlns:a16="http://schemas.microsoft.com/office/drawing/2014/main" val="4075596501"/>
+                  </a:ext>
+                </a:extLst>
+              </a:tr>
+              <a:tr h="370840">
+                <a:tc>
+                  <a:txBody>
+                    <a:bodyPr/>
+                    <a:lstStyle/>
+                    <a:p>
+                      <a:r>
+                        <a:rPr lang="ru-RU" dirty="0"/>
+                        <a:t>Кросс-</a:t>
+                      </a:r>
+                      <a:r>
+                        <a:rPr lang="ru-RU" dirty="0" err="1"/>
+                        <a:t>валидация</a:t>
+                      </a:r>
+                      <a:endParaRPr lang="ru-RU" dirty="0"/>
+                    </a:p>
+                  </a:txBody>
+                  <a:tcPr/>
+                </a:tc>
+                <a:tc>
+                  <a:txBody>
+                    <a:bodyPr/>
+                    <a:lstStyle/>
+                    <a:p>
+                      <a:r>
+                        <a:rPr lang="ru-RU" dirty="0"/>
+                        <a:t>Случайная</a:t>
+                      </a:r>
+                      <a:r>
+                        <a:rPr lang="ru-RU" baseline="0" dirty="0"/>
+                        <a:t> </a:t>
+                      </a:r>
+                      <a:r>
+                        <a:rPr lang="ru-RU" baseline="0" dirty="0" err="1"/>
+                        <a:t>подвыборка</a:t>
+                      </a:r>
+                      <a:r>
+                        <a:rPr lang="ru-RU" dirty="0"/>
+                        <a:t>, </a:t>
+                      </a:r>
+                      <a:r>
+                        <a:rPr lang="en-US" dirty="0"/>
+                        <a:t>k-folds</a:t>
+                      </a:r>
+                      <a:endParaRPr lang="ru-RU" dirty="0"/>
+                    </a:p>
+                  </a:txBody>
+                  <a:tcPr/>
+                </a:tc>
+                <a:tc>
+                  <a:txBody>
+                    <a:bodyPr/>
+                    <a:lstStyle/>
+                    <a:p>
+                      <a:r>
+                        <a:rPr lang="en-US" dirty="0"/>
+                        <a:t>Walking</a:t>
+                      </a:r>
+                      <a:r>
+                        <a:rPr lang="en-US" baseline="0" dirty="0"/>
+                        <a:t>-forward – </a:t>
+                      </a:r>
+                      <a:r>
+                        <a:rPr lang="ru-RU" baseline="0" dirty="0"/>
+                        <a:t>нельзя делать случайную </a:t>
+                      </a:r>
+                      <a:r>
+                        <a:rPr lang="ru-RU" baseline="0" dirty="0" err="1"/>
+                        <a:t>подвыборку</a:t>
+                      </a:r>
+                      <a:r>
+                        <a:rPr lang="ru-RU" baseline="0" dirty="0"/>
+                        <a:t>, только последовательно</a:t>
+                      </a:r>
+                      <a:endParaRPr lang="ru-RU" dirty="0"/>
+                    </a:p>
+                  </a:txBody>
+                  <a:tcPr/>
+                </a:tc>
+                <a:extLst>
+                  <a:ext uri="{0D108BD9-81ED-4DB2-BD59-A6C34878D82A}">
+                    <a16:rowId xmlns:a16="http://schemas.microsoft.com/office/drawing/2014/main" val="2143537897"/>
+                  </a:ext>
+                </a:extLst>
+              </a:tr>
+              <a:tr h="370840">
+                <a:tc>
+                  <a:txBody>
+                    <a:bodyPr/>
+                    <a:lstStyle/>
+                    <a:p>
+                      <a:r>
+                        <a:rPr lang="ru-RU" dirty="0"/>
+                        <a:t>Паттерны</a:t>
+                      </a:r>
+                    </a:p>
+                  </a:txBody>
+                  <a:tcPr/>
+                </a:tc>
+                <a:tc>
+                  <a:txBody>
+                    <a:bodyPr/>
+                    <a:lstStyle/>
+                    <a:p>
+                      <a:r>
+                        <a:rPr lang="ru-RU" dirty="0"/>
+                        <a:t>Паттерн</a:t>
+                      </a:r>
+                      <a:r>
+                        <a:rPr lang="ru-RU" baseline="0" dirty="0"/>
+                        <a:t> – набор </a:t>
+                      </a:r>
+                      <a:r>
+                        <a:rPr lang="ru-RU" baseline="0" dirty="0" err="1"/>
+                        <a:t>фичей</a:t>
+                      </a:r>
+                      <a:r>
+                        <a:rPr lang="ru-RU" baseline="0" dirty="0"/>
+                        <a:t> (запись, строка)</a:t>
+                      </a:r>
+                      <a:endParaRPr lang="ru-RU" dirty="0"/>
+                    </a:p>
+                  </a:txBody>
+                  <a:tcPr/>
+                </a:tc>
+                <a:tc>
+                  <a:txBody>
+                    <a:bodyPr/>
+                    <a:lstStyle/>
+                    <a:p>
+                      <a:r>
+                        <a:rPr lang="ru-RU" dirty="0"/>
+                        <a:t>Последовательный паттерн (его еще нужно преобразовать в </a:t>
+                      </a:r>
+                      <a:r>
+                        <a:rPr lang="ru-RU" dirty="0" err="1"/>
+                        <a:t>фичи</a:t>
+                      </a:r>
+                      <a:r>
+                        <a:rPr lang="ru-RU" dirty="0"/>
+                        <a:t>)</a:t>
+                      </a:r>
+                    </a:p>
+                  </a:txBody>
+                  <a:tcPr/>
+                </a:tc>
+                <a:extLst>
+                  <a:ext uri="{0D108BD9-81ED-4DB2-BD59-A6C34878D82A}">
+                    <a16:rowId xmlns:a16="http://schemas.microsoft.com/office/drawing/2014/main" val="412694433"/>
+                  </a:ext>
+                </a:extLst>
+              </a:tr>
+            </a:tbl>
+          </a:graphicData>
+        </a:graphic>
+      </p:graphicFrame>
+      <p:sp>
+        <p:nvSpPr>
+          <p:cNvPr id="5" name="Прямоугольник 4"/>
+          <p:cNvSpPr/>
+          <p:nvPr/>
+        </p:nvSpPr>
+        <p:spPr>
+          <a:xfrm>
+            <a:off x="421340" y="5118864"/>
+            <a:ext cx="10703859" cy="646331"/>
+          </a:xfrm>
+          <a:prstGeom prst="rect">
+            <a:avLst/>
+          </a:prstGeom>
+        </p:spPr>
+        <p:txBody>
+          <a:bodyPr wrap="square">
+            <a:spAutoFit/>
+          </a:bodyPr>
+          <a:lstStyle/>
+          <a:p>
+            <a:pPr lvl="0" eaLnBrk="0" fontAlgn="base" hangingPunct="0">
               <a:spcBef>
-                <a:spcPts val="0"/>
+                <a:spcPct val="0"/>
               </a:spcBef>
+              <a:spcAft>
+                <a:spcPct val="0"/>
+              </a:spcAft>
             </a:pPr>
             <a:r>
-              <a:rPr lang="ru-RU" altLang="ru-RU" sz="2300" b="1" dirty="0"/>
-              <a:t>Эндогенные ф</a:t>
-            </a:r>
-            <a:r>
-              <a:rPr lang="en-US" sz="2300" b="1" dirty="0" err="1"/>
-              <a:t>акторы</a:t>
-            </a:r>
-            <a:r>
-              <a:rPr lang="en-US" sz="2300" dirty="0"/>
-              <a:t>, </a:t>
-            </a:r>
-            <a:r>
-              <a:rPr lang="en-US" sz="2300" dirty="0" err="1"/>
-              <a:t>очевидно</a:t>
-            </a:r>
-            <a:r>
-              <a:rPr lang="en-US" sz="2300" dirty="0"/>
-              <a:t> </a:t>
-            </a:r>
-            <a:r>
-              <a:rPr lang="en-US" sz="2300" dirty="0" err="1"/>
-              <a:t>коррелирующие</a:t>
-            </a:r>
-            <a:r>
-              <a:rPr lang="en-US" sz="2300" dirty="0"/>
-              <a:t> с </a:t>
-            </a:r>
-            <a:r>
-              <a:rPr lang="ru-RU" sz="2300" dirty="0"/>
-              <a:t>ВР</a:t>
-            </a:r>
-            <a:r>
-              <a:rPr lang="en-US" sz="2300" dirty="0"/>
+              <a:rPr lang="ru-RU" altLang="ru-RU" b="1" dirty="0">
+                <a:latin typeface="system-ui"/>
+              </a:rPr>
+              <a:t>Прогнозирование ВР</a:t>
+            </a:r>
+            <a:r>
+              <a:rPr lang="ru-RU" altLang="ru-RU" dirty="0">
+                <a:latin typeface="system-ui"/>
+              </a:rPr>
+              <a:t> - это не то же самое, что контролируемое обучение (с учителем), в т.ч. задача регрессии, например, в </a:t>
+            </a:r>
+            <a:r>
+              <a:rPr lang="ru-RU" altLang="ru-RU" dirty="0" err="1">
+                <a:latin typeface="Menlo"/>
+              </a:rPr>
+              <a:t>scikit-learn</a:t>
+            </a:r>
+            <a:r>
+              <a:rPr lang="ru-RU" altLang="ru-RU" dirty="0">
+                <a:latin typeface="system-ui"/>
+              </a:rPr>
               <a:t>. </a:t>
             </a:r>
-            <a:endParaRPr lang="ru-RU" sz="2300" dirty="0" smtClean="0"/>
-          </a:p>
-          <a:p>
-            <a:pPr lvl="1">
-              <a:lnSpc>
-                <a:spcPct val="120000"/>
-              </a:lnSpc>
-              <a:spcBef>
-                <a:spcPts val="0"/>
-              </a:spcBef>
-            </a:pPr>
-            <a:r>
-              <a:rPr lang="ru-RU" sz="2300" dirty="0" smtClean="0"/>
-              <a:t>Лаги ВР, преобразованные значения, значения автокорреляций, тренда или сезонности, и </a:t>
-            </a:r>
-            <a:r>
-              <a:rPr lang="ru-RU" sz="2300" dirty="0" err="1" smtClean="0"/>
-              <a:t>тд</a:t>
-            </a:r>
-            <a:endParaRPr lang="ru-RU" sz="2300" dirty="0" smtClean="0"/>
-          </a:p>
-          <a:p>
-            <a:pPr>
-              <a:lnSpc>
-                <a:spcPct val="120000"/>
-              </a:lnSpc>
-              <a:spcBef>
-                <a:spcPts val="0"/>
-              </a:spcBef>
-            </a:pPr>
-            <a:r>
-              <a:rPr lang="ru-RU" sz="2300" b="1" dirty="0" smtClean="0"/>
-              <a:t>Э</a:t>
-            </a:r>
-            <a:r>
-              <a:rPr lang="en-US" sz="2300" b="1" dirty="0" err="1" smtClean="0"/>
-              <a:t>кзогенны</a:t>
-            </a:r>
-            <a:r>
-              <a:rPr lang="ru-RU" sz="2300" b="1" dirty="0" smtClean="0"/>
-              <a:t>е факторы</a:t>
-            </a:r>
-            <a:r>
-              <a:rPr lang="ru-RU" sz="2300" dirty="0" smtClean="0"/>
-              <a:t> – факторы, не имеющие линейной корреляции с ВР, но объясняющие его поведения  </a:t>
-            </a:r>
-          </a:p>
-          <a:p>
-            <a:pPr lvl="1">
-              <a:lnSpc>
-                <a:spcPct val="120000"/>
-              </a:lnSpc>
-              <a:spcBef>
-                <a:spcPts val="0"/>
-              </a:spcBef>
-            </a:pPr>
-            <a:r>
-              <a:rPr lang="ru-RU" altLang="ru-RU" sz="2300" dirty="0" smtClean="0"/>
-              <a:t>Прогноз энергопотребления – </a:t>
-            </a:r>
-            <a:r>
-              <a:rPr lang="en-US" altLang="ru-RU" sz="2300" dirty="0" err="1" smtClean="0"/>
-              <a:t>exdog</a:t>
-            </a:r>
-            <a:r>
-              <a:rPr lang="en-US" altLang="ru-RU" sz="2300" dirty="0" smtClean="0"/>
-              <a:t>: </a:t>
-            </a:r>
-            <a:r>
-              <a:rPr lang="ru-RU" altLang="ru-RU" sz="2300" dirty="0" smtClean="0"/>
-              <a:t>Температура, время суток, день недели</a:t>
-            </a:r>
-          </a:p>
-          <a:p>
-            <a:pPr marL="447675" lvl="2" indent="0" eaLnBrk="0" fontAlgn="base" hangingPunct="0">
-              <a:lnSpc>
-                <a:spcPct val="120000"/>
-              </a:lnSpc>
-              <a:spcBef>
-                <a:spcPts val="0"/>
-              </a:spcBef>
-              <a:buNone/>
-            </a:pPr>
-            <a:r>
-              <a:rPr lang="ru-RU" altLang="ru-RU" sz="2400" b="1" dirty="0" smtClean="0"/>
-              <a:t>Требования к экзогенным факторам</a:t>
-            </a:r>
-          </a:p>
-          <a:p>
-            <a:pPr lvl="2" eaLnBrk="0" fontAlgn="base" hangingPunct="0">
-              <a:lnSpc>
-                <a:spcPct val="100000"/>
-              </a:lnSpc>
-              <a:spcBef>
-                <a:spcPts val="200"/>
-              </a:spcBef>
-            </a:pPr>
-            <a:r>
-              <a:rPr lang="ru-RU" altLang="ru-RU" sz="1900" dirty="0" smtClean="0"/>
-              <a:t>На практике </a:t>
-            </a:r>
-            <a:r>
-              <a:rPr lang="ru-RU" altLang="ru-RU" sz="1900" dirty="0" err="1" smtClean="0"/>
-              <a:t>экзогенность</a:t>
-            </a:r>
-            <a:r>
-              <a:rPr lang="ru-RU" altLang="ru-RU" sz="1900" dirty="0" smtClean="0"/>
-              <a:t> устанавливается экспертом в предметной области!</a:t>
-            </a:r>
-          </a:p>
-          <a:p>
-            <a:pPr lvl="2" eaLnBrk="0" fontAlgn="base" hangingPunct="0">
-              <a:lnSpc>
-                <a:spcPct val="100000"/>
-              </a:lnSpc>
-              <a:spcBef>
-                <a:spcPts val="200"/>
-              </a:spcBef>
-            </a:pPr>
-            <a:r>
-              <a:rPr lang="ru-RU" altLang="ru-RU" sz="1900" dirty="0" smtClean="0"/>
-              <a:t>Экзогенные факторы объясняют ВР – то есть их использование статистически значимо и стабильно улучшает прогноз. В ином случае лучше фактор не использовать.</a:t>
-            </a:r>
-          </a:p>
-          <a:p>
-            <a:pPr lvl="2" eaLnBrk="0" fontAlgn="base" hangingPunct="0">
-              <a:lnSpc>
-                <a:spcPct val="100000"/>
-              </a:lnSpc>
-              <a:spcBef>
-                <a:spcPts val="200"/>
-              </a:spcBef>
-            </a:pPr>
-            <a:r>
-              <a:rPr lang="ru-RU" altLang="ru-RU" sz="1900" dirty="0"/>
-              <a:t>Экзогенные </a:t>
-            </a:r>
-            <a:r>
-              <a:rPr lang="ru-RU" altLang="ru-RU" sz="1900" dirty="0" smtClean="0"/>
-              <a:t>факторы должны быть «всегда в наличии», не пропадать</a:t>
-            </a:r>
-          </a:p>
-          <a:p>
-            <a:pPr lvl="2" eaLnBrk="0" fontAlgn="base" hangingPunct="0">
-              <a:lnSpc>
-                <a:spcPct val="100000"/>
-              </a:lnSpc>
-              <a:spcBef>
-                <a:spcPts val="200"/>
-              </a:spcBef>
-            </a:pPr>
-            <a:r>
-              <a:rPr lang="ru-RU" altLang="ru-RU" sz="1900" dirty="0"/>
-              <a:t>Экзогенные </a:t>
-            </a:r>
-            <a:r>
-              <a:rPr lang="ru-RU" altLang="ru-RU" sz="1900" dirty="0" smtClean="0"/>
-              <a:t>факторы не должны приводить к «утечке данных» (созданию ложных корреляций) – они должны не завесить от ВР</a:t>
-            </a:r>
-          </a:p>
-          <a:p>
-            <a:pPr lvl="2" eaLnBrk="0" fontAlgn="base" hangingPunct="0">
-              <a:lnSpc>
-                <a:spcPct val="100000"/>
-              </a:lnSpc>
-              <a:spcBef>
-                <a:spcPts val="200"/>
-              </a:spcBef>
-            </a:pPr>
-            <a:r>
-              <a:rPr lang="ru-RU" altLang="ru-RU" sz="1900" dirty="0" smtClean="0"/>
-              <a:t>Для многомерных ВР экзогенные факторы могут быть локальными или глобальными – то есть общей информацией между ВР</a:t>
-            </a:r>
-            <a:endParaRPr lang="en-US" altLang="ru-RU" sz="1900" dirty="0" smtClean="0"/>
           </a:p>
         </p:txBody>
       </p:sp>
     </p:spTree>
     <p:extLst>
       <p:ext uri="{BB962C8B-B14F-4D97-AF65-F5344CB8AC3E}">
-        <p14:creationId xmlns:p14="http://schemas.microsoft.com/office/powerpoint/2010/main" val="1968690726"/>
+        <p14:creationId xmlns:p14="http://schemas.microsoft.com/office/powerpoint/2010/main" val="512408469"/>
       </p:ext>
     </p:extLst>
   </p:cSld>
   <p:clrMapOvr>
     <a:masterClrMapping/>
   </p:clrMapOvr>
-  <p:timing>
-    <p:tnLst>
-      <p:par>
-        <p:cTn id="1" dur="indefinite" restart="never" nodeType="tmRoot"/>
-      </p:par>
-    </p:tnLst>
-  </p:timing>
 </p:sld>
 </file>
 
@@ -4441,64 +4475,18 @@
         </p:nvSpPr>
         <p:spPr>
           <a:xfrm>
-            <a:off x="280146" y="238498"/>
-            <a:ext cx="11111753" cy="656851"/>
+            <a:off x="215712" y="174625"/>
+            <a:ext cx="11147613" cy="898899"/>
           </a:xfrm>
         </p:spPr>
         <p:txBody>
-          <a:bodyPr>
-            <a:normAutofit fontScale="90000"/>
-          </a:bodyPr>
-          <a:lstStyle/>
-          <a:p>
-            <a:pPr lvl="0"/>
-            <a:r>
-              <a:rPr lang="ru-RU" altLang="ru-RU" b="1" dirty="0" smtClean="0">
-                <a:solidFill>
-                  <a:srgbClr val="0D47A1"/>
-                </a:solidFill>
-                <a:latin typeface="system-ui"/>
-              </a:rPr>
-              <a:t>Экзогенные переменные</a:t>
-            </a:r>
-            <a:r>
-              <a:rPr lang="en-US" altLang="ru-RU" b="1" dirty="0">
-                <a:solidFill>
-                  <a:srgbClr val="0D47A1"/>
-                </a:solidFill>
-                <a:latin typeface="system-ui"/>
-              </a:rPr>
-              <a:t>.</a:t>
-            </a:r>
-            <a:r>
-              <a:rPr lang="ru-RU" altLang="ru-RU" b="1" dirty="0" smtClean="0">
-                <a:solidFill>
-                  <a:srgbClr val="0D47A1"/>
-                </a:solidFill>
-                <a:latin typeface="system-ui"/>
-              </a:rPr>
-              <a:t> Три </a:t>
-            </a:r>
-            <a:r>
-              <a:rPr lang="ru-RU" altLang="ru-RU" b="1" dirty="0">
-                <a:solidFill>
-                  <a:srgbClr val="0D47A1"/>
-                </a:solidFill>
-                <a:latin typeface="system-ui"/>
-              </a:rPr>
-              <a:t>группы</a:t>
-            </a:r>
-            <a:r>
-              <a:rPr lang="ru-RU" altLang="ru-RU" dirty="0" smtClean="0"/>
-              <a:t>:</a:t>
-            </a:r>
-            <a:r>
-              <a:rPr lang="ru-RU" altLang="ru-RU" dirty="0" smtClean="0">
-                <a:latin typeface="system-ui"/>
-              </a:rPr>
-              <a:t> </a:t>
-            </a:r>
-            <a:endParaRPr lang="ru-RU" dirty="0"/>
+          <a:bodyPr/>
+          <a:lstStyle/>
+          <a:p>
+            <a:r>
+              <a:rPr lang="ru-RU" dirty="0"/>
+              <a:t>Замечания к процедуре редукции</a:t>
+            </a:r>
           </a:p>
         </p:txBody>
       </p:sp>
@@ -4514,22 +4502,22 @@
         </p:nvSpPr>
         <p:spPr>
           <a:xfrm>
-            <a:off x="134470" y="761998"/>
-            <a:ext cx="11949953" cy="5862919"/>
+            <a:off x="215712" y="940174"/>
+            <a:ext cx="11985813" cy="5154704"/>
           </a:xfrm>
         </p:spPr>
         <p:txBody>
           <a:bodyPr>
-            <a:normAutofit fontScale="92500"/>
+            <a:noAutofit/>
           </a:bodyPr>
           <a:lstStyle/>
           <a:p>
             <a:pPr marL="0" lvl="0" indent="0" eaLnBrk="0" fontAlgn="base" hangingPunct="0">
               <a:lnSpc>
-                <a:spcPct val="120000"/>
+                <a:spcPct val="100000"/>
               </a:lnSpc>
               <a:spcBef>
-                <a:spcPts val="600"/>
+                <a:spcPts val="300"/>
               </a:spcBef>
               <a:spcAft>
                 <a:spcPct val="0"/>
@@ -4537,319 +4525,10 @@
               <a:buNone/>
             </a:pPr>
             <a:r>
-              <a:rPr lang="ru-RU" altLang="ru-RU" b="1" dirty="0" smtClean="0"/>
-              <a:t>Статические </a:t>
-            </a:r>
-            <a:r>
-              <a:rPr lang="ru-RU" altLang="ru-RU" b="1" dirty="0"/>
-              <a:t>экзогенные переменные</a:t>
-            </a:r>
-            <a:r>
-              <a:rPr lang="ru-RU" altLang="ru-RU" dirty="0"/>
-              <a:t>: </a:t>
-            </a:r>
-            <a:endParaRPr lang="en-US" altLang="ru-RU" dirty="0"/>
-          </a:p>
-          <a:p>
-            <a:pPr lvl="1" eaLnBrk="0" fontAlgn="base" hangingPunct="0">
-              <a:lnSpc>
-                <a:spcPct val="120000"/>
-              </a:lnSpc>
-              <a:spcBef>
-                <a:spcPct val="0"/>
-              </a:spcBef>
-              <a:spcAft>
-                <a:spcPct val="0"/>
-              </a:spcAft>
-            </a:pPr>
-            <a:r>
-              <a:rPr lang="ru-RU" altLang="ru-RU" dirty="0" smtClean="0"/>
-              <a:t>несут </a:t>
-            </a:r>
-            <a:r>
-              <a:rPr lang="ru-RU" altLang="ru-RU" dirty="0"/>
-              <a:t>неизменную во времени информацию для каждого временного ряда</a:t>
-            </a:r>
-            <a:r>
-              <a:rPr lang="ru-RU" altLang="ru-RU" dirty="0" smtClean="0"/>
-              <a:t>.</a:t>
-            </a:r>
-            <a:endParaRPr lang="en-US" altLang="ru-RU" dirty="0" smtClean="0"/>
-          </a:p>
-          <a:p>
-            <a:pPr lvl="2" eaLnBrk="0" fontAlgn="base" hangingPunct="0">
-              <a:lnSpc>
-                <a:spcPct val="120000"/>
-              </a:lnSpc>
-              <a:spcBef>
-                <a:spcPct val="0"/>
-              </a:spcBef>
-              <a:spcAft>
-                <a:spcPct val="0"/>
-              </a:spcAft>
-            </a:pPr>
-            <a:r>
-              <a:rPr lang="ru-RU" altLang="ru-RU" sz="2400" b="1" dirty="0" smtClean="0"/>
-              <a:t>Напр. </a:t>
-            </a:r>
-            <a:r>
-              <a:rPr lang="ru-RU" altLang="ru-RU" sz="2400" dirty="0"/>
-              <a:t> </a:t>
-            </a:r>
-            <a:r>
-              <a:rPr lang="ru-RU" altLang="ru-RU" sz="2400" dirty="0" smtClean="0"/>
-              <a:t>идентификаторы </a:t>
-            </a:r>
-            <a:r>
-              <a:rPr lang="ru-RU" altLang="ru-RU" sz="2400" dirty="0"/>
-              <a:t>регионов, групп </a:t>
-            </a:r>
-            <a:r>
-              <a:rPr lang="ru-RU" altLang="ru-RU" sz="2400" dirty="0" smtClean="0"/>
-              <a:t>товаров </a:t>
-            </a:r>
-            <a:r>
-              <a:rPr lang="ru-RU" altLang="ru-RU" sz="2400" dirty="0"/>
-              <a:t>и т. д.</a:t>
-            </a:r>
-          </a:p>
-          <a:p>
-            <a:pPr eaLnBrk="0" fontAlgn="base" hangingPunct="0">
-              <a:lnSpc>
-                <a:spcPct val="120000"/>
-              </a:lnSpc>
-              <a:spcBef>
-                <a:spcPct val="0"/>
-              </a:spcBef>
-              <a:spcAft>
-                <a:spcPct val="0"/>
-              </a:spcAft>
-            </a:pPr>
-            <a:r>
-              <a:rPr lang="ru-RU" altLang="ru-RU" b="1" dirty="0"/>
-              <a:t>Исторические экзогенные переменные</a:t>
-            </a:r>
-            <a:r>
-              <a:rPr lang="ru-RU" altLang="ru-RU" dirty="0"/>
-              <a:t>: </a:t>
-            </a:r>
-            <a:r>
-              <a:rPr lang="ru-RU" altLang="ru-RU" dirty="0" smtClean="0"/>
-              <a:t>переменная </a:t>
-            </a:r>
-            <a:r>
-              <a:rPr lang="ru-RU" altLang="ru-RU" dirty="0"/>
-              <a:t>ограничена прошлыми наблюдаемыми значениями. </a:t>
-            </a:r>
-            <a:endParaRPr lang="ru-RU" altLang="ru-RU" dirty="0" smtClean="0"/>
-          </a:p>
-          <a:p>
-            <a:pPr lvl="1" eaLnBrk="0" fontAlgn="base" hangingPunct="0">
-              <a:lnSpc>
-                <a:spcPct val="120000"/>
-              </a:lnSpc>
-              <a:spcBef>
-                <a:spcPct val="0"/>
-              </a:spcBef>
-              <a:spcAft>
-                <a:spcPct val="0"/>
-              </a:spcAft>
-            </a:pPr>
-            <a:r>
-              <a:rPr lang="ru-RU" altLang="ru-RU" sz="2600" dirty="0"/>
-              <a:t>Причинность можно проверить напр. </a:t>
-            </a:r>
-            <a:r>
-              <a:rPr lang="ru-RU" altLang="ru-RU" sz="2600" dirty="0" smtClean="0"/>
-              <a:t>при помощи Теста </a:t>
-            </a:r>
-            <a:r>
-              <a:rPr lang="ru-RU" altLang="ru-RU" sz="2600" dirty="0" err="1" smtClean="0"/>
-              <a:t>Гранжера</a:t>
-            </a:r>
-            <a:r>
-              <a:rPr lang="ru-RU" altLang="ru-RU" sz="2600" dirty="0"/>
-              <a:t> </a:t>
-            </a:r>
-            <a:r>
-              <a:rPr lang="ru-RU" altLang="ru-RU" sz="2600" dirty="0" smtClean="0"/>
-              <a:t>на казуальность.</a:t>
-            </a:r>
-            <a:endParaRPr lang="ru-RU" altLang="ru-RU" sz="2600" dirty="0"/>
-          </a:p>
-          <a:p>
-            <a:pPr eaLnBrk="0" fontAlgn="base" hangingPunct="0">
-              <a:lnSpc>
-                <a:spcPct val="120000"/>
-              </a:lnSpc>
-              <a:spcBef>
-                <a:spcPct val="0"/>
-              </a:spcBef>
-              <a:spcAft>
-                <a:spcPct val="0"/>
-              </a:spcAft>
-            </a:pPr>
-            <a:r>
-              <a:rPr lang="ru-RU" altLang="ru-RU" b="1" dirty="0"/>
-              <a:t>Будущие экзогенные переменные</a:t>
-            </a:r>
-            <a:r>
-              <a:rPr lang="ru-RU" altLang="ru-RU" dirty="0"/>
-              <a:t>: </a:t>
-            </a:r>
-            <a:r>
-              <a:rPr lang="ru-RU" altLang="ru-RU" dirty="0" smtClean="0"/>
-              <a:t> </a:t>
-            </a:r>
-            <a:r>
-              <a:rPr lang="ru-RU" altLang="ru-RU" dirty="0"/>
-              <a:t>доступны на момент прогнозирования. </a:t>
-            </a:r>
-            <a:endParaRPr lang="ru-RU" altLang="ru-RU" dirty="0" smtClean="0"/>
-          </a:p>
-          <a:p>
-            <a:pPr lvl="1" eaLnBrk="0" fontAlgn="base" hangingPunct="0">
-              <a:lnSpc>
-                <a:spcPct val="120000"/>
-              </a:lnSpc>
-              <a:spcBef>
-                <a:spcPct val="0"/>
-              </a:spcBef>
-              <a:spcAft>
-                <a:spcPct val="0"/>
-              </a:spcAft>
-            </a:pPr>
-            <a:r>
-              <a:rPr lang="ru-RU" altLang="ru-RU" dirty="0" smtClean="0"/>
-              <a:t>Напр. календарные </a:t>
-            </a:r>
-            <a:r>
-              <a:rPr lang="ru-RU" altLang="ru-RU" dirty="0"/>
-              <a:t>переменные, известные события, </a:t>
-            </a:r>
-            <a:r>
-              <a:rPr lang="ru-RU" altLang="ru-RU" dirty="0" smtClean="0"/>
-              <a:t>(напр. </a:t>
-            </a:r>
-            <a:r>
-              <a:rPr lang="ru-RU" altLang="ru-RU" dirty="0"/>
-              <a:t>запланированные </a:t>
-            </a:r>
-            <a:r>
-              <a:rPr lang="ru-RU" altLang="ru-RU" dirty="0" smtClean="0"/>
-              <a:t>акции), прогнозы факторов (напр. прогноз погоды для прогноза электропотребления на 1 день).</a:t>
-            </a:r>
-            <a:endParaRPr lang="en-US" altLang="ru-RU" dirty="0" smtClean="0"/>
-          </a:p>
-          <a:p>
-            <a:pPr lvl="1" eaLnBrk="0" fontAlgn="base" hangingPunct="0">
-              <a:lnSpc>
-                <a:spcPct val="120000"/>
-              </a:lnSpc>
-              <a:spcBef>
-                <a:spcPct val="0"/>
-              </a:spcBef>
-              <a:spcAft>
-                <a:spcPct val="0"/>
-              </a:spcAft>
-            </a:pPr>
-            <a:r>
-              <a:rPr lang="ru-RU" altLang="ru-RU" dirty="0" smtClean="0"/>
-              <a:t>Важно чтобы переменная всегда в будущем была известна и не несла </a:t>
-            </a:r>
-            <a:r>
-              <a:rPr lang="en-US" altLang="ru-RU" dirty="0" smtClean="0"/>
-              <a:t>data leaks</a:t>
-            </a:r>
-          </a:p>
-          <a:p>
-            <a:pPr lvl="1" eaLnBrk="0" fontAlgn="base" hangingPunct="0">
-              <a:lnSpc>
-                <a:spcPct val="120000"/>
-              </a:lnSpc>
-              <a:spcBef>
-                <a:spcPct val="0"/>
-              </a:spcBef>
-              <a:spcAft>
-                <a:spcPct val="0"/>
-              </a:spcAft>
-            </a:pPr>
-            <a:r>
-              <a:rPr lang="ru-RU" altLang="ru-RU" dirty="0" smtClean="0"/>
-              <a:t>Для проверки </a:t>
-            </a:r>
-          </a:p>
-          <a:p>
-            <a:pPr lvl="2" eaLnBrk="0" fontAlgn="base" hangingPunct="0">
-              <a:lnSpc>
-                <a:spcPct val="120000"/>
-              </a:lnSpc>
-              <a:spcBef>
-                <a:spcPct val="0"/>
-              </a:spcBef>
-              <a:spcAft>
-                <a:spcPct val="0"/>
-              </a:spcAft>
-            </a:pPr>
-            <a:r>
-              <a:rPr lang="ru-RU" altLang="ru-RU" dirty="0" smtClean="0"/>
-              <a:t>обратный тест на казуальность (фактор на ВР) </a:t>
-            </a:r>
-          </a:p>
-          <a:p>
-            <a:pPr lvl="2" eaLnBrk="0" fontAlgn="base" hangingPunct="0">
-              <a:lnSpc>
-                <a:spcPct val="120000"/>
-              </a:lnSpc>
-              <a:spcBef>
-                <a:spcPct val="0"/>
-              </a:spcBef>
-              <a:spcAft>
-                <a:spcPct val="0"/>
-              </a:spcAft>
-            </a:pPr>
-            <a:r>
-              <a:rPr lang="en-US" dirty="0"/>
-              <a:t>Lead-Lag </a:t>
-            </a:r>
-            <a:r>
-              <a:rPr lang="en-US" dirty="0" smtClean="0"/>
-              <a:t>Analysis</a:t>
-            </a:r>
-            <a:r>
-              <a:rPr lang="ru-RU" dirty="0" smtClean="0"/>
-              <a:t> – на сколько далеко нужно сместить ВР чтобы возникла казуальность?</a:t>
-            </a:r>
-            <a:endParaRPr lang="en-US" b="1" dirty="0"/>
-          </a:p>
-          <a:p>
-            <a:pPr lvl="1" eaLnBrk="0" fontAlgn="base" hangingPunct="0">
-              <a:lnSpc>
-                <a:spcPct val="120000"/>
-              </a:lnSpc>
-              <a:spcBef>
-                <a:spcPct val="0"/>
-              </a:spcBef>
-              <a:spcAft>
-                <a:spcPct val="0"/>
-              </a:spcAft>
-            </a:pPr>
-            <a:endParaRPr lang="ru-RU" altLang="ru-RU" dirty="0"/>
-          </a:p>
-          <a:p>
-            <a:pPr marL="0" lvl="0" indent="0" eaLnBrk="0" fontAlgn="base" hangingPunct="0">
-              <a:lnSpc>
-                <a:spcPct val="100000"/>
-              </a:lnSpc>
-              <a:spcBef>
-                <a:spcPct val="0"/>
-              </a:spcBef>
-              <a:spcAft>
-                <a:spcPct val="0"/>
-              </a:spcAft>
-              <a:buNone/>
-            </a:pPr>
-            <a:endParaRPr kumimoji="0" lang="ru-RU" altLang="ru-RU" sz="5400" b="0" i="0" u="none" strike="noStrike" cap="none" normalizeH="0" baseline="0" dirty="0" smtClean="0">
+              <a:rPr lang="ru-RU" altLang="ru-RU" sz="2300" b="1" dirty="0"/>
+              <a:t>Типичные ошибки при наивном сопоставлении задач регрессии и предсказания:</a:t>
+            </a:r>
+            <a:endParaRPr kumimoji="0" lang="ru-RU" altLang="ru-RU" sz="2300" b="1" i="0" u="none" strike="noStrike" cap="none" normalizeH="0" baseline="0" dirty="0">
               <a:ln>
                 <a:noFill/>
               </a:ln>
@@ -4860,27 +4539,134 @@
             </a:endParaRPr>
           </a:p>
           <a:p>
-            <a:endParaRPr lang="ru-RU" dirty="0"/>
+            <a:pPr eaLnBrk="0" fontAlgn="base" hangingPunct="0">
+              <a:lnSpc>
+                <a:spcPct val="100000"/>
+              </a:lnSpc>
+              <a:spcBef>
+                <a:spcPts val="300"/>
+              </a:spcBef>
+              <a:spcAft>
+                <a:spcPct val="0"/>
+              </a:spcAft>
+            </a:pPr>
+            <a:r>
+              <a:rPr lang="ru-RU" altLang="ru-RU" sz="2300" dirty="0"/>
+              <a:t>Чрезмерно оптимистичная оценка (завышенная точность), </a:t>
+            </a:r>
+          </a:p>
+          <a:p>
+            <a:pPr eaLnBrk="0" fontAlgn="base" hangingPunct="0">
+              <a:lnSpc>
+                <a:spcPct val="100000"/>
+              </a:lnSpc>
+              <a:spcBef>
+                <a:spcPts val="300"/>
+              </a:spcBef>
+              <a:spcAft>
+                <a:spcPct val="0"/>
+              </a:spcAft>
+            </a:pPr>
+            <a:r>
+              <a:rPr lang="ru-RU" altLang="ru-RU" sz="2300" dirty="0"/>
+              <a:t>Появление ложных корреляций между данными, </a:t>
+            </a:r>
+          </a:p>
+          <a:p>
+            <a:pPr lvl="1" eaLnBrk="0" fontAlgn="base" hangingPunct="0">
+              <a:lnSpc>
+                <a:spcPct val="100000"/>
+              </a:lnSpc>
+              <a:spcBef>
+                <a:spcPts val="300"/>
+              </a:spcBef>
+              <a:spcAft>
+                <a:spcPct val="0"/>
+              </a:spcAft>
+            </a:pPr>
+            <a:r>
+              <a:rPr lang="ru-RU" altLang="ru-RU" sz="2300" dirty="0"/>
+              <a:t>Напр. перемешанные в таблице данные во временном ряду были бы значительно разнесены во времени. </a:t>
+            </a:r>
+          </a:p>
+          <a:p>
+            <a:pPr eaLnBrk="0" fontAlgn="base" hangingPunct="0">
+              <a:lnSpc>
+                <a:spcPct val="100000"/>
+              </a:lnSpc>
+              <a:spcBef>
+                <a:spcPts val="300"/>
+              </a:spcBef>
+              <a:spcAft>
+                <a:spcPct val="0"/>
+              </a:spcAft>
+            </a:pPr>
+            <a:r>
+              <a:rPr lang="ru-RU" altLang="ru-RU" sz="2300" dirty="0"/>
+              <a:t>Случайная кросс-</a:t>
+            </a:r>
+            <a:r>
+              <a:rPr lang="ru-RU" altLang="ru-RU" sz="2300" dirty="0" err="1"/>
+              <a:t>валидация</a:t>
+            </a:r>
+            <a:r>
+              <a:rPr lang="ru-RU" altLang="ru-RU" sz="2300" dirty="0"/>
+              <a:t> также дает смещенную оценку</a:t>
+            </a:r>
+          </a:p>
+          <a:p>
+            <a:pPr marL="0" lvl="0" indent="0" eaLnBrk="0" fontAlgn="base" hangingPunct="0">
+              <a:lnSpc>
+                <a:spcPct val="100000"/>
+              </a:lnSpc>
+              <a:spcBef>
+                <a:spcPts val="300"/>
+              </a:spcBef>
+              <a:spcAft>
+                <a:spcPct val="0"/>
+              </a:spcAft>
+              <a:buNone/>
+            </a:pPr>
+            <a:endParaRPr lang="ru-RU" altLang="ru-RU" sz="2100" dirty="0"/>
+          </a:p>
+          <a:p>
+            <a:pPr marL="0" lvl="0" indent="0" eaLnBrk="0" fontAlgn="base" hangingPunct="0">
+              <a:lnSpc>
+                <a:spcPct val="100000"/>
+              </a:lnSpc>
+              <a:spcBef>
+                <a:spcPts val="300"/>
+              </a:spcBef>
+              <a:spcAft>
+                <a:spcPct val="0"/>
+              </a:spcAft>
+              <a:buNone/>
+            </a:pPr>
+            <a:endParaRPr kumimoji="0" lang="ru-RU" altLang="ru-RU" sz="2100" b="0" i="0" u="none" strike="noStrike" cap="none" normalizeH="0" baseline="0" dirty="0">
+              <a:ln>
+                <a:noFill/>
+              </a:ln>
+              <a:solidFill>
+                <a:schemeClr val="tx1"/>
+              </a:solidFill>
+              <a:effectLst/>
+            </a:endParaRPr>
+          </a:p>
+          <a:p>
+            <a:endParaRPr lang="ru-RU" sz="2100" dirty="0"/>
           </a:p>
         </p:txBody>
       </p:sp>
     </p:spTree>
     <p:extLst>
       <p:ext uri="{BB962C8B-B14F-4D97-AF65-F5344CB8AC3E}">
-        <p14:creationId xmlns:p14="http://schemas.microsoft.com/office/powerpoint/2010/main" val="1608365178"/>
+        <p14:creationId xmlns:p14="http://schemas.microsoft.com/office/powerpoint/2010/main" val="628570510"/>
       </p:ext>
     </p:extLst>
   </p:cSld>
   <p:clrMapOvr>
     <a:masterClrMapping/>
   </p:clrMapOvr>
-  <p:timing>
-    <p:tnLst>
-      <p:par>
-        <p:cTn id="1" dur="indefinite" restart="never" nodeType="tmRoot"/>
-      </p:par>
-    </p:tnLst>
-  </p:timing>
 </p:sld>
 </file>
 
@@ -4913,55 +4699,17 @@
         </p:nvSpPr>
         <p:spPr>
           <a:xfrm>
-            <a:off x="228600" y="266721"/>
-            <a:ext cx="11134725" cy="863600"/>
+            <a:off x="215712" y="174625"/>
+            <a:ext cx="11147613" cy="898899"/>
           </a:xfrm>
         </p:spPr>
         <p:txBody>
           <a:bodyPr/>
           <a:lstStyle/>
           <a:p>
-            <a:pPr lvl="0"/>
-            <a:r>
-              <a:rPr lang="ru-RU" dirty="0" smtClean="0">
-                <a:solidFill>
-                  <a:srgbClr val="2C2C36"/>
-                </a:solidFill>
-                <a:latin typeface="+mn-lt"/>
-              </a:rPr>
-              <a:t>Замечания</a:t>
-            </a:r>
-            <a:endParaRPr lang="ru-RU" dirty="0">
-              <a:latin typeface="+mn-lt"/>
-            </a:endParaRPr>
-          </a:p>
-        </p:txBody>
-      </p:sp>
-      <p:sp>
-        <p:nvSpPr>
-          <p:cNvPr id="3" name="Объект 2"/>
-          <p:cNvSpPr>
-            <a:spLocks noGrp="1"/>
-          </p:cNvSpPr>
-          <p:nvPr>
-            <p:ph idx="1"/>
-          </p:nvPr>
-        </p:nvSpPr>
-        <p:spPr>
-          <a:xfrm>
-            <a:off x="304800" y="1130321"/>
-            <a:ext cx="11601450" cy="5318104"/>
-          </a:xfrm>
-        </p:spPr>
-        <p:txBody>
-          <a:bodyPr>
-            <a:normAutofit lnSpcReduction="10000"/>
-          </a:bodyPr>
-          <a:lstStyle/>
-          <a:p>
-            <a:pPr eaLnBrk="0" fontAlgn="base" hangingPunct="0">
+            <a:pPr lvl="0" eaLnBrk="0" fontAlgn="base" hangingPunct="0">
               <a:lnSpc>
-                <a:spcPct val="110000"/>
+                <a:spcPct val="100000"/>
               </a:lnSpc>
               <a:spcBef>
                 <a:spcPts val="300"/>
@@ -4971,30 +4719,134 @@
               </a:spcAft>
             </a:pPr>
             <a:r>
-              <a:rPr lang="ru-RU" altLang="ru-RU" dirty="0" smtClean="0"/>
-              <a:t>Не </a:t>
-            </a:r>
-            <a:r>
-              <a:rPr lang="ru-RU" altLang="ru-RU" dirty="0"/>
-              <a:t>используйте обычную CV — только </a:t>
-            </a:r>
-            <a:r>
-              <a:rPr lang="ru-RU" altLang="ru-RU" dirty="0" err="1"/>
-              <a:t>time-based</a:t>
-            </a:r>
-            <a:r>
-              <a:rPr lang="ru-RU" altLang="ru-RU" dirty="0"/>
+              <a:rPr lang="ru-RU" altLang="ru-RU" b="1" dirty="0"/>
+              <a:t>Проблемы выбора окна Редукции</a:t>
+            </a:r>
+          </a:p>
+        </p:txBody>
+      </p:sp>
+      <p:sp>
+        <p:nvSpPr>
+          <p:cNvPr id="3" name="Объект 2"/>
+          <p:cNvSpPr>
+            <a:spLocks noGrp="1"/>
+          </p:cNvSpPr>
+          <p:nvPr>
+            <p:ph idx="1"/>
+          </p:nvPr>
+        </p:nvSpPr>
+        <p:spPr>
+          <a:xfrm>
+            <a:off x="215712" y="940174"/>
+            <a:ext cx="11985813" cy="5154704"/>
+          </a:xfrm>
+        </p:spPr>
+        <p:txBody>
+          <a:bodyPr>
+            <a:noAutofit/>
+          </a:bodyPr>
+          <a:lstStyle/>
+          <a:p>
+            <a:pPr marL="0" indent="0" eaLnBrk="0" fontAlgn="base" hangingPunct="0">
+              <a:lnSpc>
+                <a:spcPct val="100000"/>
+              </a:lnSpc>
+              <a:spcBef>
+                <a:spcPts val="300"/>
+              </a:spcBef>
+              <a:spcAft>
+                <a:spcPct val="0"/>
+              </a:spcAft>
+              <a:buNone/>
+            </a:pPr>
+            <a:r>
+              <a:rPr lang="ru-RU" altLang="ru-RU" sz="2300" dirty="0"/>
+              <a:t>Выбор слишком короткого или слишком длинного окна может привести к </a:t>
+            </a:r>
+            <a:br>
+              <a:rPr lang="ru-RU" altLang="ru-RU" sz="2300" dirty="0"/>
+            </a:br>
+            <a:r>
+              <a:rPr lang="ru-RU" altLang="ru-RU" sz="2300" dirty="0">
+                <a:solidFill>
+                  <a:srgbClr val="0D47A1"/>
+                </a:solidFill>
+                <a:hlinkClick r:id="rId2"/>
+              </a:rPr>
+              <a:t>“p-</a:t>
+            </a:r>
+            <a:r>
+              <a:rPr lang="ru-RU" altLang="ru-RU" sz="2300" dirty="0" err="1">
+                <a:solidFill>
+                  <a:srgbClr val="0D47A1"/>
+                </a:solidFill>
+                <a:hlinkClick r:id="rId2"/>
+              </a:rPr>
+              <a:t>value</a:t>
+            </a:r>
+            <a:r>
+              <a:rPr lang="ru-RU" altLang="ru-RU" sz="2300" dirty="0">
+                <a:solidFill>
+                  <a:srgbClr val="0D47A1"/>
+                </a:solidFill>
+                <a:hlinkClick r:id="rId2"/>
+              </a:rPr>
               <a:t> </a:t>
             </a:r>
             <a:r>
-              <a:rPr lang="ru-RU" altLang="ru-RU" dirty="0" smtClean="0"/>
-              <a:t>CV</a:t>
-            </a:r>
-          </a:p>
-          <a:p>
-            <a:pPr eaLnBrk="0" fontAlgn="base" hangingPunct="0">
+              <a:rPr lang="ru-RU" altLang="ru-RU" sz="2300" dirty="0" err="1">
+                <a:solidFill>
+                  <a:srgbClr val="0D47A1"/>
+                </a:solidFill>
+                <a:hlinkClick r:id="rId2"/>
+              </a:rPr>
+              <a:t>hacking</a:t>
+            </a:r>
+            <a:r>
+              <a:rPr lang="ru-RU" altLang="ru-RU" sz="2300" dirty="0">
+                <a:solidFill>
+                  <a:srgbClr val="0D47A1"/>
+                </a:solidFill>
+                <a:hlinkClick r:id="rId2"/>
+              </a:rPr>
+              <a:t>”</a:t>
+            </a:r>
+            <a:r>
+              <a:rPr lang="ru-RU" altLang="ru-RU" sz="2300" dirty="0"/>
+              <a:t> – то есть утечке информации (или появление ложных зависимостей). </a:t>
+            </a:r>
+            <a:endParaRPr lang="en-US" altLang="ru-RU" sz="2300" dirty="0"/>
+          </a:p>
+          <a:p>
+            <a:pPr marL="0" indent="0" eaLnBrk="0" fontAlgn="base" hangingPunct="0">
               <a:lnSpc>
-                <a:spcPct val="110000"/>
+                <a:spcPct val="100000"/>
+              </a:lnSpc>
+              <a:spcBef>
+                <a:spcPts val="300"/>
+              </a:spcBef>
+              <a:spcAft>
+                <a:spcPct val="0"/>
+              </a:spcAft>
+              <a:buNone/>
+            </a:pPr>
+            <a:r>
+              <a:rPr lang="ru-RU" altLang="ru-RU" sz="2300" dirty="0"/>
+              <a:t>Для </a:t>
+            </a:r>
+            <a:r>
+              <a:rPr lang="ru-RU" altLang="ru-RU" sz="2300" dirty="0" err="1"/>
+              <a:t>преотвращения</a:t>
+            </a:r>
+            <a:r>
+              <a:rPr lang="ru-RU" altLang="ru-RU" sz="2300" dirty="0"/>
+              <a:t>:</a:t>
+            </a:r>
+          </a:p>
+          <a:p>
+            <a:pPr lvl="1" eaLnBrk="0" fontAlgn="base" hangingPunct="0">
+              <a:lnSpc>
+                <a:spcPct val="100000"/>
               </a:lnSpc>
               <a:spcBef>
                 <a:spcPts val="300"/>
@@ -5004,15 +4856,38 @@
               </a:spcAft>
             </a:pPr>
             <a:r>
-              <a:rPr lang="ru-RU" altLang="ru-RU" dirty="0" smtClean="0"/>
-              <a:t>Экзогенные факторы используются только если они улучшают точность на тестах</a:t>
-            </a:r>
-            <a:endParaRPr lang="ru-RU" altLang="ru-RU" dirty="0"/>
-          </a:p>
-          <a:p>
-            <a:pPr eaLnBrk="0" fontAlgn="base" hangingPunct="0">
+              <a:rPr lang="en-US" altLang="ru-RU" sz="2300" dirty="0"/>
+              <a:t>Walking forward </a:t>
+            </a:r>
+            <a:r>
+              <a:rPr lang="ru-RU" altLang="ru-RU" sz="2300" dirty="0"/>
+              <a:t>кросс </a:t>
+            </a:r>
+            <a:r>
+              <a:rPr lang="ru-RU" altLang="ru-RU" sz="2300" dirty="0" err="1"/>
+              <a:t>валидация</a:t>
+            </a:r>
+            <a:r>
+              <a:rPr lang="en-US" altLang="ru-RU" sz="2300" dirty="0"/>
+              <a:t> </a:t>
+            </a:r>
+            <a:r>
+              <a:rPr lang="ru-RU" altLang="ru-RU" sz="2300" dirty="0"/>
+              <a:t>и </a:t>
+            </a:r>
+            <a:r>
+              <a:rPr lang="en-US" altLang="ru-RU" sz="2300" dirty="0" err="1"/>
+              <a:t>backtesting</a:t>
+            </a:r>
+            <a:r>
+              <a:rPr lang="ru-RU" altLang="ru-RU" sz="2300" dirty="0"/>
+              <a:t>. </a:t>
+            </a:r>
+          </a:p>
+          <a:p>
+            <a:pPr lvl="1" eaLnBrk="0" fontAlgn="base" hangingPunct="0">
               <a:lnSpc>
-                <a:spcPct val="110000"/>
+                <a:spcPct val="100000"/>
               </a:lnSpc>
               <a:spcBef>
                 <a:spcPts val="300"/>
@@ -5022,23 +4897,22 @@
               </a:spcAft>
             </a:pPr>
             <a:r>
-              <a:rPr lang="ru-RU" altLang="ru-RU" dirty="0" smtClean="0"/>
-              <a:t>Проверяйте признаки на утечку данных (забегают вперед на </a:t>
-            </a:r>
-            <a:r>
-              <a:rPr lang="ru-RU" altLang="ru-RU" dirty="0" err="1" smtClean="0"/>
-              <a:t>трейне</a:t>
-            </a:r>
-            <a:r>
-              <a:rPr lang="ru-RU" altLang="ru-RU" dirty="0" smtClean="0"/>
-              <a:t>)</a:t>
-            </a:r>
-            <a:endParaRPr lang="ru-RU" altLang="ru-RU" dirty="0"/>
-          </a:p>
-          <a:p>
-            <a:pPr eaLnBrk="0" fontAlgn="base" hangingPunct="0">
+              <a:rPr lang="ru-RU" altLang="ru-RU" sz="2300" dirty="0">
+                <a:solidFill>
+                  <a:srgbClr val="0D47A1"/>
+                </a:solidFill>
+              </a:rPr>
+              <a:t>Тесты</a:t>
+            </a:r>
+            <a:r>
+              <a:rPr lang="ru-RU" altLang="ru-RU" sz="2300" dirty="0"/>
+              <a:t> на ложные корреляции. </a:t>
+            </a:r>
+          </a:p>
+          <a:p>
+            <a:pPr lvl="2" eaLnBrk="0" fontAlgn="base" hangingPunct="0">
               <a:lnSpc>
-                <a:spcPct val="110000"/>
+                <a:spcPct val="100000"/>
               </a:lnSpc>
               <a:spcBef>
                 <a:spcPts val="300"/>
@@ -5048,35 +4922,70 @@
               </a:spcAft>
             </a:pPr>
             <a:r>
-              <a:rPr lang="ru-RU" altLang="ru-RU" dirty="0" smtClean="0"/>
-              <a:t>Используйте </a:t>
-            </a:r>
-            <a:r>
-              <a:rPr lang="en-US" altLang="ru-RU" dirty="0" smtClean="0"/>
-              <a:t>ARIMA </a:t>
-            </a:r>
-            <a:r>
-              <a:rPr lang="ru-RU" altLang="ru-RU" dirty="0" smtClean="0"/>
-              <a:t>и </a:t>
-            </a:r>
-            <a:r>
-              <a:rPr lang="en-US" altLang="ru-RU" dirty="0" smtClean="0"/>
-              <a:t>ETS </a:t>
-            </a:r>
-            <a:r>
               <a:rPr lang="ru-RU" altLang="ru-RU" dirty="0"/>
-              <a:t>как </a:t>
-            </a:r>
-            <a:r>
-              <a:rPr lang="ru-RU" altLang="ru-RU" dirty="0" err="1" smtClean="0"/>
-              <a:t>baseline</a:t>
-            </a:r>
-            <a:endParaRPr lang="ru-RU" altLang="ru-RU" dirty="0" smtClean="0"/>
+              <a:t>Напр. </a:t>
+            </a:r>
+            <a:r>
+              <a:rPr lang="ru-RU" altLang="ru-RU" dirty="0" err="1"/>
+              <a:t>Bonferonni</a:t>
+            </a:r>
+            <a:r>
+              <a:rPr lang="ru-RU" altLang="ru-RU" dirty="0"/>
+              <a:t> </a:t>
+            </a:r>
+            <a:r>
+              <a:rPr lang="ru-RU" altLang="ru-RU" dirty="0" err="1"/>
+              <a:t>correction</a:t>
+            </a:r>
+            <a:r>
+              <a:rPr lang="ru-RU" altLang="ru-RU" dirty="0"/>
+              <a:t>, </a:t>
+            </a:r>
+            <a:r>
+              <a:rPr lang="ru-RU" altLang="ru-RU" dirty="0" err="1"/>
+              <a:t>Scheffé's</a:t>
+            </a:r>
+            <a:r>
+              <a:rPr lang="ru-RU" altLang="ru-RU" dirty="0"/>
+              <a:t> </a:t>
+            </a:r>
+            <a:r>
+              <a:rPr lang="ru-RU" altLang="ru-RU" dirty="0" err="1"/>
+              <a:t>method</a:t>
+            </a:r>
+            <a:r>
+              <a:rPr lang="ru-RU" altLang="ru-RU" dirty="0"/>
+              <a:t> и </a:t>
+            </a:r>
+            <a:r>
+              <a:rPr lang="ru-RU" altLang="ru-RU" dirty="0" err="1"/>
+              <a:t>false</a:t>
+            </a:r>
+            <a:r>
+              <a:rPr lang="ru-RU" altLang="ru-RU" dirty="0"/>
+              <a:t> </a:t>
+            </a:r>
+            <a:r>
+              <a:rPr lang="ru-RU" altLang="ru-RU" dirty="0" err="1"/>
+              <a:t>discovery</a:t>
+            </a:r>
+            <a:r>
+              <a:rPr lang="ru-RU" altLang="ru-RU" dirty="0"/>
+              <a:t> </a:t>
+            </a:r>
+            <a:r>
+              <a:rPr lang="ru-RU" altLang="ru-RU" dirty="0" err="1"/>
+              <a:t>rate</a:t>
+            </a:r>
+            <a:r>
+              <a:rPr lang="ru-RU" altLang="ru-RU" dirty="0"/>
+              <a:t>.</a:t>
+            </a:r>
           </a:p>
           <a:p>
             <a:pPr eaLnBrk="0" fontAlgn="base" hangingPunct="0">
               <a:lnSpc>
-                <a:spcPct val="110000"/>
+                <a:spcPct val="100000"/>
               </a:lnSpc>
               <a:spcBef>
                 <a:spcPts val="300"/>
@@ -5086,30 +4995,22 @@
               </a:spcAft>
             </a:pPr>
             <a:r>
-              <a:rPr lang="ru-RU" altLang="ru-RU" dirty="0" smtClean="0"/>
-              <a:t>Начинайте </a:t>
-            </a:r>
-            <a:r>
-              <a:rPr lang="ru-RU" altLang="ru-RU" dirty="0"/>
-              <a:t>с простого: </a:t>
-            </a:r>
-            <a:r>
-              <a:rPr lang="ru-RU" altLang="ru-RU" dirty="0" err="1"/>
-              <a:t>XGBoost</a:t>
-            </a:r>
-            <a:r>
-              <a:rPr lang="ru-RU" altLang="ru-RU" dirty="0"/>
-              <a:t> + </a:t>
-            </a:r>
-            <a:r>
-              <a:rPr lang="ru-RU" altLang="ru-RU" dirty="0" smtClean="0"/>
-              <a:t>лаги</a:t>
+              <a:rPr lang="ru-RU" altLang="ru-RU" sz="2300" dirty="0"/>
+              <a:t>При добавлении признаков в окно прогноза нужно смотреть чтобы </a:t>
+            </a:r>
+            <a:r>
+              <a:rPr lang="ru-RU" altLang="ru-RU" sz="2300" dirty="0" err="1"/>
+              <a:t>небыло</a:t>
+            </a:r>
+            <a:r>
+              <a:rPr lang="ru-RU" altLang="ru-RU" sz="2300" dirty="0"/>
+              <a:t> утечки данных – признаки не должны опережать временную метку предсказываемого значения.</a:t>
             </a:r>
           </a:p>
           <a:p>
             <a:pPr eaLnBrk="0" fontAlgn="base" hangingPunct="0">
               <a:lnSpc>
-                <a:spcPct val="110000"/>
+                <a:spcPct val="100000"/>
               </a:lnSpc>
               <a:spcBef>
                 <a:spcPts val="300"/>
@@ -5119,31 +5020,20 @@
               </a:spcAft>
             </a:pPr>
             <a:r>
-              <a:rPr lang="ru-RU" altLang="ru-RU" dirty="0" smtClean="0"/>
-              <a:t>Модели легко могут потерять структуру (</a:t>
-            </a:r>
-            <a:r>
-              <a:rPr lang="ru-RU" altLang="ru-RU" dirty="0" err="1" smtClean="0"/>
-              <a:t>патетрны</a:t>
-            </a:r>
-            <a:r>
-              <a:rPr lang="ru-RU" altLang="ru-RU" dirty="0" smtClean="0"/>
-              <a:t> и </a:t>
-            </a:r>
-            <a:r>
-              <a:rPr lang="ru-RU" altLang="ru-RU" dirty="0" err="1" smtClean="0"/>
-              <a:t>тд</a:t>
-            </a:r>
-            <a:r>
-              <a:rPr lang="ru-RU" altLang="ru-RU" dirty="0" smtClean="0"/>
-              <a:t>), выбирайте размер окна, для стабилизации</a:t>
-            </a:r>
-            <a:endParaRPr lang="ru-RU" altLang="ru-RU" dirty="0"/>
-          </a:p>
-          <a:p>
-            <a:pPr eaLnBrk="0" fontAlgn="base" hangingPunct="0">
+              <a:rPr lang="ru-RU" altLang="ru-RU" sz="2300" dirty="0"/>
+              <a:t>Если метка прогноза преобразована, часто забывают сделать обратное преобразование</a:t>
+            </a:r>
+            <a:r>
+              <a:rPr lang="ru-RU" altLang="ru-RU" sz="2100" dirty="0">
+                <a:latin typeface="system-ui"/>
+              </a:rPr>
+              <a:t>.</a:t>
+            </a:r>
+          </a:p>
+          <a:p>
+            <a:pPr marL="0" lvl="0" indent="0" eaLnBrk="0" fontAlgn="base" hangingPunct="0">
               <a:lnSpc>
-                <a:spcPct val="110000"/>
+                <a:spcPct val="100000"/>
               </a:lnSpc>
               <a:spcBef>
                 <a:spcPts val="300"/>
@@ -5151,63 +5041,56 @@
               <a:spcAft>
                 <a:spcPct val="0"/>
               </a:spcAft>
+              <a:buNone/>
             </a:pPr>
-            <a:r>
-              <a:rPr lang="ru-RU" altLang="ru-RU" dirty="0" smtClean="0"/>
-              <a:t>Добавляйте </a:t>
-            </a:r>
-            <a:r>
-              <a:rPr lang="ru-RU" altLang="ru-RU" dirty="0"/>
-              <a:t>календарные признаки: день недели, праздник</a:t>
-            </a:r>
-          </a:p>
-          <a:p>
-            <a:pPr eaLnBrk="0" fontAlgn="base" hangingPunct="0">
-              <a:lnSpc>
-                <a:spcPct val="110000"/>
-              </a:lnSpc>
-              <a:spcBef>
-                <a:spcPts val="300"/>
-              </a:spcBef>
-              <a:spcAft>
-                <a:spcPct val="0"/>
-              </a:spcAft>
-            </a:pPr>
-            <a:r>
-              <a:rPr lang="ru-RU" altLang="ru-RU" dirty="0" smtClean="0"/>
-              <a:t>Проверяйте </a:t>
-            </a:r>
-            <a:r>
-              <a:rPr lang="ru-RU" altLang="ru-RU" dirty="0"/>
-              <a:t>остатки — должны быть белым шумом</a:t>
-            </a:r>
-          </a:p>
-          <a:p>
-            <a:pPr lvl="0" eaLnBrk="0" fontAlgn="base" hangingPunct="0">
-              <a:lnSpc>
-                <a:spcPct val="110000"/>
-              </a:lnSpc>
-              <a:spcBef>
-                <a:spcPts val="300"/>
-              </a:spcBef>
-              <a:spcAft>
-                <a:spcPct val="0"/>
-              </a:spcAft>
-            </a:pPr>
-            <a:r>
-              <a:rPr lang="ru-RU" altLang="ru-RU" dirty="0"/>
-              <a:t>Проверяйте факторы на интерпретируемость</a:t>
-            </a:r>
-          </a:p>
-          <a:p>
-            <a:endParaRPr lang="ru-RU" dirty="0"/>
+            <a:endParaRPr kumimoji="0" lang="ru-RU" altLang="ru-RU" sz="2100" b="0" i="0" u="none" strike="noStrike" cap="none" normalizeH="0" baseline="0" dirty="0">
+              <a:ln>
+                <a:noFill/>
+              </a:ln>
+              <a:solidFill>
+                <a:schemeClr val="tx1"/>
+              </a:solidFill>
+              <a:effectLst/>
+              <a:latin typeface="Arial" panose="020B0604020202020204" pitchFamily="34" charset="0"/>
+            </a:endParaRPr>
+          </a:p>
+          <a:p>
+            <a:endParaRPr lang="ru-RU" sz="2100" dirty="0"/>
+          </a:p>
+        </p:txBody>
+      </p:sp>
+      <p:sp>
+        <p:nvSpPr>
+          <p:cNvPr id="4" name="Прямоугольник 3"/>
+          <p:cNvSpPr/>
+          <p:nvPr/>
+        </p:nvSpPr>
+        <p:spPr>
+          <a:xfrm>
+            <a:off x="419379" y="6331148"/>
+            <a:ext cx="4208268" cy="307777"/>
+          </a:xfrm>
+          <a:prstGeom prst="rect">
+            <a:avLst/>
+          </a:prstGeom>
+        </p:spPr>
+        <p:txBody>
+          <a:bodyPr wrap="none">
+            <a:spAutoFit/>
+          </a:bodyPr>
+          <a:lstStyle/>
+          <a:p>
+            <a:r>
+              <a:rPr lang="ru-RU" sz="1400" dirty="0"/>
+              <a:t>https://www.nature.com/articles/d41586-025-01246-1</a:t>
+            </a:r>
           </a:p>
         </p:txBody>
       </p:sp>
     </p:spTree>
     <p:extLst>
       <p:ext uri="{BB962C8B-B14F-4D97-AF65-F5344CB8AC3E}">
-        <p14:creationId xmlns:p14="http://schemas.microsoft.com/office/powerpoint/2010/main" val="1126026669"/>
+        <p14:creationId xmlns:p14="http://schemas.microsoft.com/office/powerpoint/2010/main" val="3365436130"/>
       </p:ext>
     </p:extLst>
   </p:cSld>
@@ -5246,6 +5129,999 @@
         </p:nvSpPr>
         <p:spPr>
           <a:xfrm>
+            <a:off x="242046" y="105148"/>
+            <a:ext cx="11111753" cy="656851"/>
+          </a:xfrm>
+        </p:spPr>
+        <p:txBody>
+          <a:bodyPr>
+            <a:normAutofit fontScale="90000"/>
+          </a:bodyPr>
+          <a:lstStyle/>
+          <a:p>
+            <a:r>
+              <a:rPr lang="ru-RU" altLang="ru-RU" b="1" dirty="0">
+                <a:solidFill>
+                  <a:srgbClr val="0D47A1"/>
+                </a:solidFill>
+                <a:latin typeface="system-ui"/>
+              </a:rPr>
+              <a:t>Экзогенные переменные</a:t>
+            </a:r>
+            <a:r>
+              <a:rPr lang="ru-RU" altLang="ru-RU" dirty="0">
+                <a:latin typeface="system-ui"/>
+              </a:rPr>
+              <a:t> </a:t>
+            </a:r>
+            <a:endParaRPr lang="ru-RU" dirty="0"/>
+          </a:p>
+        </p:txBody>
+      </p:sp>
+      <p:sp>
+        <p:nvSpPr>
+          <p:cNvPr id="3" name="Объект 2"/>
+          <p:cNvSpPr>
+            <a:spLocks noGrp="1"/>
+          </p:cNvSpPr>
+          <p:nvPr>
+            <p:ph idx="1"/>
+          </p:nvPr>
+        </p:nvSpPr>
+        <p:spPr>
+          <a:xfrm>
+            <a:off x="134470" y="761998"/>
+            <a:ext cx="11949953" cy="5862919"/>
+          </a:xfrm>
+        </p:spPr>
+        <p:txBody>
+          <a:bodyPr>
+            <a:normAutofit/>
+          </a:bodyPr>
+          <a:lstStyle/>
+          <a:p>
+            <a:pPr>
+              <a:lnSpc>
+                <a:spcPct val="120000"/>
+              </a:lnSpc>
+              <a:spcBef>
+                <a:spcPts val="0"/>
+              </a:spcBef>
+            </a:pPr>
+            <a:r>
+              <a:rPr lang="ru-RU" altLang="ru-RU" sz="2300" b="1" dirty="0"/>
+              <a:t>Эндогенные ф</a:t>
+            </a:r>
+            <a:r>
+              <a:rPr lang="en-US" sz="2300" b="1" dirty="0" err="1"/>
+              <a:t>акторы</a:t>
+            </a:r>
+            <a:r>
+              <a:rPr lang="en-US" sz="2300" dirty="0"/>
+              <a:t>, </a:t>
+            </a:r>
+            <a:r>
+              <a:rPr lang="en-US" sz="2300" dirty="0" err="1"/>
+              <a:t>очевидно</a:t>
+            </a:r>
+            <a:r>
+              <a:rPr lang="en-US" sz="2300" dirty="0"/>
+              <a:t> </a:t>
+            </a:r>
+            <a:r>
+              <a:rPr lang="en-US" sz="2300" dirty="0" err="1"/>
+              <a:t>коррелирующие</a:t>
+            </a:r>
+            <a:r>
+              <a:rPr lang="en-US" sz="2300" dirty="0"/>
+              <a:t> с </a:t>
+            </a:r>
+            <a:r>
+              <a:rPr lang="ru-RU" sz="2300" dirty="0"/>
+              <a:t>ВР</a:t>
+            </a:r>
+            <a:r>
+              <a:rPr lang="en-US" sz="2300" dirty="0"/>
+              <a:t>. </a:t>
+            </a:r>
+            <a:endParaRPr lang="ru-RU" sz="2300" dirty="0"/>
+          </a:p>
+          <a:p>
+            <a:pPr lvl="1">
+              <a:lnSpc>
+                <a:spcPct val="120000"/>
+              </a:lnSpc>
+              <a:spcBef>
+                <a:spcPts val="0"/>
+              </a:spcBef>
+            </a:pPr>
+            <a:r>
+              <a:rPr lang="ru-RU" sz="2300" dirty="0"/>
+              <a:t>Лаги ВР, преобразованные значения, значения автокорреляций, тренда или сезонности, и </a:t>
+            </a:r>
+            <a:r>
+              <a:rPr lang="ru-RU" sz="2300" dirty="0" err="1"/>
+              <a:t>тд</a:t>
+            </a:r>
+            <a:endParaRPr lang="ru-RU" sz="2300" dirty="0"/>
+          </a:p>
+          <a:p>
+            <a:pPr>
+              <a:lnSpc>
+                <a:spcPct val="120000"/>
+              </a:lnSpc>
+              <a:spcBef>
+                <a:spcPts val="0"/>
+              </a:spcBef>
+            </a:pPr>
+            <a:r>
+              <a:rPr lang="ru-RU" sz="2300" b="1" dirty="0"/>
+              <a:t>Э</a:t>
+            </a:r>
+            <a:r>
+              <a:rPr lang="en-US" sz="2300" b="1" dirty="0" err="1"/>
+              <a:t>кзогенны</a:t>
+            </a:r>
+            <a:r>
+              <a:rPr lang="ru-RU" sz="2300" b="1" dirty="0"/>
+              <a:t>е факторы</a:t>
+            </a:r>
+            <a:r>
+              <a:rPr lang="ru-RU" sz="2300" dirty="0"/>
+              <a:t> – факторы, не имеющие линейной корреляции с ВР, но объясняющие его поведения  </a:t>
+            </a:r>
+          </a:p>
+          <a:p>
+            <a:pPr lvl="1">
+              <a:lnSpc>
+                <a:spcPct val="120000"/>
+              </a:lnSpc>
+              <a:spcBef>
+                <a:spcPts val="0"/>
+              </a:spcBef>
+            </a:pPr>
+            <a:r>
+              <a:rPr lang="ru-RU" altLang="ru-RU" sz="2300" dirty="0"/>
+              <a:t>Прогноз энергопотребления – </a:t>
+            </a:r>
+            <a:r>
+              <a:rPr lang="en-US" altLang="ru-RU" sz="2300" dirty="0" err="1"/>
+              <a:t>exdog</a:t>
+            </a:r>
+            <a:r>
+              <a:rPr lang="en-US" altLang="ru-RU" sz="2300" dirty="0"/>
+              <a:t>: </a:t>
+            </a:r>
+            <a:r>
+              <a:rPr lang="ru-RU" altLang="ru-RU" sz="2300" dirty="0"/>
+              <a:t>Температура, время суток, день недели</a:t>
+            </a:r>
+          </a:p>
+          <a:p>
+            <a:pPr marL="447675" lvl="2" indent="0" eaLnBrk="0" fontAlgn="base" hangingPunct="0">
+              <a:lnSpc>
+                <a:spcPct val="120000"/>
+              </a:lnSpc>
+              <a:spcBef>
+                <a:spcPts val="0"/>
+              </a:spcBef>
+              <a:buNone/>
+            </a:pPr>
+            <a:r>
+              <a:rPr lang="ru-RU" altLang="ru-RU" sz="2400" b="1" dirty="0"/>
+              <a:t>Требования к экзогенным факторам</a:t>
+            </a:r>
+          </a:p>
+          <a:p>
+            <a:pPr lvl="2" eaLnBrk="0" fontAlgn="base" hangingPunct="0">
+              <a:lnSpc>
+                <a:spcPct val="100000"/>
+              </a:lnSpc>
+              <a:spcBef>
+                <a:spcPts val="200"/>
+              </a:spcBef>
+            </a:pPr>
+            <a:r>
+              <a:rPr lang="ru-RU" altLang="ru-RU" sz="1900" dirty="0"/>
+              <a:t>На практике </a:t>
+            </a:r>
+            <a:r>
+              <a:rPr lang="ru-RU" altLang="ru-RU" sz="1900" dirty="0" err="1"/>
+              <a:t>экзогенность</a:t>
+            </a:r>
+            <a:r>
+              <a:rPr lang="ru-RU" altLang="ru-RU" sz="1900" dirty="0"/>
+              <a:t> устанавливается экспертом в предметной области!</a:t>
+            </a:r>
+          </a:p>
+          <a:p>
+            <a:pPr lvl="2" eaLnBrk="0" fontAlgn="base" hangingPunct="0">
+              <a:lnSpc>
+                <a:spcPct val="100000"/>
+              </a:lnSpc>
+              <a:spcBef>
+                <a:spcPts val="200"/>
+              </a:spcBef>
+            </a:pPr>
+            <a:r>
+              <a:rPr lang="ru-RU" altLang="ru-RU" sz="1900" dirty="0"/>
+              <a:t>Экзогенные факторы объясняют ВР – то есть их использование статистически значимо и стабильно улучшает прогноз. В ином случае лучше фактор не использовать.</a:t>
+            </a:r>
+          </a:p>
+          <a:p>
+            <a:pPr lvl="2" eaLnBrk="0" fontAlgn="base" hangingPunct="0">
+              <a:lnSpc>
+                <a:spcPct val="100000"/>
+              </a:lnSpc>
+              <a:spcBef>
+                <a:spcPts val="200"/>
+              </a:spcBef>
+            </a:pPr>
+            <a:r>
+              <a:rPr lang="ru-RU" altLang="ru-RU" sz="1900" dirty="0"/>
+              <a:t>Экзогенные факторы должны быть «всегда в наличии», не пропадать</a:t>
+            </a:r>
+          </a:p>
+          <a:p>
+            <a:pPr lvl="2" eaLnBrk="0" fontAlgn="base" hangingPunct="0">
+              <a:lnSpc>
+                <a:spcPct val="100000"/>
+              </a:lnSpc>
+              <a:spcBef>
+                <a:spcPts val="200"/>
+              </a:spcBef>
+            </a:pPr>
+            <a:r>
+              <a:rPr lang="ru-RU" altLang="ru-RU" sz="1900" dirty="0"/>
+              <a:t>Экзогенные факторы не должны приводить к «утечке данных» (созданию ложных корреляций) – они должны не завесить от ВР</a:t>
+            </a:r>
+          </a:p>
+          <a:p>
+            <a:pPr lvl="2" eaLnBrk="0" fontAlgn="base" hangingPunct="0">
+              <a:lnSpc>
+                <a:spcPct val="100000"/>
+              </a:lnSpc>
+              <a:spcBef>
+                <a:spcPts val="200"/>
+              </a:spcBef>
+            </a:pPr>
+            <a:r>
+              <a:rPr lang="ru-RU" altLang="ru-RU" sz="1900" dirty="0"/>
+              <a:t>Для многомерных ВР экзогенные факторы могут быть локальными или глобальными – то есть общей информацией между ВР</a:t>
+            </a:r>
+            <a:endParaRPr lang="en-US" altLang="ru-RU" sz="1900" dirty="0"/>
+          </a:p>
+        </p:txBody>
+      </p:sp>
+    </p:spTree>
+    <p:extLst>
+      <p:ext uri="{BB962C8B-B14F-4D97-AF65-F5344CB8AC3E}">
+        <p14:creationId xmlns:p14="http://schemas.microsoft.com/office/powerpoint/2010/main" val="1968690726"/>
+      </p:ext>
+    </p:extLst>
+  </p:cSld>
+  <p:clrMapOvr>
+    <a:masterClrMapping/>
+  </p:clrMapOvr>
+</p:sld>
+</file>
+
+<file path=ppt/slides/slide15.xml><?xml version="1.0" encoding="utf-8"?>
+<p:sld xmlns:a="http://schemas.openxmlformats.org/drawingml/2006/main" xmlns:r="http://schemas.openxmlformats.org/officeDocument/2006/relationships" xmlns:p="http://schemas.openxmlformats.org/presentationml/2006/main">
+  <p:cSld>
+    <p:spTree>
+      <p:nvGrpSpPr>
+        <p:cNvPr id="1" name=""/>
+        <p:cNvGrpSpPr/>
+        <p:nvPr/>
+      </p:nvGrpSpPr>
+      <p:grpSpPr>
+        <a:xfrm>
+          <a:off x="0" y="0"/>
+          <a:ext cx="0" cy="0"/>
+          <a:chOff x="0" y="0"/>
+          <a:chExt cx="0" cy="0"/>
+        </a:xfrm>
+      </p:grpSpPr>
+      <p:sp>
+        <p:nvSpPr>
+          <p:cNvPr id="2" name="Заголовок 1"/>
+          <p:cNvSpPr>
+            <a:spLocks noGrp="1"/>
+          </p:cNvSpPr>
+          <p:nvPr>
+            <p:ph type="title"/>
+          </p:nvPr>
+        </p:nvSpPr>
+        <p:spPr>
+          <a:xfrm>
+            <a:off x="280146" y="238498"/>
+            <a:ext cx="11111753" cy="656851"/>
+          </a:xfrm>
+        </p:spPr>
+        <p:txBody>
+          <a:bodyPr>
+            <a:normAutofit fontScale="90000"/>
+          </a:bodyPr>
+          <a:lstStyle/>
+          <a:p>
+            <a:pPr lvl="0"/>
+            <a:r>
+              <a:rPr lang="ru-RU" altLang="ru-RU" b="1" dirty="0">
+                <a:solidFill>
+                  <a:srgbClr val="0D47A1"/>
+                </a:solidFill>
+                <a:latin typeface="system-ui"/>
+              </a:rPr>
+              <a:t>Экзогенные переменные</a:t>
+            </a:r>
+            <a:r>
+              <a:rPr lang="en-US" altLang="ru-RU" b="1" dirty="0">
+                <a:solidFill>
+                  <a:srgbClr val="0D47A1"/>
+                </a:solidFill>
+                <a:latin typeface="system-ui"/>
+              </a:rPr>
+              <a:t>.</a:t>
+            </a:r>
+            <a:r>
+              <a:rPr lang="ru-RU" altLang="ru-RU" b="1" dirty="0">
+                <a:solidFill>
+                  <a:srgbClr val="0D47A1"/>
+                </a:solidFill>
+                <a:latin typeface="system-ui"/>
+              </a:rPr>
+              <a:t> Три группы</a:t>
+            </a:r>
+            <a:r>
+              <a:rPr lang="ru-RU" altLang="ru-RU" dirty="0"/>
+              <a:t>:</a:t>
+            </a:r>
+            <a:r>
+              <a:rPr lang="ru-RU" altLang="ru-RU" dirty="0">
+                <a:latin typeface="system-ui"/>
+              </a:rPr>
+              <a:t> </a:t>
+            </a:r>
+            <a:endParaRPr lang="ru-RU" dirty="0"/>
+          </a:p>
+        </p:txBody>
+      </p:sp>
+      <p:sp>
+        <p:nvSpPr>
+          <p:cNvPr id="3" name="Объект 2"/>
+          <p:cNvSpPr>
+            <a:spLocks noGrp="1"/>
+          </p:cNvSpPr>
+          <p:nvPr>
+            <p:ph idx="1"/>
+          </p:nvPr>
+        </p:nvSpPr>
+        <p:spPr>
+          <a:xfrm>
+            <a:off x="134470" y="761998"/>
+            <a:ext cx="11949953" cy="5862919"/>
+          </a:xfrm>
+        </p:spPr>
+        <p:txBody>
+          <a:bodyPr>
+            <a:normAutofit fontScale="92500"/>
+          </a:bodyPr>
+          <a:lstStyle/>
+          <a:p>
+            <a:pPr marL="0" lvl="0" indent="0" eaLnBrk="0" fontAlgn="base" hangingPunct="0">
+              <a:lnSpc>
+                <a:spcPct val="120000"/>
+              </a:lnSpc>
+              <a:spcBef>
+                <a:spcPts val="600"/>
+              </a:spcBef>
+              <a:spcAft>
+                <a:spcPct val="0"/>
+              </a:spcAft>
+              <a:buNone/>
+            </a:pPr>
+            <a:r>
+              <a:rPr lang="ru-RU" altLang="ru-RU" b="1" dirty="0"/>
+              <a:t>Статические экзогенные переменные</a:t>
+            </a:r>
+            <a:r>
+              <a:rPr lang="ru-RU" altLang="ru-RU" dirty="0"/>
+              <a:t>: </a:t>
+            </a:r>
+            <a:endParaRPr lang="en-US" altLang="ru-RU" dirty="0"/>
+          </a:p>
+          <a:p>
+            <a:pPr lvl="1" eaLnBrk="0" fontAlgn="base" hangingPunct="0">
+              <a:lnSpc>
+                <a:spcPct val="120000"/>
+              </a:lnSpc>
+              <a:spcBef>
+                <a:spcPct val="0"/>
+              </a:spcBef>
+              <a:spcAft>
+                <a:spcPct val="0"/>
+              </a:spcAft>
+            </a:pPr>
+            <a:r>
+              <a:rPr lang="ru-RU" altLang="ru-RU" dirty="0"/>
+              <a:t>несут неизменную во времени информацию для каждого временного ряда.</a:t>
+            </a:r>
+            <a:endParaRPr lang="en-US" altLang="ru-RU" dirty="0"/>
+          </a:p>
+          <a:p>
+            <a:pPr lvl="2" eaLnBrk="0" fontAlgn="base" hangingPunct="0">
+              <a:lnSpc>
+                <a:spcPct val="120000"/>
+              </a:lnSpc>
+              <a:spcBef>
+                <a:spcPct val="0"/>
+              </a:spcBef>
+              <a:spcAft>
+                <a:spcPct val="0"/>
+              </a:spcAft>
+            </a:pPr>
+            <a:r>
+              <a:rPr lang="ru-RU" altLang="ru-RU" sz="2400" b="1" dirty="0"/>
+              <a:t>Напр. </a:t>
+            </a:r>
+            <a:r>
+              <a:rPr lang="ru-RU" altLang="ru-RU" sz="2400" dirty="0"/>
+              <a:t> идентификаторы регионов, групп товаров и т. д.</a:t>
+            </a:r>
+          </a:p>
+          <a:p>
+            <a:pPr eaLnBrk="0" fontAlgn="base" hangingPunct="0">
+              <a:lnSpc>
+                <a:spcPct val="120000"/>
+              </a:lnSpc>
+              <a:spcBef>
+                <a:spcPct val="0"/>
+              </a:spcBef>
+              <a:spcAft>
+                <a:spcPct val="0"/>
+              </a:spcAft>
+            </a:pPr>
+            <a:r>
+              <a:rPr lang="ru-RU" altLang="ru-RU" b="1" dirty="0"/>
+              <a:t>Исторические экзогенные переменные</a:t>
+            </a:r>
+            <a:r>
+              <a:rPr lang="ru-RU" altLang="ru-RU" dirty="0"/>
+              <a:t>: переменная ограничена прошлыми наблюдаемыми значениями. </a:t>
+            </a:r>
+          </a:p>
+          <a:p>
+            <a:pPr lvl="1" eaLnBrk="0" fontAlgn="base" hangingPunct="0">
+              <a:lnSpc>
+                <a:spcPct val="120000"/>
+              </a:lnSpc>
+              <a:spcBef>
+                <a:spcPct val="0"/>
+              </a:spcBef>
+              <a:spcAft>
+                <a:spcPct val="0"/>
+              </a:spcAft>
+            </a:pPr>
+            <a:r>
+              <a:rPr lang="ru-RU" altLang="ru-RU" sz="2600" dirty="0"/>
+              <a:t>Причинность можно проверить напр. при помощи Теста </a:t>
+            </a:r>
+            <a:r>
+              <a:rPr lang="ru-RU" altLang="ru-RU" sz="2600" dirty="0" err="1"/>
+              <a:t>Гранжера</a:t>
+            </a:r>
+            <a:r>
+              <a:rPr lang="ru-RU" altLang="ru-RU" sz="2600" dirty="0"/>
+              <a:t> на казуальность.</a:t>
+            </a:r>
+          </a:p>
+          <a:p>
+            <a:pPr eaLnBrk="0" fontAlgn="base" hangingPunct="0">
+              <a:lnSpc>
+                <a:spcPct val="120000"/>
+              </a:lnSpc>
+              <a:spcBef>
+                <a:spcPct val="0"/>
+              </a:spcBef>
+              <a:spcAft>
+                <a:spcPct val="0"/>
+              </a:spcAft>
+            </a:pPr>
+            <a:r>
+              <a:rPr lang="ru-RU" altLang="ru-RU" b="1" dirty="0"/>
+              <a:t>Будущие экзогенные переменные</a:t>
+            </a:r>
+            <a:r>
+              <a:rPr lang="ru-RU" altLang="ru-RU" dirty="0"/>
+              <a:t>:  доступны на момент прогнозирования. </a:t>
+            </a:r>
+          </a:p>
+          <a:p>
+            <a:pPr lvl="1" eaLnBrk="0" fontAlgn="base" hangingPunct="0">
+              <a:lnSpc>
+                <a:spcPct val="120000"/>
+              </a:lnSpc>
+              <a:spcBef>
+                <a:spcPct val="0"/>
+              </a:spcBef>
+              <a:spcAft>
+                <a:spcPct val="0"/>
+              </a:spcAft>
+            </a:pPr>
+            <a:r>
+              <a:rPr lang="ru-RU" altLang="ru-RU" dirty="0"/>
+              <a:t>Напр. календарные переменные, известные события, (напр. запланированные акции), прогнозы факторов (напр. прогноз погоды для прогноза электропотребления на 1 день).</a:t>
+            </a:r>
+            <a:endParaRPr lang="en-US" altLang="ru-RU" dirty="0"/>
+          </a:p>
+          <a:p>
+            <a:pPr lvl="1" eaLnBrk="0" fontAlgn="base" hangingPunct="0">
+              <a:lnSpc>
+                <a:spcPct val="120000"/>
+              </a:lnSpc>
+              <a:spcBef>
+                <a:spcPct val="0"/>
+              </a:spcBef>
+              <a:spcAft>
+                <a:spcPct val="0"/>
+              </a:spcAft>
+            </a:pPr>
+            <a:r>
+              <a:rPr lang="ru-RU" altLang="ru-RU" dirty="0"/>
+              <a:t>Важно чтобы переменная всегда в будущем была известна и не несла </a:t>
+            </a:r>
+            <a:r>
+              <a:rPr lang="en-US" altLang="ru-RU" dirty="0"/>
+              <a:t>data leaks</a:t>
+            </a:r>
+          </a:p>
+          <a:p>
+            <a:pPr lvl="1" eaLnBrk="0" fontAlgn="base" hangingPunct="0">
+              <a:lnSpc>
+                <a:spcPct val="120000"/>
+              </a:lnSpc>
+              <a:spcBef>
+                <a:spcPct val="0"/>
+              </a:spcBef>
+              <a:spcAft>
+                <a:spcPct val="0"/>
+              </a:spcAft>
+            </a:pPr>
+            <a:r>
+              <a:rPr lang="ru-RU" altLang="ru-RU" dirty="0"/>
+              <a:t>Для проверки </a:t>
+            </a:r>
+          </a:p>
+          <a:p>
+            <a:pPr lvl="2" eaLnBrk="0" fontAlgn="base" hangingPunct="0">
+              <a:lnSpc>
+                <a:spcPct val="120000"/>
+              </a:lnSpc>
+              <a:spcBef>
+                <a:spcPct val="0"/>
+              </a:spcBef>
+              <a:spcAft>
+                <a:spcPct val="0"/>
+              </a:spcAft>
+            </a:pPr>
+            <a:r>
+              <a:rPr lang="ru-RU" altLang="ru-RU" dirty="0"/>
+              <a:t>обратный тест на казуальность (фактор на ВР) </a:t>
+            </a:r>
+          </a:p>
+          <a:p>
+            <a:pPr lvl="2" eaLnBrk="0" fontAlgn="base" hangingPunct="0">
+              <a:lnSpc>
+                <a:spcPct val="120000"/>
+              </a:lnSpc>
+              <a:spcBef>
+                <a:spcPct val="0"/>
+              </a:spcBef>
+              <a:spcAft>
+                <a:spcPct val="0"/>
+              </a:spcAft>
+            </a:pPr>
+            <a:r>
+              <a:rPr lang="en-US" dirty="0"/>
+              <a:t>Lead-Lag Analysis</a:t>
+            </a:r>
+            <a:r>
+              <a:rPr lang="ru-RU" dirty="0"/>
+              <a:t> – на сколько далеко нужно сместить ВР чтобы возникла казуальность?</a:t>
+            </a:r>
+            <a:endParaRPr lang="en-US" b="1" dirty="0"/>
+          </a:p>
+          <a:p>
+            <a:pPr lvl="1" eaLnBrk="0" fontAlgn="base" hangingPunct="0">
+              <a:lnSpc>
+                <a:spcPct val="120000"/>
+              </a:lnSpc>
+              <a:spcBef>
+                <a:spcPct val="0"/>
+              </a:spcBef>
+              <a:spcAft>
+                <a:spcPct val="0"/>
+              </a:spcAft>
+            </a:pPr>
+            <a:endParaRPr lang="ru-RU" altLang="ru-RU" dirty="0"/>
+          </a:p>
+          <a:p>
+            <a:pPr marL="0" lvl="0" indent="0" eaLnBrk="0" fontAlgn="base" hangingPunct="0">
+              <a:lnSpc>
+                <a:spcPct val="100000"/>
+              </a:lnSpc>
+              <a:spcBef>
+                <a:spcPct val="0"/>
+              </a:spcBef>
+              <a:spcAft>
+                <a:spcPct val="0"/>
+              </a:spcAft>
+              <a:buNone/>
+            </a:pPr>
+            <a:endParaRPr kumimoji="0" lang="ru-RU" altLang="ru-RU" sz="5400" b="0" i="0" u="none" strike="noStrike" cap="none" normalizeH="0" baseline="0" dirty="0">
+              <a:ln>
+                <a:noFill/>
+              </a:ln>
+              <a:solidFill>
+                <a:schemeClr val="tx1"/>
+              </a:solidFill>
+              <a:effectLst/>
+            </a:endParaRPr>
+          </a:p>
+          <a:p>
+            <a:endParaRPr lang="ru-RU" dirty="0"/>
+          </a:p>
+        </p:txBody>
+      </p:sp>
+    </p:spTree>
+    <p:extLst>
+      <p:ext uri="{BB962C8B-B14F-4D97-AF65-F5344CB8AC3E}">
+        <p14:creationId xmlns:p14="http://schemas.microsoft.com/office/powerpoint/2010/main" val="1608365178"/>
+      </p:ext>
+    </p:extLst>
+  </p:cSld>
+  <p:clrMapOvr>
+    <a:masterClrMapping/>
+  </p:clrMapOvr>
+</p:sld>
+</file>
+
+<file path=ppt/slides/slide16.xml><?xml version="1.0" encoding="utf-8"?>
+<p:sld xmlns:a="http://schemas.openxmlformats.org/drawingml/2006/main" xmlns:r="http://schemas.openxmlformats.org/officeDocument/2006/relationships" xmlns:p="http://schemas.openxmlformats.org/presentationml/2006/main">
+  <p:cSld>
+    <p:spTree>
+      <p:nvGrpSpPr>
+        <p:cNvPr id="1" name=""/>
+        <p:cNvGrpSpPr/>
+        <p:nvPr/>
+      </p:nvGrpSpPr>
+      <p:grpSpPr>
+        <a:xfrm>
+          <a:off x="0" y="0"/>
+          <a:ext cx="0" cy="0"/>
+          <a:chOff x="0" y="0"/>
+          <a:chExt cx="0" cy="0"/>
+        </a:xfrm>
+      </p:grpSpPr>
+      <p:sp>
+        <p:nvSpPr>
+          <p:cNvPr id="2" name="Заголовок 1"/>
+          <p:cNvSpPr>
+            <a:spLocks noGrp="1"/>
+          </p:cNvSpPr>
+          <p:nvPr>
+            <p:ph type="title"/>
+          </p:nvPr>
+        </p:nvSpPr>
+        <p:spPr>
+          <a:xfrm>
+            <a:off x="228600" y="266721"/>
+            <a:ext cx="11134725" cy="863600"/>
+          </a:xfrm>
+        </p:spPr>
+        <p:txBody>
+          <a:bodyPr/>
+          <a:lstStyle/>
+          <a:p>
+            <a:pPr lvl="0"/>
+            <a:r>
+              <a:rPr lang="ru-RU" dirty="0">
+                <a:solidFill>
+                  <a:srgbClr val="2C2C36"/>
+                </a:solidFill>
+                <a:latin typeface="+mn-lt"/>
+              </a:rPr>
+              <a:t>Замечания</a:t>
+            </a:r>
+            <a:endParaRPr lang="ru-RU" dirty="0">
+              <a:latin typeface="+mn-lt"/>
+            </a:endParaRPr>
+          </a:p>
+        </p:txBody>
+      </p:sp>
+      <p:sp>
+        <p:nvSpPr>
+          <p:cNvPr id="3" name="Объект 2"/>
+          <p:cNvSpPr>
+            <a:spLocks noGrp="1"/>
+          </p:cNvSpPr>
+          <p:nvPr>
+            <p:ph idx="1"/>
+          </p:nvPr>
+        </p:nvSpPr>
+        <p:spPr>
+          <a:xfrm>
+            <a:off x="304800" y="1130321"/>
+            <a:ext cx="11601450" cy="5318104"/>
+          </a:xfrm>
+        </p:spPr>
+        <p:txBody>
+          <a:bodyPr>
+            <a:normAutofit lnSpcReduction="10000"/>
+          </a:bodyPr>
+          <a:lstStyle/>
+          <a:p>
+            <a:pPr eaLnBrk="0" fontAlgn="base" hangingPunct="0">
+              <a:lnSpc>
+                <a:spcPct val="110000"/>
+              </a:lnSpc>
+              <a:spcBef>
+                <a:spcPts val="300"/>
+              </a:spcBef>
+              <a:spcAft>
+                <a:spcPct val="0"/>
+              </a:spcAft>
+            </a:pPr>
+            <a:r>
+              <a:rPr lang="ru-RU" altLang="ru-RU" dirty="0"/>
+              <a:t>Не используйте обычную CV — только </a:t>
+            </a:r>
+            <a:r>
+              <a:rPr lang="ru-RU" altLang="ru-RU" dirty="0" err="1"/>
+              <a:t>time-based</a:t>
+            </a:r>
+            <a:r>
+              <a:rPr lang="ru-RU" altLang="ru-RU" dirty="0"/>
+              <a:t> CV</a:t>
+            </a:r>
+          </a:p>
+          <a:p>
+            <a:pPr eaLnBrk="0" fontAlgn="base" hangingPunct="0">
+              <a:lnSpc>
+                <a:spcPct val="110000"/>
+              </a:lnSpc>
+              <a:spcBef>
+                <a:spcPts val="300"/>
+              </a:spcBef>
+              <a:spcAft>
+                <a:spcPct val="0"/>
+              </a:spcAft>
+            </a:pPr>
+            <a:r>
+              <a:rPr lang="ru-RU" altLang="ru-RU" dirty="0"/>
+              <a:t>Экзогенные факторы используются только если они улучшают точность на тестах</a:t>
+            </a:r>
+          </a:p>
+          <a:p>
+            <a:pPr eaLnBrk="0" fontAlgn="base" hangingPunct="0">
+              <a:lnSpc>
+                <a:spcPct val="110000"/>
+              </a:lnSpc>
+              <a:spcBef>
+                <a:spcPts val="300"/>
+              </a:spcBef>
+              <a:spcAft>
+                <a:spcPct val="0"/>
+              </a:spcAft>
+            </a:pPr>
+            <a:r>
+              <a:rPr lang="ru-RU" altLang="ru-RU" dirty="0"/>
+              <a:t>Проверяйте признаки на утечку данных (забегают вперед на </a:t>
+            </a:r>
+            <a:r>
+              <a:rPr lang="ru-RU" altLang="ru-RU" dirty="0" err="1"/>
+              <a:t>трейне</a:t>
+            </a:r>
+            <a:r>
+              <a:rPr lang="ru-RU" altLang="ru-RU" dirty="0"/>
+              <a:t>)</a:t>
+            </a:r>
+          </a:p>
+          <a:p>
+            <a:pPr eaLnBrk="0" fontAlgn="base" hangingPunct="0">
+              <a:lnSpc>
+                <a:spcPct val="110000"/>
+              </a:lnSpc>
+              <a:spcBef>
+                <a:spcPts val="300"/>
+              </a:spcBef>
+              <a:spcAft>
+                <a:spcPct val="0"/>
+              </a:spcAft>
+            </a:pPr>
+            <a:r>
+              <a:rPr lang="ru-RU" altLang="ru-RU" dirty="0"/>
+              <a:t>Используйте </a:t>
+            </a:r>
+            <a:r>
+              <a:rPr lang="en-US" altLang="ru-RU" dirty="0"/>
+              <a:t>ARIMA </a:t>
+            </a:r>
+            <a:r>
+              <a:rPr lang="ru-RU" altLang="ru-RU" dirty="0"/>
+              <a:t>и </a:t>
+            </a:r>
+            <a:r>
+              <a:rPr lang="en-US" altLang="ru-RU" dirty="0"/>
+              <a:t>ETS </a:t>
+            </a:r>
+            <a:r>
+              <a:rPr lang="ru-RU" altLang="ru-RU" dirty="0"/>
+              <a:t>как </a:t>
+            </a:r>
+            <a:r>
+              <a:rPr lang="ru-RU" altLang="ru-RU" dirty="0" err="1"/>
+              <a:t>baseline</a:t>
+            </a:r>
+            <a:endParaRPr lang="ru-RU" altLang="ru-RU" dirty="0"/>
+          </a:p>
+          <a:p>
+            <a:pPr eaLnBrk="0" fontAlgn="base" hangingPunct="0">
+              <a:lnSpc>
+                <a:spcPct val="110000"/>
+              </a:lnSpc>
+              <a:spcBef>
+                <a:spcPts val="300"/>
+              </a:spcBef>
+              <a:spcAft>
+                <a:spcPct val="0"/>
+              </a:spcAft>
+            </a:pPr>
+            <a:r>
+              <a:rPr lang="ru-RU" altLang="ru-RU" dirty="0"/>
+              <a:t>Начинайте с простого: </a:t>
+            </a:r>
+            <a:r>
+              <a:rPr lang="ru-RU" altLang="ru-RU" dirty="0" err="1"/>
+              <a:t>XGBoost</a:t>
+            </a:r>
+            <a:r>
+              <a:rPr lang="ru-RU" altLang="ru-RU" dirty="0"/>
+              <a:t> + лаги</a:t>
+            </a:r>
+          </a:p>
+          <a:p>
+            <a:pPr eaLnBrk="0" fontAlgn="base" hangingPunct="0">
+              <a:lnSpc>
+                <a:spcPct val="110000"/>
+              </a:lnSpc>
+              <a:spcBef>
+                <a:spcPts val="300"/>
+              </a:spcBef>
+              <a:spcAft>
+                <a:spcPct val="0"/>
+              </a:spcAft>
+            </a:pPr>
+            <a:r>
+              <a:rPr lang="ru-RU" altLang="ru-RU" dirty="0"/>
+              <a:t>Модели легко могут потерять структуру (</a:t>
+            </a:r>
+            <a:r>
+              <a:rPr lang="ru-RU" altLang="ru-RU" dirty="0" err="1"/>
+              <a:t>патетрны</a:t>
+            </a:r>
+            <a:r>
+              <a:rPr lang="ru-RU" altLang="ru-RU" dirty="0"/>
+              <a:t> и </a:t>
+            </a:r>
+            <a:r>
+              <a:rPr lang="ru-RU" altLang="ru-RU" dirty="0" err="1"/>
+              <a:t>тд</a:t>
+            </a:r>
+            <a:r>
+              <a:rPr lang="ru-RU" altLang="ru-RU" dirty="0"/>
+              <a:t>), выбирайте размер окна, для стабилизации</a:t>
+            </a:r>
+          </a:p>
+          <a:p>
+            <a:pPr eaLnBrk="0" fontAlgn="base" hangingPunct="0">
+              <a:lnSpc>
+                <a:spcPct val="110000"/>
+              </a:lnSpc>
+              <a:spcBef>
+                <a:spcPts val="300"/>
+              </a:spcBef>
+              <a:spcAft>
+                <a:spcPct val="0"/>
+              </a:spcAft>
+            </a:pPr>
+            <a:r>
+              <a:rPr lang="ru-RU" altLang="ru-RU" dirty="0"/>
+              <a:t>Добавляйте календарные признаки: день недели, праздник</a:t>
+            </a:r>
+          </a:p>
+          <a:p>
+            <a:pPr eaLnBrk="0" fontAlgn="base" hangingPunct="0">
+              <a:lnSpc>
+                <a:spcPct val="110000"/>
+              </a:lnSpc>
+              <a:spcBef>
+                <a:spcPts val="300"/>
+              </a:spcBef>
+              <a:spcAft>
+                <a:spcPct val="0"/>
+              </a:spcAft>
+            </a:pPr>
+            <a:r>
+              <a:rPr lang="ru-RU" altLang="ru-RU" dirty="0"/>
+              <a:t>Проверяйте остатки — должны быть белым шумом</a:t>
+            </a:r>
+          </a:p>
+          <a:p>
+            <a:pPr lvl="0" eaLnBrk="0" fontAlgn="base" hangingPunct="0">
+              <a:lnSpc>
+                <a:spcPct val="110000"/>
+              </a:lnSpc>
+              <a:spcBef>
+                <a:spcPts val="300"/>
+              </a:spcBef>
+              <a:spcAft>
+                <a:spcPct val="0"/>
+              </a:spcAft>
+            </a:pPr>
+            <a:r>
+              <a:rPr lang="ru-RU" altLang="ru-RU" dirty="0"/>
+              <a:t>Проверяйте факторы на интерпретируемость</a:t>
+            </a:r>
+          </a:p>
+          <a:p>
+            <a:endParaRPr lang="ru-RU" dirty="0"/>
+          </a:p>
+        </p:txBody>
+      </p:sp>
+    </p:spTree>
+    <p:extLst>
+      <p:ext uri="{BB962C8B-B14F-4D97-AF65-F5344CB8AC3E}">
+        <p14:creationId xmlns:p14="http://schemas.microsoft.com/office/powerpoint/2010/main" val="1126026669"/>
+      </p:ext>
+    </p:extLst>
+  </p:cSld>
+  <p:clrMapOvr>
+    <a:masterClrMapping/>
+  </p:clrMapOvr>
+</p:sld>
+</file>
+
+<file path=ppt/slides/slide17.xml><?xml version="1.0" encoding="utf-8"?>
+<p:sld xmlns:a="http://schemas.openxmlformats.org/drawingml/2006/main" xmlns:r="http://schemas.openxmlformats.org/officeDocument/2006/relationships" xmlns:p="http://schemas.openxmlformats.org/presentationml/2006/main">
+  <p:cSld>
+    <p:spTree>
+      <p:nvGrpSpPr>
+        <p:cNvPr id="1" name=""/>
+        <p:cNvGrpSpPr/>
+        <p:nvPr/>
+      </p:nvGrpSpPr>
+      <p:grpSpPr>
+        <a:xfrm>
+          <a:off x="0" y="0"/>
+          <a:ext cx="0" cy="0"/>
+          <a:chOff x="0" y="0"/>
+          <a:chExt cx="0" cy="0"/>
+        </a:xfrm>
+      </p:grpSpPr>
+      <p:sp>
+        <p:nvSpPr>
+          <p:cNvPr id="2" name="Заголовок 1"/>
+          <p:cNvSpPr>
+            <a:spLocks noGrp="1"/>
+          </p:cNvSpPr>
+          <p:nvPr>
+            <p:ph type="title"/>
+          </p:nvPr>
+        </p:nvSpPr>
+        <p:spPr>
+          <a:xfrm>
             <a:off x="228600" y="266721"/>
             <a:ext cx="11134725" cy="863600"/>
           </a:xfrm>
@@ -5262,16 +6138,7 @@
                 </a:solidFill>
                 <a:latin typeface="+mn-lt"/>
               </a:rPr>
-              <a:t>Практические советы и </a:t>
-            </a:r>
-            <a:r>
-              <a:rPr lang="ru-RU" altLang="ru-RU" dirty="0" smtClean="0">
-                <a:solidFill>
-                  <a:srgbClr val="2C2C36"/>
-                </a:solidFill>
-                <a:latin typeface="+mn-lt"/>
-              </a:rPr>
-              <a:t>ловушки</a:t>
+              <a:t>Практические советы и ловушки</a:t>
             </a:r>
             <a:endParaRPr lang="ru-RU" dirty="0">
               <a:latin typeface="+mn-lt"/>
@@ -5334,10 +6201,9 @@
                     <a:lstStyle/>
                     <a:p>
                       <a:r>
-                        <a:rPr lang="ru-RU" dirty="0" smtClean="0"/>
+                        <a:rPr lang="ru-RU" dirty="0"/>
                         <a:t>Задача</a:t>
                       </a:r>
-                      <a:endParaRPr lang="ru-RU" dirty="0"/>
                     </a:p>
                   </a:txBody>
                   <a:tcPr/>
@@ -5348,10 +6214,9 @@
                     <a:lstStyle/>
                     <a:p>
                       <a:r>
-                        <a:rPr lang="ru-RU" dirty="0" smtClean="0"/>
+                        <a:rPr lang="ru-RU" dirty="0"/>
                         <a:t>Стат. методы</a:t>
                       </a:r>
-                      <a:endParaRPr lang="ru-RU" dirty="0"/>
                     </a:p>
                   </a:txBody>
                   <a:tcPr/>
@@ -5362,15 +6227,15 @@
                     <a:lstStyle/>
                     <a:p>
                       <a:r>
-                        <a:rPr lang="en-US" dirty="0" smtClean="0"/>
+                        <a:rPr lang="en-US" dirty="0"/>
                         <a:t>ML</a:t>
                       </a:r>
                       <a:r>
-                        <a:rPr lang="en-US" baseline="0" dirty="0" smtClean="0"/>
+                        <a:rPr lang="en-US" baseline="0" dirty="0"/>
                         <a:t> </a:t>
                       </a:r>
                       <a:r>
-                        <a:rPr lang="ru-RU" baseline="0" dirty="0" smtClean="0"/>
+                        <a:rPr lang="ru-RU" baseline="0" dirty="0"/>
                         <a:t>методы</a:t>
                       </a:r>
                       <a:endParaRPr lang="ru-RU" dirty="0"/>
@@ -5391,10 +6256,9 @@
                     <a:lstStyle/>
                     <a:p>
                       <a:r>
-                        <a:rPr lang="ru-RU" dirty="0" smtClean="0"/>
+                        <a:rPr lang="ru-RU" dirty="0"/>
                         <a:t>примеры</a:t>
                       </a:r>
-                      <a:endParaRPr lang="ru-RU" dirty="0"/>
                     </a:p>
                   </a:txBody>
                   <a:tcPr/>
@@ -5405,11 +6269,11 @@
                     <a:lstStyle/>
                     <a:p>
                       <a:r>
-                        <a:rPr lang="en-US" dirty="0" smtClean="0"/>
+                        <a:rPr lang="en-US" dirty="0"/>
                         <a:t>ARIMA,</a:t>
                       </a:r>
                       <a:r>
-                        <a:rPr lang="en-US" baseline="0" dirty="0" smtClean="0"/>
+                        <a:rPr lang="en-US" baseline="0" dirty="0"/>
                         <a:t> ETS, Naïve</a:t>
                       </a:r>
                       <a:endParaRPr lang="ru-RU" dirty="0"/>
@@ -5423,15 +6287,15 @@
                     <a:lstStyle/>
                     <a:p>
                       <a:r>
-                        <a:rPr lang="en-US" dirty="0" err="1" smtClean="0"/>
+                        <a:rPr lang="en-US" dirty="0" err="1"/>
                         <a:t>XGBoost</a:t>
                       </a:r>
                       <a:r>
-                        <a:rPr lang="en-US" dirty="0" smtClean="0"/>
+                        <a:rPr lang="en-US" dirty="0"/>
                         <a:t>, </a:t>
                       </a:r>
                       <a:r>
-                        <a:rPr lang="en-US" dirty="0" err="1" smtClean="0"/>
+                        <a:rPr lang="en-US" dirty="0" err="1"/>
                         <a:t>LinearReg+Lasso</a:t>
                       </a:r>
                       <a:endParaRPr lang="ru-RU" dirty="0"/>
@@ -5452,11 +6316,11 @@
                     <a:lstStyle/>
                     <a:p>
                       <a:r>
-                        <a:rPr lang="ru-RU" dirty="0" smtClean="0"/>
+                        <a:rPr lang="ru-RU" dirty="0"/>
                         <a:t>Стационарность</a:t>
                       </a:r>
                       <a:r>
-                        <a:rPr lang="ru-RU" baseline="0" dirty="0" smtClean="0"/>
+                        <a:rPr lang="ru-RU" baseline="0" dirty="0"/>
                         <a:t> ВР</a:t>
                       </a:r>
                       <a:endParaRPr lang="ru-RU" dirty="0"/>
@@ -5470,10 +6334,9 @@
                     <a:lstStyle/>
                     <a:p>
                       <a:r>
-                        <a:rPr lang="ru-RU" dirty="0" smtClean="0"/>
+                        <a:rPr lang="ru-RU" dirty="0"/>
                         <a:t>Очень важна</a:t>
                       </a:r>
-                      <a:endParaRPr lang="ru-RU" dirty="0"/>
                     </a:p>
                   </a:txBody>
                   <a:tcPr/>
@@ -5484,11 +6347,11 @@
                     <a:lstStyle/>
                     <a:p>
                       <a:r>
-                        <a:rPr lang="ru-RU" dirty="0" smtClean="0"/>
+                        <a:rPr lang="ru-RU" dirty="0"/>
                         <a:t>Только</a:t>
                       </a:r>
                       <a:r>
-                        <a:rPr lang="ru-RU" baseline="0" dirty="0" smtClean="0"/>
+                        <a:rPr lang="ru-RU" baseline="0" dirty="0"/>
                         <a:t> регулярность</a:t>
                       </a:r>
                       <a:endParaRPr lang="ru-RU" dirty="0"/>
@@ -5509,10 +6372,9 @@
                     <a:lstStyle/>
                     <a:p>
                       <a:r>
-                        <a:rPr lang="ru-RU" dirty="0" smtClean="0"/>
+                        <a:rPr lang="ru-RU" dirty="0"/>
                         <a:t>Интерпретируемость</a:t>
                       </a:r>
-                      <a:endParaRPr lang="ru-RU" dirty="0"/>
                     </a:p>
                   </a:txBody>
                   <a:tcPr/>
@@ -5523,10 +6385,9 @@
                     <a:lstStyle/>
                     <a:p>
                       <a:r>
-                        <a:rPr lang="ru-RU" dirty="0" smtClean="0"/>
+                        <a:rPr lang="ru-RU" dirty="0"/>
                         <a:t>Высокая</a:t>
                       </a:r>
-                      <a:endParaRPr lang="ru-RU" dirty="0"/>
                     </a:p>
                   </a:txBody>
                   <a:tcPr/>
@@ -5537,10 +6398,9 @@
                     <a:lstStyle/>
                     <a:p>
                       <a:r>
-                        <a:rPr lang="ru-RU" dirty="0" smtClean="0"/>
+                        <a:rPr lang="ru-RU" dirty="0"/>
                         <a:t>средняя</a:t>
                       </a:r>
-                      <a:endParaRPr lang="ru-RU" dirty="0"/>
                     </a:p>
                   </a:txBody>
                   <a:tcPr/>
@@ -5558,10 +6418,9 @@
                     <a:lstStyle/>
                     <a:p>
                       <a:r>
-                        <a:rPr lang="ru-RU" dirty="0" smtClean="0"/>
+                        <a:rPr lang="ru-RU" dirty="0"/>
                         <a:t>Риск переобучения</a:t>
                       </a:r>
-                      <a:endParaRPr lang="ru-RU" dirty="0"/>
                     </a:p>
                   </a:txBody>
                   <a:tcPr/>
@@ -5572,11 +6431,11 @@
                     <a:lstStyle/>
                     <a:p>
                       <a:r>
-                        <a:rPr lang="ru-RU" dirty="0" smtClean="0"/>
+                        <a:rPr lang="ru-RU" dirty="0"/>
                         <a:t>Низкий,  при кросс-</a:t>
                       </a:r>
                       <a:r>
-                        <a:rPr lang="ru-RU" dirty="0" err="1" smtClean="0"/>
+                        <a:rPr lang="ru-RU" dirty="0" err="1"/>
                         <a:t>валидации</a:t>
                       </a:r>
                       <a:endParaRPr lang="ru-RU" dirty="0"/>
@@ -5607,10 +6466,9 @@
                         <a:defRPr/>
                       </a:pPr>
                       <a:r>
-                        <a:rPr lang="ru-RU" dirty="0" smtClean="0"/>
+                        <a:rPr lang="ru-RU" dirty="0"/>
                         <a:t>средний</a:t>
                       </a:r>
-                      <a:endParaRPr lang="ru-RU" dirty="0"/>
                     </a:p>
                   </a:txBody>
                   <a:tcPr/>
@@ -5628,10 +6486,9 @@
                     <a:lstStyle/>
                     <a:p>
                       <a:r>
-                        <a:rPr lang="ru-RU" dirty="0" smtClean="0"/>
+                        <a:rPr lang="ru-RU" dirty="0"/>
                         <a:t>Экзогенные факторы</a:t>
                       </a:r>
-                      <a:endParaRPr lang="ru-RU" dirty="0"/>
                     </a:p>
                   </a:txBody>
                   <a:tcPr/>
@@ -5642,11 +6499,11 @@
                     <a:lstStyle/>
                     <a:p>
                       <a:r>
-                        <a:rPr lang="ru-RU" dirty="0" smtClean="0"/>
+                        <a:rPr lang="ru-RU" dirty="0"/>
                         <a:t>Только 1</a:t>
                       </a:r>
                       <a:r>
-                        <a:rPr lang="ru-RU" baseline="0" dirty="0" smtClean="0"/>
+                        <a:rPr lang="ru-RU" baseline="0" dirty="0"/>
                         <a:t> - 2</a:t>
                       </a:r>
                       <a:endParaRPr lang="ru-RU" dirty="0"/>
@@ -5660,11 +6517,11 @@
                     <a:lstStyle/>
                     <a:p>
                       <a:r>
-                        <a:rPr lang="ru-RU" dirty="0" smtClean="0"/>
+                        <a:rPr lang="ru-RU" dirty="0"/>
                         <a:t>Главное чтобы не было</a:t>
                       </a:r>
                       <a:r>
-                        <a:rPr lang="ru-RU" baseline="0" dirty="0" smtClean="0"/>
+                        <a:rPr lang="ru-RU" baseline="0" dirty="0"/>
                         <a:t> утечки </a:t>
                       </a:r>
                       <a:endParaRPr lang="ru-RU" dirty="0"/>
@@ -5685,10 +6542,9 @@
                     <a:lstStyle/>
                     <a:p>
                       <a:r>
-                        <a:rPr lang="ru-RU" dirty="0" smtClean="0"/>
+                        <a:rPr lang="ru-RU" dirty="0"/>
                         <a:t>Многомерные ВР</a:t>
                       </a:r>
-                      <a:endParaRPr lang="ru-RU" dirty="0"/>
                     </a:p>
                   </a:txBody>
                   <a:tcPr/>
@@ -5699,11 +6555,11 @@
                     <a:lstStyle/>
                     <a:p>
                       <a:r>
-                        <a:rPr lang="ru-RU" dirty="0" smtClean="0"/>
+                        <a:rPr lang="ru-RU" dirty="0"/>
                         <a:t>Сложно,</a:t>
                       </a:r>
                       <a:r>
-                        <a:rPr lang="ru-RU" baseline="0" dirty="0" smtClean="0"/>
+                        <a:rPr lang="ru-RU" baseline="0" dirty="0"/>
                         <a:t> чаще локальные модели</a:t>
                       </a:r>
                       <a:endParaRPr lang="ru-RU" dirty="0"/>
@@ -5717,11 +6573,11 @@
                     <a:lstStyle/>
                     <a:p>
                       <a:r>
-                        <a:rPr lang="ru-RU" dirty="0" smtClean="0"/>
+                        <a:rPr lang="ru-RU" dirty="0"/>
                         <a:t>Возможны</a:t>
                       </a:r>
                       <a:r>
-                        <a:rPr lang="ru-RU" baseline="0" dirty="0" smtClean="0"/>
+                        <a:rPr lang="ru-RU" baseline="0" dirty="0"/>
                         <a:t> глобальные модели</a:t>
                       </a:r>
                       <a:endParaRPr lang="ru-RU" dirty="0"/>
@@ -5742,10 +6598,9 @@
                     <a:lstStyle/>
                     <a:p>
                       <a:r>
-                        <a:rPr lang="ru-RU" dirty="0" smtClean="0"/>
+                        <a:rPr lang="ru-RU" dirty="0"/>
                         <a:t>Иерархические ВР</a:t>
                       </a:r>
-                      <a:endParaRPr lang="ru-RU" dirty="0"/>
                     </a:p>
                   </a:txBody>
                   <a:tcPr/>
@@ -5756,10 +6611,9 @@
                     <a:lstStyle/>
                     <a:p>
                       <a:r>
-                        <a:rPr lang="ru-RU" dirty="0" smtClean="0"/>
+                        <a:rPr lang="ru-RU" dirty="0"/>
                         <a:t>Сложно учесть</a:t>
                       </a:r>
-                      <a:endParaRPr lang="ru-RU" dirty="0"/>
                     </a:p>
                   </a:txBody>
                   <a:tcPr/>
@@ -5770,10 +6624,9 @@
                     <a:lstStyle/>
                     <a:p>
                       <a:r>
-                        <a:rPr lang="ru-RU" dirty="0" smtClean="0"/>
+                        <a:rPr lang="ru-RU" dirty="0"/>
                         <a:t>да</a:t>
                       </a:r>
-                      <a:endParaRPr lang="ru-RU" dirty="0"/>
                     </a:p>
                   </a:txBody>
                   <a:tcPr/>
@@ -5791,10 +6644,9 @@
                     <a:lstStyle/>
                     <a:p>
                       <a:r>
-                        <a:rPr lang="ru-RU" dirty="0" smtClean="0"/>
+                        <a:rPr lang="ru-RU" dirty="0"/>
                         <a:t>Горизонт прогноза</a:t>
                       </a:r>
-                      <a:endParaRPr lang="ru-RU" dirty="0"/>
                     </a:p>
                   </a:txBody>
                   <a:tcPr/>
@@ -5805,10 +6657,9 @@
                     <a:lstStyle/>
                     <a:p>
                       <a:r>
-                        <a:rPr lang="ru-RU" dirty="0" smtClean="0"/>
+                        <a:rPr lang="ru-RU" dirty="0"/>
                         <a:t>Небольшой</a:t>
                       </a:r>
-                      <a:endParaRPr lang="ru-RU" dirty="0"/>
                     </a:p>
                   </a:txBody>
                   <a:tcPr/>
@@ -5819,10 +6670,9 @@
                     <a:lstStyle/>
                     <a:p>
                       <a:r>
-                        <a:rPr lang="ru-RU" dirty="0" smtClean="0"/>
+                        <a:rPr lang="ru-RU" dirty="0"/>
                         <a:t>Средний</a:t>
                       </a:r>
-                      <a:endParaRPr lang="ru-RU" dirty="0"/>
                     </a:p>
                   </a:txBody>
                   <a:tcPr/>
@@ -5840,14 +6690,13 @@
                     <a:lstStyle/>
                     <a:p>
                       <a:r>
-                        <a:rPr lang="ru-RU" dirty="0" err="1" smtClean="0"/>
+                        <a:rPr lang="ru-RU" dirty="0" err="1"/>
                         <a:t>Автомтаизация</a:t>
                       </a:r>
                       <a:r>
-                        <a:rPr lang="ru-RU" dirty="0" smtClean="0"/>
+                        <a:rPr lang="ru-RU" dirty="0"/>
                         <a:t> обучения</a:t>
                       </a:r>
-                      <a:endParaRPr lang="ru-RU" dirty="0"/>
                     </a:p>
                   </a:txBody>
                   <a:tcPr/>
@@ -5858,10 +6707,9 @@
                     <a:lstStyle/>
                     <a:p>
                       <a:r>
-                        <a:rPr lang="ru-RU" dirty="0" smtClean="0"/>
+                        <a:rPr lang="ru-RU" dirty="0"/>
                         <a:t>Средняя</a:t>
                       </a:r>
-                      <a:endParaRPr lang="ru-RU" dirty="0"/>
                     </a:p>
                   </a:txBody>
                   <a:tcPr/>
@@ -5872,11 +6720,11 @@
                     <a:lstStyle/>
                     <a:p>
                       <a:r>
-                        <a:rPr lang="ru-RU" dirty="0" smtClean="0"/>
+                        <a:rPr lang="ru-RU" dirty="0"/>
                         <a:t>Высокая</a:t>
                       </a:r>
                       <a:r>
-                        <a:rPr lang="ru-RU" baseline="0" dirty="0" smtClean="0"/>
+                        <a:rPr lang="ru-RU" baseline="0" dirty="0"/>
                         <a:t> </a:t>
                       </a:r>
                       <a:endParaRPr lang="ru-RU" dirty="0"/>
@@ -5945,10 +6793,9 @@
           <a:lstStyle/>
           <a:p>
             <a:r>
-              <a:rPr lang="ru-RU" dirty="0" smtClean="0"/>
+              <a:rPr lang="ru-RU" dirty="0"/>
               <a:t>Почему невсегда статистические методы</a:t>
             </a:r>
-            <a:endParaRPr lang="ru-RU" dirty="0"/>
           </a:p>
         </p:txBody>
       </p:sp>
@@ -5998,7 +6845,6 @@
               <a:rPr lang="ru-RU" altLang="ru-RU" sz="2100" dirty="0"/>
               <a:t> ВР приходится руководствоваться принципом скорости. </a:t>
             </a:r>
-            <a:endParaRPr lang="ru-RU" altLang="ru-RU" sz="2100" dirty="0" smtClean="0"/>
           </a:p>
           <a:p>
             <a:pPr marL="0" lvl="0" indent="0" eaLnBrk="0" fontAlgn="base" hangingPunct="0">
@@ -6014,12 +6860,8 @@
               <a:buNone/>
             </a:pPr>
             <a:r>
-              <a:rPr lang="ru-RU" altLang="ru-RU" sz="2100" dirty="0" smtClean="0"/>
-              <a:t>Основные</a:t>
-            </a:r>
-            <a:r>
               <a:rPr lang="ru-RU" altLang="ru-RU" sz="2100" dirty="0"/>
-              <a:t> </a:t>
+              <a:t>Основные </a:t>
             </a:r>
             <a:r>
               <a:rPr lang="ru-RU" altLang="ru-RU" sz="2100" b="1" dirty="0"/>
@@ -6027,21 +6869,17 @@
             </a:r>
             <a:r>
               <a:rPr lang="ru-RU" altLang="ru-RU" sz="2100" dirty="0"/>
-              <a:t> </a:t>
-            </a:r>
-            <a:r>
-              <a:rPr lang="ru-RU" altLang="ru-RU" sz="2100" dirty="0" smtClean="0"/>
-              <a:t>моделей</a:t>
-            </a:r>
-            <a:r>
-              <a:rPr lang="en-US" altLang="ru-RU" sz="2100" dirty="0" smtClean="0"/>
+              <a:t> моделей</a:t>
+            </a:r>
+            <a:r>
+              <a:rPr lang="en-US" altLang="ru-RU" sz="2100" dirty="0"/>
               <a:t> SARIMA, ETS </a:t>
             </a:r>
             <a:r>
-              <a:rPr lang="ru-RU" altLang="ru-RU" sz="2100" dirty="0" smtClean="0"/>
+              <a:rPr lang="ru-RU" altLang="ru-RU" sz="2100" dirty="0"/>
               <a:t>и других стат. моделей :</a:t>
             </a:r>
-            <a:endParaRPr kumimoji="0" lang="ru-RU" altLang="ru-RU" sz="2100" b="0" i="0" u="none" strike="noStrike" cap="none" normalizeH="0" baseline="0" dirty="0" smtClean="0">
+            <a:endParaRPr kumimoji="0" lang="ru-RU" altLang="ru-RU" sz="2100" b="0" i="0" u="none" strike="noStrike" cap="none" normalizeH="0" baseline="0" dirty="0">
               <a:ln>
                 <a:noFill/>
               </a:ln>
@@ -6064,16 +6902,8 @@
               </a:spcAft>
             </a:pPr>
             <a:r>
-              <a:rPr lang="ru-RU" altLang="ru-RU" sz="2100" dirty="0" smtClean="0"/>
-              <a:t>Сложность </a:t>
-            </a:r>
-            <a:r>
               <a:rPr lang="ru-RU" altLang="ru-RU" sz="2100" dirty="0"/>
-              <a:t>предварительного анализа и подготовки данных</a:t>
-            </a:r>
-            <a:r>
-              <a:rPr lang="ru-RU" altLang="ru-RU" sz="2100" dirty="0" smtClean="0"/>
-              <a:t>.</a:t>
+              <a:t>Сложность предварительного анализа и подготовки данных.</a:t>
             </a:r>
           </a:p>
           <a:p>
@@ -6089,7 +6919,7 @@
               </a:spcAft>
             </a:pPr>
             <a:r>
-              <a:rPr lang="ru-RU" altLang="ru-RU" sz="2100" dirty="0" smtClean="0"/>
+              <a:rPr lang="ru-RU" altLang="ru-RU" sz="2100" dirty="0"/>
               <a:t>Трудно настраиваемы параметры моделей. </a:t>
             </a:r>
           </a:p>
@@ -6106,23 +6936,15 @@
               </a:spcAft>
             </a:pPr>
             <a:r>
-              <a:rPr lang="ru-RU" altLang="ru-RU" sz="2100" dirty="0" smtClean="0"/>
-              <a:t>Необходимость </a:t>
-            </a:r>
-            <a:r>
               <a:rPr lang="ru-RU" altLang="ru-RU" sz="2100" dirty="0"/>
-              <a:t>частого </a:t>
-            </a:r>
-            <a:r>
-              <a:rPr lang="ru-RU" altLang="ru-RU" sz="2100" dirty="0" smtClean="0"/>
-              <a:t>дообучения\переобучения с новыми </a:t>
-            </a:r>
-            <a:r>
-              <a:rPr lang="ru-RU" altLang="ru-RU" sz="2100" dirty="0" err="1" smtClean="0"/>
+              <a:t>Необходимость частого дообучения\переобучения с новыми </a:t>
+            </a:r>
+            <a:r>
+              <a:rPr lang="ru-RU" altLang="ru-RU" sz="2100" dirty="0" err="1"/>
               <a:t>гиперпараметрами</a:t>
             </a:r>
             <a:r>
-              <a:rPr lang="ru-RU" altLang="ru-RU" sz="2100" dirty="0" smtClean="0"/>
+              <a:rPr lang="ru-RU" altLang="ru-RU" sz="2100" dirty="0"/>
               <a:t>.</a:t>
             </a:r>
           </a:p>
@@ -6139,18 +6961,17 @@
               </a:spcAft>
             </a:pPr>
             <a:r>
-              <a:rPr lang="ru-RU" altLang="ru-RU" sz="2100" dirty="0" smtClean="0"/>
+              <a:rPr lang="ru-RU" altLang="ru-RU" sz="2100" dirty="0"/>
               <a:t>Авто настройка не дает высоко-точных результатов без ручной </a:t>
             </a:r>
             <a:r>
-              <a:rPr lang="ru-RU" altLang="ru-RU" sz="2100" dirty="0" err="1" smtClean="0"/>
+              <a:rPr lang="ru-RU" altLang="ru-RU" sz="2100" dirty="0" err="1"/>
               <a:t>донастройки</a:t>
             </a:r>
             <a:r>
-              <a:rPr lang="ru-RU" altLang="ru-RU" sz="2100" dirty="0" smtClean="0"/>
+              <a:rPr lang="ru-RU" altLang="ru-RU" sz="2100" dirty="0"/>
               <a:t>.</a:t>
             </a:r>
-            <a:endParaRPr lang="ru-RU" altLang="ru-RU" sz="2100" dirty="0"/>
           </a:p>
           <a:p>
             <a:pPr marL="0" lvl="0" indent="0" eaLnBrk="0" fontAlgn="base" hangingPunct="0">
@@ -6167,22 +6988,17 @@
               <a:buChar char="•"/>
             </a:pPr>
             <a:r>
-              <a:rPr lang="ru-RU" altLang="ru-RU" sz="2100" dirty="0" smtClean="0"/>
+              <a:rPr lang="ru-RU" altLang="ru-RU" sz="2100" dirty="0"/>
               <a:t> </a:t>
             </a:r>
             <a:r>
-              <a:rPr lang="ru-RU" altLang="ru-RU" sz="2100" u="sng" dirty="0" smtClean="0"/>
-              <a:t>На практике при работе с большими объемами ВР и длинными горизонтами предсказания  - при массовых не прецизионных прогнозах дешевле и быстрее</a:t>
-            </a:r>
-            <a:r>
               <a:rPr lang="ru-RU" altLang="ru-RU" sz="2100" u="sng" dirty="0"/>
-              <a:t> выбрать несколько признаков из имеющегося временного ряда и построить простую линейную регрессионную модель или, скажем, случайный лес</a:t>
+              <a:t>На практике при работе с большими объемами ВР и длинными горизонтами предсказания  - при массовых не прецизионных прогнозах дешевле и быстрее выбрать несколько признаков из имеющегося временного ряда и построить простую линейную регрессионную модель или, скажем, случайный лес</a:t>
             </a:r>
             <a:r>
               <a:rPr lang="ru-RU" altLang="ru-RU" sz="2100" dirty="0"/>
               <a:t>. </a:t>
             </a:r>
-            <a:endParaRPr lang="ru-RU" altLang="ru-RU" sz="2100" dirty="0" smtClean="0"/>
           </a:p>
           <a:p>
             <a:pPr marL="457200" lvl="1" indent="0" eaLnBrk="0" fontAlgn="base" hangingPunct="0">
@@ -6198,12 +7014,8 @@
               <a:buNone/>
             </a:pPr>
             <a:r>
-              <a:rPr lang="ru-RU" altLang="ru-RU" sz="2100" dirty="0" smtClean="0"/>
-              <a:t>подход </a:t>
-            </a:r>
-            <a:r>
               <a:rPr lang="ru-RU" altLang="ru-RU" sz="2100" dirty="0"/>
-              <a:t>не подкреплен теорией и нарушает ряд предположений (например, теорему Гаусса-Маркова, особенно для некоррелированных ошибок), но он очень полезен на практике и часто используется в соревнованиях по машинному обучению</a:t>
+              <a:t>подход не подкреплен теорией и нарушает ряд предположений (например, теорему Гаусса-Маркова, особенно для некоррелированных ошибок), но он очень полезен на практике и часто используется в соревнованиях по машинному обучению</a:t>
             </a:r>
           </a:p>
           <a:p>
@@ -6220,22 +7032,22 @@
               <a:buNone/>
             </a:pPr>
             <a:r>
-              <a:rPr lang="ru-RU" altLang="ru-RU" sz="2100" b="1" dirty="0" smtClean="0"/>
+              <a:rPr lang="ru-RU" altLang="ru-RU" sz="2100" b="1" dirty="0"/>
               <a:t>При исследованиях рекомендуется начинать с </a:t>
             </a:r>
             <a:r>
-              <a:rPr lang="en-US" altLang="ru-RU" sz="2100" b="1" dirty="0" smtClean="0"/>
+              <a:rPr lang="en-US" altLang="ru-RU" sz="2100" b="1" dirty="0"/>
               <a:t>ARIMA, ETS </a:t>
             </a:r>
             <a:r>
-              <a:rPr lang="ru-RU" altLang="ru-RU" sz="2100" b="1" dirty="0" smtClean="0"/>
+              <a:rPr lang="ru-RU" altLang="ru-RU" sz="2100" b="1" dirty="0"/>
               <a:t>как </a:t>
             </a:r>
             <a:r>
-              <a:rPr lang="ru-RU" altLang="ru-RU" sz="2100" b="1" dirty="0" err="1" smtClean="0"/>
+              <a:rPr lang="ru-RU" altLang="ru-RU" sz="2100" b="1" dirty="0" err="1"/>
               <a:t>бейзлайны</a:t>
             </a:r>
-            <a:endParaRPr kumimoji="0" lang="ru-RU" altLang="ru-RU" sz="2100" b="1" i="0" u="none" strike="noStrike" cap="none" normalizeH="0" baseline="0" dirty="0" smtClean="0">
+            <a:endParaRPr kumimoji="0" lang="ru-RU" altLang="ru-RU" sz="2100" b="1" i="0" u="none" strike="noStrike" cap="none" normalizeH="0" baseline="0" dirty="0">
               <a:ln>
                 <a:noFill/>
               </a:ln>
@@ -6272,10 +7084,9 @@
           <a:lstStyle/>
           <a:p>
             <a:r>
-              <a:rPr lang="ru-RU" sz="1400" dirty="0" smtClean="0"/>
+              <a:rPr lang="ru-RU" sz="1400" dirty="0"/>
               <a:t>https://mlcourse.ai/book/topic09/topic9_part1_time_series_python.html</a:t>
             </a:r>
-            <a:endParaRPr lang="ru-RU" sz="1400" dirty="0"/>
           </a:p>
         </p:txBody>
       </p:sp>
@@ -6301,10 +7112,9 @@
           <a:lstStyle/>
           <a:p>
             <a:r>
-              <a:rPr lang="ru-RU" sz="1400" dirty="0" smtClean="0"/>
+              <a:rPr lang="ru-RU" sz="1400" dirty="0"/>
               <a:t>https://blogs.cisco.com/analytics-automation/arima3</a:t>
             </a:r>
-            <a:endParaRPr lang="ru-RU" sz="1400" dirty="0"/>
           </a:p>
         </p:txBody>
       </p:sp>
@@ -6318,13 +7128,6 @@
   <p:clrMapOvr>
     <a:masterClrMapping/>
   </p:clrMapOvr>
-  <p:timing>
-    <p:tnLst>
-      <p:par>
-        <p:cTn id="1" dur="indefinite" restart="never" nodeType="tmRoot"/>
-      </p:par>
-    </p:tnLst>
-  </p:timing>
 </p:sld>
 </file>
 
@@ -6368,10 +7171,9 @@
           <a:lstStyle/>
           <a:p>
             <a:r>
-              <a:rPr lang="ru-RU" dirty="0" smtClean="0"/>
+              <a:rPr lang="ru-RU" dirty="0"/>
               <a:t>ВР и машинное обучение</a:t>
             </a:r>
-            <a:endParaRPr lang="ru-RU" dirty="0"/>
           </a:p>
         </p:txBody>
       </p:sp>
@@ -6401,23 +7203,15 @@
               <a:buNone/>
             </a:pPr>
             <a:r>
-              <a:rPr lang="ru-RU" sz="2400" dirty="0" smtClean="0"/>
-              <a:t>технически </a:t>
-            </a:r>
-            <a:r>
               <a:rPr lang="ru-RU" sz="2400" dirty="0"/>
-              <a:t>использование машинного обучения для задач предсказания ВР </a:t>
-            </a:r>
-            <a:r>
-              <a:rPr lang="ru-RU" sz="2400" dirty="0" smtClean="0"/>
-              <a:t>- сведение ВР к табличному виду (</a:t>
-            </a:r>
-            <a:r>
-              <a:rPr lang="ru-RU" sz="2400" b="1" dirty="0" smtClean="0"/>
+              <a:t>технически использование машинного обучения для задач предсказания ВР - сведение ВР к табличному виду (</a:t>
+            </a:r>
+            <a:r>
+              <a:rPr lang="ru-RU" sz="2400" b="1" dirty="0"/>
               <a:t>редукции ВР</a:t>
             </a:r>
             <a:r>
-              <a:rPr lang="ru-RU" sz="2400" dirty="0" smtClean="0"/>
+              <a:rPr lang="ru-RU" sz="2400" dirty="0"/>
               <a:t>). </a:t>
             </a:r>
           </a:p>
@@ -6426,28 +7220,8 @@
               <a:buNone/>
             </a:pPr>
             <a:r>
-              <a:rPr lang="ru-RU" sz="2400" dirty="0" smtClean="0"/>
-              <a:t>В </a:t>
-            </a:r>
-            <a:r>
               <a:rPr lang="ru-RU" sz="2400" dirty="0"/>
-              <a:t>наиболее простом случае </a:t>
-            </a:r>
-            <a:r>
-              <a:rPr lang="ru-RU" sz="2400" dirty="0" smtClean="0"/>
-              <a:t>таблица </a:t>
-            </a:r>
-            <a:r>
-              <a:rPr lang="ru-RU" sz="2400" dirty="0"/>
-              <a:t>может быть составлена путем </a:t>
-            </a:r>
-            <a:r>
-              <a:rPr lang="ru-RU" sz="2400" dirty="0" smtClean="0"/>
-              <a:t>прохождения </a:t>
-            </a:r>
-            <a:r>
-              <a:rPr lang="ru-RU" sz="2400" dirty="0"/>
-              <a:t>окна по ВР так, что следующее за окном значение всегда будет меткой.</a:t>
+              <a:t>В наиболее простом случае таблица может быть составлена путем прохождения окна по ВР так, что следующее за окном значение всегда будет меткой.</a:t>
             </a:r>
           </a:p>
         </p:txBody>
@@ -6521,10 +7295,9 @@
           <a:lstStyle/>
           <a:p>
             <a:r>
-              <a:rPr lang="ru-RU" b="1" dirty="0" smtClean="0"/>
+              <a:rPr lang="ru-RU" b="1" dirty="0"/>
               <a:t>Лаги</a:t>
             </a:r>
-            <a:endParaRPr lang="ru-RU" b="1" dirty="0"/>
           </a:p>
         </p:txBody>
       </p:sp>
@@ -6551,10 +7324,9 @@
           <a:lstStyle/>
           <a:p>
             <a:r>
-              <a:rPr lang="ru-RU" b="1" dirty="0" smtClean="0"/>
+              <a:rPr lang="ru-RU" b="1" dirty="0"/>
               <a:t>метка</a:t>
             </a:r>
-            <a:endParaRPr lang="ru-RU" b="1" dirty="0"/>
           </a:p>
         </p:txBody>
       </p:sp>
@@ -6581,10 +7353,9 @@
           <a:lstStyle/>
           <a:p>
             <a:r>
-              <a:rPr lang="ru-RU" dirty="0" smtClean="0"/>
+              <a:rPr lang="ru-RU" dirty="0"/>
               <a:t>Окно </a:t>
             </a:r>
-            <a:endParaRPr lang="ru-RU" dirty="0"/>
           </a:p>
         </p:txBody>
       </p:sp>
@@ -6611,10 +7382,9 @@
           <a:lstStyle/>
           <a:p>
             <a:r>
-              <a:rPr lang="ru-RU" dirty="0" smtClean="0"/>
+              <a:rPr lang="ru-RU" dirty="0"/>
               <a:t>метка</a:t>
             </a:r>
-            <a:endParaRPr lang="ru-RU" dirty="0"/>
           </a:p>
         </p:txBody>
       </p:sp>
@@ -6640,10 +7410,9 @@
           <a:lstStyle/>
           <a:p>
             <a:r>
-              <a:rPr lang="ru-RU" sz="1200" dirty="0" smtClean="0"/>
+              <a:rPr lang="ru-RU" sz="1200" dirty="0"/>
               <a:t>https://cienciadedatos.net/documentos/py27-time-series-forecasting-python-scikitlearn.html</a:t>
             </a:r>
-            <a:endParaRPr lang="ru-RU" sz="1200" dirty="0"/>
           </a:p>
         </p:txBody>
       </p:sp>
@@ -6687,13 +7456,6 @@
   <p:clrMapOvr>
     <a:masterClrMapping/>
   </p:clrMapOvr>
-  <p:timing>
-    <p:tnLst>
-      <p:par>
-        <p:cTn id="1" dur="indefinite" restart="never" nodeType="tmRoot"/>
-      </p:par>
-    </p:tnLst>
-  </p:timing>
 </p:sld>
 </file>
 
@@ -6716,6 +7478,1141 @@
       </p:grpSpPr>
       <p:sp>
         <p:nvSpPr>
+          <p:cNvPr id="2" name="Заголовок 1">
+            <a:extLst>
+              <a:ext uri="{FF2B5EF4-FFF2-40B4-BE49-F238E27FC236}">
+                <a16:creationId xmlns:a16="http://schemas.microsoft.com/office/drawing/2014/main" id="{97200AAA-5110-716B-821C-A67FB1647C69}"/>
+              </a:ext>
+            </a:extLst>
+          </p:cNvPr>
+          <p:cNvSpPr>
+            <a:spLocks noGrp="1"/>
+          </p:cNvSpPr>
+          <p:nvPr>
+            <p:ph type="title"/>
+          </p:nvPr>
+        </p:nvSpPr>
+        <p:spPr>
+          <a:xfrm>
+            <a:off x="605928" y="365126"/>
+            <a:ext cx="10747872" cy="732220"/>
+          </a:xfrm>
+        </p:spPr>
+        <p:txBody>
+          <a:bodyPr/>
+          <a:lstStyle/>
+          <a:p>
+            <a:r>
+              <a:rPr lang="ru-RU" dirty="0"/>
+              <a:t>Рекурсивная редукция</a:t>
+            </a:r>
+          </a:p>
+        </p:txBody>
+      </p:sp>
+      <p:sp>
+        <p:nvSpPr>
+          <p:cNvPr id="3" name="Объект 2">
+            <a:extLst>
+              <a:ext uri="{FF2B5EF4-FFF2-40B4-BE49-F238E27FC236}">
+                <a16:creationId xmlns:a16="http://schemas.microsoft.com/office/drawing/2014/main" id="{B12EDFA1-85EA-71EC-6626-66C2DAD7A3A6}"/>
+              </a:ext>
+            </a:extLst>
+          </p:cNvPr>
+          <p:cNvSpPr>
+            <a:spLocks noGrp="1"/>
+          </p:cNvSpPr>
+          <p:nvPr>
+            <p:ph idx="1"/>
+          </p:nvPr>
+        </p:nvSpPr>
+        <p:spPr>
+          <a:xfrm>
+            <a:off x="433936" y="1097345"/>
+            <a:ext cx="11324128" cy="4351338"/>
+          </a:xfrm>
+        </p:spPr>
+        <p:txBody>
+          <a:bodyPr>
+            <a:normAutofit/>
+          </a:bodyPr>
+          <a:lstStyle/>
+          <a:p>
+            <a:r>
+              <a:rPr lang="ru-RU" sz="2200" i="1" dirty="0"/>
+              <a:t>Признаковое описание</a:t>
+            </a:r>
+            <a:r>
+              <a:rPr lang="ru-RU" sz="2200" dirty="0"/>
+              <a:t> – история ряда до момента времени </a:t>
+            </a:r>
+            <a:r>
+              <a:rPr lang="en" sz="2200" i="1" dirty="0"/>
+              <a:t>t</a:t>
+            </a:r>
+            <a:r>
+              <a:rPr lang="en" sz="2200" dirty="0"/>
+              <a:t>−1.</a:t>
+            </a:r>
+          </a:p>
+          <a:p>
+            <a:r>
+              <a:rPr lang="ru-RU" sz="2200" i="1" dirty="0"/>
+              <a:t>Целевая метка</a:t>
+            </a:r>
+            <a:r>
+              <a:rPr lang="ru-RU" sz="2200" dirty="0"/>
+              <a:t> – значение </a:t>
+            </a:r>
+            <a:r>
+              <a:rPr lang="en" sz="2200" dirty="0" err="1"/>
+              <a:t>yt</a:t>
+            </a:r>
+            <a:r>
+              <a:rPr lang="en" sz="2200" dirty="0"/>
+              <a:t>​.</a:t>
+            </a:r>
+          </a:p>
+          <a:p>
+            <a:r>
+              <a:rPr lang="ru-RU" sz="2200" dirty="0"/>
+              <a:t>По этим данным мы обучаем какую-либо регрессионную модель строить прогнозы на один шаг вперед. При построении прогноза на несколько шагов вперед мы сначала построим прогноз на один шаг. Затем – на второй шаг, используя полученный прогноз на первый шаг в качестве признаков, и далее аналогично.</a:t>
+            </a:r>
+          </a:p>
+          <a:p>
+            <a:r>
+              <a:rPr lang="ru-RU" sz="2200" dirty="0"/>
+              <a:t>Иначе говоря, если для прогнозирования </a:t>
+            </a:r>
+            <a:r>
+              <a:rPr lang="en" sz="2200" i="1" dirty="0" err="1"/>
+              <a:t>yt</a:t>
+            </a:r>
+            <a:r>
+              <a:rPr lang="en" sz="2200" dirty="0"/>
+              <a:t>​ </a:t>
+            </a:r>
+            <a:r>
+              <a:rPr lang="ru-RU" sz="2200" dirty="0"/>
+              <a:t>признаковое описание имеет вид (</a:t>
+            </a:r>
+            <a:r>
+              <a:rPr lang="en" sz="2200" dirty="0" err="1"/>
+              <a:t>yt</a:t>
+            </a:r>
+            <a:r>
+              <a:rPr lang="en" sz="2200" dirty="0"/>
+              <a:t>−p,…,yt−1), </a:t>
+            </a:r>
+            <a:r>
+              <a:rPr lang="ru-RU" sz="2200" dirty="0"/>
+              <a:t>то для построения прогноза </a:t>
+            </a:r>
+            <a:r>
+              <a:rPr lang="en" sz="2200" i="1" dirty="0"/>
+              <a:t>yt</a:t>
+            </a:r>
+            <a:r>
+              <a:rPr lang="en" sz="2200" dirty="0"/>
+              <a:t>+1​ </a:t>
+            </a:r>
+            <a:r>
+              <a:rPr lang="ru-RU" sz="2200" dirty="0"/>
+              <a:t>рассматривается признаковое описание </a:t>
+            </a:r>
+            <a:r>
+              <a:rPr lang="en" sz="2200" dirty="0"/>
+              <a:t>(</a:t>
+            </a:r>
+            <a:r>
+              <a:rPr lang="en" sz="2200" i="1" dirty="0"/>
+              <a:t>yt</a:t>
+            </a:r>
+            <a:r>
+              <a:rPr lang="en" sz="2200" dirty="0"/>
+              <a:t>−</a:t>
+            </a:r>
+            <a:r>
+              <a:rPr lang="en" sz="2200" i="1" dirty="0"/>
+              <a:t>p</a:t>
+            </a:r>
+            <a:r>
+              <a:rPr lang="en" sz="2200" dirty="0"/>
+              <a:t>+1​,…,</a:t>
+            </a:r>
+            <a:r>
+              <a:rPr lang="en" sz="2200" i="1" dirty="0"/>
+              <a:t>yt</a:t>
+            </a:r>
+            <a:r>
+              <a:rPr lang="en" sz="2200" dirty="0"/>
+              <a:t>−1​,</a:t>
+            </a:r>
+            <a:r>
+              <a:rPr lang="en" sz="2200" i="1" dirty="0"/>
+              <a:t>y</a:t>
+            </a:r>
+            <a:r>
+              <a:rPr lang="en" sz="2200" dirty="0"/>
+              <a:t>​</a:t>
+            </a:r>
+            <a:r>
+              <a:rPr lang="en" sz="2200" i="1" dirty="0"/>
+              <a:t>t</a:t>
+            </a:r>
+            <a:r>
+              <a:rPr lang="en" sz="2200" dirty="0"/>
+              <a:t>​).</a:t>
+            </a:r>
+          </a:p>
+          <a:p>
+            <a:endParaRPr lang="ru-RU" sz="2200" dirty="0"/>
+          </a:p>
+        </p:txBody>
+      </p:sp>
+      <p:pic>
+        <p:nvPicPr>
+          <p:cNvPr id="1026" name="Picture 2" descr="recursive">
+            <a:extLst>
+              <a:ext uri="{FF2B5EF4-FFF2-40B4-BE49-F238E27FC236}">
+                <a16:creationId xmlns:a16="http://schemas.microsoft.com/office/drawing/2014/main" id="{D560E87C-22DB-A7C5-AADB-1A8B03DF4FBA}"/>
+              </a:ext>
+            </a:extLst>
+          </p:cNvPr>
+          <p:cNvPicPr>
+            <a:picLocks noChangeAspect="1" noChangeArrowheads="1"/>
+          </p:cNvPicPr>
+          <p:nvPr/>
+        </p:nvPicPr>
+        <p:blipFill>
+          <a:blip r:embed="rId2">
+            <a:extLst>
+              <a:ext uri="{28A0092B-C50C-407E-A947-70E740481C1C}">
+                <a14:useLocalDpi xmlns:a14="http://schemas.microsoft.com/office/drawing/2010/main" val="0"/>
+              </a:ext>
+            </a:extLst>
+          </a:blip>
+          <a:srcRect/>
+          <a:stretch>
+            <a:fillRect/>
+          </a:stretch>
+        </p:blipFill>
+        <p:spPr bwMode="auto">
+          <a:xfrm>
+            <a:off x="7211293" y="3862047"/>
+            <a:ext cx="4546771" cy="2747362"/>
+          </a:xfrm>
+          <a:prstGeom prst="rect">
+            <a:avLst/>
+          </a:prstGeom>
+          <a:noFill/>
+          <a:extLst>
+            <a:ext uri="{909E8E84-426E-40DD-AFC4-6F175D3DCCD1}">
+              <a14:hiddenFill xmlns:a14="http://schemas.microsoft.com/office/drawing/2010/main">
+                <a:solidFill>
+                  <a:srgbClr val="FFFFFF"/>
+                </a:solidFill>
+              </a14:hiddenFill>
+            </a:ext>
+          </a:extLst>
+        </p:spPr>
+      </p:pic>
+      <p:pic>
+        <p:nvPicPr>
+          <p:cNvPr id="4" name="Picture 4" descr="https://cienciadedatos.net/images/diagram-recursive-mutistep-forecasting.png">
+            <a:extLst>
+              <a:ext uri="{FF2B5EF4-FFF2-40B4-BE49-F238E27FC236}">
+                <a16:creationId xmlns:a16="http://schemas.microsoft.com/office/drawing/2014/main" id="{25F3A3BD-6541-B697-0678-BB8DBD68786A}"/>
+              </a:ext>
+            </a:extLst>
+          </p:cNvPr>
+          <p:cNvPicPr>
+            <a:picLocks noChangeAspect="1" noChangeArrowheads="1"/>
+          </p:cNvPicPr>
+          <p:nvPr/>
+        </p:nvPicPr>
+        <p:blipFill>
+          <a:blip r:embed="rId3" cstate="print">
+            <a:extLst>
+              <a:ext uri="{28A0092B-C50C-407E-A947-70E740481C1C}">
+                <a14:useLocalDpi xmlns:a14="http://schemas.microsoft.com/office/drawing/2010/main" val="0"/>
+              </a:ext>
+            </a:extLst>
+          </a:blip>
+          <a:srcRect/>
+          <a:stretch>
+            <a:fillRect/>
+          </a:stretch>
+        </p:blipFill>
+        <p:spPr bwMode="auto">
+          <a:xfrm>
+            <a:off x="632146" y="4287959"/>
+            <a:ext cx="4737848" cy="2321450"/>
+          </a:xfrm>
+          <a:prstGeom prst="rect">
+            <a:avLst/>
+          </a:prstGeom>
+          <a:noFill/>
+          <a:extLst>
+            <a:ext uri="{909E8E84-426E-40DD-AFC4-6F175D3DCCD1}">
+              <a14:hiddenFill xmlns:a14="http://schemas.microsoft.com/office/drawing/2010/main">
+                <a:solidFill>
+                  <a:srgbClr val="FFFFFF"/>
+                </a:solidFill>
+              </a14:hiddenFill>
+            </a:ext>
+          </a:extLst>
+        </p:spPr>
+      </p:pic>
+      <p:sp>
+        <p:nvSpPr>
+          <p:cNvPr id="6" name="TextBox 5">
+            <a:extLst>
+              <a:ext uri="{FF2B5EF4-FFF2-40B4-BE49-F238E27FC236}">
+                <a16:creationId xmlns:a16="http://schemas.microsoft.com/office/drawing/2014/main" id="{06445672-A60F-7073-1A08-0F889E3A3E22}"/>
+              </a:ext>
+            </a:extLst>
+          </p:cNvPr>
+          <p:cNvSpPr txBox="1"/>
+          <p:nvPr/>
+        </p:nvSpPr>
+        <p:spPr>
+          <a:xfrm>
+            <a:off x="1111119" y="6492874"/>
+            <a:ext cx="6100174" cy="276999"/>
+          </a:xfrm>
+          <a:prstGeom prst="rect">
+            <a:avLst/>
+          </a:prstGeom>
+          <a:noFill/>
+        </p:spPr>
+        <p:txBody>
+          <a:bodyPr wrap="square">
+            <a:spAutoFit/>
+          </a:bodyPr>
+          <a:lstStyle/>
+          <a:p>
+            <a:r>
+              <a:rPr lang="ru-RU" sz="1200" dirty="0" err="1"/>
+              <a:t>https</a:t>
+            </a:r>
+            <a:r>
+              <a:rPr lang="ru-RU" sz="1200" dirty="0"/>
+              <a:t>://</a:t>
+            </a:r>
+            <a:r>
+              <a:rPr lang="ru-RU" sz="1200" dirty="0" err="1"/>
+              <a:t>education.yandex.ru</a:t>
+            </a:r>
+            <a:r>
+              <a:rPr lang="ru-RU" sz="1200" dirty="0"/>
+              <a:t>/</a:t>
+            </a:r>
+            <a:r>
+              <a:rPr lang="ru-RU" sz="1200" dirty="0" err="1"/>
+              <a:t>handbook</a:t>
+            </a:r>
+            <a:r>
+              <a:rPr lang="ru-RU" sz="1200" dirty="0"/>
+              <a:t>/</a:t>
+            </a:r>
+            <a:r>
+              <a:rPr lang="ru-RU" sz="1200" dirty="0" err="1"/>
+              <a:t>ml</a:t>
+            </a:r>
+            <a:r>
+              <a:rPr lang="ru-RU" sz="1200" dirty="0"/>
+              <a:t>/</a:t>
+            </a:r>
+            <a:r>
+              <a:rPr lang="ru-RU" sz="1200" dirty="0" err="1"/>
+              <a:t>article</a:t>
+            </a:r>
+            <a:r>
+              <a:rPr lang="ru-RU" sz="1200" dirty="0"/>
+              <a:t>/</a:t>
+            </a:r>
+            <a:r>
+              <a:rPr lang="ru-RU" sz="1200" dirty="0" err="1"/>
+              <a:t>vremennye-ryady</a:t>
+            </a:r>
+            <a:endParaRPr lang="ru-RU" sz="1200" dirty="0"/>
+          </a:p>
+        </p:txBody>
+      </p:sp>
+      <p:sp>
+        <p:nvSpPr>
+          <p:cNvPr id="7" name="Прямоугольник 6">
+            <a:extLst>
+              <a:ext uri="{FF2B5EF4-FFF2-40B4-BE49-F238E27FC236}">
+                <a16:creationId xmlns:a16="http://schemas.microsoft.com/office/drawing/2014/main" id="{19810F78-EF7E-8B5D-B6A5-7A3010C25417}"/>
+              </a:ext>
+            </a:extLst>
+          </p:cNvPr>
+          <p:cNvSpPr/>
+          <p:nvPr/>
+        </p:nvSpPr>
+        <p:spPr>
+          <a:xfrm>
+            <a:off x="6191480" y="6581001"/>
+            <a:ext cx="6096000" cy="276999"/>
+          </a:xfrm>
+          <a:prstGeom prst="rect">
+            <a:avLst/>
+          </a:prstGeom>
+        </p:spPr>
+        <p:txBody>
+          <a:bodyPr>
+            <a:spAutoFit/>
+          </a:bodyPr>
+          <a:lstStyle/>
+          <a:p>
+            <a:r>
+              <a:rPr lang="ru-RU" sz="1200" dirty="0"/>
+              <a:t>https://cienciadedatos.net/documentos/py27-time-series-forecasting-python-scikitlearn.html</a:t>
+            </a:r>
+          </a:p>
+        </p:txBody>
+      </p:sp>
+    </p:spTree>
+    <p:extLst>
+      <p:ext uri="{BB962C8B-B14F-4D97-AF65-F5344CB8AC3E}">
+        <p14:creationId xmlns:p14="http://schemas.microsoft.com/office/powerpoint/2010/main" val="3691668153"/>
+      </p:ext>
+    </p:extLst>
+  </p:cSld>
+  <p:clrMapOvr>
+    <a:masterClrMapping/>
+  </p:clrMapOvr>
+</p:sld>
+</file>
+
+<file path=ppt/slides/slide5.xml><?xml version="1.0" encoding="utf-8"?>
+<p:sld xmlns:a="http://schemas.openxmlformats.org/drawingml/2006/main" xmlns:r="http://schemas.openxmlformats.org/officeDocument/2006/relationships" xmlns:p="http://schemas.openxmlformats.org/presentationml/2006/main">
+  <p:cSld>
+    <p:spTree>
+      <p:nvGrpSpPr>
+        <p:cNvPr id="1" name="">
+          <a:extLst>
+            <a:ext uri="{FF2B5EF4-FFF2-40B4-BE49-F238E27FC236}">
+              <a16:creationId xmlns:a16="http://schemas.microsoft.com/office/drawing/2014/main" id="{9E87C487-2047-9EC3-E806-919BAF8A8EF4}"/>
+            </a:ext>
+          </a:extLst>
+        </p:cNvPr>
+        <p:cNvGrpSpPr/>
+        <p:nvPr/>
+      </p:nvGrpSpPr>
+      <p:grpSpPr>
+        <a:xfrm>
+          <a:off x="0" y="0"/>
+          <a:ext cx="0" cy="0"/>
+          <a:chOff x="0" y="0"/>
+          <a:chExt cx="0" cy="0"/>
+        </a:xfrm>
+      </p:grpSpPr>
+      <p:sp>
+        <p:nvSpPr>
+          <p:cNvPr id="2" name="Заголовок 1">
+            <a:extLst>
+              <a:ext uri="{FF2B5EF4-FFF2-40B4-BE49-F238E27FC236}">
+                <a16:creationId xmlns:a16="http://schemas.microsoft.com/office/drawing/2014/main" id="{571F0859-81A2-69A4-769C-8E6AF247706B}"/>
+              </a:ext>
+            </a:extLst>
+          </p:cNvPr>
+          <p:cNvSpPr>
+            <a:spLocks noGrp="1"/>
+          </p:cNvSpPr>
+          <p:nvPr>
+            <p:ph type="title"/>
+          </p:nvPr>
+        </p:nvSpPr>
+        <p:spPr>
+          <a:xfrm>
+            <a:off x="605928" y="365126"/>
+            <a:ext cx="10747872" cy="732220"/>
+          </a:xfrm>
+        </p:spPr>
+        <p:txBody>
+          <a:bodyPr/>
+          <a:lstStyle/>
+          <a:p>
+            <a:r>
+              <a:rPr lang="ru-RU" b="1" dirty="0"/>
+              <a:t>Прямая стратегия редукции</a:t>
+            </a:r>
+          </a:p>
+        </p:txBody>
+      </p:sp>
+      <p:sp>
+        <p:nvSpPr>
+          <p:cNvPr id="3" name="Объект 2">
+            <a:extLst>
+              <a:ext uri="{FF2B5EF4-FFF2-40B4-BE49-F238E27FC236}">
+                <a16:creationId xmlns:a16="http://schemas.microsoft.com/office/drawing/2014/main" id="{6C8F74C3-4238-0EBC-4A0C-102C383BEE58}"/>
+              </a:ext>
+            </a:extLst>
+          </p:cNvPr>
+          <p:cNvSpPr>
+            <a:spLocks noGrp="1"/>
+          </p:cNvSpPr>
+          <p:nvPr>
+            <p:ph idx="1"/>
+          </p:nvPr>
+        </p:nvSpPr>
+        <p:spPr>
+          <a:xfrm>
+            <a:off x="261944" y="986170"/>
+            <a:ext cx="11324128" cy="4351338"/>
+          </a:xfrm>
+        </p:spPr>
+        <p:txBody>
+          <a:bodyPr>
+            <a:normAutofit/>
+          </a:bodyPr>
+          <a:lstStyle/>
+          <a:p>
+            <a:pPr marL="0" indent="0">
+              <a:buNone/>
+            </a:pPr>
+            <a:r>
+              <a:rPr lang="ru-RU" dirty="0"/>
+              <a:t>построением каждого прогноза в рамках горизонта прогнозирования должна заниматься своя модель. Тем самым создается </a:t>
+            </a:r>
+            <a:r>
+              <a:rPr lang="en" i="1" dirty="0"/>
+              <a:t>H</a:t>
+            </a:r>
+            <a:r>
+              <a:rPr lang="en" dirty="0"/>
+              <a:t> </a:t>
+            </a:r>
+            <a:r>
+              <a:rPr lang="ru-RU" dirty="0"/>
+              <a:t>моделей прогнозирования для каждого момента времени </a:t>
+            </a:r>
+            <a:r>
+              <a:rPr lang="en" dirty="0"/>
+              <a:t>t0⩽t⩽t0+H−1</a:t>
+            </a:r>
+            <a:endParaRPr lang="ru-RU" dirty="0"/>
+          </a:p>
+          <a:p>
+            <a:pPr marL="0" indent="0">
+              <a:buNone/>
+            </a:pPr>
+            <a:r>
+              <a:rPr lang="ru-RU" i="1" dirty="0"/>
+              <a:t>Признаковое описание</a:t>
+            </a:r>
+            <a:r>
+              <a:rPr lang="ru-RU" dirty="0"/>
+              <a:t> – история ряда до момента времени </a:t>
+            </a:r>
+            <a:r>
+              <a:rPr lang="en" i="1" dirty="0"/>
+              <a:t>t</a:t>
+            </a:r>
+            <a:r>
+              <a:rPr lang="en" dirty="0"/>
+              <a:t>0​−1, </a:t>
+            </a:r>
+            <a:r>
+              <a:rPr lang="ru-RU" dirty="0"/>
+              <a:t>причем признаки одни и те же для каждой модели.</a:t>
+            </a:r>
+          </a:p>
+          <a:p>
+            <a:r>
+              <a:rPr lang="ru-RU" i="1" dirty="0"/>
+              <a:t>Целевая метка</a:t>
+            </a:r>
+            <a:r>
+              <a:rPr lang="ru-RU" dirty="0"/>
+              <a:t> – значение </a:t>
+            </a:r>
+            <a:r>
+              <a:rPr lang="en" i="1" dirty="0" err="1"/>
+              <a:t>yt</a:t>
+            </a:r>
+            <a:r>
+              <a:rPr lang="en" dirty="0"/>
+              <a:t>​.</a:t>
+            </a:r>
+          </a:p>
+        </p:txBody>
+      </p:sp>
+      <p:sp>
+        <p:nvSpPr>
+          <p:cNvPr id="6" name="TextBox 5">
+            <a:extLst>
+              <a:ext uri="{FF2B5EF4-FFF2-40B4-BE49-F238E27FC236}">
+                <a16:creationId xmlns:a16="http://schemas.microsoft.com/office/drawing/2014/main" id="{B9D8AD61-E9B0-7D40-BDE8-6F2365A8CDFA}"/>
+              </a:ext>
+            </a:extLst>
+          </p:cNvPr>
+          <p:cNvSpPr txBox="1"/>
+          <p:nvPr/>
+        </p:nvSpPr>
+        <p:spPr>
+          <a:xfrm>
+            <a:off x="1111119" y="6492874"/>
+            <a:ext cx="6100174" cy="276999"/>
+          </a:xfrm>
+          <a:prstGeom prst="rect">
+            <a:avLst/>
+          </a:prstGeom>
+          <a:noFill/>
+        </p:spPr>
+        <p:txBody>
+          <a:bodyPr wrap="square">
+            <a:spAutoFit/>
+          </a:bodyPr>
+          <a:lstStyle/>
+          <a:p>
+            <a:r>
+              <a:rPr lang="ru-RU" sz="1200" dirty="0" err="1"/>
+              <a:t>https</a:t>
+            </a:r>
+            <a:r>
+              <a:rPr lang="ru-RU" sz="1200" dirty="0"/>
+              <a:t>://</a:t>
+            </a:r>
+            <a:r>
+              <a:rPr lang="ru-RU" sz="1200" dirty="0" err="1"/>
+              <a:t>education.yandex.ru</a:t>
+            </a:r>
+            <a:r>
+              <a:rPr lang="ru-RU" sz="1200" dirty="0"/>
+              <a:t>/</a:t>
+            </a:r>
+            <a:r>
+              <a:rPr lang="ru-RU" sz="1200" dirty="0" err="1"/>
+              <a:t>handbook</a:t>
+            </a:r>
+            <a:r>
+              <a:rPr lang="ru-RU" sz="1200" dirty="0"/>
+              <a:t>/</a:t>
+            </a:r>
+            <a:r>
+              <a:rPr lang="ru-RU" sz="1200" dirty="0" err="1"/>
+              <a:t>ml</a:t>
+            </a:r>
+            <a:r>
+              <a:rPr lang="ru-RU" sz="1200" dirty="0"/>
+              <a:t>/</a:t>
+            </a:r>
+            <a:r>
+              <a:rPr lang="ru-RU" sz="1200" dirty="0" err="1"/>
+              <a:t>article</a:t>
+            </a:r>
+            <a:r>
+              <a:rPr lang="ru-RU" sz="1200" dirty="0"/>
+              <a:t>/</a:t>
+            </a:r>
+            <a:r>
+              <a:rPr lang="ru-RU" sz="1200" dirty="0" err="1"/>
+              <a:t>vremennye-ryady</a:t>
+            </a:r>
+            <a:endParaRPr lang="ru-RU" sz="1200" dirty="0"/>
+          </a:p>
+        </p:txBody>
+      </p:sp>
+      <p:sp>
+        <p:nvSpPr>
+          <p:cNvPr id="7" name="Прямоугольник 6">
+            <a:extLst>
+              <a:ext uri="{FF2B5EF4-FFF2-40B4-BE49-F238E27FC236}">
+                <a16:creationId xmlns:a16="http://schemas.microsoft.com/office/drawing/2014/main" id="{6E1DC60A-7122-06E4-1B44-91230427831D}"/>
+              </a:ext>
+            </a:extLst>
+          </p:cNvPr>
+          <p:cNvSpPr/>
+          <p:nvPr/>
+        </p:nvSpPr>
+        <p:spPr>
+          <a:xfrm>
+            <a:off x="6191480" y="6581001"/>
+            <a:ext cx="6096000" cy="276999"/>
+          </a:xfrm>
+          <a:prstGeom prst="rect">
+            <a:avLst/>
+          </a:prstGeom>
+        </p:spPr>
+        <p:txBody>
+          <a:bodyPr>
+            <a:spAutoFit/>
+          </a:bodyPr>
+          <a:lstStyle/>
+          <a:p>
+            <a:r>
+              <a:rPr lang="ru-RU" sz="1200" dirty="0"/>
+              <a:t>https://cienciadedatos.net/documentos/py27-time-series-forecasting-python-scikitlearn.html</a:t>
+            </a:r>
+          </a:p>
+        </p:txBody>
+      </p:sp>
+      <p:pic>
+        <p:nvPicPr>
+          <p:cNvPr id="3074" name="Picture 2" descr="direct">
+            <a:extLst>
+              <a:ext uri="{FF2B5EF4-FFF2-40B4-BE49-F238E27FC236}">
+                <a16:creationId xmlns:a16="http://schemas.microsoft.com/office/drawing/2014/main" id="{E33F7EA8-8650-2DF1-801B-4292CB94898F}"/>
+              </a:ext>
+            </a:extLst>
+          </p:cNvPr>
+          <p:cNvPicPr>
+            <a:picLocks noChangeAspect="1" noChangeArrowheads="1"/>
+          </p:cNvPicPr>
+          <p:nvPr/>
+        </p:nvPicPr>
+        <p:blipFill>
+          <a:blip r:embed="rId2">
+            <a:extLst>
+              <a:ext uri="{28A0092B-C50C-407E-A947-70E740481C1C}">
+                <a14:useLocalDpi xmlns:a14="http://schemas.microsoft.com/office/drawing/2010/main" val="0"/>
+              </a:ext>
+            </a:extLst>
+          </a:blip>
+          <a:srcRect/>
+          <a:stretch>
+            <a:fillRect/>
+          </a:stretch>
+        </p:blipFill>
+        <p:spPr bwMode="auto">
+          <a:xfrm>
+            <a:off x="3224042" y="3569464"/>
+            <a:ext cx="8871395" cy="2537819"/>
+          </a:xfrm>
+          <a:prstGeom prst="rect">
+            <a:avLst/>
+          </a:prstGeom>
+          <a:noFill/>
+          <a:extLst>
+            <a:ext uri="{909E8E84-426E-40DD-AFC4-6F175D3DCCD1}">
+              <a14:hiddenFill xmlns:a14="http://schemas.microsoft.com/office/drawing/2010/main">
+                <a:solidFill>
+                  <a:srgbClr val="FFFFFF"/>
+                </a:solidFill>
+              </a14:hiddenFill>
+            </a:ext>
+          </a:extLst>
+        </p:spPr>
+      </p:pic>
+      <p:pic>
+        <p:nvPicPr>
+          <p:cNvPr id="5" name="Picture 6" descr="https://cienciadedatos.net/images/diagram-direct-multi-step-forecasting.png">
+            <a:extLst>
+              <a:ext uri="{FF2B5EF4-FFF2-40B4-BE49-F238E27FC236}">
+                <a16:creationId xmlns:a16="http://schemas.microsoft.com/office/drawing/2014/main" id="{A2635A52-B2B7-EE12-61F7-6A40F3728D08}"/>
+              </a:ext>
+            </a:extLst>
+          </p:cNvPr>
+          <p:cNvPicPr>
+            <a:picLocks noChangeAspect="1" noChangeArrowheads="1"/>
+          </p:cNvPicPr>
+          <p:nvPr/>
+        </p:nvPicPr>
+        <p:blipFill rotWithShape="1">
+          <a:blip r:embed="rId3" cstate="print">
+            <a:extLst>
+              <a:ext uri="{28A0092B-C50C-407E-A947-70E740481C1C}">
+                <a14:useLocalDpi xmlns:a14="http://schemas.microsoft.com/office/drawing/2010/main" val="0"/>
+              </a:ext>
+            </a:extLst>
+          </a:blip>
+          <a:srcRect r="35648"/>
+          <a:stretch>
+            <a:fillRect/>
+          </a:stretch>
+        </p:blipFill>
+        <p:spPr bwMode="auto">
+          <a:xfrm>
+            <a:off x="-77050" y="3738400"/>
+            <a:ext cx="3301092" cy="2446001"/>
+          </a:xfrm>
+          <a:prstGeom prst="rect">
+            <a:avLst/>
+          </a:prstGeom>
+          <a:noFill/>
+          <a:extLst>
+            <a:ext uri="{909E8E84-426E-40DD-AFC4-6F175D3DCCD1}">
+              <a14:hiddenFill xmlns:a14="http://schemas.microsoft.com/office/drawing/2010/main">
+                <a:solidFill>
+                  <a:srgbClr val="FFFFFF"/>
+                </a:solidFill>
+              </a14:hiddenFill>
+            </a:ext>
+          </a:extLst>
+        </p:spPr>
+      </p:pic>
+    </p:spTree>
+    <p:extLst>
+      <p:ext uri="{BB962C8B-B14F-4D97-AF65-F5344CB8AC3E}">
+        <p14:creationId xmlns:p14="http://schemas.microsoft.com/office/powerpoint/2010/main" val="1047477677"/>
+      </p:ext>
+    </p:extLst>
+  </p:cSld>
+  <p:clrMapOvr>
+    <a:masterClrMapping/>
+  </p:clrMapOvr>
+</p:sld>
+</file>
+
+<file path=ppt/slides/slide6.xml><?xml version="1.0" encoding="utf-8"?>
+<p:sld xmlns:a="http://schemas.openxmlformats.org/drawingml/2006/main" xmlns:r="http://schemas.openxmlformats.org/officeDocument/2006/relationships" xmlns:p="http://schemas.openxmlformats.org/presentationml/2006/main">
+  <p:cSld>
+    <p:spTree>
+      <p:nvGrpSpPr>
+        <p:cNvPr id="1" name="">
+          <a:extLst>
+            <a:ext uri="{FF2B5EF4-FFF2-40B4-BE49-F238E27FC236}">
+              <a16:creationId xmlns:a16="http://schemas.microsoft.com/office/drawing/2014/main" id="{83F7E42D-6888-C555-1E55-C4174FE350EE}"/>
+            </a:ext>
+          </a:extLst>
+        </p:cNvPr>
+        <p:cNvGrpSpPr/>
+        <p:nvPr/>
+      </p:nvGrpSpPr>
+      <p:grpSpPr>
+        <a:xfrm>
+          <a:off x="0" y="0"/>
+          <a:ext cx="0" cy="0"/>
+          <a:chOff x="0" y="0"/>
+          <a:chExt cx="0" cy="0"/>
+        </a:xfrm>
+      </p:grpSpPr>
+      <p:sp>
+        <p:nvSpPr>
+          <p:cNvPr id="2" name="Заголовок 1">
+            <a:extLst>
+              <a:ext uri="{FF2B5EF4-FFF2-40B4-BE49-F238E27FC236}">
+                <a16:creationId xmlns:a16="http://schemas.microsoft.com/office/drawing/2014/main" id="{03113A58-C029-9BFA-0E90-185C141E0DFE}"/>
+              </a:ext>
+            </a:extLst>
+          </p:cNvPr>
+          <p:cNvSpPr>
+            <a:spLocks noGrp="1"/>
+          </p:cNvSpPr>
+          <p:nvPr>
+            <p:ph type="title"/>
+          </p:nvPr>
+        </p:nvSpPr>
+        <p:spPr>
+          <a:xfrm>
+            <a:off x="550072" y="42377"/>
+            <a:ext cx="10747872" cy="732220"/>
+          </a:xfrm>
+        </p:spPr>
+        <p:txBody>
+          <a:bodyPr/>
+          <a:lstStyle/>
+          <a:p>
+            <a:r>
+              <a:rPr lang="ru-RU" b="1" dirty="0"/>
+              <a:t>Гибридная стратегия</a:t>
+            </a:r>
+          </a:p>
+        </p:txBody>
+      </p:sp>
+      <p:sp>
+        <p:nvSpPr>
+          <p:cNvPr id="3" name="Объект 2">
+            <a:extLst>
+              <a:ext uri="{FF2B5EF4-FFF2-40B4-BE49-F238E27FC236}">
+                <a16:creationId xmlns:a16="http://schemas.microsoft.com/office/drawing/2014/main" id="{0723D7EE-CC53-CA7B-E14F-44911BBB45F0}"/>
+              </a:ext>
+            </a:extLst>
+          </p:cNvPr>
+          <p:cNvSpPr>
+            <a:spLocks noGrp="1"/>
+          </p:cNvSpPr>
+          <p:nvPr>
+            <p:ph idx="1"/>
+          </p:nvPr>
+        </p:nvSpPr>
+        <p:spPr>
+          <a:xfrm>
+            <a:off x="261944" y="567659"/>
+            <a:ext cx="11324128" cy="4351338"/>
+          </a:xfrm>
+        </p:spPr>
+        <p:txBody>
+          <a:bodyPr>
+            <a:normAutofit fontScale="70000" lnSpcReduction="20000"/>
+          </a:bodyPr>
+          <a:lstStyle/>
+          <a:p>
+            <a:r>
+              <a:rPr lang="ru-RU" dirty="0"/>
+              <a:t>Гибридная стратегия объединяет в себе преимущества рекурсивной и прямой стратегий. Как и в прямой стратегии, создается </a:t>
+            </a:r>
+            <a:r>
+              <a:rPr lang="en" dirty="0"/>
+              <a:t>H </a:t>
+            </a:r>
+            <a:r>
+              <a:rPr lang="ru-RU" dirty="0"/>
+              <a:t>моделей прогнозирования, но при этом каждая следующая модель использует прогнозы предыдущей подобно тому, как это делает рекурсивная стратегия.</a:t>
+            </a:r>
+          </a:p>
+          <a:p>
+            <a:r>
+              <a:rPr lang="ru-RU" dirty="0"/>
+              <a:t>модель для прогноза на 1 шаг вперед;</a:t>
+            </a:r>
+          </a:p>
+          <a:p>
+            <a:r>
+              <a:rPr lang="ru-RU" dirty="0"/>
+              <a:t>модель для прогноза на 2 шага вперед, используя прогноз уже обученной модели на 1 шаг вперед в качестве признака;</a:t>
+            </a:r>
+          </a:p>
+          <a:p>
+            <a:r>
+              <a:rPr lang="ru-RU" dirty="0"/>
+              <a:t>модель для прогноза на 3 шага вперед, используя прогноз уже обученных моделей на 1 и 2 шага вперед в качестве признаков;</a:t>
+            </a:r>
+          </a:p>
+          <a:p>
+            <a:r>
+              <a:rPr lang="ru-RU" dirty="0"/>
+              <a:t>и так далее обучается </a:t>
+            </a:r>
+            <a:r>
+              <a:rPr lang="en" dirty="0"/>
+              <a:t>H </a:t>
+            </a:r>
+            <a:r>
+              <a:rPr lang="ru-RU" dirty="0"/>
+              <a:t>моделей.</a:t>
+            </a:r>
+          </a:p>
+          <a:p>
+            <a:r>
+              <a:rPr lang="ru-RU" dirty="0"/>
+              <a:t>Признаковое описание:</a:t>
+            </a:r>
+          </a:p>
+          <a:p>
+            <a:r>
+              <a:rPr lang="ru-RU" dirty="0"/>
+              <a:t>история ряда до момента времени </a:t>
+            </a:r>
+            <a:r>
+              <a:rPr lang="en" i="1" dirty="0"/>
+              <a:t>t</a:t>
+            </a:r>
+            <a:r>
+              <a:rPr lang="en" dirty="0"/>
+              <a:t>0​−1;</a:t>
+            </a:r>
+          </a:p>
+          <a:p>
+            <a:r>
+              <a:rPr lang="ru-RU" dirty="0"/>
+              <a:t>предсказание предыдущих моделей для </a:t>
+            </a:r>
+            <a:r>
+              <a:rPr lang="en" dirty="0"/>
+              <a:t>t0,t0−1,…,t−1.</a:t>
+            </a:r>
+          </a:p>
+          <a:p>
+            <a:br>
+              <a:rPr lang="en" dirty="0"/>
+            </a:br>
+            <a:endParaRPr lang="en" dirty="0"/>
+          </a:p>
+        </p:txBody>
+      </p:sp>
+      <p:sp>
+        <p:nvSpPr>
+          <p:cNvPr id="6" name="TextBox 5">
+            <a:extLst>
+              <a:ext uri="{FF2B5EF4-FFF2-40B4-BE49-F238E27FC236}">
+                <a16:creationId xmlns:a16="http://schemas.microsoft.com/office/drawing/2014/main" id="{125EAB4B-E98D-9F3C-F1A6-9382A313435D}"/>
+              </a:ext>
+            </a:extLst>
+          </p:cNvPr>
+          <p:cNvSpPr txBox="1"/>
+          <p:nvPr/>
+        </p:nvSpPr>
+        <p:spPr>
+          <a:xfrm>
+            <a:off x="1067051" y="6581000"/>
+            <a:ext cx="6100174" cy="276999"/>
+          </a:xfrm>
+          <a:prstGeom prst="rect">
+            <a:avLst/>
+          </a:prstGeom>
+          <a:noFill/>
+        </p:spPr>
+        <p:txBody>
+          <a:bodyPr wrap="square">
+            <a:spAutoFit/>
+          </a:bodyPr>
+          <a:lstStyle/>
+          <a:p>
+            <a:r>
+              <a:rPr lang="ru-RU" sz="1200" dirty="0" err="1"/>
+              <a:t>https</a:t>
+            </a:r>
+            <a:r>
+              <a:rPr lang="ru-RU" sz="1200" dirty="0"/>
+              <a:t>://</a:t>
+            </a:r>
+            <a:r>
+              <a:rPr lang="ru-RU" sz="1200" dirty="0" err="1"/>
+              <a:t>education.yandex.ru</a:t>
+            </a:r>
+            <a:r>
+              <a:rPr lang="ru-RU" sz="1200" dirty="0"/>
+              <a:t>/</a:t>
+            </a:r>
+            <a:r>
+              <a:rPr lang="ru-RU" sz="1200" dirty="0" err="1"/>
+              <a:t>handbook</a:t>
+            </a:r>
+            <a:r>
+              <a:rPr lang="ru-RU" sz="1200" dirty="0"/>
+              <a:t>/</a:t>
+            </a:r>
+            <a:r>
+              <a:rPr lang="ru-RU" sz="1200" dirty="0" err="1"/>
+              <a:t>ml</a:t>
+            </a:r>
+            <a:r>
+              <a:rPr lang="ru-RU" sz="1200" dirty="0"/>
+              <a:t>/</a:t>
+            </a:r>
+            <a:r>
+              <a:rPr lang="ru-RU" sz="1200" dirty="0" err="1"/>
+              <a:t>article</a:t>
+            </a:r>
+            <a:r>
+              <a:rPr lang="ru-RU" sz="1200" dirty="0"/>
+              <a:t>/</a:t>
+            </a:r>
+            <a:r>
+              <a:rPr lang="ru-RU" sz="1200" dirty="0" err="1"/>
+              <a:t>vremennye-ryady</a:t>
+            </a:r>
+            <a:endParaRPr lang="ru-RU" sz="1200" dirty="0"/>
+          </a:p>
+        </p:txBody>
+      </p:sp>
+      <p:sp>
+        <p:nvSpPr>
+          <p:cNvPr id="7" name="Прямоугольник 6">
+            <a:extLst>
+              <a:ext uri="{FF2B5EF4-FFF2-40B4-BE49-F238E27FC236}">
+                <a16:creationId xmlns:a16="http://schemas.microsoft.com/office/drawing/2014/main" id="{60AC567D-6E82-3079-CF63-9901D98EF897}"/>
+              </a:ext>
+            </a:extLst>
+          </p:cNvPr>
+          <p:cNvSpPr/>
+          <p:nvPr/>
+        </p:nvSpPr>
+        <p:spPr>
+          <a:xfrm>
+            <a:off x="6191480" y="6581001"/>
+            <a:ext cx="6096000" cy="276999"/>
+          </a:xfrm>
+          <a:prstGeom prst="rect">
+            <a:avLst/>
+          </a:prstGeom>
+        </p:spPr>
+        <p:txBody>
+          <a:bodyPr>
+            <a:spAutoFit/>
+          </a:bodyPr>
+          <a:lstStyle/>
+          <a:p>
+            <a:r>
+              <a:rPr lang="ru-RU" sz="1200" dirty="0"/>
+              <a:t>https://cienciadedatos.net/documentos/py27-time-series-forecasting-python-scikitlearn.html</a:t>
+            </a:r>
+          </a:p>
+        </p:txBody>
+      </p:sp>
+      <p:pic>
+        <p:nvPicPr>
+          <p:cNvPr id="5122" name="Picture 2" descr="hybrid">
+            <a:extLst>
+              <a:ext uri="{FF2B5EF4-FFF2-40B4-BE49-F238E27FC236}">
+                <a16:creationId xmlns:a16="http://schemas.microsoft.com/office/drawing/2014/main" id="{36DD418D-FDA3-42A4-0ED6-EB27CD548C6D}"/>
+              </a:ext>
+            </a:extLst>
+          </p:cNvPr>
+          <p:cNvPicPr>
+            <a:picLocks noChangeAspect="1" noChangeArrowheads="1"/>
+          </p:cNvPicPr>
+          <p:nvPr/>
+        </p:nvPicPr>
+        <p:blipFill>
+          <a:blip r:embed="rId2">
+            <a:extLst>
+              <a:ext uri="{28A0092B-C50C-407E-A947-70E740481C1C}">
+                <a14:useLocalDpi xmlns:a14="http://schemas.microsoft.com/office/drawing/2010/main" val="0"/>
+              </a:ext>
+            </a:extLst>
+          </a:blip>
+          <a:srcRect/>
+          <a:stretch>
+            <a:fillRect/>
+          </a:stretch>
+        </p:blipFill>
+        <p:spPr bwMode="auto">
+          <a:xfrm>
+            <a:off x="1487277" y="3922352"/>
+            <a:ext cx="10561504" cy="2797148"/>
+          </a:xfrm>
+          <a:prstGeom prst="rect">
+            <a:avLst/>
+          </a:prstGeom>
+          <a:noFill/>
+          <a:extLst>
+            <a:ext uri="{909E8E84-426E-40DD-AFC4-6F175D3DCCD1}">
+              <a14:hiddenFill xmlns:a14="http://schemas.microsoft.com/office/drawing/2010/main">
+                <a:solidFill>
+                  <a:srgbClr val="FFFFFF"/>
+                </a:solidFill>
+              </a14:hiddenFill>
+            </a:ext>
+          </a:extLst>
+        </p:spPr>
+      </p:pic>
+    </p:spTree>
+    <p:extLst>
+      <p:ext uri="{BB962C8B-B14F-4D97-AF65-F5344CB8AC3E}">
+        <p14:creationId xmlns:p14="http://schemas.microsoft.com/office/powerpoint/2010/main" val="3906757853"/>
+      </p:ext>
+    </p:extLst>
+  </p:cSld>
+  <p:clrMapOvr>
+    <a:masterClrMapping/>
+  </p:clrMapOvr>
+</p:sld>
+</file>
+
+<file path=ppt/slides/slide7.xml><?xml version="1.0" encoding="utf-8"?>
+<p:sld xmlns:a="http://schemas.openxmlformats.org/drawingml/2006/main" xmlns:r="http://schemas.openxmlformats.org/officeDocument/2006/relationships" xmlns:p="http://schemas.openxmlformats.org/presentationml/2006/main">
+  <p:cSld>
+    <p:spTree>
+      <p:nvGrpSpPr>
+        <p:cNvPr id="1" name=""/>
+        <p:cNvGrpSpPr/>
+        <p:nvPr/>
+      </p:nvGrpSpPr>
+      <p:grpSpPr>
+        <a:xfrm>
+          <a:off x="0" y="0"/>
+          <a:ext cx="0" cy="0"/>
+          <a:chOff x="0" y="0"/>
+          <a:chExt cx="0" cy="0"/>
+        </a:xfrm>
+      </p:grpSpPr>
+      <p:sp>
+        <p:nvSpPr>
           <p:cNvPr id="2" name="Заголовок 1"/>
           <p:cNvSpPr>
             <a:spLocks noGrp="1"/>
@@ -6735,10 +8632,9 @@
           <a:lstStyle/>
           <a:p>
             <a:r>
-              <a:rPr lang="ru-RU" dirty="0" smtClean="0"/>
+              <a:rPr lang="ru-RU" dirty="0"/>
               <a:t>Признаки во временных рядах</a:t>
             </a:r>
-            <a:endParaRPr lang="ru-RU" dirty="0"/>
           </a:p>
         </p:txBody>
       </p:sp>
@@ -6768,7 +8664,7 @@
               <a:buNone/>
             </a:pPr>
             <a:r>
-              <a:rPr lang="ru-RU" sz="2400" dirty="0" smtClean="0"/>
+              <a:rPr lang="ru-RU" sz="2400" dirty="0"/>
               <a:t>Может быть несколько вариантов редукции. </a:t>
             </a:r>
           </a:p>
@@ -6840,10 +8736,9 @@
           <a:lstStyle/>
           <a:p>
             <a:r>
-              <a:rPr lang="ru-RU" sz="1200" dirty="0" smtClean="0"/>
+              <a:rPr lang="ru-RU" sz="1200" dirty="0"/>
               <a:t>https://cienciadedatos.net/documentos/py27-time-series-forecasting-python-scikitlearn.html</a:t>
             </a:r>
-            <a:endParaRPr lang="ru-RU" sz="1200" dirty="0"/>
           </a:p>
         </p:txBody>
       </p:sp>
@@ -6952,10 +8847,9 @@
           <a:lstStyle/>
           <a:p>
             <a:r>
-              <a:rPr lang="ru-RU" dirty="0" smtClean="0"/>
+              <a:rPr lang="ru-RU" dirty="0"/>
               <a:t>Добавление экзогенных факторов к редукции</a:t>
             </a:r>
-            <a:endParaRPr lang="ru-RU" dirty="0"/>
           </a:p>
         </p:txBody>
       </p:sp>
@@ -6982,10 +8876,9 @@
           <a:lstStyle/>
           <a:p>
             <a:r>
-              <a:rPr lang="ru-RU" dirty="0" smtClean="0"/>
+              <a:rPr lang="ru-RU" dirty="0"/>
               <a:t>Рекурсивная редукция </a:t>
             </a:r>
-            <a:endParaRPr lang="ru-RU" dirty="0"/>
           </a:p>
         </p:txBody>
       </p:sp>
@@ -7035,10 +8928,9 @@
           <a:lstStyle/>
           <a:p>
             <a:r>
-              <a:rPr lang="ru-RU" dirty="0" smtClean="0"/>
+              <a:rPr lang="ru-RU" dirty="0"/>
               <a:t>Прямая редукция </a:t>
             </a:r>
-            <a:endParaRPr lang="ru-RU" dirty="0"/>
           </a:p>
         </p:txBody>
       </p:sp>
@@ -7124,10 +9016,9 @@
           <a:lstStyle/>
           <a:p>
             <a:r>
-              <a:rPr lang="ru-RU" sz="1100" dirty="0" smtClean="0"/>
+              <a:rPr lang="ru-RU" sz="1100" dirty="0"/>
               <a:t>https://machinelearningmastery.com/multi-step-time-series-forecasting/</a:t>
             </a:r>
-            <a:endParaRPr lang="ru-RU" sz="1100" dirty="0"/>
           </a:p>
         </p:txBody>
       </p:sp>
@@ -7153,10 +9044,9 @@
           <a:lstStyle/>
           <a:p>
             <a:r>
-              <a:rPr lang="ru-RU" sz="1200" dirty="0" smtClean="0"/>
+              <a:rPr lang="ru-RU" sz="1200" dirty="0"/>
               <a:t>https://robjhyndman.com/papers/rectify.pdf</a:t>
             </a:r>
-            <a:endParaRPr lang="ru-RU" sz="1200" dirty="0"/>
           </a:p>
         </p:txBody>
       </p:sp>
@@ -7170,17 +9060,10 @@
   <p:clrMapOvr>
     <a:masterClrMapping/>
   </p:clrMapOvr>
-  <p:timing>
-    <p:tnLst>
-      <p:par>
-        <p:cTn id="1" dur="indefinite" restart="never" nodeType="tmRoot"/>
-      </p:par>
-    </p:tnLst>
-  </p:timing>
 </p:sld>
 </file>
 
-<file path=ppt/slides/slide5.xml><?xml version="1.0" encoding="utf-8"?>
+<file path=ppt/slides/slide8.xml><?xml version="1.0" encoding="utf-8"?>
 <p:sld xmlns:a="http://schemas.openxmlformats.org/drawingml/2006/main" xmlns:r="http://schemas.openxmlformats.org/officeDocument/2006/relationships" xmlns:p="http://schemas.openxmlformats.org/presentationml/2006/main">
   <p:cSld>
     <p:spTree>
@@ -7213,10 +9096,9 @@
           <a:lstStyle/>
           <a:p>
             <a:r>
-              <a:rPr lang="ru-RU" dirty="0" smtClean="0"/>
+              <a:rPr lang="ru-RU" dirty="0"/>
               <a:t>Учет экзогенных и других типов признаков</a:t>
             </a:r>
-            <a:endParaRPr lang="ru-RU" dirty="0"/>
           </a:p>
         </p:txBody>
       </p:sp>
@@ -7374,7 +9256,7 @@
 </p:sld>
 </file>
 
-<file path=ppt/slides/slide6.xml><?xml version="1.0" encoding="utf-8"?>
+<file path=ppt/slides/slide9.xml><?xml version="1.0" encoding="utf-8"?>
 <p:sld xmlns:a="http://schemas.openxmlformats.org/drawingml/2006/main" xmlns:r="http://schemas.openxmlformats.org/officeDocument/2006/relationships" xmlns:p="http://schemas.openxmlformats.org/presentationml/2006/main">
   <p:cSld>
     <p:spTree>
@@ -7450,8 +9332,8 @@
         </p:blipFill>
         <p:spPr bwMode="auto">
           <a:xfrm>
-            <a:off x="3438525" y="3458884"/>
-            <a:ext cx="8620125" cy="3224491"/>
+            <a:off x="4352630" y="3800819"/>
+            <a:ext cx="7706020" cy="2882556"/>
           </a:xfrm>
           <a:prstGeom prst="rect">
             <a:avLst/>
@@ -7519,8 +9401,8 @@
         </p:blipFill>
         <p:spPr bwMode="auto">
           <a:xfrm>
-            <a:off x="438150" y="908123"/>
-            <a:ext cx="8070850" cy="3093171"/>
+            <a:off x="0" y="1319213"/>
+            <a:ext cx="8210327" cy="3146626"/>
           </a:xfrm>
           <a:prstGeom prst="rect">
             <a:avLst/>
@@ -7547,1124 +9429,6 @@
   <p:clrMapOvr>
     <a:masterClrMapping/>
   </p:clrMapOvr>
-</p:sld>
-</file>
-
-<file path=ppt/slides/slide7.xml><?xml version="1.0" encoding="utf-8"?>
-<p:sld xmlns:a="http://schemas.openxmlformats.org/drawingml/2006/main" xmlns:r="http://schemas.openxmlformats.org/officeDocument/2006/relationships" xmlns:p="http://schemas.openxmlformats.org/presentationml/2006/main">
-  <p:cSld>
-    <p:spTree>
-      <p:nvGrpSpPr>
-        <p:cNvPr id="1" name=""/>
-        <p:cNvGrpSpPr/>
-        <p:nvPr/>
-      </p:nvGrpSpPr>
-      <p:grpSpPr>
-        <a:xfrm>
-          <a:off x="0" y="0"/>
-          <a:ext cx="0" cy="0"/>
-          <a:chOff x="0" y="0"/>
-          <a:chExt cx="0" cy="0"/>
-        </a:xfrm>
-      </p:grpSpPr>
-      <p:sp>
-        <p:nvSpPr>
-          <p:cNvPr id="2" name="Заголовок 1"/>
-          <p:cNvSpPr>
-            <a:spLocks noGrp="1"/>
-          </p:cNvSpPr>
-          <p:nvPr>
-            <p:ph type="title"/>
-          </p:nvPr>
-        </p:nvSpPr>
-        <p:spPr>
-          <a:xfrm>
-            <a:off x="125505" y="320303"/>
-            <a:ext cx="12227859" cy="773392"/>
-          </a:xfrm>
-        </p:spPr>
-        <p:txBody>
-          <a:bodyPr/>
-          <a:lstStyle/>
-          <a:p>
-            <a:r>
-              <a:rPr lang="ru-RU" dirty="0" smtClean="0"/>
-              <a:t>Признаки во временных рядах</a:t>
-            </a:r>
-            <a:endParaRPr lang="ru-RU" dirty="0"/>
-          </a:p>
-        </p:txBody>
-      </p:sp>
-      <p:sp>
-        <p:nvSpPr>
-          <p:cNvPr id="3" name="Объект 2"/>
-          <p:cNvSpPr>
-            <a:spLocks noGrp="1"/>
-          </p:cNvSpPr>
-          <p:nvPr>
-            <p:ph idx="1"/>
-          </p:nvPr>
-        </p:nvSpPr>
-        <p:spPr>
-          <a:xfrm>
-            <a:off x="188258" y="1029249"/>
-            <a:ext cx="11660842" cy="5304876"/>
-          </a:xfrm>
-        </p:spPr>
-        <p:txBody>
-          <a:bodyPr>
-            <a:normAutofit fontScale="92500" lnSpcReduction="20000"/>
-          </a:bodyPr>
-          <a:lstStyle/>
-          <a:p>
-            <a:r>
-              <a:rPr lang="ru-RU" dirty="0" smtClean="0"/>
-              <a:t>Лаги временных рядов</a:t>
-            </a:r>
-          </a:p>
-          <a:p>
-            <a:r>
-              <a:rPr lang="ru-RU" dirty="0" smtClean="0"/>
-              <a:t>Преобразования лагов (степенное, разность и </a:t>
-            </a:r>
-            <a:r>
-              <a:rPr lang="ru-RU" dirty="0" err="1" smtClean="0"/>
-              <a:t>тд</a:t>
-            </a:r>
-            <a:r>
-              <a:rPr lang="ru-RU" dirty="0" smtClean="0"/>
-              <a:t>)</a:t>
-            </a:r>
-            <a:endParaRPr lang="en-US" dirty="0" smtClean="0"/>
-          </a:p>
-          <a:p>
-            <a:r>
-              <a:rPr lang="ru-RU" dirty="0" smtClean="0"/>
-              <a:t>Преобразования метки (степенное, разность, кодирование и </a:t>
-            </a:r>
-            <a:r>
-              <a:rPr lang="ru-RU" dirty="0" err="1" smtClean="0"/>
-              <a:t>тд</a:t>
-            </a:r>
-            <a:r>
-              <a:rPr lang="ru-RU" dirty="0" smtClean="0"/>
-              <a:t>)</a:t>
-            </a:r>
-            <a:endParaRPr lang="en-US" dirty="0" smtClean="0"/>
-          </a:p>
-          <a:p>
-            <a:r>
-              <a:rPr lang="ru-RU" dirty="0" smtClean="0"/>
-              <a:t>Оконные статистики</a:t>
-            </a:r>
-            <a:r>
-              <a:rPr lang="en-US" dirty="0" smtClean="0"/>
-              <a:t>:</a:t>
-            </a:r>
-            <a:endParaRPr lang="en-US" dirty="0"/>
-          </a:p>
-          <a:p>
-            <a:pPr lvl="1"/>
-            <a:r>
-              <a:rPr lang="en-US" dirty="0"/>
-              <a:t>Max/min value of series in a window</a:t>
-            </a:r>
-          </a:p>
-          <a:p>
-            <a:pPr lvl="1"/>
-            <a:r>
-              <a:rPr lang="en-US" dirty="0"/>
-              <a:t>Average/median value in a window</a:t>
-            </a:r>
-          </a:p>
-          <a:p>
-            <a:pPr lvl="1"/>
-            <a:r>
-              <a:rPr lang="en-US" dirty="0"/>
-              <a:t>Window variance</a:t>
-            </a:r>
-          </a:p>
-          <a:p>
-            <a:pPr lvl="1"/>
-            <a:r>
-              <a:rPr lang="en-US" dirty="0"/>
-              <a:t>etc.</a:t>
-            </a:r>
-          </a:p>
-          <a:p>
-            <a:r>
-              <a:rPr lang="ru-RU" dirty="0" smtClean="0"/>
-              <a:t>Даты и время</a:t>
-            </a:r>
-            <a:r>
-              <a:rPr lang="en-US" dirty="0" smtClean="0"/>
-              <a:t>:</a:t>
-            </a:r>
-            <a:endParaRPr lang="en-US" dirty="0"/>
-          </a:p>
-          <a:p>
-            <a:pPr lvl="1"/>
-            <a:r>
-              <a:rPr lang="ru-RU" dirty="0" smtClean="0"/>
-              <a:t>Порядковые (категориальные) данные: Число, день недели, месяц, квартал и </a:t>
-            </a:r>
-            <a:r>
-              <a:rPr lang="ru-RU" dirty="0" err="1" smtClean="0"/>
-              <a:t>тд</a:t>
-            </a:r>
-            <a:endParaRPr lang="en-US" dirty="0"/>
-          </a:p>
-          <a:p>
-            <a:pPr lvl="1"/>
-            <a:r>
-              <a:rPr lang="ru-RU" dirty="0" smtClean="0"/>
-              <a:t>Бинарные (дискретные): </a:t>
-            </a:r>
-            <a:r>
-              <a:rPr lang="en-US" dirty="0" smtClean="0"/>
-              <a:t>Is </a:t>
-            </a:r>
-            <a:r>
-              <a:rPr lang="en-US" dirty="0"/>
-              <a:t>this day a holiday? Maybe there is a special event? </a:t>
-            </a:r>
-            <a:endParaRPr lang="ru-RU" dirty="0" smtClean="0"/>
-          </a:p>
-          <a:p>
-            <a:r>
-              <a:rPr lang="ru-RU" dirty="0" smtClean="0"/>
-              <a:t>Экзогенные факторы, объясняющие (в домене) целевую переменную</a:t>
-            </a:r>
-          </a:p>
-          <a:p>
-            <a:r>
-              <a:rPr lang="ru-RU" dirty="0" smtClean="0"/>
-              <a:t>Результаты, статистики остатков и другие характеристики </a:t>
-            </a:r>
-            <a:r>
-              <a:rPr lang="ru-RU" dirty="0" err="1" smtClean="0"/>
-              <a:t>предскзаний</a:t>
-            </a:r>
-            <a:r>
-              <a:rPr lang="ru-RU" dirty="0" smtClean="0"/>
-              <a:t> других моделей </a:t>
-            </a:r>
-            <a:endParaRPr lang="en-US" dirty="0"/>
-          </a:p>
-          <a:p>
-            <a:endParaRPr lang="ru-RU" dirty="0"/>
-          </a:p>
-        </p:txBody>
-      </p:sp>
-      <p:sp>
-        <p:nvSpPr>
-          <p:cNvPr id="4" name="Прямоугольник 3"/>
-          <p:cNvSpPr/>
-          <p:nvPr/>
-        </p:nvSpPr>
-        <p:spPr>
-          <a:xfrm>
-            <a:off x="5459505" y="6449670"/>
-            <a:ext cx="6096000" cy="307777"/>
-          </a:xfrm>
-          <a:prstGeom prst="rect">
-            <a:avLst/>
-          </a:prstGeom>
-        </p:spPr>
-        <p:txBody>
-          <a:bodyPr>
-            <a:spAutoFit/>
-          </a:bodyPr>
-          <a:lstStyle/>
-          <a:p>
-            <a:r>
-              <a:rPr lang="ru-RU" sz="1400" dirty="0" smtClean="0"/>
-              <a:t>https://mlcourse.ai/book/topic09/topic9_part1_time_series_python.html</a:t>
-            </a:r>
-            <a:endParaRPr lang="ru-RU" sz="1400" dirty="0"/>
-          </a:p>
-        </p:txBody>
-      </p:sp>
-      <p:sp>
-        <p:nvSpPr>
-          <p:cNvPr id="5" name="Прямоугольник 4"/>
-          <p:cNvSpPr/>
-          <p:nvPr/>
-        </p:nvSpPr>
-        <p:spPr>
-          <a:xfrm>
-            <a:off x="5952565" y="6172671"/>
-            <a:ext cx="6096000" cy="276999"/>
-          </a:xfrm>
-          <a:prstGeom prst="rect">
-            <a:avLst/>
-          </a:prstGeom>
-        </p:spPr>
-        <p:txBody>
-          <a:bodyPr>
-            <a:spAutoFit/>
-          </a:bodyPr>
-          <a:lstStyle/>
-          <a:p>
-            <a:r>
-              <a:rPr lang="ru-RU" sz="1200" dirty="0" smtClean="0"/>
-              <a:t>https://nixtlaverse.nixtla.io/mlforecast/docs/getting-started/end_to_end_walkthrough.htm</a:t>
-            </a:r>
-            <a:endParaRPr lang="ru-RU" sz="1200" dirty="0"/>
-          </a:p>
-        </p:txBody>
-      </p:sp>
-    </p:spTree>
-    <p:extLst>
-      <p:ext uri="{BB962C8B-B14F-4D97-AF65-F5344CB8AC3E}">
-        <p14:creationId xmlns:p14="http://schemas.microsoft.com/office/powerpoint/2010/main" val="139361784"/>
-      </p:ext>
-    </p:extLst>
-  </p:cSld>
-  <p:clrMapOvr>
-    <a:masterClrMapping/>
-  </p:clrMapOvr>
-  <p:timing>
-    <p:tnLst>
-      <p:par>
-        <p:cTn id="1" dur="indefinite" restart="never" nodeType="tmRoot"/>
-      </p:par>
-    </p:tnLst>
-  </p:timing>
-</p:sld>
-</file>
-
-<file path=ppt/slides/slide8.xml><?xml version="1.0" encoding="utf-8"?>
-<p:sld xmlns:a="http://schemas.openxmlformats.org/drawingml/2006/main" xmlns:r="http://schemas.openxmlformats.org/officeDocument/2006/relationships" xmlns:p="http://schemas.openxmlformats.org/presentationml/2006/main">
-  <p:cSld>
-    <p:spTree>
-      <p:nvGrpSpPr>
-        <p:cNvPr id="1" name=""/>
-        <p:cNvGrpSpPr/>
-        <p:nvPr/>
-      </p:nvGrpSpPr>
-      <p:grpSpPr>
-        <a:xfrm>
-          <a:off x="0" y="0"/>
-          <a:ext cx="0" cy="0"/>
-          <a:chOff x="0" y="0"/>
-          <a:chExt cx="0" cy="0"/>
-        </a:xfrm>
-      </p:grpSpPr>
-      <p:sp>
-        <p:nvSpPr>
-          <p:cNvPr id="2" name="Заголовок 1"/>
-          <p:cNvSpPr>
-            <a:spLocks noGrp="1"/>
-          </p:cNvSpPr>
-          <p:nvPr>
-            <p:ph type="title"/>
-          </p:nvPr>
-        </p:nvSpPr>
-        <p:spPr>
-          <a:xfrm>
-            <a:off x="331694" y="365125"/>
-            <a:ext cx="11022106" cy="925793"/>
-          </a:xfrm>
-        </p:spPr>
-        <p:txBody>
-          <a:bodyPr>
-            <a:normAutofit/>
-          </a:bodyPr>
-          <a:lstStyle/>
-          <a:p>
-            <a:r>
-              <a:rPr lang="ru-RU" sz="3600" dirty="0" smtClean="0"/>
-              <a:t>Разница между задачами регрессии и предсказания</a:t>
-            </a:r>
-            <a:endParaRPr lang="ru-RU" sz="3600" dirty="0"/>
-          </a:p>
-        </p:txBody>
-      </p:sp>
-      <p:graphicFrame>
-        <p:nvGraphicFramePr>
-          <p:cNvPr id="4" name="Объект 3"/>
-          <p:cNvGraphicFramePr>
-            <a:graphicFrameLocks noGrp="1"/>
-          </p:cNvGraphicFramePr>
-          <p:nvPr>
-            <p:ph idx="1"/>
-            <p:extLst>
-              <p:ext uri="{D42A27DB-BD31-4B8C-83A1-F6EECF244321}">
-                <p14:modId xmlns:p14="http://schemas.microsoft.com/office/powerpoint/2010/main" val="3329227898"/>
-              </p:ext>
-            </p:extLst>
-          </p:nvPr>
-        </p:nvGraphicFramePr>
-        <p:xfrm>
-          <a:off x="421341" y="1290918"/>
-          <a:ext cx="10932459" cy="3576320"/>
-        </p:xfrm>
-        <a:graphic>
-          <a:graphicData uri="http://schemas.openxmlformats.org/drawingml/2006/table">
-            <a:tbl>
-              <a:tblPr firstRow="1" bandRow="1">
-                <a:tableStyleId>{5C22544A-7EE6-4342-B048-85BDC9FD1C3A}</a:tableStyleId>
-              </a:tblPr>
-              <a:tblGrid>
-                <a:gridCol w="2424954">
-                  <a:extLst>
-                    <a:ext uri="{9D8B030D-6E8A-4147-A177-3AD203B41FA5}">
-                      <a16:colId xmlns:a16="http://schemas.microsoft.com/office/drawing/2014/main" val="3381004655"/>
-                    </a:ext>
-                  </a:extLst>
-                </a:gridCol>
-                <a:gridCol w="3693459">
-                  <a:extLst>
-                    <a:ext uri="{9D8B030D-6E8A-4147-A177-3AD203B41FA5}">
-                      <a16:colId xmlns:a16="http://schemas.microsoft.com/office/drawing/2014/main" val="2915955119"/>
-                    </a:ext>
-                  </a:extLst>
-                </a:gridCol>
-                <a:gridCol w="4814046">
-                  <a:extLst>
-                    <a:ext uri="{9D8B030D-6E8A-4147-A177-3AD203B41FA5}">
-                      <a16:colId xmlns:a16="http://schemas.microsoft.com/office/drawing/2014/main" val="3699764588"/>
-                    </a:ext>
-                  </a:extLst>
-                </a:gridCol>
-              </a:tblGrid>
-              <a:tr h="370840">
-                <a:tc>
-                  <a:txBody>
-                    <a:bodyPr/>
-                    <a:lstStyle/>
-                    <a:p>
-                      <a:r>
-                        <a:rPr lang="ru-RU" dirty="0" smtClean="0"/>
-                        <a:t>Задача</a:t>
-                      </a:r>
-                      <a:endParaRPr lang="ru-RU" dirty="0"/>
-                    </a:p>
-                  </a:txBody>
-                  <a:tcPr/>
-                </a:tc>
-                <a:tc>
-                  <a:txBody>
-                    <a:bodyPr/>
-                    <a:lstStyle/>
-                    <a:p>
-                      <a:r>
-                        <a:rPr lang="ru-RU" dirty="0" smtClean="0"/>
-                        <a:t>Табличная</a:t>
-                      </a:r>
-                      <a:r>
-                        <a:rPr lang="ru-RU" baseline="0" dirty="0" smtClean="0"/>
-                        <a:t> регрессия </a:t>
-                      </a:r>
-                      <a:endParaRPr lang="ru-RU" dirty="0"/>
-                    </a:p>
-                  </a:txBody>
-                  <a:tcPr/>
-                </a:tc>
-                <a:tc>
-                  <a:txBody>
-                    <a:bodyPr/>
-                    <a:lstStyle/>
-                    <a:p>
-                      <a:r>
-                        <a:rPr lang="ru-RU" dirty="0" smtClean="0"/>
-                        <a:t>предсказания ВР</a:t>
-                      </a:r>
-                      <a:endParaRPr lang="ru-RU" dirty="0"/>
-                    </a:p>
-                  </a:txBody>
-                  <a:tcPr/>
-                </a:tc>
-                <a:extLst>
-                  <a:ext uri="{0D108BD9-81ED-4DB2-BD59-A6C34878D82A}">
-                    <a16:rowId xmlns:a16="http://schemas.microsoft.com/office/drawing/2014/main" val="532934532"/>
-                  </a:ext>
-                </a:extLst>
-              </a:tr>
-              <a:tr h="370840">
-                <a:tc>
-                  <a:txBody>
-                    <a:bodyPr/>
-                    <a:lstStyle/>
-                    <a:p>
-                      <a:r>
-                        <a:rPr lang="ru-RU" dirty="0" smtClean="0"/>
-                        <a:t>Задача</a:t>
-                      </a:r>
-                      <a:endParaRPr lang="ru-RU" dirty="0"/>
-                    </a:p>
-                  </a:txBody>
-                  <a:tcPr/>
-                </a:tc>
-                <a:tc>
-                  <a:txBody>
-                    <a:bodyPr/>
-                    <a:lstStyle/>
-                    <a:p>
-                      <a:r>
-                        <a:rPr lang="ru-RU" dirty="0" smtClean="0"/>
-                        <a:t>Регрессия (</a:t>
-                      </a:r>
-                      <a:r>
-                        <a:rPr lang="ru-RU" dirty="0" err="1" smtClean="0"/>
-                        <a:t>фичи</a:t>
-                      </a:r>
-                      <a:r>
-                        <a:rPr lang="ru-RU" dirty="0" smtClean="0"/>
-                        <a:t> связаны</a:t>
-                      </a:r>
-                      <a:r>
-                        <a:rPr lang="ru-RU" baseline="0" dirty="0" smtClean="0"/>
-                        <a:t> с меткой но не коррелируют)</a:t>
-                      </a:r>
-                      <a:endParaRPr lang="ru-RU" dirty="0"/>
-                    </a:p>
-                  </a:txBody>
-                  <a:tcPr/>
-                </a:tc>
-                <a:tc>
-                  <a:txBody>
-                    <a:bodyPr/>
-                    <a:lstStyle/>
-                    <a:p>
-                      <a:r>
-                        <a:rPr lang="ru-RU" dirty="0" smtClean="0"/>
-                        <a:t>Предсказание (следующее</a:t>
-                      </a:r>
-                      <a:r>
-                        <a:rPr lang="ru-RU" baseline="0" dirty="0" smtClean="0"/>
-                        <a:t> значение сильно коррелирует с предыдущим, на которых строится </a:t>
-                      </a:r>
-                      <a:r>
-                        <a:rPr lang="ru-RU" baseline="0" dirty="0" err="1" smtClean="0"/>
-                        <a:t>прогнз</a:t>
-                      </a:r>
-                      <a:r>
-                        <a:rPr lang="ru-RU" baseline="0" dirty="0" smtClean="0"/>
-                        <a:t>)</a:t>
-                      </a:r>
-                      <a:endParaRPr lang="ru-RU" dirty="0"/>
-                    </a:p>
-                  </a:txBody>
-                  <a:tcPr/>
-                </a:tc>
-                <a:extLst>
-                  <a:ext uri="{0D108BD9-81ED-4DB2-BD59-A6C34878D82A}">
-                    <a16:rowId xmlns:a16="http://schemas.microsoft.com/office/drawing/2014/main" val="2976921306"/>
-                  </a:ext>
-                </a:extLst>
-              </a:tr>
-              <a:tr h="370840">
-                <a:tc>
-                  <a:txBody>
-                    <a:bodyPr/>
-                    <a:lstStyle/>
-                    <a:p>
-                      <a:r>
-                        <a:rPr lang="ru-RU" dirty="0" smtClean="0"/>
-                        <a:t>Признаки</a:t>
-                      </a:r>
-                      <a:endParaRPr lang="ru-RU" dirty="0"/>
-                    </a:p>
-                  </a:txBody>
-                  <a:tcPr/>
-                </a:tc>
-                <a:tc>
-                  <a:txBody>
-                    <a:bodyPr/>
-                    <a:lstStyle/>
-                    <a:p>
-                      <a:r>
-                        <a:rPr lang="ru-RU" dirty="0" smtClean="0"/>
-                        <a:t>Колонки – признаки</a:t>
-                      </a:r>
-                      <a:endParaRPr lang="ru-RU" dirty="0"/>
-                    </a:p>
-                  </a:txBody>
-                  <a:tcPr/>
-                </a:tc>
-                <a:tc>
-                  <a:txBody>
-                    <a:bodyPr/>
-                    <a:lstStyle/>
-                    <a:p>
-                      <a:r>
-                        <a:rPr lang="ru-RU" dirty="0" smtClean="0"/>
-                        <a:t>ВР – это не признаки, признаки надо выделить</a:t>
-                      </a:r>
-                      <a:endParaRPr lang="ru-RU" dirty="0"/>
-                    </a:p>
-                  </a:txBody>
-                  <a:tcPr/>
-                </a:tc>
-                <a:extLst>
-                  <a:ext uri="{0D108BD9-81ED-4DB2-BD59-A6C34878D82A}">
-                    <a16:rowId xmlns:a16="http://schemas.microsoft.com/office/drawing/2014/main" val="813022796"/>
-                  </a:ext>
-                </a:extLst>
-              </a:tr>
-              <a:tr h="370840">
-                <a:tc>
-                  <a:txBody>
-                    <a:bodyPr/>
-                    <a:lstStyle/>
-                    <a:p>
-                      <a:r>
-                        <a:rPr lang="ru-RU" dirty="0" err="1" smtClean="0"/>
-                        <a:t>Фичи-инженеринг</a:t>
-                      </a:r>
-                      <a:endParaRPr lang="ru-RU" dirty="0"/>
-                    </a:p>
-                  </a:txBody>
-                  <a:tcPr/>
-                </a:tc>
-                <a:tc>
-                  <a:txBody>
-                    <a:bodyPr/>
-                    <a:lstStyle/>
-                    <a:p>
-                      <a:r>
-                        <a:rPr lang="ru-RU" dirty="0" smtClean="0"/>
-                        <a:t>Отбор, трансформация</a:t>
-                      </a:r>
-                      <a:r>
-                        <a:rPr lang="ru-RU" baseline="0" dirty="0" smtClean="0"/>
-                        <a:t> </a:t>
-                      </a:r>
-                      <a:r>
-                        <a:rPr lang="ru-RU" dirty="0" err="1" smtClean="0"/>
-                        <a:t>фичей</a:t>
-                      </a:r>
-                      <a:r>
-                        <a:rPr lang="ru-RU" dirty="0" smtClean="0"/>
-                        <a:t>,</a:t>
-                      </a:r>
-                      <a:endParaRPr lang="ru-RU" dirty="0"/>
-                    </a:p>
-                  </a:txBody>
-                  <a:tcPr/>
-                </a:tc>
-                <a:tc>
-                  <a:txBody>
-                    <a:bodyPr/>
-                    <a:lstStyle/>
-                    <a:p>
-                      <a:pPr marL="0" marR="0" indent="0" algn="l" defTabSz="914400" rtl="0" eaLnBrk="1" fontAlgn="auto" latinLnBrk="0" hangingPunct="1">
-                        <a:lnSpc>
-                          <a:spcPct val="100000"/>
-                        </a:lnSpc>
-                        <a:spcBef>
-                          <a:spcPts val="0"/>
-                        </a:spcBef>
-                        <a:spcAft>
-                          <a:spcPts val="0"/>
-                        </a:spcAft>
-                        <a:buClrTx/>
-                        <a:buSzTx/>
-                        <a:buFontTx/>
-                        <a:buNone/>
-                        <a:tabLst/>
-                        <a:defRPr/>
-                      </a:pPr>
-                      <a:r>
-                        <a:rPr lang="ru-RU" dirty="0" smtClean="0"/>
-                        <a:t>Редукция ВР к таблице</a:t>
-                      </a:r>
-                      <a:r>
-                        <a:rPr lang="ru-RU" baseline="0" dirty="0" smtClean="0"/>
-                        <a:t> + табличный </a:t>
-                      </a:r>
-                      <a:r>
-                        <a:rPr lang="ru-RU" dirty="0" err="1" smtClean="0"/>
-                        <a:t>Фичи-инженеринг</a:t>
-                      </a:r>
-                      <a:endParaRPr lang="ru-RU" dirty="0"/>
-                    </a:p>
-                  </a:txBody>
-                  <a:tcPr/>
-                </a:tc>
-                <a:extLst>
-                  <a:ext uri="{0D108BD9-81ED-4DB2-BD59-A6C34878D82A}">
-                    <a16:rowId xmlns:a16="http://schemas.microsoft.com/office/drawing/2014/main" val="4075596501"/>
-                  </a:ext>
-                </a:extLst>
-              </a:tr>
-              <a:tr h="370840">
-                <a:tc>
-                  <a:txBody>
-                    <a:bodyPr/>
-                    <a:lstStyle/>
-                    <a:p>
-                      <a:r>
-                        <a:rPr lang="ru-RU" dirty="0" smtClean="0"/>
-                        <a:t>Кросс-</a:t>
-                      </a:r>
-                      <a:r>
-                        <a:rPr lang="ru-RU" dirty="0" err="1" smtClean="0"/>
-                        <a:t>валидация</a:t>
-                      </a:r>
-                      <a:endParaRPr lang="ru-RU" dirty="0"/>
-                    </a:p>
-                  </a:txBody>
-                  <a:tcPr/>
-                </a:tc>
-                <a:tc>
-                  <a:txBody>
-                    <a:bodyPr/>
-                    <a:lstStyle/>
-                    <a:p>
-                      <a:r>
-                        <a:rPr lang="ru-RU" dirty="0" smtClean="0"/>
-                        <a:t>Случайная</a:t>
-                      </a:r>
-                      <a:r>
-                        <a:rPr lang="ru-RU" baseline="0" dirty="0" smtClean="0"/>
-                        <a:t> </a:t>
-                      </a:r>
-                      <a:r>
-                        <a:rPr lang="ru-RU" baseline="0" dirty="0" err="1" smtClean="0"/>
-                        <a:t>подвыборка</a:t>
-                      </a:r>
-                      <a:r>
-                        <a:rPr lang="ru-RU" dirty="0" smtClean="0"/>
-                        <a:t>, </a:t>
-                      </a:r>
-                      <a:r>
-                        <a:rPr lang="en-US" dirty="0" smtClean="0"/>
-                        <a:t>k-folds</a:t>
-                      </a:r>
-                      <a:endParaRPr lang="ru-RU" dirty="0"/>
-                    </a:p>
-                  </a:txBody>
-                  <a:tcPr/>
-                </a:tc>
-                <a:tc>
-                  <a:txBody>
-                    <a:bodyPr/>
-                    <a:lstStyle/>
-                    <a:p>
-                      <a:r>
-                        <a:rPr lang="en-US" dirty="0" smtClean="0"/>
-                        <a:t>Walking</a:t>
-                      </a:r>
-                      <a:r>
-                        <a:rPr lang="en-US" baseline="0" dirty="0" smtClean="0"/>
-                        <a:t>-forward – </a:t>
-                      </a:r>
-                      <a:r>
-                        <a:rPr lang="ru-RU" baseline="0" dirty="0" smtClean="0"/>
-                        <a:t>нельзя делать случайную </a:t>
-                      </a:r>
-                      <a:r>
-                        <a:rPr lang="ru-RU" baseline="0" dirty="0" err="1" smtClean="0"/>
-                        <a:t>подвыборку</a:t>
-                      </a:r>
-                      <a:r>
-                        <a:rPr lang="ru-RU" baseline="0" dirty="0" smtClean="0"/>
-                        <a:t>, только последовательно</a:t>
-                      </a:r>
-                      <a:endParaRPr lang="ru-RU" dirty="0"/>
-                    </a:p>
-                  </a:txBody>
-                  <a:tcPr/>
-                </a:tc>
-                <a:extLst>
-                  <a:ext uri="{0D108BD9-81ED-4DB2-BD59-A6C34878D82A}">
-                    <a16:rowId xmlns:a16="http://schemas.microsoft.com/office/drawing/2014/main" val="2143537897"/>
-                  </a:ext>
-                </a:extLst>
-              </a:tr>
-              <a:tr h="370840">
-                <a:tc>
-                  <a:txBody>
-                    <a:bodyPr/>
-                    <a:lstStyle/>
-                    <a:p>
-                      <a:r>
-                        <a:rPr lang="ru-RU" dirty="0" smtClean="0"/>
-                        <a:t>Паттерны</a:t>
-                      </a:r>
-                      <a:endParaRPr lang="ru-RU" dirty="0"/>
-                    </a:p>
-                  </a:txBody>
-                  <a:tcPr/>
-                </a:tc>
-                <a:tc>
-                  <a:txBody>
-                    <a:bodyPr/>
-                    <a:lstStyle/>
-                    <a:p>
-                      <a:r>
-                        <a:rPr lang="ru-RU" dirty="0" smtClean="0"/>
-                        <a:t>Паттерн</a:t>
-                      </a:r>
-                      <a:r>
-                        <a:rPr lang="ru-RU" baseline="0" dirty="0" smtClean="0"/>
-                        <a:t> – набор </a:t>
-                      </a:r>
-                      <a:r>
-                        <a:rPr lang="ru-RU" baseline="0" dirty="0" err="1" smtClean="0"/>
-                        <a:t>фичей</a:t>
-                      </a:r>
-                      <a:r>
-                        <a:rPr lang="ru-RU" baseline="0" dirty="0" smtClean="0"/>
-                        <a:t> (запись, строка)</a:t>
-                      </a:r>
-                      <a:endParaRPr lang="ru-RU" dirty="0"/>
-                    </a:p>
-                  </a:txBody>
-                  <a:tcPr/>
-                </a:tc>
-                <a:tc>
-                  <a:txBody>
-                    <a:bodyPr/>
-                    <a:lstStyle/>
-                    <a:p>
-                      <a:r>
-                        <a:rPr lang="ru-RU" dirty="0" smtClean="0"/>
-                        <a:t>Последовательный паттерн (его еще нужно преобразовать в </a:t>
-                      </a:r>
-                      <a:r>
-                        <a:rPr lang="ru-RU" dirty="0" err="1" smtClean="0"/>
-                        <a:t>фичи</a:t>
-                      </a:r>
-                      <a:r>
-                        <a:rPr lang="ru-RU" dirty="0" smtClean="0"/>
-                        <a:t>)</a:t>
-                      </a:r>
-                      <a:endParaRPr lang="ru-RU" dirty="0"/>
-                    </a:p>
-                  </a:txBody>
-                  <a:tcPr/>
-                </a:tc>
-                <a:extLst>
-                  <a:ext uri="{0D108BD9-81ED-4DB2-BD59-A6C34878D82A}">
-                    <a16:rowId xmlns:a16="http://schemas.microsoft.com/office/drawing/2014/main" val="412694433"/>
-                  </a:ext>
-                </a:extLst>
-              </a:tr>
-            </a:tbl>
-          </a:graphicData>
-        </a:graphic>
-      </p:graphicFrame>
-      <p:sp>
-        <p:nvSpPr>
-          <p:cNvPr id="5" name="Прямоугольник 4"/>
-          <p:cNvSpPr/>
-          <p:nvPr/>
-        </p:nvSpPr>
-        <p:spPr>
-          <a:xfrm>
-            <a:off x="421340" y="5118864"/>
-            <a:ext cx="10703859" cy="646331"/>
-          </a:xfrm>
-          <a:prstGeom prst="rect">
-            <a:avLst/>
-          </a:prstGeom>
-        </p:spPr>
-        <p:txBody>
-          <a:bodyPr wrap="square">
-            <a:spAutoFit/>
-          </a:bodyPr>
-          <a:lstStyle/>
-          <a:p>
-            <a:pPr lvl="0" eaLnBrk="0" fontAlgn="base" hangingPunct="0">
-              <a:spcBef>
-                <a:spcPct val="0"/>
-              </a:spcBef>
-              <a:spcAft>
-                <a:spcPct val="0"/>
-              </a:spcAft>
-            </a:pPr>
-            <a:r>
-              <a:rPr lang="ru-RU" altLang="ru-RU" b="1" dirty="0">
-                <a:latin typeface="system-ui"/>
-              </a:rPr>
-              <a:t>Прогнозирование ВР</a:t>
-            </a:r>
-            <a:r>
-              <a:rPr lang="ru-RU" altLang="ru-RU" dirty="0">
-                <a:latin typeface="system-ui"/>
-              </a:rPr>
-              <a:t> - это не то же самое, что контролируемое </a:t>
-            </a:r>
-            <a:r>
-              <a:rPr lang="ru-RU" altLang="ru-RU" dirty="0" smtClean="0">
-                <a:latin typeface="system-ui"/>
-              </a:rPr>
-              <a:t>обучение (с учителем), </a:t>
-            </a:r>
-            <a:r>
-              <a:rPr lang="ru-RU" altLang="ru-RU" dirty="0">
-                <a:latin typeface="system-ui"/>
-              </a:rPr>
-              <a:t>в т.ч. задача регрессии, например, в </a:t>
-            </a:r>
-            <a:r>
-              <a:rPr lang="ru-RU" altLang="ru-RU" dirty="0" err="1">
-                <a:latin typeface="menlo"/>
-              </a:rPr>
-              <a:t>scikit-learn</a:t>
-            </a:r>
-            <a:r>
-              <a:rPr lang="ru-RU" altLang="ru-RU" dirty="0">
-                <a:latin typeface="system-ui"/>
-              </a:rPr>
-              <a:t>. </a:t>
-            </a:r>
-          </a:p>
-        </p:txBody>
-      </p:sp>
-    </p:spTree>
-    <p:extLst>
-      <p:ext uri="{BB962C8B-B14F-4D97-AF65-F5344CB8AC3E}">
-        <p14:creationId xmlns:p14="http://schemas.microsoft.com/office/powerpoint/2010/main" val="512408469"/>
-      </p:ext>
-    </p:extLst>
-  </p:cSld>
-  <p:clrMapOvr>
-    <a:masterClrMapping/>
-  </p:clrMapOvr>
-  <p:timing>
-    <p:tnLst>
-      <p:par>
-        <p:cTn id="1" dur="indefinite" restart="never" nodeType="tmRoot"/>
-      </p:par>
-    </p:tnLst>
-  </p:timing>
-</p:sld>
-</file>
-
-<file path=ppt/slides/slide9.xml><?xml version="1.0" encoding="utf-8"?>
-<p:sld xmlns:a="http://schemas.openxmlformats.org/drawingml/2006/main" xmlns:r="http://schemas.openxmlformats.org/officeDocument/2006/relationships" xmlns:p="http://schemas.openxmlformats.org/presentationml/2006/main">
-  <p:cSld>
-    <p:spTree>
-      <p:nvGrpSpPr>
-        <p:cNvPr id="1" name=""/>
-        <p:cNvGrpSpPr/>
-        <p:nvPr/>
-      </p:nvGrpSpPr>
-      <p:grpSpPr>
-        <a:xfrm>
-          <a:off x="0" y="0"/>
-          <a:ext cx="0" cy="0"/>
-          <a:chOff x="0" y="0"/>
-          <a:chExt cx="0" cy="0"/>
-        </a:xfrm>
-      </p:grpSpPr>
-      <p:sp>
-        <p:nvSpPr>
-          <p:cNvPr id="2" name="Заголовок 1"/>
-          <p:cNvSpPr>
-            <a:spLocks noGrp="1"/>
-          </p:cNvSpPr>
-          <p:nvPr>
-            <p:ph type="title"/>
-          </p:nvPr>
-        </p:nvSpPr>
-        <p:spPr>
-          <a:xfrm>
-            <a:off x="215712" y="174625"/>
-            <a:ext cx="11147613" cy="898899"/>
-          </a:xfrm>
-        </p:spPr>
-        <p:txBody>
-          <a:bodyPr/>
-          <a:lstStyle/>
-          <a:p>
-            <a:r>
-              <a:rPr lang="ru-RU" dirty="0" smtClean="0"/>
-              <a:t>Замечания к процедуре редукции</a:t>
-            </a:r>
-            <a:endParaRPr lang="ru-RU" dirty="0"/>
-          </a:p>
-        </p:txBody>
-      </p:sp>
-      <p:sp>
-        <p:nvSpPr>
-          <p:cNvPr id="3" name="Объект 2"/>
-          <p:cNvSpPr>
-            <a:spLocks noGrp="1"/>
-          </p:cNvSpPr>
-          <p:nvPr>
-            <p:ph idx="1"/>
-          </p:nvPr>
-        </p:nvSpPr>
-        <p:spPr>
-          <a:xfrm>
-            <a:off x="215712" y="940174"/>
-            <a:ext cx="11985813" cy="5154704"/>
-          </a:xfrm>
-        </p:spPr>
-        <p:txBody>
-          <a:bodyPr>
-            <a:noAutofit/>
-          </a:bodyPr>
-          <a:lstStyle/>
-          <a:p>
-            <a:pPr marL="0" lvl="0" indent="0" eaLnBrk="0" fontAlgn="base" hangingPunct="0">
-              <a:lnSpc>
-                <a:spcPct val="100000"/>
-              </a:lnSpc>
-              <a:spcBef>
-                <a:spcPts val="300"/>
-              </a:spcBef>
-              <a:spcAft>
-                <a:spcPct val="0"/>
-              </a:spcAft>
-              <a:buNone/>
-            </a:pPr>
-            <a:r>
-              <a:rPr lang="ru-RU" altLang="ru-RU" sz="2300" b="1" dirty="0" smtClean="0"/>
-              <a:t>Типичные ошибки при наивном сопоставлении задач регрессии и предсказания:</a:t>
-            </a:r>
-            <a:endParaRPr kumimoji="0" lang="ru-RU" altLang="ru-RU" sz="2300" b="1" i="0" u="none" strike="noStrike" cap="none" normalizeH="0" baseline="0" dirty="0" smtClean="0">
-              <a:ln>
-                <a:noFill/>
-              </a:ln>
-              <a:solidFill>
-                <a:schemeClr val="tx1"/>
-              </a:solidFill>
-              <a:effectLst/>
-            </a:endParaRPr>
-          </a:p>
-          <a:p>
-            <a:pPr eaLnBrk="0" fontAlgn="base" hangingPunct="0">
-              <a:lnSpc>
-                <a:spcPct val="100000"/>
-              </a:lnSpc>
-              <a:spcBef>
-                <a:spcPts val="300"/>
-              </a:spcBef>
-              <a:spcAft>
-                <a:spcPct val="0"/>
-              </a:spcAft>
-            </a:pPr>
-            <a:r>
-              <a:rPr lang="ru-RU" altLang="ru-RU" sz="2300" dirty="0" smtClean="0"/>
-              <a:t>Чрезмерно оптимистичная оценка (завышенная точность), </a:t>
-            </a:r>
-          </a:p>
-          <a:p>
-            <a:pPr eaLnBrk="0" fontAlgn="base" hangingPunct="0">
-              <a:lnSpc>
-                <a:spcPct val="100000"/>
-              </a:lnSpc>
-              <a:spcBef>
-                <a:spcPts val="300"/>
-              </a:spcBef>
-              <a:spcAft>
-                <a:spcPct val="0"/>
-              </a:spcAft>
-            </a:pPr>
-            <a:r>
-              <a:rPr lang="ru-RU" altLang="ru-RU" sz="2300" dirty="0" smtClean="0"/>
-              <a:t>Появление ложных корреляций между данными, </a:t>
-            </a:r>
-          </a:p>
-          <a:p>
-            <a:pPr lvl="1" eaLnBrk="0" fontAlgn="base" hangingPunct="0">
-              <a:lnSpc>
-                <a:spcPct val="100000"/>
-              </a:lnSpc>
-              <a:spcBef>
-                <a:spcPts val="300"/>
-              </a:spcBef>
-              <a:spcAft>
-                <a:spcPct val="0"/>
-              </a:spcAft>
-            </a:pPr>
-            <a:r>
-              <a:rPr lang="ru-RU" altLang="ru-RU" sz="2300" dirty="0" smtClean="0"/>
-              <a:t>Напр. перемешанные в таблице данные во временном ряду были бы значительно разнесены во времени. </a:t>
-            </a:r>
-          </a:p>
-          <a:p>
-            <a:pPr eaLnBrk="0" fontAlgn="base" hangingPunct="0">
-              <a:lnSpc>
-                <a:spcPct val="100000"/>
-              </a:lnSpc>
-              <a:spcBef>
-                <a:spcPts val="300"/>
-              </a:spcBef>
-              <a:spcAft>
-                <a:spcPct val="0"/>
-              </a:spcAft>
-            </a:pPr>
-            <a:r>
-              <a:rPr lang="ru-RU" altLang="ru-RU" sz="2300" dirty="0" smtClean="0"/>
-              <a:t>Случайная кросс-</a:t>
-            </a:r>
-            <a:r>
-              <a:rPr lang="ru-RU" altLang="ru-RU" sz="2300" dirty="0" err="1" smtClean="0"/>
-              <a:t>валидация</a:t>
-            </a:r>
-            <a:r>
-              <a:rPr lang="ru-RU" altLang="ru-RU" sz="2300" dirty="0" smtClean="0"/>
-              <a:t> также дает смещенную оценку</a:t>
-            </a:r>
-          </a:p>
-          <a:p>
-            <a:pPr marL="0" lvl="0" indent="0" eaLnBrk="0" fontAlgn="base" hangingPunct="0">
-              <a:lnSpc>
-                <a:spcPct val="100000"/>
-              </a:lnSpc>
-              <a:spcBef>
-                <a:spcPts val="300"/>
-              </a:spcBef>
-              <a:spcAft>
-                <a:spcPct val="0"/>
-              </a:spcAft>
-              <a:buNone/>
-            </a:pPr>
-            <a:endParaRPr lang="ru-RU" altLang="ru-RU" sz="2100" dirty="0" smtClean="0"/>
-          </a:p>
-          <a:p>
-            <a:pPr marL="0" lvl="0" indent="0" eaLnBrk="0" fontAlgn="base" hangingPunct="0">
-              <a:lnSpc>
-                <a:spcPct val="100000"/>
-              </a:lnSpc>
-              <a:spcBef>
-                <a:spcPts val="300"/>
-              </a:spcBef>
-              <a:spcAft>
-                <a:spcPct val="0"/>
-              </a:spcAft>
-              <a:buNone/>
-            </a:pPr>
-            <a:endParaRPr kumimoji="0" lang="ru-RU" altLang="ru-RU" sz="2100" b="0" i="0" u="none" strike="noStrike" cap="none" normalizeH="0" baseline="0" dirty="0" smtClean="0">
-              <a:ln>
-                <a:noFill/>
-              </a:ln>
-              <a:solidFill>
-                <a:schemeClr val="tx1"/>
-              </a:solidFill>
-              <a:effectLst/>
-            </a:endParaRPr>
-          </a:p>
-          <a:p>
-            <a:endParaRPr lang="ru-RU" sz="2100" dirty="0"/>
-          </a:p>
-        </p:txBody>
-      </p:sp>
-    </p:spTree>
-    <p:extLst>
-      <p:ext uri="{BB962C8B-B14F-4D97-AF65-F5344CB8AC3E}">
-        <p14:creationId xmlns:p14="http://schemas.microsoft.com/office/powerpoint/2010/main" val="628570510"/>
-      </p:ext>
-    </p:extLst>
-  </p:cSld>
-  <p:clrMapOvr>
-    <a:masterClrMapping/>
-  </p:clrMapOvr>
-  <p:timing>
-    <p:tnLst>
-      <p:par>
-        <p:cTn id="1" dur="indefinite" restart="never" nodeType="tmRoot"/>
-      </p:par>
-    </p:tnLst>
-  </p:timing>
 </p:sld>
 </file>
 

--- a/2025/LEC/05-1 методы машинного обучения для анализа ВР.pptx
+++ b/2025/LEC/05-1 методы машинного обучения для анализа ВР.pptx
@@ -5,7 +5,7 @@
     <p:sldMasterId id="2147483648" r:id="rId1"/>
   </p:sldMasterIdLst>
   <p:notesMasterIdLst>
-    <p:notesMasterId r:id="rId19"/>
+    <p:notesMasterId r:id="rId21"/>
   </p:notesMasterIdLst>
   <p:sldIdLst>
     <p:sldId id="256" r:id="rId2"/>
@@ -24,7 +24,9 @@
     <p:sldId id="266" r:id="rId15"/>
     <p:sldId id="271" r:id="rId16"/>
     <p:sldId id="272" r:id="rId17"/>
-    <p:sldId id="273" r:id="rId18"/>
+    <p:sldId id="279" r:id="rId18"/>
+    <p:sldId id="273" r:id="rId19"/>
+    <p:sldId id="277" r:id="rId20"/>
   </p:sldIdLst>
   <p:sldSz cx="12192000" cy="6858000"/>
   <p:notesSz cx="6858000" cy="9144000"/>
@@ -239,7 +241,7 @@
           <a:p>
             <a:fld id="{803A9DE4-6CFD-4732-953B-EF950A6B3001}" type="datetimeFigureOut">
               <a:rPr lang="ru-RU" smtClean="0"/>
-              <a:t>08.08.2025</a:t>
+              <a:t>10.08.2025</a:t>
             </a:fld>
             <a:endParaRPr lang="ru-RU"/>
           </a:p>
@@ -550,6 +552,164 @@
           <a:bodyPr/>
           <a:lstStyle/>
           <a:p>
+            <a:pPr>
+              <a:lnSpc>
+                <a:spcPct val="120000"/>
+              </a:lnSpc>
+              <a:spcBef>
+                <a:spcPts val="0"/>
+              </a:spcBef>
+            </a:pPr>
+            <a:r>
+              <a:rPr lang="ru-RU" altLang="ru-RU" sz="2300" b="1" dirty="0"/>
+              <a:t>Эндогенные ф</a:t>
+            </a:r>
+            <a:r>
+              <a:rPr lang="en-US" sz="2300" b="1" dirty="0" err="1"/>
+              <a:t>акторы</a:t>
+            </a:r>
+            <a:r>
+              <a:rPr lang="en-US" sz="2300" dirty="0"/>
+              <a:t>, </a:t>
+            </a:r>
+            <a:r>
+              <a:rPr lang="en-US" sz="2300" dirty="0" err="1"/>
+              <a:t>очевидно</a:t>
+            </a:r>
+            <a:r>
+              <a:rPr lang="en-US" sz="2300" dirty="0"/>
+              <a:t> </a:t>
+            </a:r>
+            <a:r>
+              <a:rPr lang="en-US" sz="2300" dirty="0" err="1"/>
+              <a:t>коррелирующие</a:t>
+            </a:r>
+            <a:r>
+              <a:rPr lang="en-US" sz="2300" dirty="0"/>
+              <a:t> </a:t>
+            </a:r>
+            <a:r>
+              <a:rPr lang="en-US" sz="2300" dirty="0" err="1"/>
+              <a:t>с</a:t>
+            </a:r>
+            <a:r>
+              <a:rPr lang="en-US" sz="2300" dirty="0"/>
+              <a:t> </a:t>
+            </a:r>
+            <a:r>
+              <a:rPr lang="ru-RU" sz="2300" dirty="0"/>
+              <a:t>ВР</a:t>
+            </a:r>
+            <a:r>
+              <a:rPr lang="en-US" sz="2300" dirty="0"/>
+              <a:t>. </a:t>
+            </a:r>
+            <a:endParaRPr lang="ru-RU" sz="2300" dirty="0"/>
+          </a:p>
+          <a:p>
+            <a:pPr lvl="1">
+              <a:lnSpc>
+                <a:spcPct val="120000"/>
+              </a:lnSpc>
+              <a:spcBef>
+                <a:spcPts val="0"/>
+              </a:spcBef>
+            </a:pPr>
+            <a:r>
+              <a:rPr lang="ru-RU" sz="2300" dirty="0"/>
+              <a:t>Лаги ВР, преобразованные значения, значения автокорреляций, тренда или сезонности, и </a:t>
+            </a:r>
+            <a:r>
+              <a:rPr lang="ru-RU" sz="2300" dirty="0" err="1"/>
+              <a:t>тд</a:t>
+            </a:r>
+            <a:endParaRPr lang="ru-RU" sz="2300" dirty="0"/>
+          </a:p>
+          <a:p>
+            <a:endParaRPr lang="ru-RU" dirty="0"/>
+          </a:p>
+        </p:txBody>
+      </p:sp>
+      <p:sp>
+        <p:nvSpPr>
+          <p:cNvPr id="4" name="Номер слайда 3"/>
+          <p:cNvSpPr>
+            <a:spLocks noGrp="1"/>
+          </p:cNvSpPr>
+          <p:nvPr>
+            <p:ph type="sldNum" sz="quarter" idx="5"/>
+          </p:nvPr>
+        </p:nvSpPr>
+        <p:spPr/>
+        <p:txBody>
+          <a:bodyPr/>
+          <a:lstStyle/>
+          <a:p>
+            <a:fld id="{26E69999-DA45-44A1-83D2-44E2B03D187B}" type="slidenum">
+              <a:rPr lang="ru-RU" smtClean="0"/>
+              <a:t>14</a:t>
+            </a:fld>
+            <a:endParaRPr lang="ru-RU"/>
+          </a:p>
+        </p:txBody>
+      </p:sp>
+    </p:spTree>
+    <p:extLst>
+      <p:ext uri="{BB962C8B-B14F-4D97-AF65-F5344CB8AC3E}">
+        <p14:creationId xmlns:p14="http://schemas.microsoft.com/office/powerpoint/2010/main" val="3308149847"/>
+      </p:ext>
+    </p:extLst>
+  </p:cSld>
+  <p:clrMapOvr>
+    <a:masterClrMapping/>
+  </p:clrMapOvr>
+</p:notes>
+</file>
+
+<file path=ppt/notesSlides/notesSlide2.xml><?xml version="1.0" encoding="utf-8"?>
+<p:notes xmlns:a="http://schemas.openxmlformats.org/drawingml/2006/main" xmlns:r="http://schemas.openxmlformats.org/officeDocument/2006/relationships" xmlns:p="http://schemas.openxmlformats.org/presentationml/2006/main">
+  <p:cSld>
+    <p:spTree>
+      <p:nvGrpSpPr>
+        <p:cNvPr id="1" name=""/>
+        <p:cNvGrpSpPr/>
+        <p:nvPr/>
+      </p:nvGrpSpPr>
+      <p:grpSpPr>
+        <a:xfrm>
+          <a:off x="0" y="0"/>
+          <a:ext cx="0" cy="0"/>
+          <a:chOff x="0" y="0"/>
+          <a:chExt cx="0" cy="0"/>
+        </a:xfrm>
+      </p:grpSpPr>
+      <p:sp>
+        <p:nvSpPr>
+          <p:cNvPr id="2" name="Образ слайда 1"/>
+          <p:cNvSpPr>
+            <a:spLocks noGrp="1" noRot="1" noChangeAspect="1"/>
+          </p:cNvSpPr>
+          <p:nvPr>
+            <p:ph type="sldImg"/>
+          </p:nvPr>
+        </p:nvSpPr>
+        <p:spPr/>
+      </p:sp>
+      <p:sp>
+        <p:nvSpPr>
+          <p:cNvPr id="3" name="Заметки 2"/>
+          <p:cNvSpPr>
+            <a:spLocks noGrp="1"/>
+          </p:cNvSpPr>
+          <p:nvPr>
+            <p:ph type="body" idx="1"/>
+          </p:nvPr>
+        </p:nvSpPr>
+        <p:spPr/>
+        <p:txBody>
+          <a:bodyPr/>
+          <a:lstStyle/>
+          <a:p>
             <a:r>
               <a:rPr lang="ru-RU" sz="1200" b="1" i="0" kern="1200" dirty="0">
                 <a:solidFill>
@@ -706,6 +866,90 @@
     <p:extLst>
       <p:ext uri="{BB962C8B-B14F-4D97-AF65-F5344CB8AC3E}">
         <p14:creationId xmlns:p14="http://schemas.microsoft.com/office/powerpoint/2010/main" val="1065724184"/>
+      </p:ext>
+    </p:extLst>
+  </p:cSld>
+  <p:clrMapOvr>
+    <a:masterClrMapping/>
+  </p:clrMapOvr>
+</p:notes>
+</file>
+
+<file path=ppt/notesSlides/notesSlide3.xml><?xml version="1.0" encoding="utf-8"?>
+<p:notes xmlns:a="http://schemas.openxmlformats.org/drawingml/2006/main" xmlns:r="http://schemas.openxmlformats.org/officeDocument/2006/relationships" xmlns:p="http://schemas.openxmlformats.org/presentationml/2006/main">
+  <p:cSld>
+    <p:spTree>
+      <p:nvGrpSpPr>
+        <p:cNvPr id="1" name=""/>
+        <p:cNvGrpSpPr/>
+        <p:nvPr/>
+      </p:nvGrpSpPr>
+      <p:grpSpPr>
+        <a:xfrm>
+          <a:off x="0" y="0"/>
+          <a:ext cx="0" cy="0"/>
+          <a:chOff x="0" y="0"/>
+          <a:chExt cx="0" cy="0"/>
+        </a:xfrm>
+      </p:grpSpPr>
+      <p:sp>
+        <p:nvSpPr>
+          <p:cNvPr id="2" name="Образ слайда 1"/>
+          <p:cNvSpPr>
+            <a:spLocks noGrp="1" noRot="1" noChangeAspect="1"/>
+          </p:cNvSpPr>
+          <p:nvPr>
+            <p:ph type="sldImg"/>
+          </p:nvPr>
+        </p:nvSpPr>
+        <p:spPr/>
+      </p:sp>
+      <p:sp>
+        <p:nvSpPr>
+          <p:cNvPr id="3" name="Заметки 2"/>
+          <p:cNvSpPr>
+            <a:spLocks noGrp="1"/>
+          </p:cNvSpPr>
+          <p:nvPr>
+            <p:ph type="body" idx="1"/>
+          </p:nvPr>
+        </p:nvSpPr>
+        <p:spPr/>
+        <p:txBody>
+          <a:bodyPr/>
+          <a:lstStyle/>
+          <a:p>
+            <a:endParaRPr lang="ru-RU" dirty="0"/>
+          </a:p>
+        </p:txBody>
+      </p:sp>
+      <p:sp>
+        <p:nvSpPr>
+          <p:cNvPr id="4" name="Номер слайда 3"/>
+          <p:cNvSpPr>
+            <a:spLocks noGrp="1"/>
+          </p:cNvSpPr>
+          <p:nvPr>
+            <p:ph type="sldNum" sz="quarter" idx="5"/>
+          </p:nvPr>
+        </p:nvSpPr>
+        <p:spPr/>
+        <p:txBody>
+          <a:bodyPr/>
+          <a:lstStyle/>
+          <a:p>
+            <a:fld id="{E5904A68-FE9C-41D3-96AD-A1A68ED6C497}" type="slidenum">
+              <a:rPr lang="ru-RU" smtClean="0"/>
+              <a:t>19</a:t>
+            </a:fld>
+            <a:endParaRPr lang="ru-RU"/>
+          </a:p>
+        </p:txBody>
+      </p:sp>
+    </p:spTree>
+    <p:extLst>
+      <p:ext uri="{BB962C8B-B14F-4D97-AF65-F5344CB8AC3E}">
+        <p14:creationId xmlns:p14="http://schemas.microsoft.com/office/powerpoint/2010/main" val="1383585542"/>
       </p:ext>
     </p:extLst>
   </p:cSld>
@@ -844,7 +1088,7 @@
           <a:p>
             <a:fld id="{43B237C4-111C-4636-B222-D785A341FF5A}" type="datetimeFigureOut">
               <a:rPr lang="ru-RU" smtClean="0"/>
-              <a:t>08.08.2025</a:t>
+              <a:t>10.08.2025</a:t>
             </a:fld>
             <a:endParaRPr lang="ru-RU"/>
           </a:p>
@@ -1012,7 +1256,7 @@
           <a:p>
             <a:fld id="{43B237C4-111C-4636-B222-D785A341FF5A}" type="datetimeFigureOut">
               <a:rPr lang="ru-RU" smtClean="0"/>
-              <a:t>08.08.2025</a:t>
+              <a:t>10.08.2025</a:t>
             </a:fld>
             <a:endParaRPr lang="ru-RU"/>
           </a:p>
@@ -1190,7 +1434,7 @@
           <a:p>
             <a:fld id="{43B237C4-111C-4636-B222-D785A341FF5A}" type="datetimeFigureOut">
               <a:rPr lang="ru-RU" smtClean="0"/>
-              <a:t>08.08.2025</a:t>
+              <a:t>10.08.2025</a:t>
             </a:fld>
             <a:endParaRPr lang="ru-RU"/>
           </a:p>
@@ -1358,7 +1602,7 @@
           <a:p>
             <a:fld id="{43B237C4-111C-4636-B222-D785A341FF5A}" type="datetimeFigureOut">
               <a:rPr lang="ru-RU" smtClean="0"/>
-              <a:t>08.08.2025</a:t>
+              <a:t>10.08.2025</a:t>
             </a:fld>
             <a:endParaRPr lang="ru-RU"/>
           </a:p>
@@ -1603,7 +1847,7 @@
           <a:p>
             <a:fld id="{43B237C4-111C-4636-B222-D785A341FF5A}" type="datetimeFigureOut">
               <a:rPr lang="ru-RU" smtClean="0"/>
-              <a:t>08.08.2025</a:t>
+              <a:t>10.08.2025</a:t>
             </a:fld>
             <a:endParaRPr lang="ru-RU"/>
           </a:p>
@@ -1832,7 +2076,7 @@
           <a:p>
             <a:fld id="{43B237C4-111C-4636-B222-D785A341FF5A}" type="datetimeFigureOut">
               <a:rPr lang="ru-RU" smtClean="0"/>
-              <a:t>08.08.2025</a:t>
+              <a:t>10.08.2025</a:t>
             </a:fld>
             <a:endParaRPr lang="ru-RU"/>
           </a:p>
@@ -2196,7 +2440,7 @@
           <a:p>
             <a:fld id="{43B237C4-111C-4636-B222-D785A341FF5A}" type="datetimeFigureOut">
               <a:rPr lang="ru-RU" smtClean="0"/>
-              <a:t>08.08.2025</a:t>
+              <a:t>10.08.2025</a:t>
             </a:fld>
             <a:endParaRPr lang="ru-RU"/>
           </a:p>
@@ -2313,7 +2557,7 @@
           <a:p>
             <a:fld id="{43B237C4-111C-4636-B222-D785A341FF5A}" type="datetimeFigureOut">
               <a:rPr lang="ru-RU" smtClean="0"/>
-              <a:t>08.08.2025</a:t>
+              <a:t>10.08.2025</a:t>
             </a:fld>
             <a:endParaRPr lang="ru-RU"/>
           </a:p>
@@ -2408,7 +2652,7 @@
           <a:p>
             <a:fld id="{43B237C4-111C-4636-B222-D785A341FF5A}" type="datetimeFigureOut">
               <a:rPr lang="ru-RU" smtClean="0"/>
-              <a:t>08.08.2025</a:t>
+              <a:t>10.08.2025</a:t>
             </a:fld>
             <a:endParaRPr lang="ru-RU"/>
           </a:p>
@@ -2683,7 +2927,7 @@
           <a:p>
             <a:fld id="{43B237C4-111C-4636-B222-D785A341FF5A}" type="datetimeFigureOut">
               <a:rPr lang="ru-RU" smtClean="0"/>
-              <a:t>08.08.2025</a:t>
+              <a:t>10.08.2025</a:t>
             </a:fld>
             <a:endParaRPr lang="ru-RU"/>
           </a:p>
@@ -2935,7 +3179,7 @@
           <a:p>
             <a:fld id="{43B237C4-111C-4636-B222-D785A341FF5A}" type="datetimeFigureOut">
               <a:rPr lang="ru-RU" smtClean="0"/>
-              <a:t>08.08.2025</a:t>
+              <a:t>10.08.2025</a:t>
             </a:fld>
             <a:endParaRPr lang="ru-RU"/>
           </a:p>
@@ -3146,7 +3390,7 @@
           <a:p>
             <a:fld id="{43B237C4-111C-4636-B222-D785A341FF5A}" type="datetimeFigureOut">
               <a:rPr lang="ru-RU" smtClean="0"/>
-              <a:t>08.08.2025</a:t>
+              <a:t>10.08.2025</a:t>
             </a:fld>
             <a:endParaRPr lang="ru-RU"/>
           </a:p>
@@ -3667,7 +3911,7 @@
         </p:spPr>
         <p:txBody>
           <a:bodyPr>
-            <a:normAutofit fontScale="92500" lnSpcReduction="20000"/>
+            <a:normAutofit fontScale="85000" lnSpcReduction="20000"/>
           </a:bodyPr>
           <a:lstStyle/>
           <a:p>
@@ -3694,7 +3938,56 @@
           <a:p>
             <a:r>
               <a:rPr lang="ru-RU" dirty="0"/>
-              <a:t>Преобразования метки (степенное, разность, кодирование и </a:t>
+              <a:t>Оконные статистики лагов</a:t>
+            </a:r>
+            <a:r>
+              <a:rPr lang="en-US" dirty="0"/>
+              <a:t>:</a:t>
+            </a:r>
+          </a:p>
+          <a:p>
+            <a:pPr lvl="1"/>
+            <a:r>
+              <a:rPr lang="en-US" dirty="0"/>
+              <a:t>Max/min value of series in a window</a:t>
+            </a:r>
+          </a:p>
+          <a:p>
+            <a:pPr lvl="1"/>
+            <a:r>
+              <a:rPr lang="en-US" dirty="0"/>
+              <a:t>Average/median value in a window</a:t>
+            </a:r>
+          </a:p>
+          <a:p>
+            <a:pPr lvl="1"/>
+            <a:r>
+              <a:rPr lang="en-US" dirty="0"/>
+              <a:t>Window variance</a:t>
+            </a:r>
+          </a:p>
+          <a:p>
+            <a:pPr lvl="1"/>
+            <a:r>
+              <a:rPr lang="en-US" dirty="0"/>
+              <a:t>etc.</a:t>
+            </a:r>
+          </a:p>
+          <a:p>
+            <a:r>
+              <a:rPr lang="ru-RU" dirty="0"/>
+              <a:t>Даты и время</a:t>
+            </a:r>
+            <a:r>
+              <a:rPr lang="en-US" dirty="0"/>
+              <a:t>:</a:t>
+            </a:r>
+          </a:p>
+          <a:p>
+            <a:pPr lvl="1"/>
+            <a:r>
+              <a:rPr lang="ru-RU" dirty="0"/>
+              <a:t>Порядковые (категориальные) данные: Число, день недели, месяц, квартал и </a:t>
             </a:r>
             <a:r>
               <a:rPr lang="ru-RU" dirty="0" err="1"/>
@@ -3702,63 +3995,47 @@
             </a:r>
             <a:r>
               <a:rPr lang="ru-RU" dirty="0"/>
-              <a:t>)</a:t>
+              <a:t>,</a:t>
             </a:r>
             <a:endParaRPr lang="en-US" dirty="0"/>
           </a:p>
           <a:p>
+            <a:pPr lvl="1"/>
             <a:r>
               <a:rPr lang="ru-RU" dirty="0"/>
-              <a:t>Оконные статистики</a:t>
+              <a:t>Бинарные (дискретные): </a:t>
             </a:r>
             <a:r>
               <a:rPr lang="en-US" dirty="0"/>
-              <a:t>:</a:t>
-            </a:r>
-          </a:p>
-          <a:p>
-            <a:pPr lvl="1"/>
+              <a:t>Is this day a holiday? Maybe there is a special event? </a:t>
+            </a:r>
+            <a:endParaRPr lang="ru-RU" dirty="0"/>
+          </a:p>
+          <a:p>
+            <a:r>
+              <a:rPr lang="ru-RU" dirty="0"/>
+              <a:t>Экзогенные факторы, объясняющие (в домене) целевую переменную</a:t>
+            </a:r>
+          </a:p>
+          <a:p>
+            <a:r>
+              <a:rPr lang="ru-RU" dirty="0"/>
+              <a:t>Результаты, статистики остатков и другие характеристики предсказаний других моделей (напр. </a:t>
+            </a:r>
+            <a:r>
+              <a:rPr lang="ru-RU" dirty="0" err="1"/>
+              <a:t>A</a:t>
+            </a:r>
             <a:r>
               <a:rPr lang="en-US" dirty="0"/>
-              <a:t>Max/min value of series in a window</a:t>
-            </a:r>
-          </a:p>
-          <a:p>
-            <a:pPr lvl="1"/>
-            <a:r>
-              <a:rPr lang="en-US" dirty="0"/>
-              <a:t>Average/median value in a window</a:t>
-            </a:r>
-          </a:p>
-          <a:p>
-            <a:pPr lvl="1"/>
-            <a:r>
-              <a:rPr lang="en-US" dirty="0"/>
-              <a:t>Window variance</a:t>
-            </a:r>
-          </a:p>
-          <a:p>
-            <a:pPr lvl="1"/>
-            <a:r>
-              <a:rPr lang="en-US" dirty="0"/>
-              <a:t>etc.</a:t>
-            </a:r>
+              <a:t>RIMA)</a:t>
+            </a:r>
+            <a:endParaRPr lang="ru-RU" dirty="0"/>
           </a:p>
           <a:p>
             <a:r>
               <a:rPr lang="ru-RU" dirty="0"/>
-              <a:t>Даты и время</a:t>
-            </a:r>
-            <a:r>
-              <a:rPr lang="en-US" dirty="0"/>
-              <a:t>:</a:t>
-            </a:r>
-          </a:p>
-          <a:p>
-            <a:pPr lvl="1"/>
-            <a:r>
-              <a:rPr lang="ru-RU" dirty="0"/>
-              <a:t>Порядковые (категориальные) данные: Число, день недели, месяц, квартал и </a:t>
+              <a:t>Другие признаки: напр. Частотные переменные, значения статистик и </a:t>
             </a:r>
             <a:r>
               <a:rPr lang="ru-RU" dirty="0" err="1"/>
@@ -3767,35 +4044,17 @@
             <a:endParaRPr lang="en-US" dirty="0"/>
           </a:p>
           <a:p>
-            <a:pPr lvl="1"/>
             <a:r>
               <a:rPr lang="ru-RU" dirty="0"/>
-              <a:t>Бинарные (дискретные): </a:t>
-            </a:r>
-            <a:r>
-              <a:rPr lang="en-US" dirty="0"/>
-              <a:t>Is this day a holiday? Maybe there is a special event? </a:t>
-            </a:r>
-            <a:endParaRPr lang="ru-RU" dirty="0"/>
-          </a:p>
-          <a:p>
+              <a:t>Также используют - Преобразования метки (степенное, разность, кодирование и </a:t>
+            </a:r>
+            <a:r>
+              <a:rPr lang="ru-RU" dirty="0" err="1"/>
+              <a:t>тд</a:t>
+            </a:r>
             <a:r>
               <a:rPr lang="ru-RU" dirty="0"/>
-              <a:t>Экзогенные факторы, объясняющие (в домене) целевую переменную</a:t>
-            </a:r>
-          </a:p>
-          <a:p>
-            <a:r>
-              <a:rPr lang="ru-RU" dirty="0"/>
-              <a:t>Результаты, статистики остатков и другие характеристики </a:t>
-            </a:r>
-            <a:r>
-              <a:rPr lang="ru-RU" dirty="0" err="1"/>
-              <a:t>предскзаний</a:t>
-            </a:r>
-            <a:r>
-              <a:rPr lang="ru-RU" dirty="0"/>
-              <a:t> других моделей </a:t>
+              <a:t>)</a:t>
             </a:r>
             <a:endParaRPr lang="en-US" dirty="0"/>
           </a:p>
@@ -3857,6 +4116,66 @@
               <a:rPr lang="ru-RU" sz="1200" dirty="0"/>
               <a:t>https://nixtlaverse.nixtla.io/mlforecast/docs/getting-started/end_to_end_walkthrough.htm</a:t>
             </a:r>
+          </a:p>
+        </p:txBody>
+      </p:sp>
+      <p:sp>
+        <p:nvSpPr>
+          <p:cNvPr id="7" name="TextBox 6">
+            <a:extLst>
+              <a:ext uri="{FF2B5EF4-FFF2-40B4-BE49-F238E27FC236}">
+                <a16:creationId xmlns:a16="http://schemas.microsoft.com/office/drawing/2014/main" id="{843D709B-8C57-6B5A-961D-91A269E0454F}"/>
+              </a:ext>
+            </a:extLst>
+          </p:cNvPr>
+          <p:cNvSpPr txBox="1"/>
+          <p:nvPr/>
+        </p:nvSpPr>
+        <p:spPr>
+          <a:xfrm>
+            <a:off x="636495" y="6465058"/>
+            <a:ext cx="6235546" cy="276999"/>
+          </a:xfrm>
+          <a:prstGeom prst="rect">
+            <a:avLst/>
+          </a:prstGeom>
+          <a:noFill/>
+        </p:spPr>
+        <p:txBody>
+          <a:bodyPr wrap="square">
+            <a:spAutoFit/>
+          </a:bodyPr>
+          <a:lstStyle/>
+          <a:p>
+            <a:r>
+              <a:rPr lang="ru-RU" sz="1200" dirty="0" err="1"/>
+              <a:t>https</a:t>
+            </a:r>
+            <a:r>
+              <a:rPr lang="ru-RU" sz="1200" dirty="0"/>
+              <a:t>://</a:t>
+            </a:r>
+            <a:r>
+              <a:rPr lang="ru-RU" sz="1200" dirty="0" err="1"/>
+              <a:t>skforecast.org</a:t>
+            </a:r>
+            <a:r>
+              <a:rPr lang="ru-RU" sz="1200" dirty="0"/>
+              <a:t>/0.16.0/</a:t>
+            </a:r>
+            <a:r>
+              <a:rPr lang="ru-RU" sz="1200" dirty="0" err="1"/>
+              <a:t>user_guides</a:t>
+            </a:r>
+            <a:r>
+              <a:rPr lang="ru-RU" sz="1200" dirty="0"/>
+              <a:t>/</a:t>
+            </a:r>
+            <a:r>
+              <a:rPr lang="ru-RU" sz="1200" dirty="0" err="1"/>
+              <a:t>categorical-features</a:t>
+            </a:r>
+            <a:endParaRPr lang="ru-RU" sz="1200" dirty="0"/>
           </a:p>
         </p:txBody>
       </p:sp>
@@ -5146,15 +5465,32 @@
                 </a:solidFill>
                 <a:latin typeface="system-ui"/>
               </a:rPr>
-              <a:t>Экзогенные переменные</a:t>
-            </a:r>
-            <a:r>
-              <a:rPr lang="ru-RU" altLang="ru-RU" dirty="0">
+              <a:t>Экзогенные переменные  (</a:t>
+            </a:r>
+            <a:r>
+              <a:rPr lang="ru-RU" altLang="ru-RU" b="1" dirty="0" err="1">
+                <a:solidFill>
+                  <a:srgbClr val="0D47A1"/>
+                </a:solidFill>
                 <a:latin typeface="system-ui"/>
               </a:rPr>
-              <a:t> </a:t>
-            </a:r>
-            <a:endParaRPr lang="ru-RU" dirty="0"/>
+              <a:t>ковариаты</a:t>
+            </a:r>
+            <a:r>
+              <a:rPr lang="ru-RU" altLang="ru-RU" b="1" dirty="0">
+                <a:solidFill>
+                  <a:srgbClr val="0D47A1"/>
+                </a:solidFill>
+                <a:latin typeface="system-ui"/>
+              </a:rPr>
+              <a:t>)</a:t>
+            </a:r>
+            <a:endParaRPr lang="ru-RU" b="1" dirty="0">
+              <a:solidFill>
+                <a:srgbClr val="0D47A1"/>
+              </a:solidFill>
+              <a:latin typeface="system-ui"/>
+            </a:endParaRPr>
           </a:p>
         </p:txBody>
       </p:sp>
@@ -5176,7 +5512,7 @@
         </p:spPr>
         <p:txBody>
           <a:bodyPr>
-            <a:normAutofit/>
+            <a:normAutofit fontScale="92500"/>
           </a:bodyPr>
           <a:lstStyle/>
           <a:p>
@@ -5189,42 +5525,37 @@
               </a:spcBef>
             </a:pPr>
             <a:r>
-              <a:rPr lang="ru-RU" altLang="ru-RU" sz="2300" b="1" dirty="0"/>
-              <a:t>Эндогенные ф</a:t>
+              <a:rPr lang="ru-RU" sz="2300" b="1" dirty="0"/>
+              <a:t>Э</a:t>
             </a:r>
             <a:r>
               <a:rPr lang="en-US" sz="2300" b="1" dirty="0" err="1"/>
-              <a:t>акторы</a:t>
-            </a:r>
-            <a:r>
-              <a:rPr lang="en-US" sz="2300" dirty="0"/>
+              <a:t>кзогенны</a:t>
+            </a:r>
+            <a:r>
+              <a:rPr lang="ru-RU" sz="2300" b="1" dirty="0"/>
+              <a:t>е факторы (</a:t>
+            </a:r>
+            <a:r>
+              <a:rPr lang="ru-RU" sz="2300" b="1" dirty="0" err="1"/>
+              <a:t>ковариаты</a:t>
+            </a:r>
+            <a:r>
+              <a:rPr lang="ru-RU" sz="2300" b="1" dirty="0"/>
               <a:t>, </a:t>
             </a:r>
             <a:r>
-              <a:rPr lang="en-US" sz="2300" dirty="0" err="1"/>
-              <a:t>очевидно</a:t>
-            </a:r>
-            <a:r>
-              <a:rPr lang="en-US" sz="2300" dirty="0"/>
-              <a:t> </a:t>
-            </a:r>
-            <a:r>
-              <a:rPr lang="en-US" sz="2300" dirty="0" err="1"/>
-              <a:t>коррелирующие</a:t>
-            </a:r>
-            <a:r>
-              <a:rPr lang="en-US" sz="2300" dirty="0"/>
-              <a:t> с </a:t>
+              <a:rPr lang="ru-RU" sz="2300" b="1" dirty="0" err="1"/>
+              <a:t>exdog</a:t>
+            </a:r>
+            <a:r>
+              <a:rPr lang="en-US" sz="2300" b="1" dirty="0"/>
+              <a:t>)</a:t>
             </a:r>
             <a:r>
               <a:rPr lang="ru-RU" sz="2300" dirty="0"/>
-              <a:t>ВР</a:t>
-            </a:r>
-            <a:r>
-              <a:rPr lang="en-US" sz="2300" dirty="0"/>
-              <a:t>. </a:t>
-            </a:r>
-            <a:endParaRPr lang="ru-RU" sz="2300" dirty="0"/>
+              <a:t> – факторы, не имеющие линейной корреляции с ВР, но объясняющие его поведения  </a:t>
+            </a:r>
           </a:p>
           <a:p>
             <a:pPr lvl="1">
@@ -5236,57 +5567,8 @@
               </a:spcBef>
             </a:pPr>
             <a:r>
-              <a:rPr lang="ru-RU" sz="2300" dirty="0"/>
-              <a:t>Лаги ВР, преобразованные значения, значения автокорреляций, тренда или сезонности, и </a:t>
-            </a:r>
-            <a:r>
-              <a:rPr lang="ru-RU" sz="2300" dirty="0" err="1"/>
-              <a:t>тд</a:t>
-            </a:r>
-            <a:endParaRPr lang="ru-RU" sz="2300" dirty="0"/>
-          </a:p>
-          <a:p>
-            <a:pPr>
-              <a:lnSpc>
-                <a:spcPct val="120000"/>
-              </a:lnSpc>
-              <a:spcBef>
-                <a:spcPts val="0"/>
-              </a:spcBef>
-            </a:pPr>
-            <a:r>
-              <a:rPr lang="ru-RU" sz="2300" b="1" dirty="0"/>
-              <a:t>Э</a:t>
-            </a:r>
-            <a:r>
-              <a:rPr lang="en-US" sz="2300" b="1" dirty="0" err="1"/>
-              <a:t>кзогенны</a:t>
-            </a:r>
-            <a:r>
-              <a:rPr lang="ru-RU" sz="2300" b="1" dirty="0"/>
-              <a:t>е факторы</a:t>
-            </a:r>
-            <a:r>
-              <a:rPr lang="ru-RU" sz="2300" dirty="0"/>
-              <a:t> – факторы, не имеющие линейной корреляции с ВР, но объясняющие его поведения  </a:t>
-            </a:r>
-          </a:p>
-          <a:p>
-            <a:pPr lvl="1">
-              <a:lnSpc>
-                <a:spcPct val="120000"/>
-              </a:lnSpc>
-              <a:spcBef>
-                <a:spcPts val="0"/>
-              </a:spcBef>
-            </a:pPr>
-            <a:r>
               <a:rPr lang="ru-RU" altLang="ru-RU" sz="2300" dirty="0"/>
-              <a:t>Прогноз энергопотребления – </a:t>
-            </a:r>
-            <a:r>
-              <a:rPr lang="en-US" altLang="ru-RU" sz="2300" dirty="0" err="1"/>
-              <a:t>exdog</a:t>
+              <a:t>Напр. Прогноз энергопотребления </a:t>
             </a:r>
             <a:r>
               <a:rPr lang="en-US" altLang="ru-RU" sz="2300" dirty="0"/>
@@ -5308,7 +5590,7 @@
               <a:buNone/>
             </a:pPr>
             <a:r>
-              <a:rPr lang="ru-RU" altLang="ru-RU" sz="2400" b="1" dirty="0"/>
+              <a:rPr lang="ru-RU" altLang="ru-RU" sz="2300" b="1" dirty="0"/>
               <a:t>Требования к экзогенным факторам</a:t>
             </a:r>
           </a:p>
@@ -5322,15 +5604,15 @@
               </a:spcBef>
             </a:pPr>
             <a:r>
-              <a:rPr lang="ru-RU" altLang="ru-RU" sz="1900" dirty="0"/>
+              <a:rPr lang="ru-RU" altLang="ru-RU" sz="2300" dirty="0"/>
               <a:t>На практике </a:t>
             </a:r>
             <a:r>
-              <a:rPr lang="ru-RU" altLang="ru-RU" sz="1900" dirty="0" err="1"/>
+              <a:rPr lang="ru-RU" altLang="ru-RU" sz="2300" dirty="0" err="1"/>
               <a:t>экзогенность</a:t>
             </a:r>
             <a:r>
-              <a:rPr lang="ru-RU" altLang="ru-RU" sz="1900" dirty="0"/>
+              <a:rPr lang="ru-RU" altLang="ru-RU" sz="2300" dirty="0"/>
               <a:t> устанавливается экспертом в предметной области!</a:t>
             </a:r>
           </a:p>
@@ -5344,7 +5626,7 @@
               </a:spcBef>
             </a:pPr>
             <a:r>
-              <a:rPr lang="ru-RU" altLang="ru-RU" sz="1900" dirty="0"/>
+              <a:rPr lang="ru-RU" altLang="ru-RU" sz="2300" dirty="0"/>
               <a:t>Экзогенные факторы объясняют ВР – то есть их использование статистически значимо и стабильно улучшает прогноз. В ином случае лучше фактор не использовать.</a:t>
             </a:r>
           </a:p>
@@ -5358,7 +5640,7 @@
               </a:spcBef>
             </a:pPr>
             <a:r>
-              <a:rPr lang="ru-RU" altLang="ru-RU" sz="1900" dirty="0"/>
+              <a:rPr lang="ru-RU" altLang="ru-RU" sz="2300" dirty="0"/>
               <a:t>Экзогенные факторы должны быть «всегда в наличии», не пропадать</a:t>
             </a:r>
           </a:p>
@@ -5372,7 +5654,7 @@
               </a:spcBef>
             </a:pPr>
             <a:r>
-              <a:rPr lang="ru-RU" altLang="ru-RU" sz="1900" dirty="0"/>
+              <a:rPr lang="ru-RU" altLang="ru-RU" sz="2300" dirty="0"/>
               <a:t>Экзогенные факторы не должны приводить к «утечке данных» (созданию ложных корреляций) – они должны не завесить от ВР</a:t>
             </a:r>
           </a:p>
@@ -5386,10 +5668,95 @@
               </a:spcBef>
             </a:pPr>
             <a:r>
-              <a:rPr lang="ru-RU" altLang="ru-RU" sz="1900" dirty="0"/>
+              <a:rPr lang="ru-RU" altLang="ru-RU" sz="2300" dirty="0"/>
               <a:t>Для многомерных ВР экзогенные факторы могут быть локальными или глобальными – то есть общей информацией между ВР</a:t>
             </a:r>
-            <a:endParaRPr lang="en-US" altLang="ru-RU" sz="1900" dirty="0"/>
+          </a:p>
+          <a:p>
+            <a:pPr marL="914400" lvl="2" indent="0" eaLnBrk="0" fontAlgn="base" hangingPunct="0">
+              <a:lnSpc>
+                <a:spcPct val="100000"/>
+              </a:lnSpc>
+              <a:spcBef>
+                <a:spcPts val="200"/>
+              </a:spcBef>
+              <a:buNone/>
+            </a:pPr>
+            <a:endParaRPr lang="ru-RU" altLang="ru-RU" sz="2300" dirty="0"/>
+          </a:p>
+          <a:p>
+            <a:pPr>
+              <a:lnSpc>
+                <a:spcPct val="120000"/>
+              </a:lnSpc>
+              <a:spcBef>
+                <a:spcPts val="0"/>
+              </a:spcBef>
+            </a:pPr>
+            <a:r>
+              <a:rPr lang="ru-RU" altLang="ru-RU" sz="2300" b="1" i="1" dirty="0"/>
+              <a:t>Эндогенные ф</a:t>
+            </a:r>
+            <a:r>
+              <a:rPr lang="en-US" sz="2300" b="1" i="1" dirty="0" err="1"/>
+              <a:t>акторы</a:t>
+            </a:r>
+            <a:r>
+              <a:rPr lang="en-US" sz="2300" i="1" dirty="0"/>
+              <a:t>, </a:t>
+            </a:r>
+            <a:r>
+              <a:rPr lang="en-US" sz="2300" i="1" dirty="0" err="1"/>
+              <a:t>очевидно</a:t>
+            </a:r>
+            <a:r>
+              <a:rPr lang="en-US" sz="2300" i="1" dirty="0"/>
+              <a:t> </a:t>
+            </a:r>
+            <a:r>
+              <a:rPr lang="en-US" sz="2300" i="1" dirty="0" err="1"/>
+              <a:t>коррелирующие</a:t>
+            </a:r>
+            <a:r>
+              <a:rPr lang="en-US" sz="2300" i="1" dirty="0"/>
+              <a:t> </a:t>
+            </a:r>
+            <a:r>
+              <a:rPr lang="en-US" sz="2300" i="1" dirty="0" err="1"/>
+              <a:t>с</a:t>
+            </a:r>
+            <a:r>
+              <a:rPr lang="en-US" sz="2300" i="1" dirty="0"/>
+              <a:t> </a:t>
+            </a:r>
+            <a:r>
+              <a:rPr lang="ru-RU" sz="2300" i="1" dirty="0"/>
+              <a:t>ВР</a:t>
+            </a:r>
+            <a:r>
+              <a:rPr lang="en-US" sz="2300" i="1" dirty="0"/>
+              <a:t>. </a:t>
+            </a:r>
+            <a:endParaRPr lang="ru-RU" sz="2300" i="1" dirty="0"/>
+          </a:p>
+          <a:p>
+            <a:pPr lvl="1">
+              <a:lnSpc>
+                <a:spcPct val="120000"/>
+              </a:lnSpc>
+              <a:spcBef>
+                <a:spcPts val="0"/>
+              </a:spcBef>
+            </a:pPr>
+            <a:r>
+              <a:rPr lang="ru-RU" sz="2300" i="1" dirty="0"/>
+              <a:t>Лаги ВР, преобразованные значения, значения автокорреляций, тренда или сезонности, и </a:t>
+            </a:r>
+            <a:r>
+              <a:rPr lang="ru-RU" sz="2300" i="1" dirty="0" err="1"/>
+              <a:t>тд</a:t>
+            </a:r>
+            <a:endParaRPr lang="ru-RU" sz="2300" i="1" dirty="0"/>
           </a:p>
         </p:txBody>
       </p:sp>
@@ -6098,6 +6465,649 @@
   <p:cSld>
     <p:spTree>
       <p:nvGrpSpPr>
+        <p:cNvPr id="1" name="">
+          <a:extLst>
+            <a:ext uri="{FF2B5EF4-FFF2-40B4-BE49-F238E27FC236}">
+              <a16:creationId xmlns:a16="http://schemas.microsoft.com/office/drawing/2014/main" id="{F9644804-6C7E-CE44-45D4-FBF70ABCE5C4}"/>
+            </a:ext>
+          </a:extLst>
+        </p:cNvPr>
+        <p:cNvGrpSpPr/>
+        <p:nvPr/>
+      </p:nvGrpSpPr>
+      <p:grpSpPr>
+        <a:xfrm>
+          <a:off x="0" y="0"/>
+          <a:ext cx="0" cy="0"/>
+          <a:chOff x="0" y="0"/>
+          <a:chExt cx="0" cy="0"/>
+        </a:xfrm>
+      </p:grpSpPr>
+      <p:sp>
+        <p:nvSpPr>
+          <p:cNvPr id="2" name="Заголовок 1">
+            <a:extLst>
+              <a:ext uri="{FF2B5EF4-FFF2-40B4-BE49-F238E27FC236}">
+                <a16:creationId xmlns:a16="http://schemas.microsoft.com/office/drawing/2014/main" id="{4E1FF64A-D469-D08D-2015-83ED65E392F7}"/>
+              </a:ext>
+            </a:extLst>
+          </p:cNvPr>
+          <p:cNvSpPr>
+            <a:spLocks noGrp="1"/>
+          </p:cNvSpPr>
+          <p:nvPr>
+            <p:ph type="title"/>
+          </p:nvPr>
+        </p:nvSpPr>
+        <p:spPr>
+          <a:xfrm>
+            <a:off x="228600" y="266721"/>
+            <a:ext cx="11134725" cy="863600"/>
+          </a:xfrm>
+        </p:spPr>
+        <p:txBody>
+          <a:bodyPr>
+            <a:normAutofit fontScale="90000"/>
+          </a:bodyPr>
+          <a:lstStyle/>
+          <a:p>
+            <a:r>
+              <a:rPr lang="ru-RU" dirty="0">
+                <a:solidFill>
+                  <a:srgbClr val="2C2C36"/>
+                </a:solidFill>
+                <a:latin typeface="+mn-lt"/>
+              </a:rPr>
+              <a:t>Замечания. </a:t>
+            </a:r>
+            <a:r>
+              <a:rPr lang="ru-RU" altLang="ru-RU" dirty="0"/>
+              <a:t>Календарные признаки могут быть </a:t>
+            </a:r>
+            <a:endParaRPr lang="ru-RU" dirty="0">
+              <a:latin typeface="+mn-lt"/>
+            </a:endParaRPr>
+          </a:p>
+        </p:txBody>
+      </p:sp>
+      <p:sp>
+        <p:nvSpPr>
+          <p:cNvPr id="3" name="Объект 2">
+            <a:extLst>
+              <a:ext uri="{FF2B5EF4-FFF2-40B4-BE49-F238E27FC236}">
+                <a16:creationId xmlns:a16="http://schemas.microsoft.com/office/drawing/2014/main" id="{05A37EBE-87B0-6443-6F75-09B183A4A9FC}"/>
+              </a:ext>
+            </a:extLst>
+          </p:cNvPr>
+          <p:cNvSpPr>
+            <a:spLocks noGrp="1"/>
+          </p:cNvSpPr>
+          <p:nvPr>
+            <p:ph idx="1"/>
+          </p:nvPr>
+        </p:nvSpPr>
+        <p:spPr>
+          <a:xfrm>
+            <a:off x="304800" y="1130321"/>
+            <a:ext cx="11601450" cy="5318104"/>
+          </a:xfrm>
+        </p:spPr>
+        <p:txBody>
+          <a:bodyPr>
+            <a:normAutofit/>
+          </a:bodyPr>
+          <a:lstStyle/>
+          <a:p>
+            <a:pPr eaLnBrk="0" fontAlgn="base" hangingPunct="0">
+              <a:lnSpc>
+                <a:spcPct val="110000"/>
+              </a:lnSpc>
+              <a:spcBef>
+                <a:spcPts val="300"/>
+              </a:spcBef>
+              <a:spcAft>
+                <a:spcPct val="0"/>
+              </a:spcAft>
+            </a:pPr>
+            <a:r>
+              <a:rPr lang="ru-RU" altLang="ru-RU" sz="2100" dirty="0"/>
+              <a:t>Бинарными (</a:t>
+            </a:r>
+            <a:r>
+              <a:rPr lang="ru-RU" altLang="ru-RU" sz="2100" dirty="0" err="1"/>
+              <a:t>пн</a:t>
+            </a:r>
+            <a:r>
+              <a:rPr lang="ru-RU" altLang="ru-RU" sz="2100" dirty="0"/>
+              <a:t>, вт..), выходной и </a:t>
+            </a:r>
+            <a:r>
+              <a:rPr lang="ru-RU" altLang="ru-RU" sz="2100" dirty="0" err="1"/>
+              <a:t>тд</a:t>
+            </a:r>
+            <a:r>
+              <a:rPr lang="ru-RU" altLang="ru-RU" sz="2100" dirty="0"/>
+              <a:t>.</a:t>
+            </a:r>
+          </a:p>
+          <a:p>
+            <a:pPr lvl="1" eaLnBrk="0" fontAlgn="base" hangingPunct="0">
+              <a:lnSpc>
+                <a:spcPct val="110000"/>
+              </a:lnSpc>
+              <a:spcBef>
+                <a:spcPts val="300"/>
+              </a:spcBef>
+              <a:spcAft>
+                <a:spcPct val="0"/>
+              </a:spcAft>
+            </a:pPr>
+            <a:r>
+              <a:rPr lang="ru-RU" altLang="ru-RU" sz="2100" dirty="0"/>
+              <a:t>Для дней недели используйте 6 признаков. (все 7 – </a:t>
+            </a:r>
+            <a:r>
+              <a:rPr lang="ru-RU" altLang="ru-RU" sz="2100" dirty="0" err="1"/>
+              <a:t>мультиколиниарность</a:t>
+            </a:r>
+            <a:r>
+              <a:rPr lang="ru-RU" altLang="ru-RU" sz="2100" dirty="0"/>
+              <a:t>)  </a:t>
+            </a:r>
+          </a:p>
+          <a:p>
+            <a:pPr eaLnBrk="0" fontAlgn="base" hangingPunct="0">
+              <a:lnSpc>
+                <a:spcPct val="110000"/>
+              </a:lnSpc>
+              <a:spcBef>
+                <a:spcPts val="300"/>
+              </a:spcBef>
+              <a:spcAft>
+                <a:spcPct val="0"/>
+              </a:spcAft>
+            </a:pPr>
+            <a:r>
+              <a:rPr lang="ru-RU" altLang="ru-RU" sz="2100" dirty="0"/>
+              <a:t>Циклическими</a:t>
+            </a:r>
+          </a:p>
+          <a:p>
+            <a:pPr lvl="1" eaLnBrk="0" fontAlgn="base" hangingPunct="0">
+              <a:lnSpc>
+                <a:spcPct val="110000"/>
+              </a:lnSpc>
+              <a:spcBef>
+                <a:spcPts val="300"/>
+              </a:spcBef>
+              <a:spcAft>
+                <a:spcPct val="0"/>
+              </a:spcAft>
+            </a:pPr>
+            <a:r>
+              <a:rPr lang="en" altLang="ru-RU" sz="1800" dirty="0"/>
+              <a:t>hour = </a:t>
+            </a:r>
+            <a:r>
+              <a:rPr lang="en" altLang="ru-RU" sz="1800" dirty="0" err="1"/>
+              <a:t>df.index.hour</a:t>
+            </a:r>
+            <a:endParaRPr lang="en" altLang="ru-RU" sz="1800" dirty="0"/>
+          </a:p>
+          <a:p>
+            <a:pPr lvl="1" eaLnBrk="0" fontAlgn="base" hangingPunct="0">
+              <a:lnSpc>
+                <a:spcPct val="110000"/>
+              </a:lnSpc>
+              <a:spcBef>
+                <a:spcPts val="300"/>
+              </a:spcBef>
+              <a:spcAft>
+                <a:spcPct val="0"/>
+              </a:spcAft>
+            </a:pPr>
+            <a:r>
+              <a:rPr lang="en" altLang="ru-RU" sz="1800" dirty="0" err="1"/>
+              <a:t>df</a:t>
+            </a:r>
+            <a:r>
+              <a:rPr lang="en" altLang="ru-RU" sz="1800" dirty="0"/>
+              <a:t>['</a:t>
+            </a:r>
+            <a:r>
+              <a:rPr lang="en" altLang="ru-RU" sz="1800" dirty="0" err="1"/>
+              <a:t>hour_sin</a:t>
+            </a:r>
+            <a:r>
+              <a:rPr lang="en" altLang="ru-RU" sz="1800" dirty="0"/>
+              <a:t>'] = </a:t>
+            </a:r>
+            <a:r>
+              <a:rPr lang="en" altLang="ru-RU" sz="1800" dirty="0" err="1"/>
+              <a:t>np.sin</a:t>
+            </a:r>
+            <a:r>
+              <a:rPr lang="en" altLang="ru-RU" sz="1800" dirty="0"/>
+              <a:t>(2 * </a:t>
+            </a:r>
+            <a:r>
+              <a:rPr lang="en" altLang="ru-RU" sz="1800" dirty="0" err="1"/>
+              <a:t>np.pi</a:t>
+            </a:r>
+            <a:r>
+              <a:rPr lang="en" altLang="ru-RU" sz="1800" dirty="0"/>
+              <a:t> * hour / 24)</a:t>
+            </a:r>
+          </a:p>
+          <a:p>
+            <a:pPr lvl="1" eaLnBrk="0" fontAlgn="base" hangingPunct="0">
+              <a:lnSpc>
+                <a:spcPct val="110000"/>
+              </a:lnSpc>
+              <a:spcBef>
+                <a:spcPts val="300"/>
+              </a:spcBef>
+              <a:spcAft>
+                <a:spcPct val="0"/>
+              </a:spcAft>
+            </a:pPr>
+            <a:r>
+              <a:rPr lang="en" altLang="ru-RU" sz="1800" dirty="0" err="1"/>
+              <a:t>df</a:t>
+            </a:r>
+            <a:r>
+              <a:rPr lang="en" altLang="ru-RU" sz="1800" dirty="0"/>
+              <a:t>['</a:t>
+            </a:r>
+            <a:r>
+              <a:rPr lang="en" altLang="ru-RU" sz="1800" dirty="0" err="1"/>
+              <a:t>hour_cos</a:t>
+            </a:r>
+            <a:r>
+              <a:rPr lang="en" altLang="ru-RU" sz="1800" dirty="0"/>
+              <a:t>'] = </a:t>
+            </a:r>
+            <a:r>
+              <a:rPr lang="en" altLang="ru-RU" sz="1800" dirty="0" err="1"/>
+              <a:t>np.cos</a:t>
+            </a:r>
+            <a:r>
+              <a:rPr lang="en" altLang="ru-RU" sz="1800" dirty="0"/>
+              <a:t>(2 * </a:t>
+            </a:r>
+            <a:r>
+              <a:rPr lang="en" altLang="ru-RU" sz="1800" dirty="0" err="1"/>
+              <a:t>np.pi</a:t>
+            </a:r>
+            <a:r>
+              <a:rPr lang="en" altLang="ru-RU" sz="1800" dirty="0"/>
+              <a:t> * hour / 24)</a:t>
+            </a:r>
+            <a:endParaRPr lang="ru-RU" altLang="ru-RU" sz="1800" dirty="0"/>
+          </a:p>
+          <a:p>
+            <a:pPr lvl="2" eaLnBrk="0" fontAlgn="base" hangingPunct="0">
+              <a:lnSpc>
+                <a:spcPct val="110000"/>
+              </a:lnSpc>
+              <a:spcBef>
+                <a:spcPts val="300"/>
+              </a:spcBef>
+              <a:spcAft>
+                <a:spcPct val="0"/>
+              </a:spcAft>
+            </a:pPr>
+            <a:r>
+              <a:rPr lang="ru-RU" altLang="ru-RU" sz="1800" dirty="0"/>
+              <a:t>00:00 и 23:00 близки</a:t>
+            </a:r>
+          </a:p>
+          <a:p>
+            <a:pPr lvl="1" eaLnBrk="0" fontAlgn="base" hangingPunct="0">
+              <a:lnSpc>
+                <a:spcPct val="110000"/>
+              </a:lnSpc>
+              <a:spcBef>
+                <a:spcPts val="300"/>
+              </a:spcBef>
+              <a:spcAft>
+                <a:spcPct val="0"/>
+              </a:spcAft>
+            </a:pPr>
+            <a:r>
+              <a:rPr lang="en" altLang="ru-RU" sz="1800" dirty="0" err="1"/>
+              <a:t>df</a:t>
+            </a:r>
+            <a:r>
+              <a:rPr lang="en" altLang="ru-RU" sz="1800" dirty="0"/>
+              <a:t>['</a:t>
+            </a:r>
+            <a:r>
+              <a:rPr lang="en" altLang="ru-RU" sz="1800" dirty="0" err="1"/>
+              <a:t>day_of_year</a:t>
+            </a:r>
+            <a:r>
+              <a:rPr lang="en" altLang="ru-RU" sz="1800" dirty="0"/>
+              <a:t>'] = </a:t>
+            </a:r>
+            <a:r>
+              <a:rPr lang="en" altLang="ru-RU" sz="1800" dirty="0" err="1"/>
+              <a:t>df.index.dayofyear</a:t>
+            </a:r>
+            <a:endParaRPr lang="en" altLang="ru-RU" sz="1800" dirty="0"/>
+          </a:p>
+          <a:p>
+            <a:pPr lvl="1" eaLnBrk="0" fontAlgn="base" hangingPunct="0">
+              <a:lnSpc>
+                <a:spcPct val="110000"/>
+              </a:lnSpc>
+              <a:spcBef>
+                <a:spcPts val="300"/>
+              </a:spcBef>
+              <a:spcAft>
+                <a:spcPct val="0"/>
+              </a:spcAft>
+            </a:pPr>
+            <a:r>
+              <a:rPr lang="en" altLang="ru-RU" sz="1800" dirty="0" err="1"/>
+              <a:t>df</a:t>
+            </a:r>
+            <a:r>
+              <a:rPr lang="en" altLang="ru-RU" sz="1800" dirty="0"/>
+              <a:t>['</a:t>
+            </a:r>
+            <a:r>
+              <a:rPr lang="en" altLang="ru-RU" sz="1800" dirty="0" err="1"/>
+              <a:t>doy_sin</a:t>
+            </a:r>
+            <a:r>
+              <a:rPr lang="en" altLang="ru-RU" sz="1800" dirty="0"/>
+              <a:t>'] = </a:t>
+            </a:r>
+            <a:r>
+              <a:rPr lang="en" altLang="ru-RU" sz="1800" dirty="0" err="1"/>
+              <a:t>np.sin</a:t>
+            </a:r>
+            <a:r>
+              <a:rPr lang="en" altLang="ru-RU" sz="1800" dirty="0"/>
+              <a:t>(2 * </a:t>
+            </a:r>
+            <a:r>
+              <a:rPr lang="en" altLang="ru-RU" sz="1800" dirty="0" err="1"/>
+              <a:t>np.pi</a:t>
+            </a:r>
+            <a:r>
+              <a:rPr lang="en" altLang="ru-RU" sz="1800" dirty="0"/>
+              <a:t> * </a:t>
+            </a:r>
+            <a:r>
+              <a:rPr lang="en" altLang="ru-RU" sz="1800" dirty="0" err="1"/>
+              <a:t>df</a:t>
+            </a:r>
+            <a:r>
+              <a:rPr lang="en" altLang="ru-RU" sz="1800" dirty="0"/>
+              <a:t>['</a:t>
+            </a:r>
+            <a:r>
+              <a:rPr lang="en" altLang="ru-RU" sz="1800" dirty="0" err="1"/>
+              <a:t>day_of_year</a:t>
+            </a:r>
+            <a:r>
+              <a:rPr lang="en" altLang="ru-RU" sz="1800" dirty="0"/>
+              <a:t>'] / 365.25)</a:t>
+            </a:r>
+          </a:p>
+          <a:p>
+            <a:pPr lvl="1" eaLnBrk="0" fontAlgn="base" hangingPunct="0">
+              <a:lnSpc>
+                <a:spcPct val="110000"/>
+              </a:lnSpc>
+              <a:spcBef>
+                <a:spcPts val="300"/>
+              </a:spcBef>
+              <a:spcAft>
+                <a:spcPct val="0"/>
+              </a:spcAft>
+            </a:pPr>
+            <a:r>
+              <a:rPr lang="en" altLang="ru-RU" sz="1800" dirty="0" err="1"/>
+              <a:t>df</a:t>
+            </a:r>
+            <a:r>
+              <a:rPr lang="en" altLang="ru-RU" sz="1800" dirty="0"/>
+              <a:t>['</a:t>
+            </a:r>
+            <a:r>
+              <a:rPr lang="en" altLang="ru-RU" sz="1800" dirty="0" err="1"/>
+              <a:t>doy_cos</a:t>
+            </a:r>
+            <a:r>
+              <a:rPr lang="en" altLang="ru-RU" sz="1800" dirty="0"/>
+              <a:t>'] = </a:t>
+            </a:r>
+            <a:r>
+              <a:rPr lang="en" altLang="ru-RU" sz="1800" dirty="0" err="1"/>
+              <a:t>np.cos</a:t>
+            </a:r>
+            <a:r>
+              <a:rPr lang="en" altLang="ru-RU" sz="1800" dirty="0"/>
+              <a:t>(2 * </a:t>
+            </a:r>
+            <a:r>
+              <a:rPr lang="en" altLang="ru-RU" sz="1800" dirty="0" err="1"/>
+              <a:t>np.pi</a:t>
+            </a:r>
+            <a:r>
+              <a:rPr lang="en" altLang="ru-RU" sz="1800" dirty="0"/>
+              <a:t> * </a:t>
+            </a:r>
+            <a:r>
+              <a:rPr lang="en" altLang="ru-RU" sz="1800" dirty="0" err="1"/>
+              <a:t>df</a:t>
+            </a:r>
+            <a:r>
+              <a:rPr lang="en" altLang="ru-RU" sz="1800" dirty="0"/>
+              <a:t>['</a:t>
+            </a:r>
+            <a:r>
+              <a:rPr lang="en" altLang="ru-RU" sz="1800" dirty="0" err="1"/>
+              <a:t>day_of_year</a:t>
+            </a:r>
+            <a:r>
+              <a:rPr lang="en" altLang="ru-RU" sz="1800" dirty="0"/>
+              <a:t>'] / 365.25)</a:t>
+            </a:r>
+            <a:endParaRPr lang="ru-RU" altLang="ru-RU" sz="1800" dirty="0"/>
+          </a:p>
+          <a:p>
+            <a:pPr lvl="2" eaLnBrk="0" fontAlgn="base" hangingPunct="0">
+              <a:lnSpc>
+                <a:spcPct val="110000"/>
+              </a:lnSpc>
+              <a:spcBef>
+                <a:spcPts val="300"/>
+              </a:spcBef>
+              <a:spcAft>
+                <a:spcPct val="0"/>
+              </a:spcAft>
+            </a:pPr>
+            <a:r>
+              <a:rPr lang="ru-RU" altLang="ru-RU" sz="1400" dirty="0"/>
+              <a:t>Конец года и его начало близки </a:t>
+            </a:r>
+          </a:p>
+          <a:p>
+            <a:pPr eaLnBrk="0" fontAlgn="base" hangingPunct="0">
+              <a:lnSpc>
+                <a:spcPct val="110000"/>
+              </a:lnSpc>
+              <a:spcBef>
+                <a:spcPts val="300"/>
+              </a:spcBef>
+              <a:spcAft>
+                <a:spcPct val="0"/>
+              </a:spcAft>
+            </a:pPr>
+            <a:r>
+              <a:rPr lang="en" altLang="ru-RU" sz="2100" dirty="0"/>
+              <a:t>T</a:t>
+            </a:r>
+            <a:r>
+              <a:rPr lang="ru-RU" altLang="ru-RU" sz="2100" dirty="0" err="1"/>
+              <a:t>ar</a:t>
+            </a:r>
+            <a:r>
+              <a:rPr lang="en-US" altLang="ru-RU" sz="2100" dirty="0"/>
+              <a:t>get-</a:t>
+            </a:r>
+            <a:r>
+              <a:rPr lang="ru-RU" altLang="ru-RU" sz="2100" dirty="0"/>
+              <a:t>кодированными (среднее по каждому дню недели, напр. Если в выходные продаже выше чем в будни) или кодирование продолжительностью солнечного дня</a:t>
+            </a:r>
+          </a:p>
+          <a:p>
+            <a:endParaRPr lang="ru-RU" dirty="0"/>
+          </a:p>
+        </p:txBody>
+      </p:sp>
+      <p:sp>
+        <p:nvSpPr>
+          <p:cNvPr id="5" name="TextBox 4">
+            <a:extLst>
+              <a:ext uri="{FF2B5EF4-FFF2-40B4-BE49-F238E27FC236}">
+                <a16:creationId xmlns:a16="http://schemas.microsoft.com/office/drawing/2014/main" id="{72EE6C6A-398D-C8E1-CDCF-4806F7BE91C9}"/>
+              </a:ext>
+            </a:extLst>
+          </p:cNvPr>
+          <p:cNvSpPr txBox="1"/>
+          <p:nvPr/>
+        </p:nvSpPr>
+        <p:spPr>
+          <a:xfrm>
+            <a:off x="85380" y="6437390"/>
+            <a:ext cx="6097836" cy="307777"/>
+          </a:xfrm>
+          <a:prstGeom prst="rect">
+            <a:avLst/>
+          </a:prstGeom>
+          <a:noFill/>
+        </p:spPr>
+        <p:txBody>
+          <a:bodyPr wrap="square">
+            <a:spAutoFit/>
+          </a:bodyPr>
+          <a:lstStyle/>
+          <a:p>
+            <a:r>
+              <a:rPr lang="ru-RU" sz="1400" dirty="0" err="1"/>
+              <a:t>https</a:t>
+            </a:r>
+            <a:r>
+              <a:rPr lang="ru-RU" sz="1400" dirty="0"/>
+              <a:t>://</a:t>
+            </a:r>
+            <a:r>
+              <a:rPr lang="ru-RU" sz="1400" dirty="0" err="1"/>
+              <a:t>skforecast.org</a:t>
+            </a:r>
+            <a:r>
+              <a:rPr lang="ru-RU" sz="1400" dirty="0"/>
+              <a:t>/0.16.0/</a:t>
+            </a:r>
+            <a:r>
+              <a:rPr lang="ru-RU" sz="1400" dirty="0" err="1"/>
+              <a:t>user_guides</a:t>
+            </a:r>
+            <a:r>
+              <a:rPr lang="ru-RU" sz="1400" dirty="0"/>
+              <a:t>/</a:t>
+            </a:r>
+            <a:r>
+              <a:rPr lang="ru-RU" sz="1400" dirty="0" err="1"/>
+              <a:t>categorical-features</a:t>
+            </a:r>
+            <a:endParaRPr lang="ru-RU" sz="1400" dirty="0"/>
+          </a:p>
+        </p:txBody>
+      </p:sp>
+      <p:sp>
+        <p:nvSpPr>
+          <p:cNvPr id="7" name="TextBox 6">
+            <a:extLst>
+              <a:ext uri="{FF2B5EF4-FFF2-40B4-BE49-F238E27FC236}">
+                <a16:creationId xmlns:a16="http://schemas.microsoft.com/office/drawing/2014/main" id="{ED7BF83A-940E-92D6-75FD-A5107C98A20B}"/>
+              </a:ext>
+            </a:extLst>
+          </p:cNvPr>
+          <p:cNvSpPr txBox="1"/>
+          <p:nvPr/>
+        </p:nvSpPr>
+        <p:spPr>
+          <a:xfrm>
+            <a:off x="5265489" y="6406612"/>
+            <a:ext cx="6097836" cy="369332"/>
+          </a:xfrm>
+          <a:prstGeom prst="rect">
+            <a:avLst/>
+          </a:prstGeom>
+          <a:noFill/>
+        </p:spPr>
+        <p:txBody>
+          <a:bodyPr wrap="square">
+            <a:spAutoFit/>
+          </a:bodyPr>
+          <a:lstStyle/>
+          <a:p>
+            <a:r>
+              <a:rPr lang="ru-RU" dirty="0" err="1"/>
+              <a:t>https</a:t>
+            </a:r>
+            <a:r>
+              <a:rPr lang="ru-RU" dirty="0"/>
+              <a:t>://</a:t>
+            </a:r>
+            <a:r>
+              <a:rPr lang="ru-RU" dirty="0" err="1"/>
+              <a:t>skforecast.org</a:t>
+            </a:r>
+            <a:r>
+              <a:rPr lang="ru-RU" dirty="0"/>
+              <a:t>/0.16.0/</a:t>
+            </a:r>
+            <a:r>
+              <a:rPr lang="ru-RU" dirty="0" err="1"/>
+              <a:t>user_guides</a:t>
+            </a:r>
+            <a:r>
+              <a:rPr lang="ru-RU" dirty="0"/>
+              <a:t>/</a:t>
+            </a:r>
+            <a:r>
+              <a:rPr lang="ru-RU" dirty="0" err="1"/>
+              <a:t>calendar-features</a:t>
+            </a:r>
+            <a:endParaRPr lang="ru-RU" dirty="0"/>
+          </a:p>
+        </p:txBody>
+      </p:sp>
+    </p:spTree>
+    <p:extLst>
+      <p:ext uri="{BB962C8B-B14F-4D97-AF65-F5344CB8AC3E}">
+        <p14:creationId xmlns:p14="http://schemas.microsoft.com/office/powerpoint/2010/main" val="2681255471"/>
+      </p:ext>
+    </p:extLst>
+  </p:cSld>
+  <p:clrMapOvr>
+    <a:masterClrMapping/>
+  </p:clrMapOvr>
+</p:sld>
+</file>
+
+<file path=ppt/slides/slide18.xml><?xml version="1.0" encoding="utf-8"?>
+<p:sld xmlns:a="http://schemas.openxmlformats.org/drawingml/2006/main" xmlns:r="http://schemas.openxmlformats.org/officeDocument/2006/relationships" xmlns:p="http://schemas.openxmlformats.org/presentationml/2006/main">
+  <p:cSld>
+    <p:spTree>
+      <p:nvGrpSpPr>
         <p:cNvPr id="1" name=""/>
         <p:cNvGrpSpPr/>
         <p:nvPr/>
@@ -6156,14 +7166,14 @@
             <p:ph idx="1"/>
             <p:extLst>
               <p:ext uri="{D42A27DB-BD31-4B8C-83A1-F6EECF244321}">
-                <p14:modId xmlns:p14="http://schemas.microsoft.com/office/powerpoint/2010/main" val="77201736"/>
+                <p14:modId xmlns:p14="http://schemas.microsoft.com/office/powerpoint/2010/main" val="1216354750"/>
               </p:ext>
             </p:extLst>
           </p:nvPr>
         </p:nvGraphicFramePr>
         <p:xfrm>
           <a:off x="421341" y="1290918"/>
-          <a:ext cx="10932459" cy="3977640"/>
+          <a:ext cx="10932459" cy="4876800"/>
         </p:xfrm>
         <a:graphic>
           <a:graphicData uri="http://schemas.openxmlformats.org/drawingml/2006/table">
@@ -6172,14 +7182,14 @@
                 <a:tableStyleId>{5C22544A-7EE6-4342-B048-85BDC9FD1C3A}</a:tableStyleId>
               </a:tblPr>
               <a:tblGrid>
-                <a:gridCol w="2424954">
+                <a:gridCol w="2883719">
                   <a:extLst>
                     <a:ext uri="{9D8B030D-6E8A-4147-A177-3AD203B41FA5}">
                       <a16:colId xmlns:a16="http://schemas.microsoft.com/office/drawing/2014/main" val="3381004655"/>
                     </a:ext>
                   </a:extLst>
                 </a:gridCol>
-                <a:gridCol w="3693459">
+                <a:gridCol w="3234694">
                   <a:extLst>
                     <a:ext uri="{9D8B030D-6E8A-4147-A177-3AD203B41FA5}">
                       <a16:colId xmlns:a16="http://schemas.microsoft.com/office/drawing/2014/main" val="2915955119"/>
@@ -6194,14 +7204,14 @@
                   </a:extLst>
                 </a:gridCol>
               </a:tblGrid>
-              <a:tr h="370840">
+              <a:tr h="326561">
                 <a:tc>
                   <a:txBody>
                     <a:bodyPr/>
                     <a:lstStyle/>
                     <a:p>
                       <a:r>
-                        <a:rPr lang="ru-RU" dirty="0"/>
+                        <a:rPr lang="ru-RU" sz="2000" dirty="0"/>
                         <a:t>Задача</a:t>
                       </a:r>
                     </a:p>
@@ -6214,7 +7224,7 @@
                     <a:lstStyle/>
                     <a:p>
                       <a:r>
-                        <a:rPr lang="ru-RU" dirty="0"/>
+                        <a:rPr lang="ru-RU" sz="2000" dirty="0"/>
                         <a:t>Стат. методы</a:t>
                       </a:r>
                     </a:p>
@@ -6227,18 +7237,18 @@
                     <a:lstStyle/>
                     <a:p>
                       <a:r>
-                        <a:rPr lang="en-US" dirty="0"/>
+                        <a:rPr lang="en-US" sz="2000" dirty="0"/>
                         <a:t>ML</a:t>
                       </a:r>
                       <a:r>
-                        <a:rPr lang="en-US" baseline="0" dirty="0"/>
+                        <a:rPr lang="en-US" sz="2000" baseline="0" dirty="0"/>
                         <a:t> </a:t>
                       </a:r>
                       <a:r>
-                        <a:rPr lang="ru-RU" baseline="0" dirty="0"/>
+                        <a:rPr lang="ru-RU" sz="2000" baseline="0" dirty="0"/>
                         <a:t>методы</a:t>
                       </a:r>
-                      <a:endParaRPr lang="ru-RU" dirty="0"/>
+                      <a:endParaRPr lang="ru-RU" sz="2000" dirty="0"/>
                     </a:p>
                   </a:txBody>
                   <a:tcPr/>
@@ -6249,14 +7259,14 @@
                   </a:ext>
                 </a:extLst>
               </a:tr>
-              <a:tr h="370840">
+              <a:tr h="326561">
                 <a:tc>
                   <a:txBody>
                     <a:bodyPr/>
                     <a:lstStyle/>
                     <a:p>
                       <a:r>
-                        <a:rPr lang="ru-RU" dirty="0"/>
+                        <a:rPr lang="ru-RU" sz="2000" dirty="0"/>
                         <a:t>примеры</a:t>
                       </a:r>
                     </a:p>
@@ -6269,14 +7279,14 @@
                     <a:lstStyle/>
                     <a:p>
                       <a:r>
-                        <a:rPr lang="en-US" dirty="0"/>
+                        <a:rPr lang="en-US" sz="2000" dirty="0"/>
                         <a:t>ARIMA,</a:t>
                       </a:r>
                       <a:r>
-                        <a:rPr lang="en-US" baseline="0" dirty="0"/>
+                        <a:rPr lang="en-US" sz="2000" baseline="0" dirty="0"/>
                         <a:t> ETS, Naïve</a:t>
                       </a:r>
-                      <a:endParaRPr lang="ru-RU" dirty="0"/>
+                      <a:endParaRPr lang="ru-RU" sz="2000" dirty="0"/>
                     </a:p>
                   </a:txBody>
                   <a:tcPr/>
@@ -6287,18 +7297,18 @@
                     <a:lstStyle/>
                     <a:p>
                       <a:r>
-                        <a:rPr lang="en-US" dirty="0" err="1"/>
+                        <a:rPr lang="en-US" sz="2000" dirty="0" err="1"/>
                         <a:t>XGBoost</a:t>
                       </a:r>
                       <a:r>
-                        <a:rPr lang="en-US" dirty="0"/>
+                        <a:rPr lang="en-US" sz="2000" dirty="0"/>
                         <a:t>, </a:t>
                       </a:r>
                       <a:r>
-                        <a:rPr lang="en-US" dirty="0" err="1"/>
+                        <a:rPr lang="en-US" sz="2000" dirty="0" err="1"/>
                         <a:t>LinearReg+Lasso</a:t>
                       </a:r>
-                      <a:endParaRPr lang="ru-RU" dirty="0"/>
+                      <a:endParaRPr lang="ru-RU" sz="2000" dirty="0"/>
                     </a:p>
                   </a:txBody>
                   <a:tcPr/>
@@ -6309,21 +7319,21 @@
                   </a:ext>
                 </a:extLst>
               </a:tr>
-              <a:tr h="370840">
+              <a:tr h="326561">
                 <a:tc>
                   <a:txBody>
                     <a:bodyPr/>
                     <a:lstStyle/>
                     <a:p>
                       <a:r>
-                        <a:rPr lang="ru-RU" dirty="0"/>
+                        <a:rPr lang="ru-RU" sz="2000" dirty="0"/>
                         <a:t>Стационарность</a:t>
                       </a:r>
                       <a:r>
-                        <a:rPr lang="ru-RU" baseline="0" dirty="0"/>
+                        <a:rPr lang="ru-RU" sz="2000" baseline="0" dirty="0"/>
                         <a:t> ВР</a:t>
                       </a:r>
-                      <a:endParaRPr lang="ru-RU" dirty="0"/>
+                      <a:endParaRPr lang="ru-RU" sz="2000" dirty="0"/>
                     </a:p>
                   </a:txBody>
                   <a:tcPr/>
@@ -6334,7 +7344,7 @@
                     <a:lstStyle/>
                     <a:p>
                       <a:r>
-                        <a:rPr lang="ru-RU" dirty="0"/>
+                        <a:rPr lang="ru-RU" sz="2000" dirty="0"/>
                         <a:t>Очень важна</a:t>
                       </a:r>
                     </a:p>
@@ -6347,14 +7357,14 @@
                     <a:lstStyle/>
                     <a:p>
                       <a:r>
-                        <a:rPr lang="ru-RU" dirty="0"/>
+                        <a:rPr lang="ru-RU" sz="2000" dirty="0"/>
                         <a:t>Только</a:t>
                       </a:r>
                       <a:r>
-                        <a:rPr lang="ru-RU" baseline="0" dirty="0"/>
+                        <a:rPr lang="ru-RU" sz="2000" baseline="0" dirty="0"/>
                         <a:t> регулярность</a:t>
                       </a:r>
-                      <a:endParaRPr lang="ru-RU" dirty="0"/>
+                      <a:endParaRPr lang="ru-RU" sz="2000" dirty="0"/>
                     </a:p>
                   </a:txBody>
                   <a:tcPr/>
@@ -6365,14 +7375,14 @@
                   </a:ext>
                 </a:extLst>
               </a:tr>
-              <a:tr h="370840">
+              <a:tr h="326561">
                 <a:tc>
                   <a:txBody>
                     <a:bodyPr/>
                     <a:lstStyle/>
                     <a:p>
                       <a:r>
-                        <a:rPr lang="ru-RU" dirty="0"/>
+                        <a:rPr lang="ru-RU" sz="2000" dirty="0"/>
                         <a:t>Интерпретируемость</a:t>
                       </a:r>
                     </a:p>
@@ -6385,7 +7395,7 @@
                     <a:lstStyle/>
                     <a:p>
                       <a:r>
-                        <a:rPr lang="ru-RU" dirty="0"/>
+                        <a:rPr lang="ru-RU" sz="2000" dirty="0"/>
                         <a:t>Высокая</a:t>
                       </a:r>
                     </a:p>
@@ -6398,7 +7408,7 @@
                     <a:lstStyle/>
                     <a:p>
                       <a:r>
-                        <a:rPr lang="ru-RU" dirty="0"/>
+                        <a:rPr lang="ru-RU" sz="2000" dirty="0"/>
                         <a:t>средняя</a:t>
                       </a:r>
                     </a:p>
@@ -6411,14 +7421,14 @@
                   </a:ext>
                 </a:extLst>
               </a:tr>
-              <a:tr h="370840">
+              <a:tr h="577762">
                 <a:tc>
                   <a:txBody>
                     <a:bodyPr/>
                     <a:lstStyle/>
                     <a:p>
                       <a:r>
-                        <a:rPr lang="ru-RU" dirty="0"/>
+                        <a:rPr lang="ru-RU" sz="2000" dirty="0"/>
                         <a:t>Риск переобучения</a:t>
                       </a:r>
                     </a:p>
@@ -6431,14 +7441,14 @@
                     <a:lstStyle/>
                     <a:p>
                       <a:r>
-                        <a:rPr lang="ru-RU" dirty="0"/>
+                        <a:rPr lang="ru-RU" sz="2000" dirty="0"/>
                         <a:t>Низкий,  при кросс-</a:t>
                       </a:r>
                       <a:r>
-                        <a:rPr lang="ru-RU" dirty="0" err="1"/>
+                        <a:rPr lang="ru-RU" sz="2000" dirty="0" err="1"/>
                         <a:t>валидации</a:t>
                       </a:r>
-                      <a:endParaRPr lang="ru-RU" dirty="0"/>
+                      <a:endParaRPr lang="ru-RU" sz="2000" dirty="0"/>
                     </a:p>
                   </a:txBody>
                   <a:tcPr/>
@@ -6466,7 +7476,7 @@
                         <a:defRPr/>
                       </a:pPr>
                       <a:r>
-                        <a:rPr lang="ru-RU" dirty="0"/>
+                        <a:rPr lang="ru-RU" sz="2000" dirty="0"/>
                         <a:t>средний</a:t>
                       </a:r>
                     </a:p>
@@ -6479,14 +7489,14 @@
                   </a:ext>
                 </a:extLst>
               </a:tr>
-              <a:tr h="370840">
+              <a:tr h="326561">
                 <a:tc>
                   <a:txBody>
                     <a:bodyPr/>
                     <a:lstStyle/>
                     <a:p>
                       <a:r>
-                        <a:rPr lang="ru-RU" dirty="0"/>
+                        <a:rPr lang="ru-RU" sz="2000" dirty="0"/>
                         <a:t>Экзогенные факторы</a:t>
                       </a:r>
                     </a:p>
@@ -6499,14 +7509,14 @@
                     <a:lstStyle/>
                     <a:p>
                       <a:r>
-                        <a:rPr lang="ru-RU" dirty="0"/>
+                        <a:rPr lang="ru-RU" sz="2000" dirty="0"/>
                         <a:t>Только 1</a:t>
                       </a:r>
                       <a:r>
-                        <a:rPr lang="ru-RU" baseline="0" dirty="0"/>
+                        <a:rPr lang="ru-RU" sz="2000" baseline="0" dirty="0"/>
                         <a:t> - 2</a:t>
                       </a:r>
-                      <a:endParaRPr lang="ru-RU" dirty="0"/>
+                      <a:endParaRPr lang="ru-RU" sz="2000" dirty="0"/>
                     </a:p>
                   </a:txBody>
                   <a:tcPr/>
@@ -6517,14 +7527,14 @@
                     <a:lstStyle/>
                     <a:p>
                       <a:r>
-                        <a:rPr lang="ru-RU" dirty="0"/>
+                        <a:rPr lang="ru-RU" sz="2000" dirty="0"/>
                         <a:t>Главное чтобы не было</a:t>
                       </a:r>
                       <a:r>
-                        <a:rPr lang="ru-RU" baseline="0" dirty="0"/>
+                        <a:rPr lang="ru-RU" sz="2000" baseline="0" dirty="0"/>
                         <a:t> утечки </a:t>
                       </a:r>
-                      <a:endParaRPr lang="ru-RU" dirty="0"/>
+                      <a:endParaRPr lang="ru-RU" sz="2000" dirty="0"/>
                     </a:p>
                   </a:txBody>
                   <a:tcPr/>
@@ -6535,14 +7545,14 @@
                   </a:ext>
                 </a:extLst>
               </a:tr>
-              <a:tr h="370840">
+              <a:tr h="577762">
                 <a:tc>
                   <a:txBody>
                     <a:bodyPr/>
                     <a:lstStyle/>
                     <a:p>
                       <a:r>
-                        <a:rPr lang="ru-RU" dirty="0"/>
+                        <a:rPr lang="ru-RU" sz="2000" dirty="0"/>
                         <a:t>Многомерные ВР</a:t>
                       </a:r>
                     </a:p>
@@ -6555,14 +7565,14 @@
                     <a:lstStyle/>
                     <a:p>
                       <a:r>
-                        <a:rPr lang="ru-RU" dirty="0"/>
+                        <a:rPr lang="ru-RU" sz="2000" dirty="0"/>
                         <a:t>Сложно,</a:t>
                       </a:r>
                       <a:r>
-                        <a:rPr lang="ru-RU" baseline="0" dirty="0"/>
+                        <a:rPr lang="ru-RU" sz="2000" baseline="0" dirty="0"/>
                         <a:t> чаще локальные модели</a:t>
                       </a:r>
-                      <a:endParaRPr lang="ru-RU" dirty="0"/>
+                      <a:endParaRPr lang="ru-RU" sz="2000" dirty="0"/>
                     </a:p>
                   </a:txBody>
                   <a:tcPr/>
@@ -6573,14 +7583,14 @@
                     <a:lstStyle/>
                     <a:p>
                       <a:r>
-                        <a:rPr lang="ru-RU" dirty="0"/>
+                        <a:rPr lang="ru-RU" sz="2000" dirty="0"/>
                         <a:t>Возможны</a:t>
                       </a:r>
                       <a:r>
-                        <a:rPr lang="ru-RU" baseline="0" dirty="0"/>
+                        <a:rPr lang="ru-RU" sz="2000" baseline="0" dirty="0"/>
                         <a:t> глобальные модели</a:t>
                       </a:r>
-                      <a:endParaRPr lang="ru-RU" dirty="0"/>
+                      <a:endParaRPr lang="ru-RU" sz="2000" dirty="0"/>
                     </a:p>
                   </a:txBody>
                   <a:tcPr/>
@@ -6591,14 +7601,14 @@
                   </a:ext>
                 </a:extLst>
               </a:tr>
-              <a:tr h="370840">
+              <a:tr h="326561">
                 <a:tc>
                   <a:txBody>
                     <a:bodyPr/>
                     <a:lstStyle/>
                     <a:p>
                       <a:r>
-                        <a:rPr lang="ru-RU" dirty="0"/>
+                        <a:rPr lang="ru-RU" sz="2000" dirty="0"/>
                         <a:t>Иерархические ВР</a:t>
                       </a:r>
                     </a:p>
@@ -6611,7 +7621,7 @@
                     <a:lstStyle/>
                     <a:p>
                       <a:r>
-                        <a:rPr lang="ru-RU" dirty="0"/>
+                        <a:rPr lang="ru-RU" sz="2000" dirty="0"/>
                         <a:t>Сложно учесть</a:t>
                       </a:r>
                     </a:p>
@@ -6624,7 +7634,7 @@
                     <a:lstStyle/>
                     <a:p>
                       <a:r>
-                        <a:rPr lang="ru-RU" dirty="0"/>
+                        <a:rPr lang="ru-RU" sz="2000" dirty="0"/>
                         <a:t>да</a:t>
                       </a:r>
                     </a:p>
@@ -6637,14 +7647,14 @@
                   </a:ext>
                 </a:extLst>
               </a:tr>
-              <a:tr h="370840">
+              <a:tr h="326561">
                 <a:tc>
                   <a:txBody>
                     <a:bodyPr/>
                     <a:lstStyle/>
                     <a:p>
                       <a:r>
-                        <a:rPr lang="ru-RU" dirty="0"/>
+                        <a:rPr lang="ru-RU" sz="2000" dirty="0"/>
                         <a:t>Горизонт прогноза</a:t>
                       </a:r>
                     </a:p>
@@ -6657,7 +7667,7 @@
                     <a:lstStyle/>
                     <a:p>
                       <a:r>
-                        <a:rPr lang="ru-RU" dirty="0"/>
+                        <a:rPr lang="ru-RU" sz="2000" dirty="0"/>
                         <a:t>Небольшой</a:t>
                       </a:r>
                     </a:p>
@@ -6670,7 +7680,7 @@
                     <a:lstStyle/>
                     <a:p>
                       <a:r>
-                        <a:rPr lang="ru-RU" dirty="0"/>
+                        <a:rPr lang="ru-RU" sz="2000" dirty="0"/>
                         <a:t>Средний</a:t>
                       </a:r>
                     </a:p>
@@ -6683,18 +7693,18 @@
                   </a:ext>
                 </a:extLst>
               </a:tr>
-              <a:tr h="370840">
+              <a:tr h="577762">
                 <a:tc>
                   <a:txBody>
                     <a:bodyPr/>
                     <a:lstStyle/>
                     <a:p>
                       <a:r>
-                        <a:rPr lang="ru-RU" dirty="0" err="1"/>
+                        <a:rPr lang="ru-RU" sz="2000" dirty="0" err="1"/>
                         <a:t>Автомтаизация</a:t>
                       </a:r>
                       <a:r>
-                        <a:rPr lang="ru-RU" dirty="0"/>
+                        <a:rPr lang="ru-RU" sz="2000" dirty="0"/>
                         <a:t> обучения</a:t>
                       </a:r>
                     </a:p>
@@ -6707,7 +7717,7 @@
                     <a:lstStyle/>
                     <a:p>
                       <a:r>
-                        <a:rPr lang="ru-RU" dirty="0"/>
+                        <a:rPr lang="ru-RU" sz="2000" dirty="0"/>
                         <a:t>Средняя</a:t>
                       </a:r>
                     </a:p>
@@ -6720,14 +7730,14 @@
                     <a:lstStyle/>
                     <a:p>
                       <a:r>
-                        <a:rPr lang="ru-RU" dirty="0"/>
+                        <a:rPr lang="ru-RU" sz="2000" dirty="0"/>
                         <a:t>Высокая</a:t>
                       </a:r>
                       <a:r>
-                        <a:rPr lang="ru-RU" baseline="0" dirty="0"/>
+                        <a:rPr lang="ru-RU" sz="2000" baseline="0" dirty="0"/>
                         <a:t> </a:t>
                       </a:r>
-                      <a:endParaRPr lang="ru-RU" dirty="0"/>
+                      <a:endParaRPr lang="ru-RU" sz="2000" dirty="0"/>
                     </a:p>
                   </a:txBody>
                   <a:tcPr/>
@@ -6746,6 +7756,938 @@
     <p:extLst>
       <p:ext uri="{BB962C8B-B14F-4D97-AF65-F5344CB8AC3E}">
         <p14:creationId xmlns:p14="http://schemas.microsoft.com/office/powerpoint/2010/main" val="2832351448"/>
+      </p:ext>
+    </p:extLst>
+  </p:cSld>
+  <p:clrMapOvr>
+    <a:masterClrMapping/>
+  </p:clrMapOvr>
+</p:sld>
+</file>
+
+<file path=ppt/slides/slide19.xml><?xml version="1.0" encoding="utf-8"?>
+<p:sld xmlns:a="http://schemas.openxmlformats.org/drawingml/2006/main" xmlns:r="http://schemas.openxmlformats.org/officeDocument/2006/relationships" xmlns:p="http://schemas.openxmlformats.org/presentationml/2006/main">
+  <p:cSld>
+    <p:spTree>
+      <p:nvGrpSpPr>
+        <p:cNvPr id="1" name=""/>
+        <p:cNvGrpSpPr/>
+        <p:nvPr/>
+      </p:nvGrpSpPr>
+      <p:grpSpPr>
+        <a:xfrm>
+          <a:off x="0" y="0"/>
+          <a:ext cx="0" cy="0"/>
+          <a:chOff x="0" y="0"/>
+          <a:chExt cx="0" cy="0"/>
+        </a:xfrm>
+      </p:grpSpPr>
+      <p:sp>
+        <p:nvSpPr>
+          <p:cNvPr id="2" name="Заголовок 1">
+            <a:extLst>
+              <a:ext uri="{FF2B5EF4-FFF2-40B4-BE49-F238E27FC236}">
+                <a16:creationId xmlns:a16="http://schemas.microsoft.com/office/drawing/2014/main" id="{5EDB508A-0C0C-1FDF-642F-9604AF420D61}"/>
+              </a:ext>
+            </a:extLst>
+          </p:cNvPr>
+          <p:cNvSpPr>
+            <a:spLocks noGrp="1"/>
+          </p:cNvSpPr>
+          <p:nvPr>
+            <p:ph type="title"/>
+          </p:nvPr>
+        </p:nvSpPr>
+        <p:spPr>
+          <a:xfrm>
+            <a:off x="467116" y="188856"/>
+            <a:ext cx="11165910" cy="599379"/>
+          </a:xfrm>
+        </p:spPr>
+        <p:txBody>
+          <a:bodyPr>
+            <a:normAutofit fontScale="90000"/>
+          </a:bodyPr>
+          <a:lstStyle/>
+          <a:p>
+            <a:r>
+              <a:rPr lang="ru-RU" dirty="0"/>
+              <a:t>Требования и проблемы подготовки данных</a:t>
+            </a:r>
+          </a:p>
+        </p:txBody>
+      </p:sp>
+      <p:graphicFrame>
+        <p:nvGraphicFramePr>
+          <p:cNvPr id="4" name="Объект 3">
+            <a:extLst>
+              <a:ext uri="{FF2B5EF4-FFF2-40B4-BE49-F238E27FC236}">
+                <a16:creationId xmlns:a16="http://schemas.microsoft.com/office/drawing/2014/main" id="{4C6D77A8-018D-4F69-E0AB-665CC72D36BE}"/>
+              </a:ext>
+            </a:extLst>
+          </p:cNvPr>
+          <p:cNvGraphicFramePr>
+            <a:graphicFrameLocks noGrp="1"/>
+          </p:cNvGraphicFramePr>
+          <p:nvPr>
+            <p:ph idx="1"/>
+            <p:extLst>
+              <p:ext uri="{D42A27DB-BD31-4B8C-83A1-F6EECF244321}">
+                <p14:modId xmlns:p14="http://schemas.microsoft.com/office/powerpoint/2010/main" val="1105262803"/>
+              </p:ext>
+            </p:extLst>
+          </p:nvPr>
+        </p:nvGraphicFramePr>
+        <p:xfrm>
+          <a:off x="233818" y="791584"/>
+          <a:ext cx="11724363" cy="5877560"/>
+        </p:xfrm>
+        <a:graphic>
+          <a:graphicData uri="http://schemas.openxmlformats.org/drawingml/2006/table">
+            <a:tbl>
+              <a:tblPr firstRow="1" bandRow="1">
+                <a:tableStyleId>{5C22544A-7EE6-4342-B048-85BDC9FD1C3A}</a:tableStyleId>
+              </a:tblPr>
+              <a:tblGrid>
+                <a:gridCol w="1993450">
+                  <a:extLst>
+                    <a:ext uri="{9D8B030D-6E8A-4147-A177-3AD203B41FA5}">
+                      <a16:colId xmlns:a16="http://schemas.microsoft.com/office/drawing/2014/main" val="2003674582"/>
+                    </a:ext>
+                  </a:extLst>
+                </a:gridCol>
+                <a:gridCol w="3543055">
+                  <a:extLst>
+                    <a:ext uri="{9D8B030D-6E8A-4147-A177-3AD203B41FA5}">
+                      <a16:colId xmlns:a16="http://schemas.microsoft.com/office/drawing/2014/main" val="3372195085"/>
+                    </a:ext>
+                  </a:extLst>
+                </a:gridCol>
+                <a:gridCol w="6187858">
+                  <a:extLst>
+                    <a:ext uri="{9D8B030D-6E8A-4147-A177-3AD203B41FA5}">
+                      <a16:colId xmlns:a16="http://schemas.microsoft.com/office/drawing/2014/main" val="2406795206"/>
+                    </a:ext>
+                  </a:extLst>
+                </a:gridCol>
+              </a:tblGrid>
+              <a:tr h="241170">
+                <a:tc>
+                  <a:txBody>
+                    <a:bodyPr/>
+                    <a:lstStyle/>
+                    <a:p>
+                      <a:endParaRPr lang="ru-RU" dirty="0"/>
+                    </a:p>
+                  </a:txBody>
+                  <a:tcPr/>
+                </a:tc>
+                <a:tc>
+                  <a:txBody>
+                    <a:bodyPr/>
+                    <a:lstStyle/>
+                    <a:p>
+                      <a:r>
+                        <a:rPr lang="ru-RU" dirty="0"/>
+                        <a:t>Проблемы</a:t>
+                      </a:r>
+                    </a:p>
+                  </a:txBody>
+                  <a:tcPr/>
+                </a:tc>
+                <a:tc>
+                  <a:txBody>
+                    <a:bodyPr/>
+                    <a:lstStyle/>
+                    <a:p>
+                      <a:r>
+                        <a:rPr lang="ru-RU" dirty="0"/>
+                        <a:t>Решения </a:t>
+                      </a:r>
+                    </a:p>
+                  </a:txBody>
+                  <a:tcPr/>
+                </a:tc>
+                <a:extLst>
+                  <a:ext uri="{0D108BD9-81ED-4DB2-BD59-A6C34878D82A}">
+                    <a16:rowId xmlns:a16="http://schemas.microsoft.com/office/drawing/2014/main" val="601287456"/>
+                  </a:ext>
+                </a:extLst>
+              </a:tr>
+              <a:tr h="489185">
+                <a:tc>
+                  <a:txBody>
+                    <a:bodyPr/>
+                    <a:lstStyle/>
+                    <a:p>
+                      <a:r>
+                        <a:rPr lang="ru-RU" sz="2000" dirty="0"/>
+                        <a:t>Заполнение пропусков</a:t>
+                      </a:r>
+                    </a:p>
+                  </a:txBody>
+                  <a:tcPr/>
+                </a:tc>
+                <a:tc>
+                  <a:txBody>
+                    <a:bodyPr/>
+                    <a:lstStyle/>
+                    <a:p>
+                      <a:pPr marL="0" marR="0" lvl="0" indent="0" algn="l" defTabSz="914400" rtl="0" eaLnBrk="1" fontAlgn="auto" latinLnBrk="0" hangingPunct="1">
+                        <a:lnSpc>
+                          <a:spcPct val="100000"/>
+                        </a:lnSpc>
+                        <a:spcBef>
+                          <a:spcPts val="0"/>
+                        </a:spcBef>
+                        <a:spcAft>
+                          <a:spcPts val="0"/>
+                        </a:spcAft>
+                        <a:buClrTx/>
+                        <a:buSzTx/>
+                        <a:buFontTx/>
+                        <a:buNone/>
+                        <a:tabLst/>
+                        <a:defRPr/>
+                      </a:pPr>
+                      <a:r>
+                        <a:rPr lang="ru-RU" sz="2000" dirty="0"/>
+                        <a:t>Пропуски в некоторых рядах или во всех</a:t>
+                      </a:r>
+                    </a:p>
+                  </a:txBody>
+                  <a:tcPr/>
+                </a:tc>
+                <a:tc>
+                  <a:txBody>
+                    <a:bodyPr/>
+                    <a:lstStyle/>
+                    <a:p>
+                      <a:pPr marL="285750" indent="-285750">
+                        <a:spcBef>
+                          <a:spcPts val="200"/>
+                        </a:spcBef>
+                        <a:buFont typeface="Arial" panose="020B0604020202020204" pitchFamily="34" charset="0"/>
+                        <a:buChar char="•"/>
+                      </a:pPr>
+                      <a:r>
+                        <a:rPr lang="ru-RU" sz="2000" dirty="0"/>
+                        <a:t>Интерполяция (линейная, сплайн и </a:t>
+                      </a:r>
+                      <a:r>
+                        <a:rPr lang="ru-RU" sz="2000" dirty="0" err="1"/>
+                        <a:t>тд</a:t>
+                      </a:r>
+                      <a:r>
+                        <a:rPr lang="ru-RU" sz="2000" dirty="0"/>
+                        <a:t>), </a:t>
+                      </a:r>
+                    </a:p>
+                    <a:p>
+                      <a:pPr marL="285750" indent="-285750">
+                        <a:spcBef>
+                          <a:spcPts val="200"/>
+                        </a:spcBef>
+                        <a:buFont typeface="Arial" panose="020B0604020202020204" pitchFamily="34" charset="0"/>
+                        <a:buChar char="•"/>
+                      </a:pPr>
+                      <a:r>
+                        <a:rPr lang="ru-RU" sz="2000" dirty="0"/>
+                        <a:t>скользящее среднее,</a:t>
+                      </a:r>
+                    </a:p>
+                    <a:p>
+                      <a:pPr marL="285750" indent="-285750">
+                        <a:spcBef>
+                          <a:spcPts val="200"/>
+                        </a:spcBef>
+                        <a:buFont typeface="Arial" panose="020B0604020202020204" pitchFamily="34" charset="0"/>
+                        <a:buChar char="•"/>
+                      </a:pPr>
+                      <a:r>
+                        <a:rPr lang="ru-RU" sz="2000" dirty="0"/>
+                        <a:t>Заполнение через ML</a:t>
+                      </a:r>
+                      <a:r>
+                        <a:rPr lang="en-US" sz="2000" dirty="0"/>
+                        <a:t>-</a:t>
+                      </a:r>
+                      <a:r>
+                        <a:rPr lang="ru-RU" sz="2000" dirty="0"/>
+                        <a:t>регрессию</a:t>
+                      </a:r>
+                    </a:p>
+                  </a:txBody>
+                  <a:tcPr/>
+                </a:tc>
+                <a:extLst>
+                  <a:ext uri="{0D108BD9-81ED-4DB2-BD59-A6C34878D82A}">
+                    <a16:rowId xmlns:a16="http://schemas.microsoft.com/office/drawing/2014/main" val="332529232"/>
+                  </a:ext>
+                </a:extLst>
+              </a:tr>
+              <a:tr h="575798">
+                <a:tc>
+                  <a:txBody>
+                    <a:bodyPr/>
+                    <a:lstStyle/>
+                    <a:p>
+                      <a:r>
+                        <a:rPr lang="ru-RU" sz="2000" dirty="0"/>
+                        <a:t>Нормализация</a:t>
+                      </a:r>
+                    </a:p>
+                  </a:txBody>
+                  <a:tcPr/>
+                </a:tc>
+                <a:tc>
+                  <a:txBody>
+                    <a:bodyPr/>
+                    <a:lstStyle/>
+                    <a:p>
+                      <a:r>
+                        <a:rPr lang="ru-RU" sz="2000" dirty="0"/>
+                        <a:t>Для ML алгоритмов все ВР в сопоставимых масштабах</a:t>
+                      </a:r>
+                    </a:p>
+                  </a:txBody>
+                  <a:tcPr/>
+                </a:tc>
+                <a:tc>
+                  <a:txBody>
+                    <a:bodyPr/>
+                    <a:lstStyle/>
+                    <a:p>
+                      <a:pPr marL="285750" indent="-285750">
+                        <a:spcBef>
+                          <a:spcPts val="200"/>
+                        </a:spcBef>
+                        <a:buFont typeface="Arial" panose="020B0604020202020204" pitchFamily="34" charset="0"/>
+                        <a:buChar char="•"/>
+                      </a:pPr>
+                      <a:r>
+                        <a:rPr lang="en" sz="2000" b="0" dirty="0" err="1">
+                          <a:solidFill>
+                            <a:srgbClr val="1D1D20"/>
+                          </a:solidFill>
+                          <a:effectLst/>
+                        </a:rPr>
+                        <a:t>MinMaxScaler</a:t>
+                      </a:r>
+                      <a:r>
+                        <a:rPr lang="ru-RU" sz="2000" b="0" dirty="0">
+                          <a:solidFill>
+                            <a:srgbClr val="1D1D20"/>
+                          </a:solidFill>
+                          <a:effectLst/>
+                        </a:rPr>
+                        <a:t> </a:t>
+                      </a:r>
+                      <a:r>
+                        <a:rPr lang="en" sz="2000" b="0" i="0" kern="1200" dirty="0" err="1">
+                          <a:solidFill>
+                            <a:schemeClr val="dk1"/>
+                          </a:solidFill>
+                          <a:effectLst/>
+                          <a:latin typeface="+mn-lt"/>
+                          <a:ea typeface="+mn-ea"/>
+                          <a:cs typeface="+mn-cs"/>
+                        </a:rPr>
+                        <a:t>StandardScaler</a:t>
+                      </a:r>
+                      <a:r>
+                        <a:rPr lang="ru-RU" sz="2000" b="0" i="0" kern="1200" dirty="0">
+                          <a:solidFill>
+                            <a:schemeClr val="dk1"/>
+                          </a:solidFill>
+                          <a:effectLst/>
+                          <a:latin typeface="+mn-lt"/>
+                          <a:ea typeface="+mn-ea"/>
+                          <a:cs typeface="+mn-cs"/>
+                        </a:rPr>
+                        <a:t> и </a:t>
+                      </a:r>
+                      <a:r>
+                        <a:rPr lang="ru-RU" sz="2000" b="0" i="0" kern="1200" dirty="0" err="1">
+                          <a:solidFill>
+                            <a:schemeClr val="dk1"/>
+                          </a:solidFill>
+                          <a:effectLst/>
+                          <a:latin typeface="+mn-lt"/>
+                          <a:ea typeface="+mn-ea"/>
+                          <a:cs typeface="+mn-cs"/>
+                        </a:rPr>
+                        <a:t>тд</a:t>
+                      </a:r>
+                      <a:r>
+                        <a:rPr lang="ru-RU" sz="2000" b="0" i="0" kern="1200" dirty="0">
+                          <a:solidFill>
+                            <a:schemeClr val="dk1"/>
+                          </a:solidFill>
+                          <a:effectLst/>
+                          <a:latin typeface="+mn-lt"/>
+                          <a:ea typeface="+mn-ea"/>
+                          <a:cs typeface="+mn-cs"/>
+                        </a:rPr>
+                        <a:t> для склонных к нормальному </a:t>
+                      </a:r>
+                      <a:r>
+                        <a:rPr lang="ru-RU" sz="2000" b="0" i="0" kern="1200" dirty="0" err="1">
+                          <a:solidFill>
+                            <a:schemeClr val="dk1"/>
+                          </a:solidFill>
+                          <a:effectLst/>
+                          <a:latin typeface="+mn-lt"/>
+                          <a:ea typeface="+mn-ea"/>
+                          <a:cs typeface="+mn-cs"/>
+                        </a:rPr>
+                        <a:t>распределний</a:t>
+                      </a:r>
+                      <a:endParaRPr lang="ru-RU" sz="2000" b="0" i="0" kern="1200" dirty="0">
+                        <a:solidFill>
+                          <a:schemeClr val="dk1"/>
+                        </a:solidFill>
+                        <a:effectLst/>
+                        <a:latin typeface="+mn-lt"/>
+                        <a:ea typeface="+mn-ea"/>
+                        <a:cs typeface="+mn-cs"/>
+                      </a:endParaRPr>
+                    </a:p>
+                    <a:p>
+                      <a:pPr marL="285750" indent="-285750">
+                        <a:spcBef>
+                          <a:spcPts val="200"/>
+                        </a:spcBef>
+                        <a:buFont typeface="Arial" panose="020B0604020202020204" pitchFamily="34" charset="0"/>
+                        <a:buChar char="•"/>
+                      </a:pPr>
+                      <a:r>
+                        <a:rPr lang="en" sz="2000" b="0" i="0" kern="1200" dirty="0" err="1">
+                          <a:solidFill>
+                            <a:schemeClr val="dk1"/>
+                          </a:solidFill>
+                          <a:effectLst/>
+                          <a:latin typeface="+mn-lt"/>
+                          <a:ea typeface="+mn-ea"/>
+                          <a:cs typeface="+mn-cs"/>
+                        </a:rPr>
+                        <a:t>RobustScaler</a:t>
+                      </a:r>
+                      <a:r>
+                        <a:rPr lang="ru-RU" sz="2000" b="0" i="0" kern="1200" dirty="0">
+                          <a:solidFill>
+                            <a:schemeClr val="dk1"/>
+                          </a:solidFill>
+                          <a:effectLst/>
+                          <a:latin typeface="+mn-lt"/>
+                          <a:ea typeface="+mn-ea"/>
+                          <a:cs typeface="+mn-cs"/>
+                        </a:rPr>
+                        <a:t> </a:t>
+                      </a:r>
+                      <a:r>
+                        <a:rPr lang="en" sz="2000" b="0" i="0" kern="1200" dirty="0" err="1">
+                          <a:solidFill>
+                            <a:schemeClr val="dk1"/>
+                          </a:solidFill>
+                          <a:effectLst/>
+                          <a:latin typeface="+mn-lt"/>
+                          <a:ea typeface="+mn-ea"/>
+                          <a:cs typeface="+mn-cs"/>
+                        </a:rPr>
+                        <a:t>QuantileTransformer</a:t>
+                      </a:r>
+                      <a:r>
+                        <a:rPr lang="ru-RU" sz="2000" b="0" i="0" kern="1200" dirty="0">
+                          <a:solidFill>
+                            <a:schemeClr val="dk1"/>
+                          </a:solidFill>
+                          <a:effectLst/>
+                          <a:latin typeface="+mn-lt"/>
+                          <a:ea typeface="+mn-ea"/>
+                          <a:cs typeface="+mn-cs"/>
+                        </a:rPr>
+                        <a:t> для распределений с выбросами и сильно не </a:t>
+                      </a:r>
+                      <a:r>
+                        <a:rPr lang="ru-RU" sz="2000" b="0" i="0" kern="1200" dirty="0" err="1">
+                          <a:solidFill>
+                            <a:schemeClr val="dk1"/>
+                          </a:solidFill>
+                          <a:effectLst/>
+                          <a:latin typeface="+mn-lt"/>
+                          <a:ea typeface="+mn-ea"/>
+                          <a:cs typeface="+mn-cs"/>
+                        </a:rPr>
+                        <a:t>стац</a:t>
+                      </a:r>
+                      <a:r>
+                        <a:rPr lang="ru-RU" sz="2000" b="0" i="0" kern="1200" dirty="0">
+                          <a:solidFill>
+                            <a:schemeClr val="dk1"/>
+                          </a:solidFill>
+                          <a:effectLst/>
+                          <a:latin typeface="+mn-lt"/>
+                          <a:ea typeface="+mn-ea"/>
+                          <a:cs typeface="+mn-cs"/>
+                        </a:rPr>
+                        <a:t>.</a:t>
+                      </a:r>
+                      <a:endParaRPr lang="ru-RU" sz="2000" dirty="0"/>
+                    </a:p>
+                  </a:txBody>
+                  <a:tcPr/>
+                </a:tc>
+                <a:extLst>
+                  <a:ext uri="{0D108BD9-81ED-4DB2-BD59-A6C34878D82A}">
+                    <a16:rowId xmlns:a16="http://schemas.microsoft.com/office/drawing/2014/main" val="2793548672"/>
+                  </a:ext>
+                </a:extLst>
+              </a:tr>
+              <a:tr h="575798">
+                <a:tc>
+                  <a:txBody>
+                    <a:bodyPr/>
+                    <a:lstStyle/>
+                    <a:p>
+                      <a:r>
+                        <a:rPr lang="ru-RU" sz="2000" dirty="0"/>
+                        <a:t>Проверка на выбросы</a:t>
+                      </a:r>
+                    </a:p>
+                  </a:txBody>
+                  <a:tcPr/>
+                </a:tc>
+                <a:tc>
+                  <a:txBody>
+                    <a:bodyPr/>
+                    <a:lstStyle/>
+                    <a:p>
+                      <a:r>
+                        <a:rPr lang="ru-RU" sz="2000" b="0" i="0" kern="1200" dirty="0">
+                          <a:solidFill>
+                            <a:schemeClr val="dk1"/>
+                          </a:solidFill>
+                          <a:effectLst/>
+                          <a:latin typeface="+mn-lt"/>
+                          <a:ea typeface="+mn-ea"/>
+                          <a:cs typeface="+mn-cs"/>
+                        </a:rPr>
+                        <a:t>Выбросы-  ложные корреляции</a:t>
+                      </a:r>
+                    </a:p>
+                    <a:p>
+                      <a:r>
+                        <a:rPr lang="ru-RU" sz="2000" b="0" i="0" kern="1200" dirty="0">
+                          <a:solidFill>
+                            <a:schemeClr val="dk1"/>
+                          </a:solidFill>
+                          <a:effectLst/>
+                          <a:latin typeface="+mn-lt"/>
+                          <a:ea typeface="+mn-ea"/>
+                          <a:cs typeface="+mn-cs"/>
+                        </a:rPr>
+                        <a:t>Дают смещение результатов</a:t>
+                      </a:r>
+                    </a:p>
+                  </a:txBody>
+                  <a:tcPr/>
+                </a:tc>
+                <a:tc>
+                  <a:txBody>
+                    <a:bodyPr/>
+                    <a:lstStyle/>
+                    <a:p>
+                      <a:pPr marL="285750" indent="-285750">
+                        <a:spcBef>
+                          <a:spcPts val="200"/>
+                        </a:spcBef>
+                        <a:buFont typeface="Arial" panose="020B0604020202020204" pitchFamily="34" charset="0"/>
+                        <a:buChar char="•"/>
+                      </a:pPr>
+                      <a:r>
+                        <a:rPr lang="en" sz="2000" b="0" i="0" kern="1200" dirty="0">
+                          <a:solidFill>
+                            <a:schemeClr val="dk1"/>
+                          </a:solidFill>
+                          <a:effectLst/>
+                          <a:latin typeface="+mn-lt"/>
+                          <a:ea typeface="+mn-ea"/>
+                          <a:cs typeface="+mn-cs"/>
+                        </a:rPr>
+                        <a:t>Z-score (&gt;3</a:t>
+                      </a:r>
+                      <a:r>
+                        <a:rPr lang="el-GR" sz="2000" b="0" i="0" kern="1200" dirty="0">
+                          <a:solidFill>
+                            <a:schemeClr val="dk1"/>
+                          </a:solidFill>
+                          <a:effectLst/>
+                          <a:latin typeface="+mn-lt"/>
+                          <a:ea typeface="+mn-ea"/>
+                          <a:cs typeface="+mn-cs"/>
+                        </a:rPr>
+                        <a:t>σ</a:t>
+                      </a:r>
+                      <a:r>
+                        <a:rPr lang="en" sz="2000" b="0" i="0" kern="1200" dirty="0">
+                          <a:solidFill>
+                            <a:schemeClr val="dk1"/>
+                          </a:solidFill>
+                          <a:effectLst/>
+                          <a:latin typeface="+mn-lt"/>
+                          <a:ea typeface="+mn-ea"/>
+                          <a:cs typeface="+mn-cs"/>
+                        </a:rPr>
+                        <a:t>)</a:t>
+                      </a:r>
+                      <a:r>
+                        <a:rPr lang="ru-RU" sz="2000" b="0" i="0" kern="1200" dirty="0">
+                          <a:solidFill>
+                            <a:schemeClr val="dk1"/>
+                          </a:solidFill>
+                          <a:effectLst/>
+                          <a:latin typeface="+mn-lt"/>
+                          <a:ea typeface="+mn-ea"/>
+                          <a:cs typeface="+mn-cs"/>
+                        </a:rPr>
+                        <a:t>,  </a:t>
+                      </a:r>
+                      <a:r>
+                        <a:rPr lang="en" sz="2000" b="0" i="0" kern="1200" dirty="0">
+                          <a:solidFill>
+                            <a:schemeClr val="dk1"/>
+                          </a:solidFill>
+                          <a:effectLst/>
+                          <a:latin typeface="+mn-lt"/>
+                          <a:ea typeface="+mn-ea"/>
+                          <a:cs typeface="+mn-cs"/>
+                        </a:rPr>
+                        <a:t>IQR (1.5 × IQR)</a:t>
+                      </a:r>
+                    </a:p>
+                    <a:p>
+                      <a:pPr marL="285750" indent="-285750">
+                        <a:spcBef>
+                          <a:spcPts val="200"/>
+                        </a:spcBef>
+                        <a:buFont typeface="Arial" panose="020B0604020202020204" pitchFamily="34" charset="0"/>
+                        <a:buChar char="•"/>
+                      </a:pPr>
+                      <a:r>
+                        <a:rPr lang="ru-RU" sz="2000" b="0" i="0" kern="1200" dirty="0">
+                          <a:solidFill>
+                            <a:schemeClr val="dk1"/>
+                          </a:solidFill>
+                          <a:effectLst/>
+                          <a:latin typeface="+mn-lt"/>
+                          <a:ea typeface="+mn-ea"/>
+                          <a:cs typeface="+mn-cs"/>
+                        </a:rPr>
+                        <a:t>Из</a:t>
+                      </a:r>
+                      <a:r>
+                        <a:rPr lang="en" sz="2000" b="0" i="0" kern="1200" dirty="0">
+                          <a:solidFill>
+                            <a:schemeClr val="dk1"/>
+                          </a:solidFill>
+                          <a:effectLst/>
+                          <a:latin typeface="+mn-lt"/>
+                          <a:ea typeface="+mn-ea"/>
+                          <a:cs typeface="+mn-cs"/>
+                        </a:rPr>
+                        <a:t>olation Forest, One-Class SVM</a:t>
+                      </a:r>
+                    </a:p>
+                    <a:p>
+                      <a:pPr marL="285750" indent="-285750">
+                        <a:spcBef>
+                          <a:spcPts val="200"/>
+                        </a:spcBef>
+                        <a:buFont typeface="Arial" panose="020B0604020202020204" pitchFamily="34" charset="0"/>
+                        <a:buChar char="•"/>
+                      </a:pPr>
+                      <a:r>
+                        <a:rPr lang="en" sz="2000" b="0" i="0" kern="1200" dirty="0">
+                          <a:solidFill>
+                            <a:schemeClr val="dk1"/>
+                          </a:solidFill>
+                          <a:effectLst/>
+                          <a:latin typeface="+mn-lt"/>
+                          <a:ea typeface="+mn-ea"/>
+                          <a:cs typeface="+mn-cs"/>
+                        </a:rPr>
+                        <a:t>STL-</a:t>
+                      </a:r>
+                      <a:r>
+                        <a:rPr lang="ru-RU" sz="2000" b="0" i="0" kern="1200" dirty="0">
+                          <a:solidFill>
+                            <a:schemeClr val="dk1"/>
+                          </a:solidFill>
+                          <a:effectLst/>
+                          <a:latin typeface="+mn-lt"/>
+                          <a:ea typeface="+mn-ea"/>
+                          <a:cs typeface="+mn-cs"/>
+                        </a:rPr>
+                        <a:t>остатки (остатки &gt; 3</a:t>
+                      </a:r>
+                      <a:r>
+                        <a:rPr lang="el-GR" sz="2000" b="0" i="0" kern="1200" dirty="0">
+                          <a:solidFill>
+                            <a:schemeClr val="dk1"/>
+                          </a:solidFill>
+                          <a:effectLst/>
+                          <a:latin typeface="+mn-lt"/>
+                          <a:ea typeface="+mn-ea"/>
+                          <a:cs typeface="+mn-cs"/>
+                        </a:rPr>
+                        <a:t>σ)</a:t>
+                      </a:r>
+                    </a:p>
+                  </a:txBody>
+                  <a:tcPr/>
+                </a:tc>
+                <a:extLst>
+                  <a:ext uri="{0D108BD9-81ED-4DB2-BD59-A6C34878D82A}">
+                    <a16:rowId xmlns:a16="http://schemas.microsoft.com/office/drawing/2014/main" val="783984968"/>
+                  </a:ext>
+                </a:extLst>
+              </a:tr>
+              <a:tr h="575798">
+                <a:tc>
+                  <a:txBody>
+                    <a:bodyPr/>
+                    <a:lstStyle/>
+                    <a:p>
+                      <a:r>
+                        <a:rPr lang="ru-RU" sz="2000" dirty="0" err="1"/>
+                        <a:t>Кроссвалидация</a:t>
+                      </a:r>
+                      <a:endParaRPr lang="ru-RU" sz="2000" dirty="0"/>
+                    </a:p>
+                  </a:txBody>
+                  <a:tcPr/>
+                </a:tc>
+                <a:tc>
+                  <a:txBody>
+                    <a:bodyPr/>
+                    <a:lstStyle/>
+                    <a:p>
+                      <a:r>
+                        <a:rPr lang="ru-RU" sz="2000" b="0" i="0" kern="1200" dirty="0">
+                          <a:solidFill>
+                            <a:schemeClr val="dk1"/>
+                          </a:solidFill>
+                          <a:effectLst/>
+                          <a:latin typeface="+mn-lt"/>
+                          <a:ea typeface="+mn-ea"/>
+                          <a:cs typeface="+mn-cs"/>
+                        </a:rPr>
+                        <a:t>Только последовательно!</a:t>
+                      </a:r>
+                    </a:p>
+                    <a:p>
+                      <a:r>
+                        <a:rPr lang="ru-RU" sz="2000" b="0" i="0" kern="1200" dirty="0">
+                          <a:solidFill>
+                            <a:schemeClr val="dk1"/>
+                          </a:solidFill>
+                          <a:effectLst/>
+                          <a:latin typeface="+mn-lt"/>
+                          <a:ea typeface="+mn-ea"/>
+                          <a:cs typeface="+mn-cs"/>
+                        </a:rPr>
+                        <a:t>Возможность утечки данных</a:t>
+                      </a:r>
+                    </a:p>
+                  </a:txBody>
+                  <a:tcPr/>
+                </a:tc>
+                <a:tc>
+                  <a:txBody>
+                    <a:bodyPr/>
+                    <a:lstStyle/>
+                    <a:p>
+                      <a:pPr marL="285750" indent="-285750">
+                        <a:spcBef>
+                          <a:spcPts val="200"/>
+                        </a:spcBef>
+                        <a:buFont typeface="Arial" panose="020B0604020202020204" pitchFamily="34" charset="0"/>
+                        <a:buChar char="•"/>
+                      </a:pPr>
+                      <a:r>
+                        <a:rPr lang="ru-RU" sz="2000" b="0" i="0" kern="1200" dirty="0">
+                          <a:solidFill>
+                            <a:schemeClr val="dk1"/>
+                          </a:solidFill>
+                          <a:effectLst/>
+                          <a:latin typeface="+mn-lt"/>
+                          <a:ea typeface="+mn-ea"/>
+                          <a:cs typeface="+mn-cs"/>
+                        </a:rPr>
+                        <a:t>Проверяйте на утечку, </a:t>
+                      </a:r>
+                    </a:p>
+                    <a:p>
+                      <a:pPr marL="285750" indent="-285750">
+                        <a:spcBef>
+                          <a:spcPts val="200"/>
+                        </a:spcBef>
+                        <a:buFont typeface="Arial" panose="020B0604020202020204" pitchFamily="34" charset="0"/>
+                        <a:buChar char="•"/>
+                      </a:pPr>
+                      <a:r>
+                        <a:rPr lang="ru-RU" sz="2000" b="0" i="0" kern="1200" dirty="0">
+                          <a:solidFill>
+                            <a:schemeClr val="dk1"/>
+                          </a:solidFill>
+                          <a:effectLst/>
+                          <a:latin typeface="+mn-lt"/>
+                          <a:ea typeface="+mn-ea"/>
+                          <a:cs typeface="+mn-cs"/>
+                        </a:rPr>
+                        <a:t>Лучше сначала делить данные потом преобразовывать признаки</a:t>
+                      </a:r>
+                      <a:endParaRPr lang="el-GR" sz="2000" b="0" i="0" kern="1200" dirty="0">
+                        <a:solidFill>
+                          <a:schemeClr val="dk1"/>
+                        </a:solidFill>
+                        <a:effectLst/>
+                        <a:latin typeface="+mn-lt"/>
+                        <a:ea typeface="+mn-ea"/>
+                        <a:cs typeface="+mn-cs"/>
+                      </a:endParaRPr>
+                    </a:p>
+                  </a:txBody>
+                  <a:tcPr/>
+                </a:tc>
+                <a:extLst>
+                  <a:ext uri="{0D108BD9-81ED-4DB2-BD59-A6C34878D82A}">
+                    <a16:rowId xmlns:a16="http://schemas.microsoft.com/office/drawing/2014/main" val="87516275"/>
+                  </a:ext>
+                </a:extLst>
+              </a:tr>
+              <a:tr h="575798">
+                <a:tc>
+                  <a:txBody>
+                    <a:bodyPr/>
+                    <a:lstStyle/>
+                    <a:p>
+                      <a:r>
+                        <a:rPr lang="ru-RU" sz="2000" dirty="0"/>
+                        <a:t>Экзогенные факторы</a:t>
+                      </a:r>
+                    </a:p>
+                  </a:txBody>
+                  <a:tcPr/>
+                </a:tc>
+                <a:tc>
+                  <a:txBody>
+                    <a:bodyPr/>
+                    <a:lstStyle/>
+                    <a:p>
+                      <a:r>
+                        <a:rPr lang="ru-RU" sz="2000" b="0" i="0" kern="1200" dirty="0">
+                          <a:solidFill>
+                            <a:schemeClr val="dk1"/>
+                          </a:solidFill>
+                          <a:effectLst/>
+                          <a:latin typeface="+mn-lt"/>
+                          <a:ea typeface="+mn-ea"/>
+                          <a:cs typeface="+mn-cs"/>
+                        </a:rPr>
+                        <a:t>Действительно экзогенные?</a:t>
+                      </a:r>
+                    </a:p>
+                    <a:p>
+                      <a:r>
+                        <a:rPr lang="ru-RU" sz="2000" b="0" i="0" kern="1200" dirty="0">
+                          <a:solidFill>
+                            <a:schemeClr val="dk1"/>
+                          </a:solidFill>
+                          <a:effectLst/>
+                          <a:latin typeface="+mn-lt"/>
+                          <a:ea typeface="+mn-ea"/>
+                          <a:cs typeface="+mn-cs"/>
+                        </a:rPr>
+                        <a:t>Утечка факторов</a:t>
+                      </a:r>
+                    </a:p>
+                  </a:txBody>
+                  <a:tcPr/>
+                </a:tc>
+                <a:tc>
+                  <a:txBody>
+                    <a:bodyPr/>
+                    <a:lstStyle/>
+                    <a:p>
+                      <a:pPr marL="285750" indent="-285750">
+                        <a:spcBef>
+                          <a:spcPts val="200"/>
+                        </a:spcBef>
+                        <a:buFont typeface="Arial" panose="020B0604020202020204" pitchFamily="34" charset="0"/>
+                        <a:buChar char="•"/>
+                      </a:pPr>
+                      <a:r>
+                        <a:rPr lang="ru-RU" sz="2000" b="0" i="0" kern="1200" dirty="0">
+                          <a:solidFill>
+                            <a:schemeClr val="dk1"/>
+                          </a:solidFill>
+                          <a:effectLst/>
+                          <a:latin typeface="+mn-lt"/>
+                          <a:ea typeface="+mn-ea"/>
+                          <a:cs typeface="+mn-cs"/>
+                        </a:rPr>
+                        <a:t>Проверяйте необходимость факторов</a:t>
+                      </a:r>
+                    </a:p>
+                    <a:p>
+                      <a:pPr marL="285750" indent="-285750">
+                        <a:spcBef>
+                          <a:spcPts val="200"/>
+                        </a:spcBef>
+                        <a:buFont typeface="Arial" panose="020B0604020202020204" pitchFamily="34" charset="0"/>
+                        <a:buChar char="•"/>
+                      </a:pPr>
+                      <a:r>
+                        <a:rPr lang="ru-RU" sz="2000" b="0" i="0" kern="1200" dirty="0">
+                          <a:solidFill>
+                            <a:schemeClr val="dk1"/>
+                          </a:solidFill>
+                          <a:effectLst/>
+                          <a:latin typeface="+mn-lt"/>
+                          <a:ea typeface="+mn-ea"/>
+                          <a:cs typeface="+mn-cs"/>
+                        </a:rPr>
+                        <a:t>Проверяйте на утечки и наличие значений в рабочем режиме</a:t>
+                      </a:r>
+                      <a:endParaRPr lang="el-GR" sz="2000" b="0" i="0" kern="1200" dirty="0">
+                        <a:solidFill>
+                          <a:schemeClr val="dk1"/>
+                        </a:solidFill>
+                        <a:effectLst/>
+                        <a:latin typeface="+mn-lt"/>
+                        <a:ea typeface="+mn-ea"/>
+                        <a:cs typeface="+mn-cs"/>
+                      </a:endParaRPr>
+                    </a:p>
+                  </a:txBody>
+                  <a:tcPr/>
+                </a:tc>
+                <a:extLst>
+                  <a:ext uri="{0D108BD9-81ED-4DB2-BD59-A6C34878D82A}">
+                    <a16:rowId xmlns:a16="http://schemas.microsoft.com/office/drawing/2014/main" val="2886357840"/>
+                  </a:ext>
+                </a:extLst>
+              </a:tr>
+            </a:tbl>
+          </a:graphicData>
+        </a:graphic>
+      </p:graphicFrame>
+    </p:spTree>
+    <p:extLst>
+      <p:ext uri="{BB962C8B-B14F-4D97-AF65-F5344CB8AC3E}">
+        <p14:creationId xmlns:p14="http://schemas.microsoft.com/office/powerpoint/2010/main" val="538255811"/>
       </p:ext>
     </p:extLst>
   </p:cSld>

--- a/2025/LEC/05-1 методы машинного обучения для анализа ВР.pptx
+++ b/2025/LEC/05-1 методы машинного обучения для анализа ВР.pptx
@@ -16,17 +16,17 @@
     <p:sldId id="278" r:id="rId7"/>
     <p:sldId id="259" r:id="rId8"/>
     <p:sldId id="269" r:id="rId9"/>
-    <p:sldId id="274" r:id="rId10"/>
-    <p:sldId id="261" r:id="rId11"/>
-    <p:sldId id="264" r:id="rId12"/>
-    <p:sldId id="263" r:id="rId13"/>
-    <p:sldId id="270" r:id="rId14"/>
-    <p:sldId id="266" r:id="rId15"/>
-    <p:sldId id="271" r:id="rId16"/>
-    <p:sldId id="272" r:id="rId17"/>
-    <p:sldId id="279" r:id="rId18"/>
-    <p:sldId id="273" r:id="rId19"/>
-    <p:sldId id="277" r:id="rId20"/>
+    <p:sldId id="261" r:id="rId10"/>
+    <p:sldId id="264" r:id="rId11"/>
+    <p:sldId id="263" r:id="rId12"/>
+    <p:sldId id="270" r:id="rId13"/>
+    <p:sldId id="266" r:id="rId14"/>
+    <p:sldId id="271" r:id="rId15"/>
+    <p:sldId id="272" r:id="rId16"/>
+    <p:sldId id="279" r:id="rId17"/>
+    <p:sldId id="273" r:id="rId18"/>
+    <p:sldId id="277" r:id="rId19"/>
+    <p:sldId id="274" r:id="rId20"/>
   </p:sldIdLst>
   <p:sldSz cx="12192000" cy="6858000"/>
   <p:notesSz cx="6858000" cy="9144000"/>
@@ -241,7 +241,7 @@
           <a:p>
             <a:fld id="{803A9DE4-6CFD-4732-953B-EF950A6B3001}" type="datetimeFigureOut">
               <a:rPr lang="ru-RU" smtClean="0"/>
-              <a:t>10.08.2025</a:t>
+              <a:t>11.08.2025</a:t>
             </a:fld>
             <a:endParaRPr lang="ru-RU"/>
           </a:p>
@@ -647,7 +647,7 @@
           <a:p>
             <a:fld id="{26E69999-DA45-44A1-83D2-44E2B03D187B}" type="slidenum">
               <a:rPr lang="ru-RU" smtClean="0"/>
-              <a:t>14</a:t>
+              <a:t>13</a:t>
             </a:fld>
             <a:endParaRPr lang="ru-RU"/>
           </a:p>
@@ -856,7 +856,7 @@
           <a:p>
             <a:fld id="{26E69999-DA45-44A1-83D2-44E2B03D187B}" type="slidenum">
               <a:rPr lang="ru-RU" smtClean="0"/>
-              <a:t>15</a:t>
+              <a:t>14</a:t>
             </a:fld>
             <a:endParaRPr lang="ru-RU"/>
           </a:p>
@@ -940,7 +940,7 @@
           <a:p>
             <a:fld id="{E5904A68-FE9C-41D3-96AD-A1A68ED6C497}" type="slidenum">
               <a:rPr lang="ru-RU" smtClean="0"/>
-              <a:t>19</a:t>
+              <a:t>18</a:t>
             </a:fld>
             <a:endParaRPr lang="ru-RU"/>
           </a:p>
@@ -1088,7 +1088,7 @@
           <a:p>
             <a:fld id="{43B237C4-111C-4636-B222-D785A341FF5A}" type="datetimeFigureOut">
               <a:rPr lang="ru-RU" smtClean="0"/>
-              <a:t>10.08.2025</a:t>
+              <a:t>11.08.2025</a:t>
             </a:fld>
             <a:endParaRPr lang="ru-RU"/>
           </a:p>
@@ -1256,7 +1256,7 @@
           <a:p>
             <a:fld id="{43B237C4-111C-4636-B222-D785A341FF5A}" type="datetimeFigureOut">
               <a:rPr lang="ru-RU" smtClean="0"/>
-              <a:t>10.08.2025</a:t>
+              <a:t>11.08.2025</a:t>
             </a:fld>
             <a:endParaRPr lang="ru-RU"/>
           </a:p>
@@ -1434,7 +1434,7 @@
           <a:p>
             <a:fld id="{43B237C4-111C-4636-B222-D785A341FF5A}" type="datetimeFigureOut">
               <a:rPr lang="ru-RU" smtClean="0"/>
-              <a:t>10.08.2025</a:t>
+              <a:t>11.08.2025</a:t>
             </a:fld>
             <a:endParaRPr lang="ru-RU"/>
           </a:p>
@@ -1602,7 +1602,7 @@
           <a:p>
             <a:fld id="{43B237C4-111C-4636-B222-D785A341FF5A}" type="datetimeFigureOut">
               <a:rPr lang="ru-RU" smtClean="0"/>
-              <a:t>10.08.2025</a:t>
+              <a:t>11.08.2025</a:t>
             </a:fld>
             <a:endParaRPr lang="ru-RU"/>
           </a:p>
@@ -1847,7 +1847,7 @@
           <a:p>
             <a:fld id="{43B237C4-111C-4636-B222-D785A341FF5A}" type="datetimeFigureOut">
               <a:rPr lang="ru-RU" smtClean="0"/>
-              <a:t>10.08.2025</a:t>
+              <a:t>11.08.2025</a:t>
             </a:fld>
             <a:endParaRPr lang="ru-RU"/>
           </a:p>
@@ -2076,7 +2076,7 @@
           <a:p>
             <a:fld id="{43B237C4-111C-4636-B222-D785A341FF5A}" type="datetimeFigureOut">
               <a:rPr lang="ru-RU" smtClean="0"/>
-              <a:t>10.08.2025</a:t>
+              <a:t>11.08.2025</a:t>
             </a:fld>
             <a:endParaRPr lang="ru-RU"/>
           </a:p>
@@ -2440,7 +2440,7 @@
           <a:p>
             <a:fld id="{43B237C4-111C-4636-B222-D785A341FF5A}" type="datetimeFigureOut">
               <a:rPr lang="ru-RU" smtClean="0"/>
-              <a:t>10.08.2025</a:t>
+              <a:t>11.08.2025</a:t>
             </a:fld>
             <a:endParaRPr lang="ru-RU"/>
           </a:p>
@@ -2557,7 +2557,7 @@
           <a:p>
             <a:fld id="{43B237C4-111C-4636-B222-D785A341FF5A}" type="datetimeFigureOut">
               <a:rPr lang="ru-RU" smtClean="0"/>
-              <a:t>10.08.2025</a:t>
+              <a:t>11.08.2025</a:t>
             </a:fld>
             <a:endParaRPr lang="ru-RU"/>
           </a:p>
@@ -2652,7 +2652,7 @@
           <a:p>
             <a:fld id="{43B237C4-111C-4636-B222-D785A341FF5A}" type="datetimeFigureOut">
               <a:rPr lang="ru-RU" smtClean="0"/>
-              <a:t>10.08.2025</a:t>
+              <a:t>11.08.2025</a:t>
             </a:fld>
             <a:endParaRPr lang="ru-RU"/>
           </a:p>
@@ -2927,7 +2927,7 @@
           <a:p>
             <a:fld id="{43B237C4-111C-4636-B222-D785A341FF5A}" type="datetimeFigureOut">
               <a:rPr lang="ru-RU" smtClean="0"/>
-              <a:t>10.08.2025</a:t>
+              <a:t>11.08.2025</a:t>
             </a:fld>
             <a:endParaRPr lang="ru-RU"/>
           </a:p>
@@ -3179,7 +3179,7 @@
           <a:p>
             <a:fld id="{43B237C4-111C-4636-B222-D785A341FF5A}" type="datetimeFigureOut">
               <a:rPr lang="ru-RU" smtClean="0"/>
-              <a:t>10.08.2025</a:t>
+              <a:t>11.08.2025</a:t>
             </a:fld>
             <a:endParaRPr lang="ru-RU"/>
           </a:p>
@@ -3390,7 +3390,7 @@
           <a:p>
             <a:fld id="{43B237C4-111C-4636-B222-D785A341FF5A}" type="datetimeFigureOut">
               <a:rPr lang="ru-RU" smtClean="0"/>
-              <a:t>10.08.2025</a:t>
+              <a:t>11.08.2025</a:t>
             </a:fld>
             <a:endParaRPr lang="ru-RU"/>
           </a:p>
@@ -3878,349 +3878,6 @@
         </p:nvSpPr>
         <p:spPr>
           <a:xfrm>
-            <a:off x="125505" y="320303"/>
-            <a:ext cx="12227859" cy="773392"/>
-          </a:xfrm>
-        </p:spPr>
-        <p:txBody>
-          <a:bodyPr/>
-          <a:lstStyle/>
-          <a:p>
-            <a:r>
-              <a:rPr lang="ru-RU" dirty="0"/>
-              <a:t>Признаки во временных рядах</a:t>
-            </a:r>
-          </a:p>
-        </p:txBody>
-      </p:sp>
-      <p:sp>
-        <p:nvSpPr>
-          <p:cNvPr id="3" name="Объект 2"/>
-          <p:cNvSpPr>
-            <a:spLocks noGrp="1"/>
-          </p:cNvSpPr>
-          <p:nvPr>
-            <p:ph idx="1"/>
-          </p:nvPr>
-        </p:nvSpPr>
-        <p:spPr>
-          <a:xfrm>
-            <a:off x="188258" y="1029249"/>
-            <a:ext cx="11660842" cy="5304876"/>
-          </a:xfrm>
-        </p:spPr>
-        <p:txBody>
-          <a:bodyPr>
-            <a:normAutofit fontScale="85000" lnSpcReduction="20000"/>
-          </a:bodyPr>
-          <a:lstStyle/>
-          <a:p>
-            <a:r>
-              <a:rPr lang="ru-RU" dirty="0"/>
-              <a:t>Лаги временных рядов</a:t>
-            </a:r>
-          </a:p>
-          <a:p>
-            <a:r>
-              <a:rPr lang="ru-RU" dirty="0"/>
-              <a:t>Преобразования лагов (степенное, разность и </a:t>
-            </a:r>
-            <a:r>
-              <a:rPr lang="ru-RU" dirty="0" err="1"/>
-              <a:t>тд</a:t>
-            </a:r>
-            <a:r>
-              <a:rPr lang="ru-RU" dirty="0"/>
-              <a:t>)</a:t>
-            </a:r>
-            <a:endParaRPr lang="en-US" dirty="0"/>
-          </a:p>
-          <a:p>
-            <a:r>
-              <a:rPr lang="ru-RU" dirty="0"/>
-              <a:t>Оконные статистики лагов</a:t>
-            </a:r>
-            <a:r>
-              <a:rPr lang="en-US" dirty="0"/>
-              <a:t>:</a:t>
-            </a:r>
-          </a:p>
-          <a:p>
-            <a:pPr lvl="1"/>
-            <a:r>
-              <a:rPr lang="en-US" dirty="0"/>
-              <a:t>Max/min value of series in a window</a:t>
-            </a:r>
-          </a:p>
-          <a:p>
-            <a:pPr lvl="1"/>
-            <a:r>
-              <a:rPr lang="en-US" dirty="0"/>
-              <a:t>Average/median value in a window</a:t>
-            </a:r>
-          </a:p>
-          <a:p>
-            <a:pPr lvl="1"/>
-            <a:r>
-              <a:rPr lang="en-US" dirty="0"/>
-              <a:t>Window variance</a:t>
-            </a:r>
-          </a:p>
-          <a:p>
-            <a:pPr lvl="1"/>
-            <a:r>
-              <a:rPr lang="en-US" dirty="0"/>
-              <a:t>etc.</a:t>
-            </a:r>
-          </a:p>
-          <a:p>
-            <a:r>
-              <a:rPr lang="ru-RU" dirty="0"/>
-              <a:t>Даты и время</a:t>
-            </a:r>
-            <a:r>
-              <a:rPr lang="en-US" dirty="0"/>
-              <a:t>:</a:t>
-            </a:r>
-          </a:p>
-          <a:p>
-            <a:pPr lvl="1"/>
-            <a:r>
-              <a:rPr lang="ru-RU" dirty="0"/>
-              <a:t>Порядковые (категориальные) данные: Число, день недели, месяц, квартал и </a:t>
-            </a:r>
-            <a:r>
-              <a:rPr lang="ru-RU" dirty="0" err="1"/>
-              <a:t>тд</a:t>
-            </a:r>
-            <a:r>
-              <a:rPr lang="ru-RU" dirty="0"/>
-              <a:t>,</a:t>
-            </a:r>
-            <a:endParaRPr lang="en-US" dirty="0"/>
-          </a:p>
-          <a:p>
-            <a:pPr lvl="1"/>
-            <a:r>
-              <a:rPr lang="ru-RU" dirty="0"/>
-              <a:t>Бинарные (дискретные): </a:t>
-            </a:r>
-            <a:r>
-              <a:rPr lang="en-US" dirty="0"/>
-              <a:t>Is this day a holiday? Maybe there is a special event? </a:t>
-            </a:r>
-            <a:endParaRPr lang="ru-RU" dirty="0"/>
-          </a:p>
-          <a:p>
-            <a:r>
-              <a:rPr lang="ru-RU" dirty="0"/>
-              <a:t>Экзогенные факторы, объясняющие (в домене) целевую переменную</a:t>
-            </a:r>
-          </a:p>
-          <a:p>
-            <a:r>
-              <a:rPr lang="ru-RU" dirty="0"/>
-              <a:t>Результаты, статистики остатков и другие характеристики предсказаний других моделей (напр. </a:t>
-            </a:r>
-            <a:r>
-              <a:rPr lang="ru-RU" dirty="0" err="1"/>
-              <a:t>A</a:t>
-            </a:r>
-            <a:r>
-              <a:rPr lang="en-US" dirty="0"/>
-              <a:t>RIMA)</a:t>
-            </a:r>
-            <a:endParaRPr lang="ru-RU" dirty="0"/>
-          </a:p>
-          <a:p>
-            <a:r>
-              <a:rPr lang="ru-RU" dirty="0"/>
-              <a:t>Другие признаки: напр. Частотные переменные, значения статистик и </a:t>
-            </a:r>
-            <a:r>
-              <a:rPr lang="ru-RU" dirty="0" err="1"/>
-              <a:t>тд</a:t>
-            </a:r>
-            <a:endParaRPr lang="en-US" dirty="0"/>
-          </a:p>
-          <a:p>
-            <a:r>
-              <a:rPr lang="ru-RU" dirty="0"/>
-              <a:t>Также используют - Преобразования метки (степенное, разность, кодирование и </a:t>
-            </a:r>
-            <a:r>
-              <a:rPr lang="ru-RU" dirty="0" err="1"/>
-              <a:t>тд</a:t>
-            </a:r>
-            <a:r>
-              <a:rPr lang="ru-RU" dirty="0"/>
-              <a:t>)</a:t>
-            </a:r>
-            <a:endParaRPr lang="en-US" dirty="0"/>
-          </a:p>
-          <a:p>
-            <a:endParaRPr lang="ru-RU" dirty="0"/>
-          </a:p>
-        </p:txBody>
-      </p:sp>
-      <p:sp>
-        <p:nvSpPr>
-          <p:cNvPr id="4" name="Прямоугольник 3"/>
-          <p:cNvSpPr/>
-          <p:nvPr/>
-        </p:nvSpPr>
-        <p:spPr>
-          <a:xfrm>
-            <a:off x="5459505" y="6449670"/>
-            <a:ext cx="6096000" cy="307777"/>
-          </a:xfrm>
-          <a:prstGeom prst="rect">
-            <a:avLst/>
-          </a:prstGeom>
-        </p:spPr>
-        <p:txBody>
-          <a:bodyPr>
-            <a:spAutoFit/>
-          </a:bodyPr>
-          <a:lstStyle/>
-          <a:p>
-            <a:r>
-              <a:rPr lang="ru-RU" sz="1400" dirty="0"/>
-              <a:t>https://mlcourse.ai/book/topic09/topic9_part1_time_series_python.html</a:t>
-            </a:r>
-          </a:p>
-        </p:txBody>
-      </p:sp>
-      <p:sp>
-        <p:nvSpPr>
-          <p:cNvPr id="5" name="Прямоугольник 4"/>
-          <p:cNvSpPr/>
-          <p:nvPr/>
-        </p:nvSpPr>
-        <p:spPr>
-          <a:xfrm>
-            <a:off x="5952565" y="6172671"/>
-            <a:ext cx="6096000" cy="276999"/>
-          </a:xfrm>
-          <a:prstGeom prst="rect">
-            <a:avLst/>
-          </a:prstGeom>
-        </p:spPr>
-        <p:txBody>
-          <a:bodyPr>
-            <a:spAutoFit/>
-          </a:bodyPr>
-          <a:lstStyle/>
-          <a:p>
-            <a:r>
-              <a:rPr lang="ru-RU" sz="1200" dirty="0"/>
-              <a:t>https://nixtlaverse.nixtla.io/mlforecast/docs/getting-started/end_to_end_walkthrough.htm</a:t>
-            </a:r>
-          </a:p>
-        </p:txBody>
-      </p:sp>
-      <p:sp>
-        <p:nvSpPr>
-          <p:cNvPr id="7" name="TextBox 6">
-            <a:extLst>
-              <a:ext uri="{FF2B5EF4-FFF2-40B4-BE49-F238E27FC236}">
-                <a16:creationId xmlns:a16="http://schemas.microsoft.com/office/drawing/2014/main" id="{843D709B-8C57-6B5A-961D-91A269E0454F}"/>
-              </a:ext>
-            </a:extLst>
-          </p:cNvPr>
-          <p:cNvSpPr txBox="1"/>
-          <p:nvPr/>
-        </p:nvSpPr>
-        <p:spPr>
-          <a:xfrm>
-            <a:off x="636495" y="6465058"/>
-            <a:ext cx="6235546" cy="276999"/>
-          </a:xfrm>
-          <a:prstGeom prst="rect">
-            <a:avLst/>
-          </a:prstGeom>
-          <a:noFill/>
-        </p:spPr>
-        <p:txBody>
-          <a:bodyPr wrap="square">
-            <a:spAutoFit/>
-          </a:bodyPr>
-          <a:lstStyle/>
-          <a:p>
-            <a:r>
-              <a:rPr lang="ru-RU" sz="1200" dirty="0" err="1"/>
-              <a:t>https</a:t>
-            </a:r>
-            <a:r>
-              <a:rPr lang="ru-RU" sz="1200" dirty="0"/>
-              <a:t>://</a:t>
-            </a:r>
-            <a:r>
-              <a:rPr lang="ru-RU" sz="1200" dirty="0" err="1"/>
-              <a:t>skforecast.org</a:t>
-            </a:r>
-            <a:r>
-              <a:rPr lang="ru-RU" sz="1200" dirty="0"/>
-              <a:t>/0.16.0/</a:t>
-            </a:r>
-            <a:r>
-              <a:rPr lang="ru-RU" sz="1200" dirty="0" err="1"/>
-              <a:t>user_guides</a:t>
-            </a:r>
-            <a:r>
-              <a:rPr lang="ru-RU" sz="1200" dirty="0"/>
-              <a:t>/</a:t>
-            </a:r>
-            <a:r>
-              <a:rPr lang="ru-RU" sz="1200" dirty="0" err="1"/>
-              <a:t>categorical-features</a:t>
-            </a:r>
-            <a:endParaRPr lang="ru-RU" sz="1200" dirty="0"/>
-          </a:p>
-        </p:txBody>
-      </p:sp>
-    </p:spTree>
-    <p:extLst>
-      <p:ext uri="{BB962C8B-B14F-4D97-AF65-F5344CB8AC3E}">
-        <p14:creationId xmlns:p14="http://schemas.microsoft.com/office/powerpoint/2010/main" val="139361784"/>
-      </p:ext>
-    </p:extLst>
-  </p:cSld>
-  <p:clrMapOvr>
-    <a:masterClrMapping/>
-  </p:clrMapOvr>
-</p:sld>
-</file>
-
-<file path=ppt/slides/slide11.xml><?xml version="1.0" encoding="utf-8"?>
-<p:sld xmlns:a="http://schemas.openxmlformats.org/drawingml/2006/main" xmlns:r="http://schemas.openxmlformats.org/officeDocument/2006/relationships" xmlns:p="http://schemas.openxmlformats.org/presentationml/2006/main">
-  <p:cSld>
-    <p:spTree>
-      <p:nvGrpSpPr>
-        <p:cNvPr id="1" name=""/>
-        <p:cNvGrpSpPr/>
-        <p:nvPr/>
-      </p:nvGrpSpPr>
-      <p:grpSpPr>
-        <a:xfrm>
-          <a:off x="0" y="0"/>
-          <a:ext cx="0" cy="0"/>
-          <a:chOff x="0" y="0"/>
-          <a:chExt cx="0" cy="0"/>
-        </a:xfrm>
-      </p:grpSpPr>
-      <p:sp>
-        <p:nvSpPr>
-          <p:cNvPr id="2" name="Заголовок 1"/>
-          <p:cNvSpPr>
-            <a:spLocks noGrp="1"/>
-          </p:cNvSpPr>
-          <p:nvPr>
-            <p:ph type="title"/>
-          </p:nvPr>
-        </p:nvSpPr>
-        <p:spPr>
-          <a:xfrm>
             <a:off x="331694" y="365125"/>
             <a:ext cx="11022106" cy="925793"/>
           </a:xfrm>
@@ -4765,7 +4422,7 @@
 </p:sld>
 </file>
 
-<file path=ppt/slides/slide12.xml><?xml version="1.0" encoding="utf-8"?>
+<file path=ppt/slides/slide11.xml><?xml version="1.0" encoding="utf-8"?>
 <p:sld xmlns:a="http://schemas.openxmlformats.org/drawingml/2006/main" xmlns:r="http://schemas.openxmlformats.org/officeDocument/2006/relationships" xmlns:p="http://schemas.openxmlformats.org/presentationml/2006/main">
   <p:cSld>
     <p:spTree>
@@ -4980,6 +4637,436 @@
     <p:extLst>
       <p:ext uri="{BB962C8B-B14F-4D97-AF65-F5344CB8AC3E}">
         <p14:creationId xmlns:p14="http://schemas.microsoft.com/office/powerpoint/2010/main" val="628570510"/>
+      </p:ext>
+    </p:extLst>
+  </p:cSld>
+  <p:clrMapOvr>
+    <a:masterClrMapping/>
+  </p:clrMapOvr>
+</p:sld>
+</file>
+
+<file path=ppt/slides/slide12.xml><?xml version="1.0" encoding="utf-8"?>
+<p:sld xmlns:a="http://schemas.openxmlformats.org/drawingml/2006/main" xmlns:r="http://schemas.openxmlformats.org/officeDocument/2006/relationships" xmlns:p="http://schemas.openxmlformats.org/presentationml/2006/main">
+  <p:cSld>
+    <p:spTree>
+      <p:nvGrpSpPr>
+        <p:cNvPr id="1" name=""/>
+        <p:cNvGrpSpPr/>
+        <p:nvPr/>
+      </p:nvGrpSpPr>
+      <p:grpSpPr>
+        <a:xfrm>
+          <a:off x="0" y="0"/>
+          <a:ext cx="0" cy="0"/>
+          <a:chOff x="0" y="0"/>
+          <a:chExt cx="0" cy="0"/>
+        </a:xfrm>
+      </p:grpSpPr>
+      <p:sp>
+        <p:nvSpPr>
+          <p:cNvPr id="2" name="Заголовок 1"/>
+          <p:cNvSpPr>
+            <a:spLocks noGrp="1"/>
+          </p:cNvSpPr>
+          <p:nvPr>
+            <p:ph type="title"/>
+          </p:nvPr>
+        </p:nvSpPr>
+        <p:spPr>
+          <a:xfrm>
+            <a:off x="215712" y="174625"/>
+            <a:ext cx="11147613" cy="898899"/>
+          </a:xfrm>
+        </p:spPr>
+        <p:txBody>
+          <a:bodyPr/>
+          <a:lstStyle/>
+          <a:p>
+            <a:pPr lvl="0" eaLnBrk="0" fontAlgn="base" hangingPunct="0">
+              <a:lnSpc>
+                <a:spcPct val="100000"/>
+              </a:lnSpc>
+              <a:spcBef>
+                <a:spcPts val="300"/>
+              </a:spcBef>
+              <a:spcAft>
+                <a:spcPct val="0"/>
+              </a:spcAft>
+            </a:pPr>
+            <a:r>
+              <a:rPr lang="ru-RU" altLang="ru-RU" b="1" dirty="0"/>
+              <a:t>Проблемы выбора окна Редукции</a:t>
+            </a:r>
+          </a:p>
+        </p:txBody>
+      </p:sp>
+      <p:sp>
+        <p:nvSpPr>
+          <p:cNvPr id="3" name="Объект 2"/>
+          <p:cNvSpPr>
+            <a:spLocks noGrp="1"/>
+          </p:cNvSpPr>
+          <p:nvPr>
+            <p:ph idx="1"/>
+          </p:nvPr>
+        </p:nvSpPr>
+        <p:spPr>
+          <a:xfrm>
+            <a:off x="215712" y="940174"/>
+            <a:ext cx="11985813" cy="5154704"/>
+          </a:xfrm>
+        </p:spPr>
+        <p:txBody>
+          <a:bodyPr>
+            <a:noAutofit/>
+          </a:bodyPr>
+          <a:lstStyle/>
+          <a:p>
+            <a:pPr marL="0" indent="0" eaLnBrk="0" fontAlgn="base" hangingPunct="0">
+              <a:lnSpc>
+                <a:spcPct val="100000"/>
+              </a:lnSpc>
+              <a:spcBef>
+                <a:spcPts val="300"/>
+              </a:spcBef>
+              <a:spcAft>
+                <a:spcPct val="0"/>
+              </a:spcAft>
+              <a:buNone/>
+            </a:pPr>
+            <a:r>
+              <a:rPr lang="ru-RU" altLang="ru-RU" sz="2300" dirty="0"/>
+              <a:t>Выбор слишком короткого или слишком длинного окна может привести к </a:t>
+            </a:r>
+            <a:br>
+              <a:rPr lang="ru-RU" altLang="ru-RU" sz="2300" dirty="0"/>
+            </a:br>
+            <a:r>
+              <a:rPr lang="ru-RU" altLang="ru-RU" sz="2300" dirty="0">
+                <a:solidFill>
+                  <a:srgbClr val="0D47A1"/>
+                </a:solidFill>
+                <a:hlinkClick r:id="rId2"/>
+              </a:rPr>
+              <a:t>“p-</a:t>
+            </a:r>
+            <a:r>
+              <a:rPr lang="ru-RU" altLang="ru-RU" sz="2300" dirty="0" err="1">
+                <a:solidFill>
+                  <a:srgbClr val="0D47A1"/>
+                </a:solidFill>
+                <a:hlinkClick r:id="rId2"/>
+              </a:rPr>
+              <a:t>value</a:t>
+            </a:r>
+            <a:r>
+              <a:rPr lang="ru-RU" altLang="ru-RU" sz="2300" dirty="0">
+                <a:solidFill>
+                  <a:srgbClr val="0D47A1"/>
+                </a:solidFill>
+                <a:hlinkClick r:id="rId2"/>
+              </a:rPr>
+              <a:t> </a:t>
+            </a:r>
+            <a:r>
+              <a:rPr lang="ru-RU" altLang="ru-RU" sz="2300" dirty="0" err="1">
+                <a:solidFill>
+                  <a:srgbClr val="0D47A1"/>
+                </a:solidFill>
+                <a:hlinkClick r:id="rId2"/>
+              </a:rPr>
+              <a:t>hacking</a:t>
+            </a:r>
+            <a:r>
+              <a:rPr lang="ru-RU" altLang="ru-RU" sz="2300" dirty="0">
+                <a:solidFill>
+                  <a:srgbClr val="0D47A1"/>
+                </a:solidFill>
+                <a:hlinkClick r:id="rId2"/>
+              </a:rPr>
+              <a:t>”</a:t>
+            </a:r>
+            <a:r>
+              <a:rPr lang="ru-RU" altLang="ru-RU" sz="2300" dirty="0"/>
+              <a:t> – то есть утечке информации (или появление ложных зависимостей). </a:t>
+            </a:r>
+            <a:endParaRPr lang="en-US" altLang="ru-RU" sz="2300" dirty="0"/>
+          </a:p>
+          <a:p>
+            <a:pPr marL="0" indent="0" eaLnBrk="0" fontAlgn="base" hangingPunct="0">
+              <a:lnSpc>
+                <a:spcPct val="100000"/>
+              </a:lnSpc>
+              <a:spcBef>
+                <a:spcPts val="300"/>
+              </a:spcBef>
+              <a:spcAft>
+                <a:spcPct val="0"/>
+              </a:spcAft>
+              <a:buNone/>
+            </a:pPr>
+            <a:r>
+              <a:rPr lang="ru-RU" altLang="ru-RU" sz="2300" dirty="0"/>
+              <a:t>Для </a:t>
+            </a:r>
+            <a:r>
+              <a:rPr lang="ru-RU" altLang="ru-RU" sz="2300" dirty="0" err="1"/>
+              <a:t>преотвращения</a:t>
+            </a:r>
+            <a:r>
+              <a:rPr lang="ru-RU" altLang="ru-RU" sz="2300" dirty="0"/>
+              <a:t>:</a:t>
+            </a:r>
+          </a:p>
+          <a:p>
+            <a:pPr lvl="1" eaLnBrk="0" fontAlgn="base" hangingPunct="0">
+              <a:lnSpc>
+                <a:spcPct val="100000"/>
+              </a:lnSpc>
+              <a:spcBef>
+                <a:spcPts val="300"/>
+              </a:spcBef>
+              <a:spcAft>
+                <a:spcPct val="0"/>
+              </a:spcAft>
+            </a:pPr>
+            <a:r>
+              <a:rPr lang="en-US" altLang="ru-RU" sz="2300" dirty="0"/>
+              <a:t>Walking forward </a:t>
+            </a:r>
+            <a:r>
+              <a:rPr lang="ru-RU" altLang="ru-RU" sz="2300" dirty="0"/>
+              <a:t>кросс </a:t>
+            </a:r>
+            <a:r>
+              <a:rPr lang="ru-RU" altLang="ru-RU" sz="2300" dirty="0" err="1"/>
+              <a:t>валидация</a:t>
+            </a:r>
+            <a:r>
+              <a:rPr lang="en-US" altLang="ru-RU" sz="2300" dirty="0"/>
+              <a:t> </a:t>
+            </a:r>
+            <a:r>
+              <a:rPr lang="ru-RU" altLang="ru-RU" sz="2300" dirty="0"/>
+              <a:t>и </a:t>
+            </a:r>
+            <a:r>
+              <a:rPr lang="en-US" altLang="ru-RU" sz="2300" dirty="0" err="1"/>
+              <a:t>backtesting</a:t>
+            </a:r>
+            <a:r>
+              <a:rPr lang="ru-RU" altLang="ru-RU" sz="2300" dirty="0"/>
+              <a:t>. </a:t>
+            </a:r>
+          </a:p>
+          <a:p>
+            <a:pPr lvl="1" eaLnBrk="0" fontAlgn="base" hangingPunct="0">
+              <a:lnSpc>
+                <a:spcPct val="100000"/>
+              </a:lnSpc>
+              <a:spcBef>
+                <a:spcPts val="300"/>
+              </a:spcBef>
+              <a:spcAft>
+                <a:spcPct val="0"/>
+              </a:spcAft>
+            </a:pPr>
+            <a:r>
+              <a:rPr lang="ru-RU" altLang="ru-RU" sz="2300" dirty="0">
+                <a:solidFill>
+                  <a:srgbClr val="0D47A1"/>
+                </a:solidFill>
+              </a:rPr>
+              <a:t>Тесты</a:t>
+            </a:r>
+            <a:r>
+              <a:rPr lang="ru-RU" altLang="ru-RU" sz="2300" dirty="0"/>
+              <a:t> на ложные корреляции. </a:t>
+            </a:r>
+          </a:p>
+          <a:p>
+            <a:pPr lvl="2" eaLnBrk="0" fontAlgn="base" hangingPunct="0">
+              <a:lnSpc>
+                <a:spcPct val="100000"/>
+              </a:lnSpc>
+              <a:spcBef>
+                <a:spcPts val="300"/>
+              </a:spcBef>
+              <a:spcAft>
+                <a:spcPct val="0"/>
+              </a:spcAft>
+            </a:pPr>
+            <a:r>
+              <a:rPr lang="ru-RU" altLang="ru-RU" dirty="0"/>
+              <a:t>Напр. </a:t>
+            </a:r>
+            <a:r>
+              <a:rPr lang="ru-RU" altLang="ru-RU" dirty="0" err="1"/>
+              <a:t>Bonferonni</a:t>
+            </a:r>
+            <a:r>
+              <a:rPr lang="ru-RU" altLang="ru-RU" dirty="0"/>
+              <a:t> </a:t>
+            </a:r>
+            <a:r>
+              <a:rPr lang="ru-RU" altLang="ru-RU" dirty="0" err="1"/>
+              <a:t>correction</a:t>
+            </a:r>
+            <a:r>
+              <a:rPr lang="ru-RU" altLang="ru-RU" dirty="0"/>
+              <a:t>, </a:t>
+            </a:r>
+            <a:r>
+              <a:rPr lang="ru-RU" altLang="ru-RU" dirty="0" err="1"/>
+              <a:t>Scheffé's</a:t>
+            </a:r>
+            <a:r>
+              <a:rPr lang="ru-RU" altLang="ru-RU" dirty="0"/>
+              <a:t> </a:t>
+            </a:r>
+            <a:r>
+              <a:rPr lang="ru-RU" altLang="ru-RU" dirty="0" err="1"/>
+              <a:t>method</a:t>
+            </a:r>
+            <a:r>
+              <a:rPr lang="ru-RU" altLang="ru-RU" dirty="0"/>
+              <a:t> и </a:t>
+            </a:r>
+            <a:r>
+              <a:rPr lang="ru-RU" altLang="ru-RU" dirty="0" err="1"/>
+              <a:t>false</a:t>
+            </a:r>
+            <a:r>
+              <a:rPr lang="ru-RU" altLang="ru-RU" dirty="0"/>
+              <a:t> </a:t>
+            </a:r>
+            <a:r>
+              <a:rPr lang="ru-RU" altLang="ru-RU" dirty="0" err="1"/>
+              <a:t>discovery</a:t>
+            </a:r>
+            <a:r>
+              <a:rPr lang="ru-RU" altLang="ru-RU" dirty="0"/>
+              <a:t> </a:t>
+            </a:r>
+            <a:r>
+              <a:rPr lang="ru-RU" altLang="ru-RU" dirty="0" err="1"/>
+              <a:t>rate</a:t>
+            </a:r>
+            <a:r>
+              <a:rPr lang="ru-RU" altLang="ru-RU" dirty="0"/>
+              <a:t>.</a:t>
+            </a:r>
+          </a:p>
+          <a:p>
+            <a:pPr eaLnBrk="0" fontAlgn="base" hangingPunct="0">
+              <a:lnSpc>
+                <a:spcPct val="100000"/>
+              </a:lnSpc>
+              <a:spcBef>
+                <a:spcPts val="300"/>
+              </a:spcBef>
+              <a:spcAft>
+                <a:spcPct val="0"/>
+              </a:spcAft>
+            </a:pPr>
+            <a:r>
+              <a:rPr lang="ru-RU" altLang="ru-RU" sz="2300" dirty="0"/>
+              <a:t>При добавлении признаков в окно прогноза нужно смотреть чтобы </a:t>
+            </a:r>
+            <a:r>
+              <a:rPr lang="ru-RU" altLang="ru-RU" sz="2300" dirty="0" err="1"/>
+              <a:t>небыло</a:t>
+            </a:r>
+            <a:r>
+              <a:rPr lang="ru-RU" altLang="ru-RU" sz="2300" dirty="0"/>
+              <a:t> утечки данных – признаки не должны опережать временную метку предсказываемого значения.</a:t>
+            </a:r>
+          </a:p>
+          <a:p>
+            <a:pPr eaLnBrk="0" fontAlgn="base" hangingPunct="0">
+              <a:lnSpc>
+                <a:spcPct val="100000"/>
+              </a:lnSpc>
+              <a:spcBef>
+                <a:spcPts val="300"/>
+              </a:spcBef>
+              <a:spcAft>
+                <a:spcPct val="0"/>
+              </a:spcAft>
+            </a:pPr>
+            <a:r>
+              <a:rPr lang="ru-RU" altLang="ru-RU" sz="2300" dirty="0"/>
+              <a:t>Если метка прогноза преобразована, часто забывают сделать обратное преобразование</a:t>
+            </a:r>
+            <a:r>
+              <a:rPr lang="ru-RU" altLang="ru-RU" sz="2100" dirty="0">
+                <a:latin typeface="system-ui"/>
+              </a:rPr>
+              <a:t>.</a:t>
+            </a:r>
+          </a:p>
+          <a:p>
+            <a:pPr marL="0" lvl="0" indent="0" eaLnBrk="0" fontAlgn="base" hangingPunct="0">
+              <a:lnSpc>
+                <a:spcPct val="100000"/>
+              </a:lnSpc>
+              <a:spcBef>
+                <a:spcPts val="300"/>
+              </a:spcBef>
+              <a:spcAft>
+                <a:spcPct val="0"/>
+              </a:spcAft>
+              <a:buNone/>
+            </a:pPr>
+            <a:endParaRPr kumimoji="0" lang="ru-RU" altLang="ru-RU" sz="2100" b="0" i="0" u="none" strike="noStrike" cap="none" normalizeH="0" baseline="0" dirty="0">
+              <a:ln>
+                <a:noFill/>
+              </a:ln>
+              <a:solidFill>
+                <a:schemeClr val="tx1"/>
+              </a:solidFill>
+              <a:effectLst/>
+              <a:latin typeface="Arial" panose="020B0604020202020204" pitchFamily="34" charset="0"/>
+            </a:endParaRPr>
+          </a:p>
+          <a:p>
+            <a:endParaRPr lang="ru-RU" sz="2100" dirty="0"/>
+          </a:p>
+        </p:txBody>
+      </p:sp>
+      <p:sp>
+        <p:nvSpPr>
+          <p:cNvPr id="4" name="Прямоугольник 3"/>
+          <p:cNvSpPr/>
+          <p:nvPr/>
+        </p:nvSpPr>
+        <p:spPr>
+          <a:xfrm>
+            <a:off x="419379" y="6331148"/>
+            <a:ext cx="4208268" cy="307777"/>
+          </a:xfrm>
+          <a:prstGeom prst="rect">
+            <a:avLst/>
+          </a:prstGeom>
+        </p:spPr>
+        <p:txBody>
+          <a:bodyPr wrap="none">
+            <a:spAutoFit/>
+          </a:bodyPr>
+          <a:lstStyle/>
+          <a:p>
+            <a:r>
+              <a:rPr lang="ru-RU" sz="1400" dirty="0"/>
+              <a:t>https://www.nature.com/articles/d41586-025-01246-1</a:t>
+            </a:r>
+          </a:p>
+        </p:txBody>
+      </p:sp>
+    </p:spTree>
+    <p:extLst>
+      <p:ext uri="{BB962C8B-B14F-4D97-AF65-F5344CB8AC3E}">
+        <p14:creationId xmlns:p14="http://schemas.microsoft.com/office/powerpoint/2010/main" val="3365436130"/>
       </p:ext>
     </p:extLst>
   </p:cSld>
@@ -5018,29 +5105,49 @@
         </p:nvSpPr>
         <p:spPr>
           <a:xfrm>
-            <a:off x="215712" y="174625"/>
-            <a:ext cx="11147613" cy="898899"/>
+            <a:off x="242046" y="105148"/>
+            <a:ext cx="11111753" cy="656851"/>
           </a:xfrm>
         </p:spPr>
         <p:txBody>
-          <a:bodyPr/>
+          <a:bodyPr>
+            <a:normAutofit fontScale="90000"/>
+          </a:bodyPr>
           <a:lstStyle/>
           <a:p>
-            <a:pPr lvl="0" eaLnBrk="0" fontAlgn="base" hangingPunct="0">
-              <a:lnSpc>
-                <a:spcPct val="100000"/>
-              </a:lnSpc>
-              <a:spcBef>
-                <a:spcPts val="300"/>
-              </a:spcBef>
-              <a:spcAft>
-                <a:spcPct val="0"/>
-              </a:spcAft>
-            </a:pPr>
-            <a:r>
-              <a:rPr lang="ru-RU" altLang="ru-RU" b="1" dirty="0"/>
-              <a:t>Проблемы выбора окна Редукции</a:t>
-            </a:r>
+            <a:r>
+              <a:rPr lang="ru-RU" altLang="ru-RU" b="1" dirty="0">
+                <a:solidFill>
+                  <a:srgbClr val="0D47A1"/>
+                </a:solidFill>
+                <a:latin typeface="system-ui"/>
+              </a:rPr>
+              <a:t>Экзогенные переменные  (</a:t>
+            </a:r>
+            <a:r>
+              <a:rPr lang="ru-RU" altLang="ru-RU" b="1" dirty="0" err="1">
+                <a:solidFill>
+                  <a:srgbClr val="0D47A1"/>
+                </a:solidFill>
+                <a:latin typeface="system-ui"/>
+              </a:rPr>
+              <a:t>ковариаты</a:t>
+            </a:r>
+            <a:r>
+              <a:rPr lang="ru-RU" altLang="ru-RU" b="1" dirty="0">
+                <a:solidFill>
+                  <a:srgbClr val="0D47A1"/>
+                </a:solidFill>
+                <a:latin typeface="system-ui"/>
+              </a:rPr>
+              <a:t>)</a:t>
+            </a:r>
+            <a:endParaRPr lang="ru-RU" b="1" dirty="0">
+              <a:solidFill>
+                <a:srgbClr val="0D47A1"/>
+              </a:solidFill>
+              <a:latin typeface="system-ui"/>
+            </a:endParaRPr>
           </a:p>
         </p:txBody>
       </p:sp>
@@ -5056,176 +5163,92 @@
         </p:nvSpPr>
         <p:spPr>
           <a:xfrm>
-            <a:off x="215712" y="940174"/>
-            <a:ext cx="11985813" cy="5154704"/>
+            <a:off x="134470" y="761998"/>
+            <a:ext cx="11949953" cy="5862919"/>
           </a:xfrm>
         </p:spPr>
         <p:txBody>
           <a:bodyPr>
-            <a:noAutofit/>
+            <a:normAutofit fontScale="92500"/>
           </a:bodyPr>
           <a:lstStyle/>
           <a:p>
-            <a:pPr marL="0" indent="0" eaLnBrk="0" fontAlgn="base" hangingPunct="0">
+            <a:pPr>
               <a:lnSpc>
-                <a:spcPct val="100000"/>
+                <a:spcPct val="120000"/>
               </a:lnSpc>
               <a:spcBef>
-                <a:spcPts val="300"/>
+                <a:spcPts val="0"/>
               </a:spcBef>
-              <a:spcAft>
-                <a:spcPct val="0"/>
-              </a:spcAft>
+            </a:pPr>
+            <a:r>
+              <a:rPr lang="ru-RU" sz="2300" b="1" dirty="0"/>
+              <a:t>Э</a:t>
+            </a:r>
+            <a:r>
+              <a:rPr lang="en-US" sz="2300" b="1" dirty="0" err="1"/>
+              <a:t>кзогенны</a:t>
+            </a:r>
+            <a:r>
+              <a:rPr lang="ru-RU" sz="2300" b="1" dirty="0"/>
+              <a:t>е факторы (</a:t>
+            </a:r>
+            <a:r>
+              <a:rPr lang="ru-RU" sz="2300" b="1" dirty="0" err="1"/>
+              <a:t>ковариаты</a:t>
+            </a:r>
+            <a:r>
+              <a:rPr lang="ru-RU" sz="2300" b="1" dirty="0"/>
+              <a:t>, </a:t>
+            </a:r>
+            <a:r>
+              <a:rPr lang="ru-RU" sz="2300" b="1" dirty="0" err="1"/>
+              <a:t>exdog</a:t>
+            </a:r>
+            <a:r>
+              <a:rPr lang="en-US" sz="2300" b="1" dirty="0"/>
+              <a:t>)</a:t>
+            </a:r>
+            <a:r>
+              <a:rPr lang="ru-RU" sz="2300" dirty="0"/>
+              <a:t> – факторы, не имеющие линейной корреляции с ВР, но объясняющие его поведения  </a:t>
+            </a:r>
+          </a:p>
+          <a:p>
+            <a:pPr lvl="1">
+              <a:lnSpc>
+                <a:spcPct val="120000"/>
+              </a:lnSpc>
+              <a:spcBef>
+                <a:spcPts val="0"/>
+              </a:spcBef>
+            </a:pPr>
+            <a:r>
+              <a:rPr lang="ru-RU" altLang="ru-RU" sz="2300" dirty="0"/>
+              <a:t>Напр. Прогноз энергопотребления </a:t>
+            </a:r>
+            <a:r>
+              <a:rPr lang="en-US" altLang="ru-RU" sz="2300" dirty="0"/>
+              <a:t>: </a:t>
+            </a:r>
+            <a:r>
+              <a:rPr lang="ru-RU" altLang="ru-RU" sz="2300" dirty="0"/>
+              <a:t>Температура, время суток, день недели</a:t>
+            </a:r>
+          </a:p>
+          <a:p>
+            <a:pPr marL="447675" lvl="2" indent="0" eaLnBrk="0" fontAlgn="base" hangingPunct="0">
+              <a:lnSpc>
+                <a:spcPct val="120000"/>
+              </a:lnSpc>
+              <a:spcBef>
+                <a:spcPts val="0"/>
+              </a:spcBef>
               <a:buNone/>
             </a:pPr>
             <a:r>
-              <a:rPr lang="ru-RU" altLang="ru-RU" sz="2300" dirty="0"/>
-              <a:t>Выбор слишком короткого или слишком длинного окна может привести к </a:t>
-            </a:r>
-            <a:br>
-              <a:rPr lang="ru-RU" altLang="ru-RU" sz="2300" dirty="0"/>
-            </a:br>
-            <a:r>
-              <a:rPr lang="ru-RU" altLang="ru-RU" sz="2300" dirty="0">
-                <a:solidFill>
-                  <a:srgbClr val="0D47A1"/>
-                </a:solidFill>
-                <a:hlinkClick r:id="rId2"/>
-              </a:rPr>
-              <a:t>“p-</a:t>
-            </a:r>
-            <a:r>
-              <a:rPr lang="ru-RU" altLang="ru-RU" sz="2300" dirty="0" err="1">
-                <a:solidFill>
-                  <a:srgbClr val="0D47A1"/>
-                </a:solidFill>
-                <a:hlinkClick r:id="rId2"/>
-              </a:rPr>
-              <a:t>value</a:t>
-            </a:r>
-            <a:r>
-              <a:rPr lang="ru-RU" altLang="ru-RU" sz="2300" dirty="0">
-                <a:solidFill>
-                  <a:srgbClr val="0D47A1"/>
-                </a:solidFill>
-                <a:hlinkClick r:id="rId2"/>
-              </a:rPr>
-              <a:t> </a:t>
-            </a:r>
-            <a:r>
-              <a:rPr lang="ru-RU" altLang="ru-RU" sz="2300" dirty="0" err="1">
-                <a:solidFill>
-                  <a:srgbClr val="0D47A1"/>
-                </a:solidFill>
-                <a:hlinkClick r:id="rId2"/>
-              </a:rPr>
-              <a:t>hacking</a:t>
-            </a:r>
-            <a:r>
-              <a:rPr lang="ru-RU" altLang="ru-RU" sz="2300" dirty="0">
-                <a:solidFill>
-                  <a:srgbClr val="0D47A1"/>
-                </a:solidFill>
-                <a:hlinkClick r:id="rId2"/>
-              </a:rPr>
-              <a:t>”</a:t>
-            </a:r>
-            <a:r>
-              <a:rPr lang="ru-RU" altLang="ru-RU" sz="2300" dirty="0"/>
-              <a:t> – то есть утечке информации (или появление ложных зависимостей). </a:t>
-            </a:r>
-            <a:endParaRPr lang="en-US" altLang="ru-RU" sz="2300" dirty="0"/>
-          </a:p>
-          <a:p>
-            <a:pPr marL="0" indent="0" eaLnBrk="0" fontAlgn="base" hangingPunct="0">
-              <a:lnSpc>
-                <a:spcPct val="100000"/>
-              </a:lnSpc>
-              <a:spcBef>
-                <a:spcPts val="300"/>
-              </a:spcBef>
-              <a:spcAft>
-                <a:spcPct val="0"/>
-              </a:spcAft>
-              <a:buNone/>
-            </a:pPr>
-            <a:r>
-              <a:rPr lang="ru-RU" altLang="ru-RU" sz="2300" dirty="0"/>
-              <a:t>Для </a:t>
-            </a:r>
-            <a:r>
-              <a:rPr lang="ru-RU" altLang="ru-RU" sz="2300" dirty="0" err="1"/>
-              <a:t>преотвращения</a:t>
-            </a:r>
-            <a:r>
-              <a:rPr lang="ru-RU" altLang="ru-RU" sz="2300" dirty="0"/>
-              <a:t>:</a:t>
-            </a:r>
-          </a:p>
-          <a:p>
-            <a:pPr lvl="1" eaLnBrk="0" fontAlgn="base" hangingPunct="0">
-              <a:lnSpc>
-                <a:spcPct val="100000"/>
-              </a:lnSpc>
-              <a:spcBef>
-                <a:spcPts val="300"/>
-              </a:spcBef>
-              <a:spcAft>
-                <a:spcPct val="0"/>
-              </a:spcAft>
-            </a:pPr>
-            <a:r>
-              <a:rPr lang="en-US" altLang="ru-RU" sz="2300" dirty="0"/>
-              <a:t>Walking forward </a:t>
-            </a:r>
-            <a:r>
-              <a:rPr lang="ru-RU" altLang="ru-RU" sz="2300" dirty="0"/>
-              <a:t>кросс </a:t>
-            </a:r>
-            <a:r>
-              <a:rPr lang="ru-RU" altLang="ru-RU" sz="2300" dirty="0" err="1"/>
-              <a:t>валидация</a:t>
-            </a:r>
-            <a:r>
-              <a:rPr lang="en-US" altLang="ru-RU" sz="2300" dirty="0"/>
-              <a:t> </a:t>
-            </a:r>
-            <a:r>
-              <a:rPr lang="ru-RU" altLang="ru-RU" sz="2300" dirty="0"/>
-              <a:t>и </a:t>
-            </a:r>
-            <a:r>
-              <a:rPr lang="en-US" altLang="ru-RU" sz="2300" dirty="0" err="1"/>
-              <a:t>backtesting</a:t>
-            </a:r>
-            <a:r>
-              <a:rPr lang="ru-RU" altLang="ru-RU" sz="2300" dirty="0"/>
-              <a:t>. </a:t>
-            </a:r>
-          </a:p>
-          <a:p>
-            <a:pPr lvl="1" eaLnBrk="0" fontAlgn="base" hangingPunct="0">
-              <a:lnSpc>
-                <a:spcPct val="100000"/>
-              </a:lnSpc>
-              <a:spcBef>
-                <a:spcPts val="300"/>
-              </a:spcBef>
-              <a:spcAft>
-                <a:spcPct val="0"/>
-              </a:spcAft>
-            </a:pPr>
-            <a:r>
-              <a:rPr lang="ru-RU" altLang="ru-RU" sz="2300" dirty="0">
-                <a:solidFill>
-                  <a:srgbClr val="0D47A1"/>
-                </a:solidFill>
-              </a:rPr>
-              <a:t>Тесты</a:t>
-            </a:r>
-            <a:r>
-              <a:rPr lang="ru-RU" altLang="ru-RU" sz="2300" dirty="0"/>
-              <a:t> на ложные корреляции. </a:t>
+              <a:rPr lang="ru-RU" altLang="ru-RU" sz="2300" b="1" dirty="0"/>
+              <a:t>Требования к экзогенным факторам</a:t>
             </a:r>
           </a:p>
           <a:p>
@@ -5234,182 +5257,170 @@
                 <a:spcPct val="100000"/>
               </a:lnSpc>
               <a:spcBef>
-                <a:spcPts val="300"/>
+                <a:spcPts val="200"/>
               </a:spcBef>
-              <a:spcAft>
-                <a:spcPct val="0"/>
-              </a:spcAft>
             </a:pPr>
             <a:r>
-              <a:rPr lang="ru-RU" altLang="ru-RU" dirty="0"/>
-              <a:t>Напр. </a:t>
-            </a:r>
-            <a:r>
-              <a:rPr lang="ru-RU" altLang="ru-RU" dirty="0" err="1"/>
-              <a:t>Bonferonni</a:t>
-            </a:r>
-            <a:r>
-              <a:rPr lang="ru-RU" altLang="ru-RU" dirty="0"/>
-              <a:t> </a:t>
-            </a:r>
-            <a:r>
-              <a:rPr lang="ru-RU" altLang="ru-RU" dirty="0" err="1"/>
-              <a:t>correction</a:t>
-            </a:r>
-            <a:r>
-              <a:rPr lang="ru-RU" altLang="ru-RU" dirty="0"/>
-              <a:t>, </a:t>
-            </a:r>
-            <a:r>
-              <a:rPr lang="ru-RU" altLang="ru-RU" dirty="0" err="1"/>
-              <a:t>Scheffé's</a:t>
-            </a:r>
-            <a:r>
-              <a:rPr lang="ru-RU" altLang="ru-RU" dirty="0"/>
-              <a:t> </a:t>
-            </a:r>
-            <a:r>
-              <a:rPr lang="ru-RU" altLang="ru-RU" dirty="0" err="1"/>
-              <a:t>method</a:t>
-            </a:r>
-            <a:r>
-              <a:rPr lang="ru-RU" altLang="ru-RU" dirty="0"/>
-              <a:t> и </a:t>
-            </a:r>
-            <a:r>
-              <a:rPr lang="ru-RU" altLang="ru-RU" dirty="0" err="1"/>
-              <a:t>false</a:t>
-            </a:r>
-            <a:r>
-              <a:rPr lang="ru-RU" altLang="ru-RU" dirty="0"/>
-              <a:t> </a:t>
-            </a:r>
-            <a:r>
-              <a:rPr lang="ru-RU" altLang="ru-RU" dirty="0" err="1"/>
-              <a:t>discovery</a:t>
-            </a:r>
-            <a:r>
-              <a:rPr lang="ru-RU" altLang="ru-RU" dirty="0"/>
-              <a:t> </a:t>
-            </a:r>
-            <a:r>
-              <a:rPr lang="ru-RU" altLang="ru-RU" dirty="0" err="1"/>
-              <a:t>rate</a:t>
-            </a:r>
-            <a:r>
-              <a:rPr lang="ru-RU" altLang="ru-RU" dirty="0"/>
-              <a:t>.</a:t>
-            </a:r>
-          </a:p>
-          <a:p>
-            <a:pPr eaLnBrk="0" fontAlgn="base" hangingPunct="0">
+              <a:rPr lang="ru-RU" altLang="ru-RU" sz="2300" dirty="0"/>
+              <a:t>На практике </a:t>
+            </a:r>
+            <a:r>
+              <a:rPr lang="ru-RU" altLang="ru-RU" sz="2300" dirty="0" err="1"/>
+              <a:t>экзогенность</a:t>
+            </a:r>
+            <a:r>
+              <a:rPr lang="ru-RU" altLang="ru-RU" sz="2300" dirty="0"/>
+              <a:t> устанавливается экспертом в предметной области!</a:t>
+            </a:r>
+          </a:p>
+          <a:p>
+            <a:pPr lvl="2" eaLnBrk="0" fontAlgn="base" hangingPunct="0">
               <a:lnSpc>
                 <a:spcPct val="100000"/>
               </a:lnSpc>
               <a:spcBef>
-                <a:spcPts val="300"/>
+                <a:spcPts val="200"/>
               </a:spcBef>
-              <a:spcAft>
-                <a:spcPct val="0"/>
-              </a:spcAft>
             </a:pPr>
             <a:r>
               <a:rPr lang="ru-RU" altLang="ru-RU" sz="2300" dirty="0"/>
-              <a:t>При добавлении признаков в окно прогноза нужно смотреть чтобы </a:t>
-            </a:r>
-            <a:r>
-              <a:rPr lang="ru-RU" altLang="ru-RU" sz="2300" dirty="0" err="1"/>
-              <a:t>небыло</a:t>
-            </a:r>
-            <a:r>
-              <a:rPr lang="ru-RU" altLang="ru-RU" sz="2300" dirty="0"/>
-              <a:t> утечки данных – признаки не должны опережать временную метку предсказываемого значения.</a:t>
-            </a:r>
-          </a:p>
-          <a:p>
-            <a:pPr eaLnBrk="0" fontAlgn="base" hangingPunct="0">
+              <a:t>Экзогенные факторы объясняют ВР – то есть их использование статистически значимо и стабильно улучшает прогноз. В ином случае лучше фактор не использовать.</a:t>
+            </a:r>
+          </a:p>
+          <a:p>
+            <a:pPr lvl="2" eaLnBrk="0" fontAlgn="base" hangingPunct="0">
               <a:lnSpc>
                 <a:spcPct val="100000"/>
               </a:lnSpc>
               <a:spcBef>
-                <a:spcPts val="300"/>
+                <a:spcPts val="200"/>
               </a:spcBef>
-              <a:spcAft>
-                <a:spcPct val="0"/>
-              </a:spcAft>
             </a:pPr>
             <a:r>
               <a:rPr lang="ru-RU" altLang="ru-RU" sz="2300" dirty="0"/>
-              <a:t>Если метка прогноза преобразована, часто забывают сделать обратное преобразование</a:t>
-            </a:r>
-            <a:r>
-              <a:rPr lang="ru-RU" altLang="ru-RU" sz="2100" dirty="0">
-                <a:latin typeface="system-ui"/>
-              </a:rPr>
-              <a:t>.</a:t>
-            </a:r>
-          </a:p>
-          <a:p>
-            <a:pPr marL="0" lvl="0" indent="0" eaLnBrk="0" fontAlgn="base" hangingPunct="0">
+              <a:t>Экзогенные факторы должны быть «всегда в наличии», не пропадать</a:t>
+            </a:r>
+          </a:p>
+          <a:p>
+            <a:pPr lvl="2" eaLnBrk="0" fontAlgn="base" hangingPunct="0">
               <a:lnSpc>
                 <a:spcPct val="100000"/>
               </a:lnSpc>
               <a:spcBef>
-                <a:spcPts val="300"/>
+                <a:spcPts val="200"/>
               </a:spcBef>
-              <a:spcAft>
-                <a:spcPct val="0"/>
-              </a:spcAft>
+            </a:pPr>
+            <a:r>
+              <a:rPr lang="ru-RU" altLang="ru-RU" sz="2300" dirty="0"/>
+              <a:t>Экзогенные факторы не должны приводить к «утечке данных» (созданию ложных корреляций) – они должны не завесить от ВР</a:t>
+            </a:r>
+          </a:p>
+          <a:p>
+            <a:pPr lvl="2" eaLnBrk="0" fontAlgn="base" hangingPunct="0">
+              <a:lnSpc>
+                <a:spcPct val="100000"/>
+              </a:lnSpc>
+              <a:spcBef>
+                <a:spcPts val="200"/>
+              </a:spcBef>
+            </a:pPr>
+            <a:r>
+              <a:rPr lang="ru-RU" altLang="ru-RU" sz="2300" dirty="0"/>
+              <a:t>Для многомерных ВР экзогенные факторы могут быть локальными или глобальными – то есть общей информацией между ВР</a:t>
+            </a:r>
+          </a:p>
+          <a:p>
+            <a:pPr marL="914400" lvl="2" indent="0" eaLnBrk="0" fontAlgn="base" hangingPunct="0">
+              <a:lnSpc>
+                <a:spcPct val="100000"/>
+              </a:lnSpc>
+              <a:spcBef>
+                <a:spcPts val="200"/>
+              </a:spcBef>
               <a:buNone/>
             </a:pPr>
-            <a:endParaRPr kumimoji="0" lang="ru-RU" altLang="ru-RU" sz="2100" b="0" i="0" u="none" strike="noStrike" cap="none" normalizeH="0" baseline="0" dirty="0">
-              <a:ln>
-                <a:noFill/>
-              </a:ln>
-              <a:solidFill>
-                <a:schemeClr val="tx1"/>
-              </a:solidFill>
-              <a:effectLst/>
-              <a:latin typeface="Arial" panose="020B0604020202020204" pitchFamily="34" charset="0"/>
-            </a:endParaRPr>
-          </a:p>
-          <a:p>
-            <a:endParaRPr lang="ru-RU" sz="2100" dirty="0"/>
-          </a:p>
-        </p:txBody>
-      </p:sp>
-      <p:sp>
-        <p:nvSpPr>
-          <p:cNvPr id="4" name="Прямоугольник 3"/>
-          <p:cNvSpPr/>
-          <p:nvPr/>
-        </p:nvSpPr>
-        <p:spPr>
-          <a:xfrm>
-            <a:off x="419379" y="6331148"/>
-            <a:ext cx="4208268" cy="307777"/>
-          </a:xfrm>
-          <a:prstGeom prst="rect">
-            <a:avLst/>
-          </a:prstGeom>
-        </p:spPr>
-        <p:txBody>
-          <a:bodyPr wrap="none">
-            <a:spAutoFit/>
-          </a:bodyPr>
-          <a:lstStyle/>
-          <a:p>
-            <a:r>
-              <a:rPr lang="ru-RU" sz="1400" dirty="0"/>
-              <a:t>https://www.nature.com/articles/d41586-025-01246-1</a:t>
-            </a:r>
+            <a:endParaRPr lang="ru-RU" altLang="ru-RU" sz="2300" dirty="0"/>
+          </a:p>
+          <a:p>
+            <a:pPr>
+              <a:lnSpc>
+                <a:spcPct val="120000"/>
+              </a:lnSpc>
+              <a:spcBef>
+                <a:spcPts val="0"/>
+              </a:spcBef>
+            </a:pPr>
+            <a:r>
+              <a:rPr lang="ru-RU" altLang="ru-RU" sz="2300" b="1" i="1" dirty="0"/>
+              <a:t>Эндогенные ф</a:t>
+            </a:r>
+            <a:r>
+              <a:rPr lang="en-US" sz="2300" b="1" i="1" dirty="0" err="1"/>
+              <a:t>акторы</a:t>
+            </a:r>
+            <a:r>
+              <a:rPr lang="en-US" sz="2300" i="1" dirty="0"/>
+              <a:t>, </a:t>
+            </a:r>
+            <a:r>
+              <a:rPr lang="en-US" sz="2300" i="1" dirty="0" err="1"/>
+              <a:t>очевидно</a:t>
+            </a:r>
+            <a:r>
+              <a:rPr lang="en-US" sz="2300" i="1" dirty="0"/>
+              <a:t> </a:t>
+            </a:r>
+            <a:r>
+              <a:rPr lang="en-US" sz="2300" i="1" dirty="0" err="1"/>
+              <a:t>коррелирующие</a:t>
+            </a:r>
+            <a:r>
+              <a:rPr lang="en-US" sz="2300" i="1" dirty="0"/>
+              <a:t> </a:t>
+            </a:r>
+            <a:r>
+              <a:rPr lang="en-US" sz="2300" i="1" dirty="0" err="1"/>
+              <a:t>с</a:t>
+            </a:r>
+            <a:r>
+              <a:rPr lang="en-US" sz="2300" i="1" dirty="0"/>
+              <a:t> </a:t>
+            </a:r>
+            <a:r>
+              <a:rPr lang="ru-RU" sz="2300" i="1" dirty="0"/>
+              <a:t>ВР</a:t>
+            </a:r>
+            <a:r>
+              <a:rPr lang="en-US" sz="2300" i="1" dirty="0"/>
+              <a:t>. </a:t>
+            </a:r>
+            <a:endParaRPr lang="ru-RU" sz="2300" i="1" dirty="0"/>
+          </a:p>
+          <a:p>
+            <a:pPr lvl="1">
+              <a:lnSpc>
+                <a:spcPct val="120000"/>
+              </a:lnSpc>
+              <a:spcBef>
+                <a:spcPts val="0"/>
+              </a:spcBef>
+            </a:pPr>
+            <a:r>
+              <a:rPr lang="ru-RU" sz="2300" i="1" dirty="0"/>
+              <a:t>Лаги ВР, преобразованные значения, значения автокорреляций, тренда или сезонности, и </a:t>
+            </a:r>
+            <a:r>
+              <a:rPr lang="ru-RU" sz="2300" i="1" dirty="0" err="1"/>
+              <a:t>тд</a:t>
+            </a:r>
+            <a:endParaRPr lang="ru-RU" sz="2300" i="1" dirty="0"/>
           </a:p>
         </p:txBody>
       </p:sp>
     </p:spTree>
     <p:extLst>
       <p:ext uri="{BB962C8B-B14F-4D97-AF65-F5344CB8AC3E}">
-        <p14:creationId xmlns:p14="http://schemas.microsoft.com/office/powerpoint/2010/main" val="3365436130"/>
+        <p14:creationId xmlns:p14="http://schemas.microsoft.com/office/powerpoint/2010/main" val="1968690726"/>
       </p:ext>
     </p:extLst>
   </p:cSld>
@@ -5448,7 +5459,7 @@
         </p:nvSpPr>
         <p:spPr>
           <a:xfrm>
-            <a:off x="242046" y="105148"/>
+            <a:off x="280146" y="238498"/>
             <a:ext cx="11111753" cy="656851"/>
           </a:xfrm>
         </p:spPr>
@@ -5458,6 +5469,7 @@
           </a:bodyPr>
           <a:lstStyle/>
           <a:p>
+            <a:pPr lvl="0"/>
             <a:r>
               <a:rPr lang="ru-RU" altLang="ru-RU" b="1" dirty="0">
                 <a:solidFill>
@@ -5465,16 +5477,16 @@
                 </a:solidFill>
                 <a:latin typeface="system-ui"/>
               </a:rPr>
-              <a:t>Экзогенные переменные  (</a:t>
-            </a:r>
-            <a:r>
-              <a:rPr lang="ru-RU" altLang="ru-RU" b="1" dirty="0" err="1">
+              <a:t>Экзогенные переменные</a:t>
+            </a:r>
+            <a:r>
+              <a:rPr lang="en-US" altLang="ru-RU" b="1" dirty="0">
                 <a:solidFill>
                   <a:srgbClr val="0D47A1"/>
                 </a:solidFill>
                 <a:latin typeface="system-ui"/>
               </a:rPr>
-              <a:t>ковариаты</a:t>
+              <a:t>.</a:t>
             </a:r>
             <a:r>
               <a:rPr lang="ru-RU" altLang="ru-RU" b="1" dirty="0">
@@ -5483,14 +5495,19 @@
                 </a:solidFill>
                 <a:latin typeface="system-ui"/>
               </a:rPr>
-              <a:t>)</a:t>
-            </a:r>
-            <a:endParaRPr lang="ru-RU" b="1" dirty="0">
-              <a:solidFill>
-                <a:srgbClr val="0D47A1"/>
-              </a:solidFill>
-              <a:latin typeface="system-ui"/>
-            </a:endParaRPr>
+              <a:t> Три группы</a:t>
+            </a:r>
+            <a:r>
+              <a:rPr lang="ru-RU" altLang="ru-RU" dirty="0"/>
+              <a:t>:</a:t>
+            </a:r>
+            <a:r>
+              <a:rPr lang="ru-RU" altLang="ru-RU" dirty="0">
+                <a:latin typeface="system-ui"/>
+              </a:rPr>
+              <a:t> </a:t>
+            </a:r>
+            <a:endParaRPr lang="ru-RU" dirty="0"/>
           </a:p>
         </p:txBody>
       </p:sp>
@@ -5516,254 +5533,275 @@
           </a:bodyPr>
           <a:lstStyle/>
           <a:p>
-            <a:pPr>
+            <a:pPr marL="0" lvl="0" indent="0" eaLnBrk="0" fontAlgn="base" hangingPunct="0">
               <a:lnSpc>
                 <a:spcPct val="120000"/>
               </a:lnSpc>
               <a:spcBef>
-                <a:spcPts val="0"/>
+                <a:spcPts val="600"/>
               </a:spcBef>
+              <a:spcAft>
+                <a:spcPct val="0"/>
+              </a:spcAft>
+              <a:buNone/>
             </a:pPr>
             <a:r>
-              <a:rPr lang="ru-RU" sz="2300" b="1" dirty="0"/>
-              <a:t>Э</a:t>
-            </a:r>
-            <a:r>
-              <a:rPr lang="en-US" sz="2300" b="1" dirty="0" err="1"/>
-              <a:t>кзогенны</a:t>
-            </a:r>
-            <a:r>
-              <a:rPr lang="ru-RU" sz="2300" b="1" dirty="0"/>
-              <a:t>е факторы (</a:t>
-            </a:r>
-            <a:r>
-              <a:rPr lang="ru-RU" sz="2300" b="1" dirty="0" err="1"/>
-              <a:t>ковариаты</a:t>
-            </a:r>
-            <a:r>
-              <a:rPr lang="ru-RU" sz="2300" b="1" dirty="0"/>
-              <a:t>, </a:t>
-            </a:r>
-            <a:r>
-              <a:rPr lang="ru-RU" sz="2300" b="1" dirty="0" err="1"/>
-              <a:t>exdog</a:t>
-            </a:r>
-            <a:r>
-              <a:rPr lang="en-US" sz="2300" b="1" dirty="0"/>
-              <a:t>)</a:t>
-            </a:r>
-            <a:r>
-              <a:rPr lang="ru-RU" sz="2300" dirty="0"/>
-              <a:t> – факторы, не имеющие линейной корреляции с ВР, но объясняющие его поведения  </a:t>
-            </a:r>
-          </a:p>
-          <a:p>
-            <a:pPr lvl="1">
+              <a:rPr lang="ru-RU" altLang="ru-RU" b="1" dirty="0"/>
+              <a:t>Статические экзогенные переменные</a:t>
+            </a:r>
+            <a:r>
+              <a:rPr lang="ru-RU" altLang="ru-RU" dirty="0"/>
+              <a:t>: </a:t>
+            </a:r>
+            <a:endParaRPr lang="en-US" altLang="ru-RU" dirty="0"/>
+          </a:p>
+          <a:p>
+            <a:pPr lvl="1" eaLnBrk="0" fontAlgn="base" hangingPunct="0">
               <a:lnSpc>
                 <a:spcPct val="120000"/>
               </a:lnSpc>
               <a:spcBef>
-                <a:spcPts val="0"/>
+                <a:spcPct val="0"/>
               </a:spcBef>
+              <a:spcAft>
+                <a:spcPct val="0"/>
+              </a:spcAft>
             </a:pPr>
             <a:r>
-              <a:rPr lang="ru-RU" altLang="ru-RU" sz="2300" dirty="0"/>
-              <a:t>Напр. Прогноз энергопотребления </a:t>
-            </a:r>
-            <a:r>
-              <a:rPr lang="en-US" altLang="ru-RU" sz="2300" dirty="0"/>
-              <a:t>: </a:t>
-            </a:r>
-            <a:r>
-              <a:rPr lang="ru-RU" altLang="ru-RU" sz="2300" dirty="0"/>
-              <a:t>Температура, время суток, день недели</a:t>
-            </a:r>
-          </a:p>
-          <a:p>
-            <a:pPr marL="447675" lvl="2" indent="0" eaLnBrk="0" fontAlgn="base" hangingPunct="0">
+              <a:rPr lang="ru-RU" altLang="ru-RU" dirty="0"/>
+              <a:t>несут неизменную во времени информацию для каждого временного ряда.</a:t>
+            </a:r>
+            <a:endParaRPr lang="en-US" altLang="ru-RU" dirty="0"/>
+          </a:p>
+          <a:p>
+            <a:pPr lvl="2" eaLnBrk="0" fontAlgn="base" hangingPunct="0">
               <a:lnSpc>
                 <a:spcPct val="120000"/>
               </a:lnSpc>
               <a:spcBef>
-                <a:spcPts val="0"/>
+                <a:spcPct val="0"/>
               </a:spcBef>
-              <a:buNone/>
+              <a:spcAft>
+                <a:spcPct val="0"/>
+              </a:spcAft>
             </a:pPr>
             <a:r>
-              <a:rPr lang="ru-RU" altLang="ru-RU" sz="2300" b="1" dirty="0"/>
-              <a:t>Требования к экзогенным факторам</a:t>
+              <a:rPr lang="ru-RU" altLang="ru-RU" sz="2400" b="1" dirty="0"/>
+              <a:t>Напр. </a:t>
+            </a:r>
+            <a:r>
+              <a:rPr lang="ru-RU" altLang="ru-RU" sz="2400" dirty="0"/>
+              <a:t> идентификаторы регионов, групп товаров и т. д.</a:t>
+            </a:r>
+          </a:p>
+          <a:p>
+            <a:pPr eaLnBrk="0" fontAlgn="base" hangingPunct="0">
+              <a:lnSpc>
+                <a:spcPct val="120000"/>
+              </a:lnSpc>
+              <a:spcBef>
+                <a:spcPct val="0"/>
+              </a:spcBef>
+              <a:spcAft>
+                <a:spcPct val="0"/>
+              </a:spcAft>
+            </a:pPr>
+            <a:r>
+              <a:rPr lang="ru-RU" altLang="ru-RU" b="1" dirty="0"/>
+              <a:t>Исторические экзогенные переменные</a:t>
+            </a:r>
+            <a:r>
+              <a:rPr lang="ru-RU" altLang="ru-RU" dirty="0"/>
+              <a:t>: переменная ограничена прошлыми наблюдаемыми значениями. </a:t>
+            </a:r>
+          </a:p>
+          <a:p>
+            <a:pPr lvl="1" eaLnBrk="0" fontAlgn="base" hangingPunct="0">
+              <a:lnSpc>
+                <a:spcPct val="120000"/>
+              </a:lnSpc>
+              <a:spcBef>
+                <a:spcPct val="0"/>
+              </a:spcBef>
+              <a:spcAft>
+                <a:spcPct val="0"/>
+              </a:spcAft>
+            </a:pPr>
+            <a:r>
+              <a:rPr lang="ru-RU" altLang="ru-RU" sz="2600" dirty="0"/>
+              <a:t>Причинность можно проверить напр. при помощи Теста </a:t>
+            </a:r>
+            <a:r>
+              <a:rPr lang="ru-RU" altLang="ru-RU" sz="2600" dirty="0" err="1"/>
+              <a:t>Гранжера</a:t>
+            </a:r>
+            <a:r>
+              <a:rPr lang="ru-RU" altLang="ru-RU" sz="2600" dirty="0"/>
+              <a:t> на казуальность.</a:t>
+            </a:r>
+          </a:p>
+          <a:p>
+            <a:pPr eaLnBrk="0" fontAlgn="base" hangingPunct="0">
+              <a:lnSpc>
+                <a:spcPct val="120000"/>
+              </a:lnSpc>
+              <a:spcBef>
+                <a:spcPct val="0"/>
+              </a:spcBef>
+              <a:spcAft>
+                <a:spcPct val="0"/>
+              </a:spcAft>
+            </a:pPr>
+            <a:r>
+              <a:rPr lang="ru-RU" altLang="ru-RU" b="1" dirty="0"/>
+              <a:t>Будущие экзогенные переменные</a:t>
+            </a:r>
+            <a:r>
+              <a:rPr lang="ru-RU" altLang="ru-RU" dirty="0"/>
+              <a:t>:  доступны на момент прогнозирования. </a:t>
+            </a:r>
+          </a:p>
+          <a:p>
+            <a:pPr lvl="1" eaLnBrk="0" fontAlgn="base" hangingPunct="0">
+              <a:lnSpc>
+                <a:spcPct val="120000"/>
+              </a:lnSpc>
+              <a:spcBef>
+                <a:spcPct val="0"/>
+              </a:spcBef>
+              <a:spcAft>
+                <a:spcPct val="0"/>
+              </a:spcAft>
+            </a:pPr>
+            <a:r>
+              <a:rPr lang="ru-RU" altLang="ru-RU" dirty="0"/>
+              <a:t>Напр. календарные переменные, известные события, (напр. запланированные акции), прогнозы факторов (напр. прогноз погоды для прогноза электропотребления на 1 день).</a:t>
+            </a:r>
+            <a:endParaRPr lang="en-US" altLang="ru-RU" dirty="0"/>
+          </a:p>
+          <a:p>
+            <a:pPr lvl="1" eaLnBrk="0" fontAlgn="base" hangingPunct="0">
+              <a:lnSpc>
+                <a:spcPct val="120000"/>
+              </a:lnSpc>
+              <a:spcBef>
+                <a:spcPct val="0"/>
+              </a:spcBef>
+              <a:spcAft>
+                <a:spcPct val="0"/>
+              </a:spcAft>
+            </a:pPr>
+            <a:r>
+              <a:rPr lang="ru-RU" altLang="ru-RU" dirty="0"/>
+              <a:t>Важно чтобы переменная всегда в будущем была известна и не несла </a:t>
+            </a:r>
+            <a:r>
+              <a:rPr lang="en-US" altLang="ru-RU" dirty="0"/>
+              <a:t>data leaks</a:t>
+            </a:r>
+          </a:p>
+          <a:p>
+            <a:pPr lvl="1" eaLnBrk="0" fontAlgn="base" hangingPunct="0">
+              <a:lnSpc>
+                <a:spcPct val="120000"/>
+              </a:lnSpc>
+              <a:spcBef>
+                <a:spcPct val="0"/>
+              </a:spcBef>
+              <a:spcAft>
+                <a:spcPct val="0"/>
+              </a:spcAft>
+            </a:pPr>
+            <a:r>
+              <a:rPr lang="ru-RU" altLang="ru-RU" dirty="0"/>
+              <a:t>Для проверки </a:t>
             </a:r>
           </a:p>
           <a:p>
             <a:pPr lvl="2" eaLnBrk="0" fontAlgn="base" hangingPunct="0">
+              <a:lnSpc>
+                <a:spcPct val="120000"/>
+              </a:lnSpc>
+              <a:spcBef>
+                <a:spcPct val="0"/>
+              </a:spcBef>
+              <a:spcAft>
+                <a:spcPct val="0"/>
+              </a:spcAft>
+            </a:pPr>
+            <a:r>
+              <a:rPr lang="ru-RU" altLang="ru-RU" dirty="0"/>
+              <a:t>обратный тест на казуальность (фактор на ВР) </a:t>
+            </a:r>
+          </a:p>
+          <a:p>
+            <a:pPr lvl="2" eaLnBrk="0" fontAlgn="base" hangingPunct="0">
+              <a:lnSpc>
+                <a:spcPct val="120000"/>
+              </a:lnSpc>
+              <a:spcBef>
+                <a:spcPct val="0"/>
+              </a:spcBef>
+              <a:spcAft>
+                <a:spcPct val="0"/>
+              </a:spcAft>
+            </a:pPr>
+            <a:r>
+              <a:rPr lang="en-US" dirty="0"/>
+              <a:t>Lead-Lag Analysis</a:t>
+            </a:r>
+            <a:r>
+              <a:rPr lang="ru-RU" dirty="0"/>
+              <a:t> – на сколько далеко нужно сместить ВР чтобы возникла казуальность?</a:t>
+            </a:r>
+            <a:endParaRPr lang="en-US" b="1" dirty="0"/>
+          </a:p>
+          <a:p>
+            <a:pPr lvl="1" eaLnBrk="0" fontAlgn="base" hangingPunct="0">
+              <a:lnSpc>
+                <a:spcPct val="120000"/>
+              </a:lnSpc>
+              <a:spcBef>
+                <a:spcPct val="0"/>
+              </a:spcBef>
+              <a:spcAft>
+                <a:spcPct val="0"/>
+              </a:spcAft>
+            </a:pPr>
+            <a:endParaRPr lang="ru-RU" altLang="ru-RU" dirty="0"/>
+          </a:p>
+          <a:p>
+            <a:pPr marL="0" lvl="0" indent="0" eaLnBrk="0" fontAlgn="base" hangingPunct="0">
               <a:lnSpc>
                 <a:spcPct val="100000"/>
               </a:lnSpc>
               <a:spcBef>
-                <a:spcPts val="200"/>
+                <a:spcPct val="0"/>
               </a:spcBef>
-            </a:pPr>
-            <a:r>
-              <a:rPr lang="ru-RU" altLang="ru-RU" sz="2300" dirty="0"/>
-              <a:t>На практике </a:t>
-            </a:r>
-            <a:r>
-              <a:rPr lang="ru-RU" altLang="ru-RU" sz="2300" dirty="0" err="1"/>
-              <a:t>экзогенность</a:t>
-            </a:r>
-            <a:r>
-              <a:rPr lang="ru-RU" altLang="ru-RU" sz="2300" dirty="0"/>
-              <a:t> устанавливается экспертом в предметной области!</a:t>
-            </a:r>
-          </a:p>
-          <a:p>
-            <a:pPr lvl="2" eaLnBrk="0" fontAlgn="base" hangingPunct="0">
-              <a:lnSpc>
-                <a:spcPct val="100000"/>
-              </a:lnSpc>
-              <a:spcBef>
-                <a:spcPts val="200"/>
-              </a:spcBef>
-            </a:pPr>
-            <a:r>
-              <a:rPr lang="ru-RU" altLang="ru-RU" sz="2300" dirty="0"/>
-              <a:t>Экзогенные факторы объясняют ВР – то есть их использование статистически значимо и стабильно улучшает прогноз. В ином случае лучше фактор не использовать.</a:t>
-            </a:r>
-          </a:p>
-          <a:p>
-            <a:pPr lvl="2" eaLnBrk="0" fontAlgn="base" hangingPunct="0">
-              <a:lnSpc>
-                <a:spcPct val="100000"/>
-              </a:lnSpc>
-              <a:spcBef>
-                <a:spcPts val="200"/>
-              </a:spcBef>
-            </a:pPr>
-            <a:r>
-              <a:rPr lang="ru-RU" altLang="ru-RU" sz="2300" dirty="0"/>
-              <a:t>Экзогенные факторы должны быть «всегда в наличии», не пропадать</a:t>
-            </a:r>
-          </a:p>
-          <a:p>
-            <a:pPr lvl="2" eaLnBrk="0" fontAlgn="base" hangingPunct="0">
-              <a:lnSpc>
-                <a:spcPct val="100000"/>
-              </a:lnSpc>
-              <a:spcBef>
-                <a:spcPts val="200"/>
-              </a:spcBef>
-            </a:pPr>
-            <a:r>
-              <a:rPr lang="ru-RU" altLang="ru-RU" sz="2300" dirty="0"/>
-              <a:t>Экзогенные факторы не должны приводить к «утечке данных» (созданию ложных корреляций) – они должны не завесить от ВР</a:t>
-            </a:r>
-          </a:p>
-          <a:p>
-            <a:pPr lvl="2" eaLnBrk="0" fontAlgn="base" hangingPunct="0">
-              <a:lnSpc>
-                <a:spcPct val="100000"/>
-              </a:lnSpc>
-              <a:spcBef>
-                <a:spcPts val="200"/>
-              </a:spcBef>
-            </a:pPr>
-            <a:r>
-              <a:rPr lang="ru-RU" altLang="ru-RU" sz="2300" dirty="0"/>
-              <a:t>Для многомерных ВР экзогенные факторы могут быть локальными или глобальными – то есть общей информацией между ВР</a:t>
-            </a:r>
-          </a:p>
-          <a:p>
-            <a:pPr marL="914400" lvl="2" indent="0" eaLnBrk="0" fontAlgn="base" hangingPunct="0">
-              <a:lnSpc>
-                <a:spcPct val="100000"/>
-              </a:lnSpc>
-              <a:spcBef>
-                <a:spcPts val="200"/>
-              </a:spcBef>
+              <a:spcAft>
+                <a:spcPct val="0"/>
+              </a:spcAft>
               <a:buNone/>
             </a:pPr>
-            <a:endParaRPr lang="ru-RU" altLang="ru-RU" sz="2300" dirty="0"/>
-          </a:p>
-          <a:p>
-            <a:pPr>
-              <a:lnSpc>
-                <a:spcPct val="120000"/>
-              </a:lnSpc>
-              <a:spcBef>
-                <a:spcPts val="0"/>
-              </a:spcBef>
-            </a:pPr>
-            <a:r>
-              <a:rPr lang="ru-RU" altLang="ru-RU" sz="2300" b="1" i="1" dirty="0"/>
-              <a:t>Эндогенные ф</a:t>
-            </a:r>
-            <a:r>
-              <a:rPr lang="en-US" sz="2300" b="1" i="1" dirty="0" err="1"/>
-              <a:t>акторы</a:t>
-            </a:r>
-            <a:r>
-              <a:rPr lang="en-US" sz="2300" i="1" dirty="0"/>
-              <a:t>, </a:t>
-            </a:r>
-            <a:r>
-              <a:rPr lang="en-US" sz="2300" i="1" dirty="0" err="1"/>
-              <a:t>очевидно</a:t>
-            </a:r>
-            <a:r>
-              <a:rPr lang="en-US" sz="2300" i="1" dirty="0"/>
-              <a:t> </a:t>
-            </a:r>
-            <a:r>
-              <a:rPr lang="en-US" sz="2300" i="1" dirty="0" err="1"/>
-              <a:t>коррелирующие</a:t>
-            </a:r>
-            <a:r>
-              <a:rPr lang="en-US" sz="2300" i="1" dirty="0"/>
-              <a:t> </a:t>
-            </a:r>
-            <a:r>
-              <a:rPr lang="en-US" sz="2300" i="1" dirty="0" err="1"/>
-              <a:t>с</a:t>
-            </a:r>
-            <a:r>
-              <a:rPr lang="en-US" sz="2300" i="1" dirty="0"/>
-              <a:t> </a:t>
-            </a:r>
-            <a:r>
-              <a:rPr lang="ru-RU" sz="2300" i="1" dirty="0"/>
-              <a:t>ВР</a:t>
-            </a:r>
-            <a:r>
-              <a:rPr lang="en-US" sz="2300" i="1" dirty="0"/>
-              <a:t>. </a:t>
-            </a:r>
-            <a:endParaRPr lang="ru-RU" sz="2300" i="1" dirty="0"/>
-          </a:p>
-          <a:p>
-            <a:pPr lvl="1">
-              <a:lnSpc>
-                <a:spcPct val="120000"/>
-              </a:lnSpc>
-              <a:spcBef>
-                <a:spcPts val="0"/>
-              </a:spcBef>
-            </a:pPr>
-            <a:r>
-              <a:rPr lang="ru-RU" sz="2300" i="1" dirty="0"/>
-              <a:t>Лаги ВР, преобразованные значения, значения автокорреляций, тренда или сезонности, и </a:t>
-            </a:r>
-            <a:r>
-              <a:rPr lang="ru-RU" sz="2300" i="1" dirty="0" err="1"/>
-              <a:t>тд</a:t>
-            </a:r>
-            <a:endParaRPr lang="ru-RU" sz="2300" i="1" dirty="0"/>
+            <a:endParaRPr kumimoji="0" lang="ru-RU" altLang="ru-RU" sz="5400" b="0" i="0" u="none" strike="noStrike" cap="none" normalizeH="0" baseline="0" dirty="0">
+              <a:ln>
+                <a:noFill/>
+              </a:ln>
+              <a:solidFill>
+                <a:schemeClr val="tx1"/>
+              </a:solidFill>
+              <a:effectLst/>
+            </a:endParaRPr>
+          </a:p>
+          <a:p>
+            <a:endParaRPr lang="ru-RU" dirty="0"/>
           </a:p>
         </p:txBody>
       </p:sp>
     </p:spTree>
     <p:extLst>
       <p:ext uri="{BB962C8B-B14F-4D97-AF65-F5344CB8AC3E}">
-        <p14:creationId xmlns:p14="http://schemas.microsoft.com/office/powerpoint/2010/main" val="1968690726"/>
+        <p14:creationId xmlns:p14="http://schemas.microsoft.com/office/powerpoint/2010/main" val="1608365178"/>
       </p:ext>
     </p:extLst>
   </p:cSld>
@@ -5802,387 +5840,6 @@
         </p:nvSpPr>
         <p:spPr>
           <a:xfrm>
-            <a:off x="280146" y="238498"/>
-            <a:ext cx="11111753" cy="656851"/>
-          </a:xfrm>
-        </p:spPr>
-        <p:txBody>
-          <a:bodyPr>
-            <a:normAutofit fontScale="90000"/>
-          </a:bodyPr>
-          <a:lstStyle/>
-          <a:p>
-            <a:pPr lvl="0"/>
-            <a:r>
-              <a:rPr lang="ru-RU" altLang="ru-RU" b="1" dirty="0">
-                <a:solidFill>
-                  <a:srgbClr val="0D47A1"/>
-                </a:solidFill>
-                <a:latin typeface="system-ui"/>
-              </a:rPr>
-              <a:t>Экзогенные переменные</a:t>
-            </a:r>
-            <a:r>
-              <a:rPr lang="en-US" altLang="ru-RU" b="1" dirty="0">
-                <a:solidFill>
-                  <a:srgbClr val="0D47A1"/>
-                </a:solidFill>
-                <a:latin typeface="system-ui"/>
-              </a:rPr>
-              <a:t>.</a:t>
-            </a:r>
-            <a:r>
-              <a:rPr lang="ru-RU" altLang="ru-RU" b="1" dirty="0">
-                <a:solidFill>
-                  <a:srgbClr val="0D47A1"/>
-                </a:solidFill>
-                <a:latin typeface="system-ui"/>
-              </a:rPr>
-              <a:t> Три группы</a:t>
-            </a:r>
-            <a:r>
-              <a:rPr lang="ru-RU" altLang="ru-RU" dirty="0"/>
-              <a:t>:</a:t>
-            </a:r>
-            <a:r>
-              <a:rPr lang="ru-RU" altLang="ru-RU" dirty="0">
-                <a:latin typeface="system-ui"/>
-              </a:rPr>
-              <a:t> </a:t>
-            </a:r>
-            <a:endParaRPr lang="ru-RU" dirty="0"/>
-          </a:p>
-        </p:txBody>
-      </p:sp>
-      <p:sp>
-        <p:nvSpPr>
-          <p:cNvPr id="3" name="Объект 2"/>
-          <p:cNvSpPr>
-            <a:spLocks noGrp="1"/>
-          </p:cNvSpPr>
-          <p:nvPr>
-            <p:ph idx="1"/>
-          </p:nvPr>
-        </p:nvSpPr>
-        <p:spPr>
-          <a:xfrm>
-            <a:off x="134470" y="761998"/>
-            <a:ext cx="11949953" cy="5862919"/>
-          </a:xfrm>
-        </p:spPr>
-        <p:txBody>
-          <a:bodyPr>
-            <a:normAutofit fontScale="92500"/>
-          </a:bodyPr>
-          <a:lstStyle/>
-          <a:p>
-            <a:pPr marL="0" lvl="0" indent="0" eaLnBrk="0" fontAlgn="base" hangingPunct="0">
-              <a:lnSpc>
-                <a:spcPct val="120000"/>
-              </a:lnSpc>
-              <a:spcBef>
-                <a:spcPts val="600"/>
-              </a:spcBef>
-              <a:spcAft>
-                <a:spcPct val="0"/>
-              </a:spcAft>
-              <a:buNone/>
-            </a:pPr>
-            <a:r>
-              <a:rPr lang="ru-RU" altLang="ru-RU" b="1" dirty="0"/>
-              <a:t>Статические экзогенные переменные</a:t>
-            </a:r>
-            <a:r>
-              <a:rPr lang="ru-RU" altLang="ru-RU" dirty="0"/>
-              <a:t>: </a:t>
-            </a:r>
-            <a:endParaRPr lang="en-US" altLang="ru-RU" dirty="0"/>
-          </a:p>
-          <a:p>
-            <a:pPr lvl="1" eaLnBrk="0" fontAlgn="base" hangingPunct="0">
-              <a:lnSpc>
-                <a:spcPct val="120000"/>
-              </a:lnSpc>
-              <a:spcBef>
-                <a:spcPct val="0"/>
-              </a:spcBef>
-              <a:spcAft>
-                <a:spcPct val="0"/>
-              </a:spcAft>
-            </a:pPr>
-            <a:r>
-              <a:rPr lang="ru-RU" altLang="ru-RU" dirty="0"/>
-              <a:t>несут неизменную во времени информацию для каждого временного ряда.</a:t>
-            </a:r>
-            <a:endParaRPr lang="en-US" altLang="ru-RU" dirty="0"/>
-          </a:p>
-          <a:p>
-            <a:pPr lvl="2" eaLnBrk="0" fontAlgn="base" hangingPunct="0">
-              <a:lnSpc>
-                <a:spcPct val="120000"/>
-              </a:lnSpc>
-              <a:spcBef>
-                <a:spcPct val="0"/>
-              </a:spcBef>
-              <a:spcAft>
-                <a:spcPct val="0"/>
-              </a:spcAft>
-            </a:pPr>
-            <a:r>
-              <a:rPr lang="ru-RU" altLang="ru-RU" sz="2400" b="1" dirty="0"/>
-              <a:t>Напр. </a:t>
-            </a:r>
-            <a:r>
-              <a:rPr lang="ru-RU" altLang="ru-RU" sz="2400" dirty="0"/>
-              <a:t> идентификаторы регионов, групп товаров и т. д.</a:t>
-            </a:r>
-          </a:p>
-          <a:p>
-            <a:pPr eaLnBrk="0" fontAlgn="base" hangingPunct="0">
-              <a:lnSpc>
-                <a:spcPct val="120000"/>
-              </a:lnSpc>
-              <a:spcBef>
-                <a:spcPct val="0"/>
-              </a:spcBef>
-              <a:spcAft>
-                <a:spcPct val="0"/>
-              </a:spcAft>
-            </a:pPr>
-            <a:r>
-              <a:rPr lang="ru-RU" altLang="ru-RU" b="1" dirty="0"/>
-              <a:t>Исторические экзогенные переменные</a:t>
-            </a:r>
-            <a:r>
-              <a:rPr lang="ru-RU" altLang="ru-RU" dirty="0"/>
-              <a:t>: переменная ограничена прошлыми наблюдаемыми значениями. </a:t>
-            </a:r>
-          </a:p>
-          <a:p>
-            <a:pPr lvl="1" eaLnBrk="0" fontAlgn="base" hangingPunct="0">
-              <a:lnSpc>
-                <a:spcPct val="120000"/>
-              </a:lnSpc>
-              <a:spcBef>
-                <a:spcPct val="0"/>
-              </a:spcBef>
-              <a:spcAft>
-                <a:spcPct val="0"/>
-              </a:spcAft>
-            </a:pPr>
-            <a:r>
-              <a:rPr lang="ru-RU" altLang="ru-RU" sz="2600" dirty="0"/>
-              <a:t>Причинность можно проверить напр. при помощи Теста </a:t>
-            </a:r>
-            <a:r>
-              <a:rPr lang="ru-RU" altLang="ru-RU" sz="2600" dirty="0" err="1"/>
-              <a:t>Гранжера</a:t>
-            </a:r>
-            <a:r>
-              <a:rPr lang="ru-RU" altLang="ru-RU" sz="2600" dirty="0"/>
-              <a:t> на казуальность.</a:t>
-            </a:r>
-          </a:p>
-          <a:p>
-            <a:pPr eaLnBrk="0" fontAlgn="base" hangingPunct="0">
-              <a:lnSpc>
-                <a:spcPct val="120000"/>
-              </a:lnSpc>
-              <a:spcBef>
-                <a:spcPct val="0"/>
-              </a:spcBef>
-              <a:spcAft>
-                <a:spcPct val="0"/>
-              </a:spcAft>
-            </a:pPr>
-            <a:r>
-              <a:rPr lang="ru-RU" altLang="ru-RU" b="1" dirty="0"/>
-              <a:t>Будущие экзогенные переменные</a:t>
-            </a:r>
-            <a:r>
-              <a:rPr lang="ru-RU" altLang="ru-RU" dirty="0"/>
-              <a:t>:  доступны на момент прогнозирования. </a:t>
-            </a:r>
-          </a:p>
-          <a:p>
-            <a:pPr lvl="1" eaLnBrk="0" fontAlgn="base" hangingPunct="0">
-              <a:lnSpc>
-                <a:spcPct val="120000"/>
-              </a:lnSpc>
-              <a:spcBef>
-                <a:spcPct val="0"/>
-              </a:spcBef>
-              <a:spcAft>
-                <a:spcPct val="0"/>
-              </a:spcAft>
-            </a:pPr>
-            <a:r>
-              <a:rPr lang="ru-RU" altLang="ru-RU" dirty="0"/>
-              <a:t>Напр. календарные переменные, известные события, (напр. запланированные акции), прогнозы факторов (напр. прогноз погоды для прогноза электропотребления на 1 день).</a:t>
-            </a:r>
-            <a:endParaRPr lang="en-US" altLang="ru-RU" dirty="0"/>
-          </a:p>
-          <a:p>
-            <a:pPr lvl="1" eaLnBrk="0" fontAlgn="base" hangingPunct="0">
-              <a:lnSpc>
-                <a:spcPct val="120000"/>
-              </a:lnSpc>
-              <a:spcBef>
-                <a:spcPct val="0"/>
-              </a:spcBef>
-              <a:spcAft>
-                <a:spcPct val="0"/>
-              </a:spcAft>
-            </a:pPr>
-            <a:r>
-              <a:rPr lang="ru-RU" altLang="ru-RU" dirty="0"/>
-              <a:t>Важно чтобы переменная всегда в будущем была известна и не несла </a:t>
-            </a:r>
-            <a:r>
-              <a:rPr lang="en-US" altLang="ru-RU" dirty="0"/>
-              <a:t>data leaks</a:t>
-            </a:r>
-          </a:p>
-          <a:p>
-            <a:pPr lvl="1" eaLnBrk="0" fontAlgn="base" hangingPunct="0">
-              <a:lnSpc>
-                <a:spcPct val="120000"/>
-              </a:lnSpc>
-              <a:spcBef>
-                <a:spcPct val="0"/>
-              </a:spcBef>
-              <a:spcAft>
-                <a:spcPct val="0"/>
-              </a:spcAft>
-            </a:pPr>
-            <a:r>
-              <a:rPr lang="ru-RU" altLang="ru-RU" dirty="0"/>
-              <a:t>Для проверки </a:t>
-            </a:r>
-          </a:p>
-          <a:p>
-            <a:pPr lvl="2" eaLnBrk="0" fontAlgn="base" hangingPunct="0">
-              <a:lnSpc>
-                <a:spcPct val="120000"/>
-              </a:lnSpc>
-              <a:spcBef>
-                <a:spcPct val="0"/>
-              </a:spcBef>
-              <a:spcAft>
-                <a:spcPct val="0"/>
-              </a:spcAft>
-            </a:pPr>
-            <a:r>
-              <a:rPr lang="ru-RU" altLang="ru-RU" dirty="0"/>
-              <a:t>обратный тест на казуальность (фактор на ВР) </a:t>
-            </a:r>
-          </a:p>
-          <a:p>
-            <a:pPr lvl="2" eaLnBrk="0" fontAlgn="base" hangingPunct="0">
-              <a:lnSpc>
-                <a:spcPct val="120000"/>
-              </a:lnSpc>
-              <a:spcBef>
-                <a:spcPct val="0"/>
-              </a:spcBef>
-              <a:spcAft>
-                <a:spcPct val="0"/>
-              </a:spcAft>
-            </a:pPr>
-            <a:r>
-              <a:rPr lang="en-US" dirty="0"/>
-              <a:t>Lead-Lag Analysis</a:t>
-            </a:r>
-            <a:r>
-              <a:rPr lang="ru-RU" dirty="0"/>
-              <a:t> – на сколько далеко нужно сместить ВР чтобы возникла казуальность?</a:t>
-            </a:r>
-            <a:endParaRPr lang="en-US" b="1" dirty="0"/>
-          </a:p>
-          <a:p>
-            <a:pPr lvl="1" eaLnBrk="0" fontAlgn="base" hangingPunct="0">
-              <a:lnSpc>
-                <a:spcPct val="120000"/>
-              </a:lnSpc>
-              <a:spcBef>
-                <a:spcPct val="0"/>
-              </a:spcBef>
-              <a:spcAft>
-                <a:spcPct val="0"/>
-              </a:spcAft>
-            </a:pPr>
-            <a:endParaRPr lang="ru-RU" altLang="ru-RU" dirty="0"/>
-          </a:p>
-          <a:p>
-            <a:pPr marL="0" lvl="0" indent="0" eaLnBrk="0" fontAlgn="base" hangingPunct="0">
-              <a:lnSpc>
-                <a:spcPct val="100000"/>
-              </a:lnSpc>
-              <a:spcBef>
-                <a:spcPct val="0"/>
-              </a:spcBef>
-              <a:spcAft>
-                <a:spcPct val="0"/>
-              </a:spcAft>
-              <a:buNone/>
-            </a:pPr>
-            <a:endParaRPr kumimoji="0" lang="ru-RU" altLang="ru-RU" sz="5400" b="0" i="0" u="none" strike="noStrike" cap="none" normalizeH="0" baseline="0" dirty="0">
-              <a:ln>
-                <a:noFill/>
-              </a:ln>
-              <a:solidFill>
-                <a:schemeClr val="tx1"/>
-              </a:solidFill>
-              <a:effectLst/>
-            </a:endParaRPr>
-          </a:p>
-          <a:p>
-            <a:endParaRPr lang="ru-RU" dirty="0"/>
-          </a:p>
-        </p:txBody>
-      </p:sp>
-    </p:spTree>
-    <p:extLst>
-      <p:ext uri="{BB962C8B-B14F-4D97-AF65-F5344CB8AC3E}">
-        <p14:creationId xmlns:p14="http://schemas.microsoft.com/office/powerpoint/2010/main" val="1608365178"/>
-      </p:ext>
-    </p:extLst>
-  </p:cSld>
-  <p:clrMapOvr>
-    <a:masterClrMapping/>
-  </p:clrMapOvr>
-</p:sld>
-</file>
-
-<file path=ppt/slides/slide16.xml><?xml version="1.0" encoding="utf-8"?>
-<p:sld xmlns:a="http://schemas.openxmlformats.org/drawingml/2006/main" xmlns:r="http://schemas.openxmlformats.org/officeDocument/2006/relationships" xmlns:p="http://schemas.openxmlformats.org/presentationml/2006/main">
-  <p:cSld>
-    <p:spTree>
-      <p:nvGrpSpPr>
-        <p:cNvPr id="1" name=""/>
-        <p:cNvGrpSpPr/>
-        <p:nvPr/>
-      </p:nvGrpSpPr>
-      <p:grpSpPr>
-        <a:xfrm>
-          <a:off x="0" y="0"/>
-          <a:ext cx="0" cy="0"/>
-          <a:chOff x="0" y="0"/>
-          <a:chExt cx="0" cy="0"/>
-        </a:xfrm>
-      </p:grpSpPr>
-      <p:sp>
-        <p:nvSpPr>
-          <p:cNvPr id="2" name="Заголовок 1"/>
-          <p:cNvSpPr>
-            <a:spLocks noGrp="1"/>
-          </p:cNvSpPr>
-          <p:nvPr>
-            <p:ph type="title"/>
-          </p:nvPr>
-        </p:nvSpPr>
-        <p:spPr>
-          <a:xfrm>
             <a:off x="228600" y="266721"/>
             <a:ext cx="11134725" cy="863600"/>
           </a:xfrm>
@@ -6460,7 +6117,7 @@
 </p:sld>
 </file>
 
-<file path=ppt/slides/slide17.xml><?xml version="1.0" encoding="utf-8"?>
+<file path=ppt/slides/slide16.xml><?xml version="1.0" encoding="utf-8"?>
 <p:sld xmlns:a="http://schemas.openxmlformats.org/drawingml/2006/main" xmlns:r="http://schemas.openxmlformats.org/officeDocument/2006/relationships" xmlns:p="http://schemas.openxmlformats.org/presentationml/2006/main">
   <p:cSld>
     <p:spTree>
@@ -7103,7 +6760,7 @@
 </p:sld>
 </file>
 
-<file path=ppt/slides/slide18.xml><?xml version="1.0" encoding="utf-8"?>
+<file path=ppt/slides/slide17.xml><?xml version="1.0" encoding="utf-8"?>
 <p:sld xmlns:a="http://schemas.openxmlformats.org/drawingml/2006/main" xmlns:r="http://schemas.openxmlformats.org/officeDocument/2006/relationships" xmlns:p="http://schemas.openxmlformats.org/presentationml/2006/main">
   <p:cSld>
     <p:spTree>
@@ -7765,7 +7422,7 @@
 </p:sld>
 </file>
 
-<file path=ppt/slides/slide19.xml><?xml version="1.0" encoding="utf-8"?>
+<file path=ppt/slides/slide18.xml><?xml version="1.0" encoding="utf-8"?>
 <p:sld xmlns:a="http://schemas.openxmlformats.org/drawingml/2006/main" xmlns:r="http://schemas.openxmlformats.org/officeDocument/2006/relationships" xmlns:p="http://schemas.openxmlformats.org/presentationml/2006/main">
   <p:cSld>
     <p:spTree>
@@ -8694,6 +8351,190 @@
   <p:clrMapOvr>
     <a:masterClrMapping/>
   </p:clrMapOvr>
+</p:sld>
+</file>
+
+<file path=ppt/slides/slide19.xml><?xml version="1.0" encoding="utf-8"?>
+<p:sld xmlns:a="http://schemas.openxmlformats.org/drawingml/2006/main" xmlns:r="http://schemas.openxmlformats.org/officeDocument/2006/relationships" xmlns:p="http://schemas.openxmlformats.org/presentationml/2006/main" show="0">
+  <p:cSld>
+    <p:spTree>
+      <p:nvGrpSpPr>
+        <p:cNvPr id="1" name=""/>
+        <p:cNvGrpSpPr/>
+        <p:nvPr/>
+      </p:nvGrpSpPr>
+      <p:grpSpPr>
+        <a:xfrm>
+          <a:off x="0" y="0"/>
+          <a:ext cx="0" cy="0"/>
+          <a:chOff x="0" y="0"/>
+          <a:chExt cx="0" cy="0"/>
+        </a:xfrm>
+      </p:grpSpPr>
+      <p:sp>
+        <p:nvSpPr>
+          <p:cNvPr id="2" name="Заголовок 1"/>
+          <p:cNvSpPr>
+            <a:spLocks noGrp="1"/>
+          </p:cNvSpPr>
+          <p:nvPr>
+            <p:ph type="title"/>
+          </p:nvPr>
+        </p:nvSpPr>
+        <p:spPr/>
+        <p:txBody>
+          <a:bodyPr/>
+          <a:lstStyle/>
+          <a:p>
+            <a:endParaRPr lang="ru-RU"/>
+          </a:p>
+        </p:txBody>
+      </p:sp>
+      <p:sp>
+        <p:nvSpPr>
+          <p:cNvPr id="3" name="Объект 2"/>
+          <p:cNvSpPr>
+            <a:spLocks noGrp="1"/>
+          </p:cNvSpPr>
+          <p:nvPr>
+            <p:ph idx="1"/>
+          </p:nvPr>
+        </p:nvSpPr>
+        <p:spPr/>
+        <p:txBody>
+          <a:bodyPr/>
+          <a:lstStyle/>
+          <a:p>
+            <a:endParaRPr lang="ru-RU"/>
+          </a:p>
+        </p:txBody>
+      </p:sp>
+      <p:pic>
+        <p:nvPicPr>
+          <p:cNvPr id="1026" name="Picture 2" descr="https://skforecast.org/0.8.0/img/forecaster_multivariate_train_matrix_diagram.png"/>
+          <p:cNvPicPr>
+            <a:picLocks noChangeAspect="1" noChangeArrowheads="1"/>
+          </p:cNvPicPr>
+          <p:nvPr/>
+        </p:nvPicPr>
+        <p:blipFill rotWithShape="1">
+          <a:blip r:embed="rId2">
+            <a:extLst>
+              <a:ext uri="{28A0092B-C50C-407E-A947-70E740481C1C}">
+                <a14:useLocalDpi xmlns:a14="http://schemas.microsoft.com/office/drawing/2010/main" val="0"/>
+              </a:ext>
+            </a:extLst>
+          </a:blip>
+          <a:srcRect t="11213" r="3230" b="9567"/>
+          <a:stretch/>
+        </p:blipFill>
+        <p:spPr bwMode="auto">
+          <a:xfrm>
+            <a:off x="4352630" y="3800819"/>
+            <a:ext cx="7706020" cy="2882556"/>
+          </a:xfrm>
+          <a:prstGeom prst="rect">
+            <a:avLst/>
+          </a:prstGeom>
+          <a:noFill/>
+          <a:extLst>
+            <a:ext uri="{909E8E84-426E-40DD-AFC4-6F175D3DCCD1}">
+              <a14:hiddenFill xmlns:a14="http://schemas.microsoft.com/office/drawing/2010/main">
+                <a:solidFill>
+                  <a:srgbClr val="FFFFFF"/>
+                </a:solidFill>
+              </a14:hiddenFill>
+            </a:ext>
+          </a:extLst>
+        </p:spPr>
+      </p:pic>
+      <p:sp>
+        <p:nvSpPr>
+          <p:cNvPr id="4" name="Прямоугольник 3"/>
+          <p:cNvSpPr/>
+          <p:nvPr/>
+        </p:nvSpPr>
+        <p:spPr>
+          <a:xfrm>
+            <a:off x="571500" y="6544875"/>
+            <a:ext cx="6096000" cy="276999"/>
+          </a:xfrm>
+          <a:prstGeom prst="rect">
+            <a:avLst/>
+          </a:prstGeom>
+        </p:spPr>
+        <p:txBody>
+          <a:bodyPr>
+            <a:spAutoFit/>
+          </a:bodyPr>
+          <a:lstStyle/>
+          <a:p>
+            <a:r>
+              <a:rPr lang="ru-RU" sz="1200" dirty="0"/>
+              <a:t>https://skforecast.org/0.16.0/user_guides/independent-multi-time-series-forecasting.html</a:t>
+            </a:r>
+          </a:p>
+        </p:txBody>
+      </p:sp>
+      <p:pic>
+        <p:nvPicPr>
+          <p:cNvPr id="1028" name="Picture 4" descr="No description has been provided for this image"/>
+          <p:cNvPicPr>
+            <a:picLocks noChangeAspect="1" noChangeArrowheads="1"/>
+          </p:cNvPicPr>
+          <p:nvPr/>
+        </p:nvPicPr>
+        <p:blipFill>
+          <a:blip r:embed="rId3" cstate="print">
+            <a:extLst>
+              <a:ext uri="{28A0092B-C50C-407E-A947-70E740481C1C}">
+                <a14:useLocalDpi xmlns:a14="http://schemas.microsoft.com/office/drawing/2010/main" val="0"/>
+              </a:ext>
+            </a:extLst>
+          </a:blip>
+          <a:srcRect/>
+          <a:stretch>
+            <a:fillRect/>
+          </a:stretch>
+        </p:blipFill>
+        <p:spPr bwMode="auto">
+          <a:xfrm>
+            <a:off x="0" y="1319213"/>
+            <a:ext cx="8210327" cy="3146626"/>
+          </a:xfrm>
+          <a:prstGeom prst="rect">
+            <a:avLst/>
+          </a:prstGeom>
+          <a:noFill/>
+          <a:extLst>
+            <a:ext uri="{909E8E84-426E-40DD-AFC4-6F175D3DCCD1}">
+              <a14:hiddenFill xmlns:a14="http://schemas.microsoft.com/office/drawing/2010/main">
+                <a:solidFill>
+                  <a:srgbClr val="FFFFFF"/>
+                </a:solidFill>
+              </a14:hiddenFill>
+            </a:ext>
+          </a:extLst>
+        </p:spPr>
+      </p:pic>
+    </p:spTree>
+    <p:extLst>
+      <p:ext uri="{BB962C8B-B14F-4D97-AF65-F5344CB8AC3E}">
+        <p14:creationId xmlns:p14="http://schemas.microsoft.com/office/powerpoint/2010/main" val="1389010208"/>
+      </p:ext>
+    </p:extLst>
+  </p:cSld>
+  <p:clrMapOvr>
+    <a:masterClrMapping/>
+  </p:clrMapOvr>
+  <mc:AlternateContent xmlns:mc="http://schemas.openxmlformats.org/markup-compatibility/2006">
+    <mc:Choice xmlns:p14="http://schemas.microsoft.com/office/powerpoint/2010/main" Requires="p14">
+      <p:transition spd="slow" p14:dur="2000"/>
+    </mc:Choice>
+    <mc:Fallback>
+      <p:transition spd="slow"/>
+    </mc:Fallback>
+  </mc:AlternateContent>
 </p:sld>
 </file>
 
@@ -10359,6 +10200,10 @@
             </a:r>
           </a:p>
           <a:p>
+            <a:r>
+              <a:rPr lang="en" dirty="0"/>
+              <a:t/>
+            </a:r>
             <a:br>
               <a:rPr lang="en" dirty="0"/>
             </a:br>
@@ -11225,12 +11070,21 @@
             <p:ph type="title"/>
           </p:nvPr>
         </p:nvSpPr>
-        <p:spPr/>
+        <p:spPr>
+          <a:xfrm>
+            <a:off x="125504" y="179411"/>
+            <a:ext cx="12227859" cy="773392"/>
+          </a:xfrm>
+        </p:spPr>
         <p:txBody>
           <a:bodyPr/>
           <a:lstStyle/>
           <a:p>
-            <a:endParaRPr lang="ru-RU"/>
+            <a:pPr algn="ctr"/>
+            <a:r>
+              <a:rPr lang="ru-RU" dirty="0"/>
+              <a:t>Признаки во временных рядах</a:t>
+            </a:r>
           </a:p>
         </p:txBody>
       </p:sp>
@@ -11244,63 +11098,203 @@
             <p:ph idx="1"/>
           </p:nvPr>
         </p:nvSpPr>
-        <p:spPr/>
-        <p:txBody>
-          <a:bodyPr/>
+        <p:spPr>
+          <a:xfrm>
+            <a:off x="125504" y="810174"/>
+            <a:ext cx="11660842" cy="5304876"/>
+          </a:xfrm>
+        </p:spPr>
+        <p:txBody>
+          <a:bodyPr>
+            <a:normAutofit fontScale="85000" lnSpcReduction="20000"/>
+          </a:bodyPr>
           <a:lstStyle/>
           <a:p>
-            <a:endParaRPr lang="ru-RU"/>
-          </a:p>
-        </p:txBody>
-      </p:sp>
-      <p:pic>
-        <p:nvPicPr>
-          <p:cNvPr id="1026" name="Picture 2" descr="https://skforecast.org/0.8.0/img/forecaster_multivariate_train_matrix_diagram.png"/>
-          <p:cNvPicPr>
-            <a:picLocks noChangeAspect="1" noChangeArrowheads="1"/>
-          </p:cNvPicPr>
+            <a:r>
+              <a:rPr lang="ru-RU" dirty="0"/>
+              <a:t>Лаги временных рядов</a:t>
+            </a:r>
+          </a:p>
+          <a:p>
+            <a:r>
+              <a:rPr lang="ru-RU" dirty="0"/>
+              <a:t>Преобразования лагов (степенное, разность и </a:t>
+            </a:r>
+            <a:r>
+              <a:rPr lang="ru-RU" dirty="0" err="1"/>
+              <a:t>тд</a:t>
+            </a:r>
+            <a:r>
+              <a:rPr lang="ru-RU" dirty="0"/>
+              <a:t>)</a:t>
+            </a:r>
+            <a:endParaRPr lang="en-US" dirty="0"/>
+          </a:p>
+          <a:p>
+            <a:r>
+              <a:rPr lang="ru-RU" dirty="0"/>
+              <a:t>Оконные статистики лагов</a:t>
+            </a:r>
+            <a:r>
+              <a:rPr lang="en-US" dirty="0"/>
+              <a:t>:</a:t>
+            </a:r>
+          </a:p>
+          <a:p>
+            <a:pPr lvl="1"/>
+            <a:r>
+              <a:rPr lang="en-US" dirty="0"/>
+              <a:t>Max/min value of series in a window</a:t>
+            </a:r>
+          </a:p>
+          <a:p>
+            <a:pPr lvl="1"/>
+            <a:r>
+              <a:rPr lang="en-US" dirty="0"/>
+              <a:t>Average/median value in a window</a:t>
+            </a:r>
+          </a:p>
+          <a:p>
+            <a:pPr lvl="1"/>
+            <a:r>
+              <a:rPr lang="en-US" dirty="0"/>
+              <a:t>Window variance</a:t>
+            </a:r>
+          </a:p>
+          <a:p>
+            <a:pPr lvl="1"/>
+            <a:r>
+              <a:rPr lang="en-US" dirty="0"/>
+              <a:t>etc.</a:t>
+            </a:r>
+          </a:p>
+          <a:p>
+            <a:r>
+              <a:rPr lang="ru-RU" dirty="0"/>
+              <a:t>Даты и время</a:t>
+            </a:r>
+            <a:r>
+              <a:rPr lang="en-US" dirty="0"/>
+              <a:t>:</a:t>
+            </a:r>
+          </a:p>
+          <a:p>
+            <a:pPr lvl="1"/>
+            <a:r>
+              <a:rPr lang="ru-RU" dirty="0"/>
+              <a:t>Порядковые (категориальные) данные: Число, день недели, месяц, квартал и </a:t>
+            </a:r>
+            <a:r>
+              <a:rPr lang="ru-RU" dirty="0" err="1"/>
+              <a:t>тд</a:t>
+            </a:r>
+            <a:r>
+              <a:rPr lang="ru-RU" dirty="0"/>
+              <a:t>,</a:t>
+            </a:r>
+            <a:endParaRPr lang="en-US" dirty="0"/>
+          </a:p>
+          <a:p>
+            <a:pPr lvl="1"/>
+            <a:r>
+              <a:rPr lang="ru-RU" dirty="0"/>
+              <a:t>Бинарные (дискретные): </a:t>
+            </a:r>
+            <a:r>
+              <a:rPr lang="en-US" dirty="0"/>
+              <a:t>Is this day a holiday? Maybe there is a special event? </a:t>
+            </a:r>
+            <a:endParaRPr lang="ru-RU" dirty="0"/>
+          </a:p>
+          <a:p>
+            <a:r>
+              <a:rPr lang="ru-RU" dirty="0"/>
+              <a:t>Экзогенные факторы, объясняющие (в домене) целевую переменную</a:t>
+            </a:r>
+          </a:p>
+          <a:p>
+            <a:r>
+              <a:rPr lang="ru-RU" dirty="0"/>
+              <a:t>Результаты, статистики остатков и другие характеристики предсказаний других моделей (напр. </a:t>
+            </a:r>
+            <a:r>
+              <a:rPr lang="ru-RU" dirty="0" err="1"/>
+              <a:t>A</a:t>
+            </a:r>
+            <a:r>
+              <a:rPr lang="en-US" dirty="0"/>
+              <a:t>RIMA)</a:t>
+            </a:r>
+            <a:endParaRPr lang="ru-RU" dirty="0"/>
+          </a:p>
+          <a:p>
+            <a:r>
+              <a:rPr lang="ru-RU" dirty="0"/>
+              <a:t>Другие признаки: напр. Частотные переменные, значения статистик и </a:t>
+            </a:r>
+            <a:r>
+              <a:rPr lang="ru-RU" dirty="0" err="1"/>
+              <a:t>тд</a:t>
+            </a:r>
+            <a:endParaRPr lang="en-US" dirty="0"/>
+          </a:p>
+          <a:p>
+            <a:r>
+              <a:rPr lang="ru-RU" dirty="0"/>
+              <a:t>Также используют - Преобразования метки (степенное, разность, кодирование и </a:t>
+            </a:r>
+            <a:r>
+              <a:rPr lang="ru-RU" dirty="0" err="1"/>
+              <a:t>тд</a:t>
+            </a:r>
+            <a:r>
+              <a:rPr lang="ru-RU" dirty="0"/>
+              <a:t>)</a:t>
+            </a:r>
+            <a:endParaRPr lang="en-US" dirty="0"/>
+          </a:p>
+          <a:p>
+            <a:endParaRPr lang="ru-RU" dirty="0"/>
+          </a:p>
+        </p:txBody>
+      </p:sp>
+      <p:sp>
+        <p:nvSpPr>
+          <p:cNvPr id="4" name="Прямоугольник 3"/>
+          <p:cNvSpPr/>
           <p:nvPr/>
-        </p:nvPicPr>
-        <p:blipFill rotWithShape="1">
-          <a:blip r:embed="rId2">
-            <a:extLst>
-              <a:ext uri="{28A0092B-C50C-407E-A947-70E740481C1C}">
-                <a14:useLocalDpi xmlns:a14="http://schemas.microsoft.com/office/drawing/2010/main" val="0"/>
-              </a:ext>
-            </a:extLst>
-          </a:blip>
-          <a:srcRect t="11213" r="3230" b="9567"/>
-          <a:stretch/>
-        </p:blipFill>
-        <p:spPr bwMode="auto">
+        </p:nvSpPr>
+        <p:spPr>
           <a:xfrm>
-            <a:off x="4352630" y="3800819"/>
-            <a:ext cx="7706020" cy="2882556"/>
+            <a:off x="6553480" y="6581001"/>
+            <a:ext cx="4894170" cy="276999"/>
           </a:xfrm>
           <a:prstGeom prst="rect">
             <a:avLst/>
           </a:prstGeom>
-          <a:noFill/>
-          <a:extLst>
-            <a:ext uri="{909E8E84-426E-40DD-AFC4-6F175D3DCCD1}">
-              <a14:hiddenFill xmlns:a14="http://schemas.microsoft.com/office/drawing/2010/main">
-                <a:solidFill>
-                  <a:srgbClr val="FFFFFF"/>
-                </a:solidFill>
-              </a14:hiddenFill>
-            </a:ext>
-          </a:extLst>
         </p:spPr>
-      </p:pic>
-      <p:sp>
-        <p:nvSpPr>
-          <p:cNvPr id="4" name="Прямоугольник 3"/>
+        <p:txBody>
+          <a:bodyPr wrap="square">
+            <a:spAutoFit/>
+          </a:bodyPr>
+          <a:lstStyle/>
+          <a:p>
+            <a:r>
+              <a:rPr lang="ru-RU" sz="1200" dirty="0"/>
+              <a:t>https://mlcourse.ai/book/topic09/topic9_part1_time_series_python.html</a:t>
+            </a:r>
+          </a:p>
+        </p:txBody>
+      </p:sp>
+      <p:sp>
+        <p:nvSpPr>
+          <p:cNvPr id="5" name="Прямоугольник 4"/>
           <p:cNvSpPr/>
           <p:nvPr/>
         </p:nvSpPr>
         <p:spPr>
           <a:xfrm>
-            <a:off x="571500" y="6544875"/>
+            <a:off x="5753100" y="6428109"/>
             <a:ext cx="6096000" cy="276999"/>
           </a:xfrm>
           <a:prstGeom prst="rect">
@@ -11315,56 +11309,103 @@
           <a:p>
             <a:r>
               <a:rPr lang="ru-RU" sz="1200" dirty="0"/>
-              <a:t>https://skforecast.org/0.16.0/user_guides/independent-multi-time-series-forecasting.html</a:t>
-            </a:r>
-          </a:p>
-        </p:txBody>
-      </p:sp>
-      <p:pic>
-        <p:nvPicPr>
-          <p:cNvPr id="1028" name="Picture 4" descr="No description has been provided for this image"/>
-          <p:cNvPicPr>
-            <a:picLocks noChangeAspect="1" noChangeArrowheads="1"/>
-          </p:cNvPicPr>
-          <p:nvPr/>
-        </p:nvPicPr>
-        <p:blipFill>
-          <a:blip r:embed="rId3" cstate="print">
+              <a:t>https://nixtlaverse.nixtla.io/mlforecast/docs/getting-started/end_to_end_walkthrough.htm</a:t>
+            </a:r>
+          </a:p>
+        </p:txBody>
+      </p:sp>
+      <p:sp>
+        <p:nvSpPr>
+          <p:cNvPr id="7" name="TextBox 6">
             <a:extLst>
-              <a:ext uri="{28A0092B-C50C-407E-A947-70E740481C1C}">
-                <a14:useLocalDpi xmlns:a14="http://schemas.microsoft.com/office/drawing/2010/main" val="0"/>
+              <a:ext uri="{FF2B5EF4-FFF2-40B4-BE49-F238E27FC236}">
+                <a16:creationId xmlns:a16="http://schemas.microsoft.com/office/drawing/2014/main" id="{843D709B-8C57-6B5A-961D-91A269E0454F}"/>
               </a:ext>
             </a:extLst>
-          </a:blip>
-          <a:srcRect/>
-          <a:stretch>
-            <a:fillRect/>
-          </a:stretch>
-        </p:blipFill>
-        <p:spPr bwMode="auto">
+          </p:cNvPr>
+          <p:cNvSpPr txBox="1"/>
+          <p:nvPr/>
+        </p:nvSpPr>
+        <p:spPr>
           <a:xfrm>
-            <a:off x="0" y="1319213"/>
-            <a:ext cx="8210327" cy="3146626"/>
+            <a:off x="3888" y="6417190"/>
+            <a:ext cx="6235546" cy="276999"/>
           </a:xfrm>
           <a:prstGeom prst="rect">
             <a:avLst/>
           </a:prstGeom>
           <a:noFill/>
-          <a:extLst>
-            <a:ext uri="{909E8E84-426E-40DD-AFC4-6F175D3DCCD1}">
-              <a14:hiddenFill xmlns:a14="http://schemas.microsoft.com/office/drawing/2010/main">
-                <a:solidFill>
-                  <a:srgbClr val="FFFFFF"/>
-                </a:solidFill>
-              </a14:hiddenFill>
-            </a:ext>
-          </a:extLst>
         </p:spPr>
-      </p:pic>
+        <p:txBody>
+          <a:bodyPr wrap="square">
+            <a:spAutoFit/>
+          </a:bodyPr>
+          <a:lstStyle/>
+          <a:p>
+            <a:r>
+              <a:rPr lang="ru-RU" sz="1200" dirty="0" err="1"/>
+              <a:t>https</a:t>
+            </a:r>
+            <a:r>
+              <a:rPr lang="ru-RU" sz="1200" dirty="0"/>
+              <a:t>://</a:t>
+            </a:r>
+            <a:r>
+              <a:rPr lang="ru-RU" sz="1200" dirty="0" err="1"/>
+              <a:t>skforecast.org</a:t>
+            </a:r>
+            <a:r>
+              <a:rPr lang="ru-RU" sz="1200" dirty="0"/>
+              <a:t>/0.16.0/</a:t>
+            </a:r>
+            <a:r>
+              <a:rPr lang="ru-RU" sz="1200" dirty="0" err="1"/>
+              <a:t>user_guides</a:t>
+            </a:r>
+            <a:r>
+              <a:rPr lang="ru-RU" sz="1200" dirty="0"/>
+              <a:t>/</a:t>
+            </a:r>
+            <a:r>
+              <a:rPr lang="ru-RU" sz="1200" dirty="0" err="1"/>
+              <a:t>categorical-features</a:t>
+            </a:r>
+            <a:endParaRPr lang="ru-RU" sz="1200" dirty="0"/>
+          </a:p>
+        </p:txBody>
+      </p:sp>
+      <p:sp>
+        <p:nvSpPr>
+          <p:cNvPr id="6" name="Прямоугольник 5"/>
+          <p:cNvSpPr/>
+          <p:nvPr/>
+        </p:nvSpPr>
+        <p:spPr>
+          <a:xfrm>
+            <a:off x="0" y="6611252"/>
+            <a:ext cx="6972300" cy="261610"/>
+          </a:xfrm>
+          <a:prstGeom prst="rect">
+            <a:avLst/>
+          </a:prstGeom>
+        </p:spPr>
+        <p:txBody>
+          <a:bodyPr wrap="square">
+            <a:spAutoFit/>
+          </a:bodyPr>
+          <a:lstStyle/>
+          <a:p>
+            <a:r>
+              <a:rPr lang="ru-RU" sz="1100" dirty="0"/>
+              <a:t>https://readmedium.com/feature-engineering-for-time-series-data-a-deep-yet-intuitive-guide-b544aeb26ec2</a:t>
+            </a:r>
+          </a:p>
+        </p:txBody>
+      </p:sp>
     </p:spTree>
     <p:extLst>
       <p:ext uri="{BB962C8B-B14F-4D97-AF65-F5344CB8AC3E}">
-        <p14:creationId xmlns:p14="http://schemas.microsoft.com/office/powerpoint/2010/main" val="1389010208"/>
+        <p14:creationId xmlns:p14="http://schemas.microsoft.com/office/powerpoint/2010/main" val="139361784"/>
       </p:ext>
     </p:extLst>
   </p:cSld>
